--- a/docs/presentation/contest/SafeAlert_CouSolve_Contest.pptx
+++ b/docs/presentation/contest/SafeAlert_CouSolve_Contest.pptx
@@ -253,7 +253,7 @@
               <c:strCache>
                 <c:ptCount val="1"/>
                 <c:pt idx="0">
-                  <c:v>태그 방식 (차량 4대 · 인원당 110,000원)</c:v>
+                  <c:v>장비를 산다면 (태그 착용자만 · 1인당 11만원)</c:v>
                 </c:pt>
               </c:strCache>
             </c:strRef>
@@ -317,7 +317,7 @@
               <c:strCache>
                 <c:ptCount val="1"/>
                 <c:pt idx="0">
-                  <c:v>SafeAlert (앱 설치 · 추가 0원)</c:v>
+                  <c:v>앱을 깐다면 (모든 폰끼리 · 추가 0원)</c:v>
                 </c:pt>
               </c:strCache>
             </c:strRef>
@@ -5325,7 +5325,7 @@
               </a:lnSpc>
             </a:pPr>
             <a:r>
-              <a:rPr sz="2100" b="1" i="0" u="none">
+              <a:rPr sz="2000" b="1" i="0" u="none">
                 <a:solidFill>
                   <a:srgbClr val="053866"/>
                 </a:solidFill>
@@ -5333,7 +5333,7 @@
                 <a:ea typeface="맑은 고딕"/>
                 <a:cs typeface="맑은 고딕"/>
               </a:rPr>
-              <a:t>지게차 · EPJ · 보행자 사각지대 접근 경보</a:t>
+              <a:t>지게차와 보행자가 서로 다가오면 미리 알려주는 앱</a:t>
             </a:r>
             <a:endParaRPr kumimoji="0" lang="ko-KR" altLang="en-US" sz="4800" b="1" i="0" u="none" strike="noStrike" kern="1200" cap="none" spc="0" normalizeH="0" baseline="0" noProof="0">
               <a:ln>
@@ -5367,7 +5367,7 @@
                 <a:ea typeface="맑은 고딕"/>
                 <a:cs typeface="맑은 고딕"/>
               </a:rPr>
-              <a:t>— 지급된 단말끼리 BLE 로 서로를 감지하는 앱 (SafeAlert)</a:t>
+              <a:t>— 이미 나눠준 업무용 스마트폰끼리 신호를 주고받습니다 (SafeAlert)</a:t>
             </a:r>
           </a:p>
         </p:txBody>
@@ -6260,7 +6260,7 @@
                   <a:ea typeface="맑은 고딕"/>
                   <a:cs typeface="맑은 고딕"/>
                 </a:rPr>
-                <a:t>지게차 ↔ 보행자 근접 경보는 이미 상용 제품군이 있다. 현행 I-PAS 도 그중 하나다.</a:t>
+                <a:t>지게차 ↔ 보행자 접근 경보 장비는 시중에 이미 여러 제품이 있고, 사내 다른 조직도 I-PAS 를 도입해 쓰고 있다. 우리 센터에는 없다.</a:t>
               </a:r>
             </a:p>
             <a:p>
@@ -6278,7 +6278,25 @@
                   <a:ea typeface="맑은 고딕"/>
                   <a:cs typeface="맑은 고딕"/>
                 </a:rPr>
-                <a:t>감지 거리 10~25m 는 SafeAlert 의 경고 15m 와 같은 범위 — 반경 설정이 업계 관행에서 벗어나 있지 않다.</a:t>
+                <a:t>감지 거리 10~25m 는 이 앱의 경고 거리 15m 와 같은 범위 — 거리 설정이 업계 관행에서 벗어나 있지 않다.</a:t>
+              </a:r>
+            </a:p>
+            <a:p>
+              <a:pPr algn="l">
+                <a:lnSpc>
+                  <a:spcPct val="130000"/>
+                </a:lnSpc>
+              </a:pPr>
+              <a:r>
+                <a:rPr sz="850" b="0" i="0" u="none">
+                  <a:solidFill>
+                    <a:srgbClr val="9AA0A6"/>
+                  </a:solidFill>
+                  <a:latin typeface="맑은 고딕"/>
+                  <a:ea typeface="맑은 고딕"/>
+                  <a:cs typeface="맑은 고딕"/>
+                </a:rPr>
+                <a:t>제품 정보는 벤더 공개 자료 기준 (2026.09 조회). 벤더가 주장하는 효과 수치는 인용하지 않았다.</a:t>
               </a:r>
             </a:p>
           </p:txBody>
@@ -6428,7 +6446,7 @@
             </a:fontRef>
           </p:style>
           <p:txBody>
-            <a:bodyPr rtlCol="0" anchor="t" wrap="square" lIns="18288" rIns="18288" tIns="365760" bIns="73152"/>
+            <a:bodyPr rtlCol="0" anchor="t" wrap="square" lIns="18288" rIns="18288" tIns="91440" bIns="73152"/>
             <a:lstStyle/>
             <a:p>
               <a:pPr algn="l">
@@ -6531,8 +6549,8 @@
           <p:nvPr/>
         </p:nvGraphicFramePr>
         <p:xfrm>
-          <a:off x="914400" y="3584448"/>
-          <a:ext cx="10351007" cy="1513332"/>
+          <a:off x="914400" y="3566160"/>
+          <a:ext cx="10351008" cy="1513332"/>
         </p:xfrm>
         <a:graphic>
           <a:graphicData uri="http://schemas.openxmlformats.org/drawingml/2006/table">
@@ -6541,10 +6559,11 @@
                 <a:tableStyleId>{5C22544A-7EE6-4342-B048-85BDC9FD1C3A}</a:tableStyleId>
               </a:tblPr>
               <a:tblGrid>
-                <a:gridCol w="2240280"/>
-                <a:gridCol w="960120"/>
-                <a:gridCol w="3703320"/>
-                <a:gridCol w="1874519"/>
+                <a:gridCol w="2331720"/>
+                <a:gridCol w="777240"/>
+                <a:gridCol w="3063240"/>
+                <a:gridCol w="1417320"/>
+                <a:gridCol w="1188720"/>
                 <a:gridCol w="1572768"/>
               </a:tblGrid>
               <a:tr h="256032">
@@ -6559,7 +6578,7 @@
                         </a:lnSpc>
                       </a:pPr>
                       <a:r>
-                        <a:rPr sz="950" b="1" i="0" u="none">
+                        <a:rPr sz="900" b="1" i="0" u="none">
                           <a:solidFill>
                             <a:srgbClr val="FFFFFF"/>
                           </a:solidFill>
@@ -6567,7 +6586,7 @@
                           <a:ea typeface="맑은 고딕"/>
                           <a:cs typeface="맑은 고딕"/>
                         </a:rPr>
-                        <a:t>시스템</a:t>
+                        <a:t>제품 · 사례</a:t>
                       </a:r>
                     </a:p>
                   </a:txBody>
@@ -6612,7 +6631,7 @@
                         </a:lnSpc>
                       </a:pPr>
                       <a:r>
-                        <a:rPr sz="950" b="1" i="0" u="none">
+                        <a:rPr sz="900" b="1" i="0" u="none">
                           <a:solidFill>
                             <a:srgbClr val="FFFFFF"/>
                           </a:solidFill>
@@ -6665,7 +6684,7 @@
                         </a:lnSpc>
                       </a:pPr>
                       <a:r>
-                        <a:rPr sz="950" b="1" i="0" u="none">
+                        <a:rPr sz="900" b="1" i="0" u="none">
                           <a:solidFill>
                             <a:srgbClr val="FFFFFF"/>
                           </a:solidFill>
@@ -6718,7 +6737,7 @@
                         </a:lnSpc>
                       </a:pPr>
                       <a:r>
-                        <a:rPr sz="950" b="1" i="0" u="none">
+                        <a:rPr sz="900" b="1" i="0" u="none">
                           <a:solidFill>
                             <a:srgbClr val="FFFFFF"/>
                           </a:solidFill>
@@ -6726,7 +6745,7 @@
                           <a:ea typeface="맑은 고딕"/>
                           <a:cs typeface="맑은 고딕"/>
                         </a:rPr>
-                        <a:t>착용물</a:t>
+                        <a:t>몸에 다는 것</a:t>
                       </a:r>
                     </a:p>
                   </a:txBody>
@@ -6771,7 +6790,7 @@
                         </a:lnSpc>
                       </a:pPr>
                       <a:r>
-                        <a:rPr sz="950" b="1" i="0" u="none">
+                        <a:rPr sz="900" b="1" i="0" u="none">
                           <a:solidFill>
                             <a:srgbClr val="FFFFFF"/>
                           </a:solidFill>
@@ -6779,7 +6798,60 @@
                           <a:ea typeface="맑은 고딕"/>
                           <a:cs typeface="맑은 고딕"/>
                         </a:rPr>
-                        <a:t>차량 개입</a:t>
+                        <a:t>장비 정지</a:t>
+                      </a:r>
+                    </a:p>
+                  </a:txBody>
+                  <a:tcPr marL="45720" marR="45720" marT="18288" marB="18288" anchor="ctr">
+                    <a:lnB w="9525" cap="flat" cmpd="sng" algn="ctr">
+                      <a:solidFill>
+                        <a:srgbClr val="053866"/>
+                      </a:solidFill>
+                      <a:prstDash val="solid"/>
+                    </a:lnB>
+                    <a:lnT w="9525" cap="flat" cmpd="sng" algn="ctr">
+                      <a:solidFill>
+                        <a:srgbClr val="053866"/>
+                      </a:solidFill>
+                      <a:prstDash val="solid"/>
+                    </a:lnT>
+                    <a:lnR w="9525" cap="flat" cmpd="sng" algn="ctr">
+                      <a:solidFill>
+                        <a:srgbClr val="053866"/>
+                      </a:solidFill>
+                      <a:prstDash val="solid"/>
+                    </a:lnR>
+                    <a:lnL w="9525" cap="flat" cmpd="sng" algn="ctr">
+                      <a:solidFill>
+                        <a:srgbClr val="053866"/>
+                      </a:solidFill>
+                      <a:prstDash val="solid"/>
+                    </a:lnL>
+                    <a:solidFill>
+                      <a:srgbClr val="053866"/>
+                    </a:solidFill>
+                  </a:tcPr>
+                </a:tc>
+                <a:tc>
+                  <a:txBody>
+                    <a:bodyPr wrap="square"/>
+                    <a:lstStyle/>
+                    <a:p>
+                      <a:pPr algn="ctr">
+                        <a:lnSpc>
+                          <a:spcPct val="115000"/>
+                        </a:lnSpc>
+                      </a:pPr>
+                      <a:r>
+                        <a:rPr sz="900" b="1" i="0" u="none">
+                          <a:solidFill>
+                            <a:srgbClr val="FFFFFF"/>
+                          </a:solidFill>
+                          <a:latin typeface="맑은 고딕"/>
+                          <a:ea typeface="맑은 고딕"/>
+                          <a:cs typeface="맑은 고딕"/>
+                        </a:rPr>
+                        <a:t>센터 1곳 도입 비용</a:t>
                       </a:r>
                     </a:p>
                   </a:txBody>
@@ -6873,7 +6945,7 @@
                     <a:bodyPr wrap="square"/>
                     <a:lstStyle/>
                     <a:p>
-                      <a:pPr algn="ctr">
+                      <a:pPr algn="l">
                         <a:lnSpc>
                           <a:spcPct val="115000"/>
                         </a:lnSpc>
@@ -6979,7 +7051,7 @@
                     <a:bodyPr wrap="square"/>
                     <a:lstStyle/>
                     <a:p>
-                      <a:pPr algn="ctr">
+                      <a:pPr algn="l">
                         <a:lnSpc>
                           <a:spcPct val="115000"/>
                         </a:lnSpc>
@@ -7032,7 +7104,7 @@
                     <a:bodyPr wrap="square"/>
                     <a:lstStyle/>
                     <a:p>
-                      <a:pPr algn="ctr">
+                      <a:pPr algn="l">
                         <a:lnSpc>
                           <a:spcPct val="115000"/>
                         </a:lnSpc>
@@ -7046,7 +7118,60 @@
                           <a:ea typeface="맑은 고딕"/>
                           <a:cs typeface="맑은 고딕"/>
                         </a:rPr>
-                        <a:t>경보</a:t>
+                        <a:t>없음 (알림만)</a:t>
+                      </a:r>
+                    </a:p>
+                  </a:txBody>
+                  <a:tcPr marL="45720" marR="45720" marT="18288" marB="18288" anchor="ctr">
+                    <a:lnB w="9525" cap="flat" cmpd="sng" algn="ctr">
+                      <a:solidFill>
+                        <a:srgbClr val="D8DDE1"/>
+                      </a:solidFill>
+                      <a:prstDash val="solid"/>
+                    </a:lnB>
+                    <a:lnT w="9525" cap="flat" cmpd="sng" algn="ctr">
+                      <a:solidFill>
+                        <a:srgbClr val="FFFFFF"/>
+                      </a:solidFill>
+                      <a:prstDash val="solid"/>
+                    </a:lnT>
+                    <a:lnR w="9525" cap="flat" cmpd="sng" algn="ctr">
+                      <a:solidFill>
+                        <a:srgbClr val="FFFFFF"/>
+                      </a:solidFill>
+                      <a:prstDash val="solid"/>
+                    </a:lnR>
+                    <a:lnL w="9525" cap="flat" cmpd="sng" algn="ctr">
+                      <a:solidFill>
+                        <a:srgbClr val="FFFFFF"/>
+                      </a:solidFill>
+                      <a:prstDash val="solid"/>
+                    </a:lnL>
+                    <a:solidFill>
+                      <a:srgbClr val="FFFFFF"/>
+                    </a:solidFill>
+                  </a:tcPr>
+                </a:tc>
+                <a:tc>
+                  <a:txBody>
+                    <a:bodyPr wrap="square"/>
+                    <a:lstStyle/>
+                    <a:p>
+                      <a:pPr algn="l">
+                        <a:lnSpc>
+                          <a:spcPct val="115000"/>
+                        </a:lnSpc>
+                      </a:pPr>
+                      <a:r>
+                        <a:rPr sz="950" b="0" i="0" u="none">
+                          <a:solidFill>
+                            <a:srgbClr val="404040"/>
+                          </a:solidFill>
+                          <a:latin typeface="맑은 고딕"/>
+                          <a:ea typeface="맑은 고딕"/>
+                          <a:cs typeface="맑은 고딕"/>
+                        </a:rPr>
+                        <a:t>공개 단가 없음</a:t>
                       </a:r>
                     </a:p>
                   </a:txBody>
@@ -7140,7 +7265,7 @@
                     <a:bodyPr wrap="square"/>
                     <a:lstStyle/>
                     <a:p>
-                      <a:pPr algn="ctr">
+                      <a:pPr algn="l">
                         <a:lnSpc>
                           <a:spcPct val="115000"/>
                         </a:lnSpc>
@@ -7207,7 +7332,7 @@
                           <a:ea typeface="맑은 고딕"/>
                           <a:cs typeface="맑은 고딕"/>
                         </a:rPr>
-                        <a:t>경고 / 보호 구역 분리 · 비가시선 감지</a:t>
+                        <a:t>경고 / 정지 구역 분리 · 가려져도 감지</a:t>
                       </a:r>
                     </a:p>
                   </a:txBody>
@@ -7246,7 +7371,7 @@
                     <a:bodyPr wrap="square"/>
                     <a:lstStyle/>
                     <a:p>
-                      <a:pPr algn="ctr">
+                      <a:pPr algn="l">
                         <a:lnSpc>
                           <a:spcPct val="115000"/>
                         </a:lnSpc>
@@ -7299,7 +7424,7 @@
                     <a:bodyPr wrap="square"/>
                     <a:lstStyle/>
                     <a:p>
-                      <a:pPr algn="ctr">
+                      <a:pPr algn="l">
                         <a:lnSpc>
                           <a:spcPct val="115000"/>
                         </a:lnSpc>
@@ -7313,7 +7438,60 @@
                           <a:ea typeface="맑은 고딕"/>
                           <a:cs typeface="맑은 고딕"/>
                         </a:rPr>
-                        <a:t>경보 + 자동 감속</a:t>
+                        <a:t>자동 감속</a:t>
+                      </a:r>
+                    </a:p>
+                  </a:txBody>
+                  <a:tcPr marL="45720" marR="45720" marT="18288" marB="18288" anchor="ctr">
+                    <a:lnB w="9525" cap="flat" cmpd="sng" algn="ctr">
+                      <a:solidFill>
+                        <a:srgbClr val="D8DDE1"/>
+                      </a:solidFill>
+                      <a:prstDash val="solid"/>
+                    </a:lnB>
+                    <a:lnT w="9525" cap="flat" cmpd="sng" algn="ctr">
+                      <a:solidFill>
+                        <a:srgbClr val="FFFFFF"/>
+                      </a:solidFill>
+                      <a:prstDash val="solid"/>
+                    </a:lnT>
+                    <a:lnR w="9525" cap="flat" cmpd="sng" algn="ctr">
+                      <a:solidFill>
+                        <a:srgbClr val="FFFFFF"/>
+                      </a:solidFill>
+                      <a:prstDash val="solid"/>
+                    </a:lnR>
+                    <a:lnL w="9525" cap="flat" cmpd="sng" algn="ctr">
+                      <a:solidFill>
+                        <a:srgbClr val="FFFFFF"/>
+                      </a:solidFill>
+                      <a:prstDash val="solid"/>
+                    </a:lnL>
+                    <a:solidFill>
+                      <a:srgbClr val="FFFFFF"/>
+                    </a:solidFill>
+                  </a:tcPr>
+                </a:tc>
+                <a:tc>
+                  <a:txBody>
+                    <a:bodyPr wrap="square"/>
+                    <a:lstStyle/>
+                    <a:p>
+                      <a:pPr algn="l">
+                        <a:lnSpc>
+                          <a:spcPct val="115000"/>
+                        </a:lnSpc>
+                      </a:pPr>
+                      <a:r>
+                        <a:rPr sz="950" b="0" i="0" u="none">
+                          <a:solidFill>
+                            <a:srgbClr val="404040"/>
+                          </a:solidFill>
+                          <a:latin typeface="맑은 고딕"/>
+                          <a:ea typeface="맑은 고딕"/>
+                          <a:cs typeface="맑은 고딕"/>
+                        </a:rPr>
+                        <a:t>공개 단가 없음</a:t>
                       </a:r>
                     </a:p>
                   </a:txBody>
@@ -7407,7 +7585,7 @@
                     <a:bodyPr wrap="square"/>
                     <a:lstStyle/>
                     <a:p>
-                      <a:pPr algn="ctr">
+                      <a:pPr algn="l">
                         <a:lnSpc>
                           <a:spcPct val="115000"/>
                         </a:lnSpc>
@@ -7513,7 +7691,7 @@
                     <a:bodyPr wrap="square"/>
                     <a:lstStyle/>
                     <a:p>
-                      <a:pPr algn="ctr">
+                      <a:pPr algn="l">
                         <a:lnSpc>
                           <a:spcPct val="115000"/>
                         </a:lnSpc>
@@ -7566,7 +7744,7 @@
                     <a:bodyPr wrap="square"/>
                     <a:lstStyle/>
                     <a:p>
-                      <a:pPr algn="ctr">
+                      <a:pPr algn="l">
                         <a:lnSpc>
                           <a:spcPct val="115000"/>
                         </a:lnSpc>
@@ -7580,7 +7758,60 @@
                           <a:ea typeface="맑은 고딕"/>
                           <a:cs typeface="맑은 고딕"/>
                         </a:rPr>
-                        <a:t>경보</a:t>
+                        <a:t>없음 (알림만)</a:t>
+                      </a:r>
+                    </a:p>
+                  </a:txBody>
+                  <a:tcPr marL="45720" marR="45720" marT="18288" marB="18288" anchor="ctr">
+                    <a:lnB w="9525" cap="flat" cmpd="sng" algn="ctr">
+                      <a:solidFill>
+                        <a:srgbClr val="D8DDE1"/>
+                      </a:solidFill>
+                      <a:prstDash val="solid"/>
+                    </a:lnB>
+                    <a:lnT w="9525" cap="flat" cmpd="sng" algn="ctr">
+                      <a:solidFill>
+                        <a:srgbClr val="FFFFFF"/>
+                      </a:solidFill>
+                      <a:prstDash val="solid"/>
+                    </a:lnT>
+                    <a:lnR w="9525" cap="flat" cmpd="sng" algn="ctr">
+                      <a:solidFill>
+                        <a:srgbClr val="FFFFFF"/>
+                      </a:solidFill>
+                      <a:prstDash val="solid"/>
+                    </a:lnR>
+                    <a:lnL w="9525" cap="flat" cmpd="sng" algn="ctr">
+                      <a:solidFill>
+                        <a:srgbClr val="FFFFFF"/>
+                      </a:solidFill>
+                      <a:prstDash val="solid"/>
+                    </a:lnL>
+                    <a:solidFill>
+                      <a:srgbClr val="FFFFFF"/>
+                    </a:solidFill>
+                  </a:tcPr>
+                </a:tc>
+                <a:tc>
+                  <a:txBody>
+                    <a:bodyPr wrap="square"/>
+                    <a:lstStyle/>
+                    <a:p>
+                      <a:pPr algn="l">
+                        <a:lnSpc>
+                          <a:spcPct val="115000"/>
+                        </a:lnSpc>
+                      </a:pPr>
+                      <a:r>
+                        <a:rPr sz="950" b="0" i="0" u="none">
+                          <a:solidFill>
+                            <a:srgbClr val="404040"/>
+                          </a:solidFill>
+                          <a:latin typeface="맑은 고딕"/>
+                          <a:ea typeface="맑은 고딕"/>
+                          <a:cs typeface="맑은 고딕"/>
+                        </a:rPr>
+                        <a:t>공개 단가 없음</a:t>
                       </a:r>
                     </a:p>
                   </a:txBody>
@@ -7627,7 +7858,7 @@
                         </a:lnSpc>
                       </a:pPr>
                       <a:r>
-                        <a:rPr sz="950" b="0" i="0" u="none">
+                        <a:rPr sz="950" b="1" i="0" u="none">
                           <a:solidFill>
                             <a:srgbClr val="404040"/>
                           </a:solidFill>
@@ -7635,7 +7866,7 @@
                           <a:ea typeface="맑은 고딕"/>
                           <a:cs typeface="맑은 고딕"/>
                         </a:rPr>
-                        <a:t>I-PAS  (현행)</a:t>
+                        <a:t>I-PAS  (사내 타 조직 도입)</a:t>
                       </a:r>
                     </a:p>
                   </a:txBody>
@@ -7674,7 +7905,7 @@
                     <a:bodyPr wrap="square"/>
                     <a:lstStyle/>
                     <a:p>
-                      <a:pPr algn="ctr">
+                      <a:pPr algn="l">
                         <a:lnSpc>
                           <a:spcPct val="115000"/>
                         </a:lnSpc>
@@ -7780,7 +8011,7 @@
                     <a:bodyPr wrap="square"/>
                     <a:lstStyle/>
                     <a:p>
-                      <a:pPr algn="ctr">
+                      <a:pPr algn="l">
                         <a:lnSpc>
                           <a:spcPct val="115000"/>
                         </a:lnSpc>
@@ -7833,7 +8064,7 @@
                     <a:bodyPr wrap="square"/>
                     <a:lstStyle/>
                     <a:p>
-                      <a:pPr algn="ctr">
+                      <a:pPr algn="l">
                         <a:lnSpc>
                           <a:spcPct val="115000"/>
                         </a:lnSpc>
@@ -7847,7 +8078,60 @@
                           <a:ea typeface="맑은 고딕"/>
                           <a:cs typeface="맑은 고딕"/>
                         </a:rPr>
-                        <a:t>경보 + 자동 셧다운</a:t>
+                        <a:t>자동 정지</a:t>
+                      </a:r>
+                    </a:p>
+                  </a:txBody>
+                  <a:tcPr marL="45720" marR="45720" marT="18288" marB="18288" anchor="ctr">
+                    <a:lnB w="9525" cap="flat" cmpd="sng" algn="ctr">
+                      <a:solidFill>
+                        <a:srgbClr val="D8DDE1"/>
+                      </a:solidFill>
+                      <a:prstDash val="solid"/>
+                    </a:lnB>
+                    <a:lnT w="9525" cap="flat" cmpd="sng" algn="ctr">
+                      <a:solidFill>
+                        <a:srgbClr val="FFFFFF"/>
+                      </a:solidFill>
+                      <a:prstDash val="solid"/>
+                    </a:lnT>
+                    <a:lnR w="9525" cap="flat" cmpd="sng" algn="ctr">
+                      <a:solidFill>
+                        <a:srgbClr val="FFFFFF"/>
+                      </a:solidFill>
+                      <a:prstDash val="solid"/>
+                    </a:lnR>
+                    <a:lnL w="9525" cap="flat" cmpd="sng" algn="ctr">
+                      <a:solidFill>
+                        <a:srgbClr val="FFFFFF"/>
+                      </a:solidFill>
+                      <a:prstDash val="solid"/>
+                    </a:lnL>
+                    <a:solidFill>
+                      <a:srgbClr val="FFFFFF"/>
+                    </a:solidFill>
+                  </a:tcPr>
+                </a:tc>
+                <a:tc>
+                  <a:txBody>
+                    <a:bodyPr wrap="square"/>
+                    <a:lstStyle/>
+                    <a:p>
+                      <a:pPr algn="l">
+                        <a:lnSpc>
+                          <a:spcPct val="115000"/>
+                        </a:lnSpc>
+                      </a:pPr>
+                      <a:r>
+                        <a:rPr sz="950" b="1" i="0" u="none">
+                          <a:solidFill>
+                            <a:srgbClr val="B9770B"/>
+                          </a:solidFill>
+                          <a:latin typeface="맑은 고딕"/>
+                          <a:ea typeface="맑은 고딕"/>
+                          <a:cs typeface="맑은 고딕"/>
+                        </a:rPr>
+                        <a:t>331만원</a:t>
                       </a:r>
                     </a:p>
                   </a:txBody>
@@ -7902,7 +8186,7 @@
                           <a:ea typeface="맑은 고딕"/>
                           <a:cs typeface="맑은 고딕"/>
                         </a:rPr>
-                        <a:t>SafeAlert</a:t>
+                        <a:t>SafeAlert  (이 제안)</a:t>
                       </a:r>
                     </a:p>
                   </a:txBody>
@@ -7941,7 +8225,7 @@
                     <a:bodyPr wrap="square"/>
                     <a:lstStyle/>
                     <a:p>
-                      <a:pPr algn="ctr">
+                      <a:pPr algn="l">
                         <a:lnSpc>
                           <a:spcPct val="115000"/>
                         </a:lnSpc>
@@ -8047,7 +8331,7 @@
                     <a:bodyPr wrap="square"/>
                     <a:lstStyle/>
                     <a:p>
-                      <a:pPr algn="ctr">
+                      <a:pPr algn="l">
                         <a:lnSpc>
                           <a:spcPct val="115000"/>
                         </a:lnSpc>
@@ -8061,7 +8345,7 @@
                           <a:ea typeface="맑은 고딕"/>
                           <a:cs typeface="맑은 고딕"/>
                         </a:rPr>
-                        <a:t>없음 — 지급 단말</a:t>
+                        <a:t>없음 — 지급된 폰</a:t>
                       </a:r>
                     </a:p>
                   </a:txBody>
@@ -8100,7 +8384,7 @@
                     <a:bodyPr wrap="square"/>
                     <a:lstStyle/>
                     <a:p>
-                      <a:pPr algn="ctr">
+                      <a:pPr algn="l">
                         <a:lnSpc>
                           <a:spcPct val="115000"/>
                         </a:lnSpc>
@@ -8114,7 +8398,60 @@
                           <a:ea typeface="맑은 고딕"/>
                           <a:cs typeface="맑은 고딕"/>
                         </a:rPr>
-                        <a:t>경보만</a:t>
+                        <a:t>없음 (알림만)</a:t>
+                      </a:r>
+                    </a:p>
+                  </a:txBody>
+                  <a:tcPr marL="45720" marR="45720" marT="18288" marB="18288" anchor="ctr">
+                    <a:lnB w="9525" cap="flat" cmpd="sng" algn="ctr">
+                      <a:solidFill>
+                        <a:srgbClr val="D8DDE1"/>
+                      </a:solidFill>
+                      <a:prstDash val="solid"/>
+                    </a:lnB>
+                    <a:lnT w="9525" cap="flat" cmpd="sng" algn="ctr">
+                      <a:solidFill>
+                        <a:srgbClr val="FFFFFF"/>
+                      </a:solidFill>
+                      <a:prstDash val="solid"/>
+                    </a:lnT>
+                    <a:lnR w="9525" cap="flat" cmpd="sng" algn="ctr">
+                      <a:solidFill>
+                        <a:srgbClr val="FFFFFF"/>
+                      </a:solidFill>
+                      <a:prstDash val="solid"/>
+                    </a:lnR>
+                    <a:lnL w="9525" cap="flat" cmpd="sng" algn="ctr">
+                      <a:solidFill>
+                        <a:srgbClr val="FFFFFF"/>
+                      </a:solidFill>
+                      <a:prstDash val="solid"/>
+                    </a:lnL>
+                    <a:solidFill>
+                      <a:srgbClr val="FFFFFF"/>
+                    </a:solidFill>
+                  </a:tcPr>
+                </a:tc>
+                <a:tc>
+                  <a:txBody>
+                    <a:bodyPr wrap="square"/>
+                    <a:lstStyle/>
+                    <a:p>
+                      <a:pPr algn="l">
+                        <a:lnSpc>
+                          <a:spcPct val="115000"/>
+                        </a:lnSpc>
+                      </a:pPr>
+                      <a:r>
+                        <a:rPr sz="950" b="1" i="0" u="none">
+                          <a:solidFill>
+                            <a:srgbClr val="1B8A6B"/>
+                          </a:solidFill>
+                          <a:latin typeface="맑은 고딕"/>
+                          <a:ea typeface="맑은 고딕"/>
+                          <a:cs typeface="맑은 고딕"/>
+                        </a:rPr>
+                        <a:t>0원</a:t>
                       </a:r>
                     </a:p>
                   </a:txBody>
@@ -8161,7 +8498,59 @@
         </p:nvSpPr>
         <p:spPr>
           <a:xfrm>
-            <a:off x="950976" y="5193792"/>
+            <a:off x="950976" y="5102352"/>
+            <a:ext cx="10277856" cy="219456"/>
+          </a:xfrm>
+          <a:prstGeom prst="rect">
+            <a:avLst/>
+          </a:prstGeom>
+          <a:noFill/>
+        </p:spPr>
+        <p:txBody>
+          <a:bodyPr wrap="square" lIns="18288" rIns="18288" tIns="0" bIns="0">
+            <a:spAutoFit/>
+          </a:bodyPr>
+          <a:lstStyle/>
+          <a:p>
+            <a:pPr algn="l">
+              <a:lnSpc>
+                <a:spcPct val="120000"/>
+              </a:lnSpc>
+            </a:pPr>
+            <a:r>
+              <a:rPr sz="900" b="1" i="0" u="none">
+                <a:solidFill>
+                  <a:srgbClr val="053866"/>
+                </a:solidFill>
+                <a:latin typeface="맑은 고딕"/>
+                <a:ea typeface="맑은 고딕"/>
+                <a:cs typeface="맑은 고딕"/>
+              </a:rPr>
+              <a:t>331만원 산출  —  </a:t>
+            </a:r>
+            <a:r>
+              <a:rPr sz="900" b="0" i="0" u="none">
+                <a:solidFill>
+                  <a:srgbClr val="6B7278"/>
+                </a:solidFill>
+                <a:latin typeface="맑은 고딕"/>
+                <a:ea typeface="맑은 고딕"/>
+                <a:cs typeface="맑은 고딕"/>
+              </a:rPr>
+              <a:t>차량 태그 52.5만 × 지게차 4대  +  자동정지장치 22만 × 4대  +  보행자 태그 11만 × 상시 3명. 단가는 2026.08 기준이며, 사람이 늘면 1인당 11만원이 더 붙는다.</a:t>
+            </a:r>
+          </a:p>
+        </p:txBody>
+      </p:sp>
+      <p:sp>
+        <p:nvSpPr>
+          <p:cNvPr id="21" name="TextBox 20"/>
+          <p:cNvSpPr txBox="1"/>
+          <p:nvPr/>
+        </p:nvSpPr>
+        <p:spPr>
+          <a:xfrm>
+            <a:off x="950976" y="5394960"/>
             <a:ext cx="10277856" cy="237744"/>
           </a:xfrm>
           <a:prstGeom prst="rect">
@@ -8196,14 +8585,14 @@
       </p:sp>
       <p:sp>
         <p:nvSpPr>
-          <p:cNvPr id="21" name="TextBox 20"/>
+          <p:cNvPr id="22" name="TextBox 21"/>
           <p:cNvSpPr txBox="1"/>
           <p:nvPr/>
         </p:nvSpPr>
         <p:spPr>
           <a:xfrm>
-            <a:off x="1005840" y="5468112"/>
-            <a:ext cx="10168128" cy="224028"/>
+            <a:off x="1005840" y="5650992"/>
+            <a:ext cx="10168128" cy="237744"/>
           </a:xfrm>
           <a:prstGeom prst="rect">
             <a:avLst/>
@@ -8230,7 +8619,7 @@
                 <a:ea typeface="맑은 고딕"/>
                 <a:cs typeface="맑은 고딕"/>
               </a:rPr>
-              <a:t>·  외부 제품은 예외 없이 </a:t>
+              <a:t>·  시중 제품은 예외 없이 </a:t>
             </a:r>
             <a:r>
               <a:rPr sz="1000" b="1" i="0" u="none">
@@ -8241,7 +8630,7 @@
                 <a:ea typeface="맑은 고딕"/>
                 <a:cs typeface="맑은 고딕"/>
               </a:rPr>
-              <a:t>‘차량에 리더, 사람에 태그’</a:t>
+              <a:t>‘차량에 수신기, 사람에 태그’</a:t>
             </a:r>
             <a:r>
               <a:rPr sz="1000" b="0" i="0" u="none">
@@ -8252,21 +8641,62 @@
                 <a:ea typeface="맑은 고딕"/>
                 <a:cs typeface="맑은 고딕"/>
               </a:rPr>
-              <a:t> 구조다. 대상이 늘면 태그를 산다 — I-PAS 와 같다.</a:t>
+              <a:t> 구조다. 사람이 늘면 태그를 더 산다.</a:t>
             </a:r>
           </a:p>
         </p:txBody>
       </p:sp>
       <p:sp>
         <p:nvSpPr>
-          <p:cNvPr id="22" name="TextBox 21"/>
+          <p:cNvPr id="23" name="TextBox 22"/>
           <p:cNvSpPr txBox="1"/>
           <p:nvPr/>
         </p:nvSpPr>
         <p:spPr>
           <a:xfrm>
-            <a:off x="1005840" y="5692140"/>
-            <a:ext cx="10168128" cy="224028"/>
+            <a:off x="1005840" y="5888736"/>
+            <a:ext cx="10168128" cy="237744"/>
+          </a:xfrm>
+          <a:prstGeom prst="rect">
+            <a:avLst/>
+          </a:prstGeom>
+          <a:noFill/>
+        </p:spPr>
+        <p:txBody>
+          <a:bodyPr wrap="square" lIns="18288" rIns="18288" tIns="0" bIns="0">
+            <a:spAutoFit/>
+          </a:bodyPr>
+          <a:lstStyle/>
+          <a:p>
+            <a:pPr algn="l">
+              <a:lnSpc>
+                <a:spcPct val="120000"/>
+              </a:lnSpc>
+            </a:pPr>
+            <a:r>
+              <a:rPr sz="1000" b="0" i="0" u="none">
+                <a:solidFill>
+                  <a:srgbClr val="404040"/>
+                </a:solidFill>
+                <a:latin typeface="맑은 고딕"/>
+                <a:ea typeface="맑은 고딕"/>
+                <a:cs typeface="맑은 고딕"/>
+              </a:rPr>
+              <a:t>·  우리 센터 규모(지게차 4대 · 상시 3명)로 장비를 갖추면 331만원이다. 이 앱은 폰이 이미 있으니 0원이다.</a:t>
+            </a:r>
+          </a:p>
+        </p:txBody>
+      </p:sp>
+      <p:sp>
+        <p:nvSpPr>
+          <p:cNvPr id="24" name="TextBox 23"/>
+          <p:cNvSpPr txBox="1"/>
+          <p:nvPr/>
+        </p:nvSpPr>
+        <p:spPr>
+          <a:xfrm>
+            <a:off x="1005840" y="6126479"/>
+            <a:ext cx="10168128" cy="237744"/>
           </a:xfrm>
           <a:prstGeom prst="rect">
             <a:avLst/>
@@ -8293,111 +8723,7 @@
                 <a:ea typeface="맑은 고딕"/>
                 <a:cs typeface="맑은 고딕"/>
               </a:rPr>
-              <a:t>·  상위 제품은 자동 감속까지 간다. 그 자리는 I-PAS EOD 가 이미 맡고 있고, SafeAlert 는 그 앞단만 맡는다.</a:t>
-            </a:r>
-          </a:p>
-        </p:txBody>
-      </p:sp>
-      <p:sp>
-        <p:nvSpPr>
-          <p:cNvPr id="23" name="TextBox 22"/>
-          <p:cNvSpPr txBox="1"/>
-          <p:nvPr/>
-        </p:nvSpPr>
-        <p:spPr>
-          <a:xfrm>
-            <a:off x="1005840" y="5916168"/>
-            <a:ext cx="10168128" cy="224028"/>
-          </a:xfrm>
-          <a:prstGeom prst="rect">
-            <a:avLst/>
-          </a:prstGeom>
-          <a:noFill/>
-        </p:spPr>
-        <p:txBody>
-          <a:bodyPr wrap="square" lIns="18288" rIns="18288" tIns="0" bIns="0">
-            <a:spAutoFit/>
-          </a:bodyPr>
-          <a:lstStyle/>
-          <a:p>
-            <a:pPr algn="l">
-              <a:lnSpc>
-                <a:spcPct val="120000"/>
-              </a:lnSpc>
-            </a:pPr>
-            <a:r>
-              <a:rPr sz="1000" b="0" i="0" u="none">
-                <a:solidFill>
-                  <a:srgbClr val="404040"/>
-                </a:solidFill>
-                <a:latin typeface="맑은 고딕"/>
-                <a:ea typeface="맑은 고딕"/>
-                <a:cs typeface="맑은 고딕"/>
-              </a:rPr>
-              <a:t>·  다른 점은 </a:t>
-            </a:r>
-            <a:r>
-              <a:rPr sz="1000" b="1" i="0" u="none">
-                <a:solidFill>
-                  <a:srgbClr val="404040"/>
-                </a:solidFill>
-                <a:latin typeface="맑은 고딕"/>
-                <a:ea typeface="맑은 고딕"/>
-                <a:cs typeface="맑은 고딕"/>
-              </a:rPr>
-              <a:t>착용물의 유무 하나</a:t>
-            </a:r>
-            <a:r>
-              <a:rPr sz="1000" b="0" i="0" u="none">
-                <a:solidFill>
-                  <a:srgbClr val="404040"/>
-                </a:solidFill>
-                <a:latin typeface="맑은 고딕"/>
-                <a:ea typeface="맑은 고딕"/>
-                <a:cs typeface="맑은 고딕"/>
-              </a:rPr>
-              <a:t>다. 대상 확대 비용의 차이가 전부 거기서 나온다 (3장 막대).</a:t>
-            </a:r>
-          </a:p>
-        </p:txBody>
-      </p:sp>
-      <p:sp>
-        <p:nvSpPr>
-          <p:cNvPr id="24" name="TextBox 23"/>
-          <p:cNvSpPr txBox="1"/>
-          <p:nvPr/>
-        </p:nvSpPr>
-        <p:spPr>
-          <a:xfrm>
-            <a:off x="1005840" y="6140196"/>
-            <a:ext cx="10168128" cy="224028"/>
-          </a:xfrm>
-          <a:prstGeom prst="rect">
-            <a:avLst/>
-          </a:prstGeom>
-          <a:noFill/>
-        </p:spPr>
-        <p:txBody>
-          <a:bodyPr wrap="square" lIns="18288" rIns="18288" tIns="0" bIns="0">
-            <a:spAutoFit/>
-          </a:bodyPr>
-          <a:lstStyle/>
-          <a:p>
-            <a:pPr algn="l">
-              <a:lnSpc>
-                <a:spcPct val="120000"/>
-              </a:lnSpc>
-            </a:pPr>
-            <a:r>
-              <a:rPr sz="900" b="0" i="0" u="none">
-                <a:solidFill>
-                  <a:srgbClr val="9AA0A6"/>
-                </a:solidFill>
-                <a:latin typeface="맑은 고딕"/>
-                <a:ea typeface="맑은 고딕"/>
-                <a:cs typeface="맑은 고딕"/>
-              </a:rPr>
-              <a:t>·  벤더 공개 자료 기준 (2026.09 조회). ‘아차사고 감소 · ROI 3~6개월’ 은 벤더 주장이라 인용하지 않는다.</a:t>
+              <a:t>·  대신 앱은 장비를 자동으로 세우지 못한다. 알리는 데까지가 한계다.</a:t>
             </a:r>
           </a:p>
         </p:txBody>
@@ -9345,7 +9671,7 @@
                   <a:ea typeface="맑은 고딕"/>
                   <a:cs typeface="맑은 고딕"/>
                 </a:rPr>
-                <a:t>신뢰성 로드맵 Phase 1~5 + PDA 이식</a:t>
+                <a:t>같은 상황에서 항상 같게 동작하도록 다듬고, 업무용 PDA 로 옮긴다</a:t>
               </a:r>
               <a:endParaRPr lang="ko-KR" altLang="en-US" sz="1200">
                 <a:solidFill>
@@ -9376,7 +9702,7 @@
                   <a:ea typeface="맑은 고딕"/>
                   <a:cs typeface="맑은 고딕"/>
                 </a:rPr>
-                <a:t>·  새 기능을 붙이는 작업이 아니다. 판정이 흔들리는 구조적 원인을 걷어낸다</a:t>
+                <a:t>·  새 기능을 붙이는 작업이 아니다. 결과가 흔들리는 원인을 걷어내는 작업이다</a:t>
               </a:r>
             </a:p>
             <a:p>
@@ -9397,7 +9723,7 @@
                   <a:ea typeface="맑은 고딕"/>
                   <a:cs typeface="맑은 고딕"/>
                 </a:rPr>
-                <a:t>·  Phase 1 완료 — 테스트 하네스와 CI 회귀 게이트 (동작 중)</a:t>
+                <a:t>·  1단계 완료 — 자동 검사 체계를 붙였다 (지금 동작 중)</a:t>
               </a:r>
             </a:p>
             <a:p>
@@ -9418,7 +9744,7 @@
                   <a:ea typeface="맑은 고딕"/>
                   <a:cs typeface="맑은 고딕"/>
                 </a:rPr>
-                <a:t>·  Phase 2 — 안전 크리티컬 경로 골든 테스트 + PDA 이식</a:t>
+                <a:t>·  2단계 — 안전과 직결된 동작을 자동 검사로 고정하고, 업무용 PDA 로 옮긴다</a:t>
               </a:r>
             </a:p>
             <a:p>
@@ -9439,7 +9765,7 @@
                   <a:ea typeface="맑은 고딕"/>
                   <a:cs typeface="맑은 고딕"/>
                 </a:rPr>
-                <a:t>·  Phase 3~5 — BleService 분해 · 기기 상태 단일화 · 판정 워커 분리</a:t>
+                <a:t>·  3~5단계 — 경보 계산 코드를 나누고, 오래 켜 둬도 느려지지 않게 만든다</a:t>
               </a:r>
             </a:p>
             <a:p>
@@ -9460,7 +9786,7 @@
                   <a:ea typeface="맑은 고딕"/>
                   <a:cs typeface="맑은 고딕"/>
                 </a:rPr>
-                <a:t>PDA 이식이 개인 폰 임시 설치를 끝낸다.</a:t>
+                <a:t>PDA 로 옮기면 개인 폰에 임시로 깔아 둔 상태가 끝난다.</a:t>
               </a:r>
             </a:p>
             <a:p>
@@ -9481,7 +9807,7 @@
                   <a:ea typeface="맑은 고딕"/>
                   <a:cs typeface="맑은 고딕"/>
                 </a:rPr>
-                <a:t>업무 단말이라 배포 · 회수 경로가 이미 있고, 개인 폰 의존과 배터리 부담이 함께 없어진다.</a:t>
+                <a:t>업무용 단말이라 배포와 회수 경로가 이미 있고, 개인 폰 배터리를 쓰는 문제도 없어진다.</a:t>
               </a:r>
             </a:p>
           </p:txBody>
@@ -9655,7 +9981,7 @@
                   <a:ea typeface="맑은 고딕"/>
                   <a:cs typeface="맑은 고딕"/>
                 </a:rPr>
-                <a:t>지급 단말에 SafeAlert 를 설치해 BLE 로 상호 감지한다</a:t>
+                <a:t>업무용 스마트폰에 앱을 깔아, 폰끼리 서로를 감지하게 한다</a:t>
               </a:r>
               <a:endParaRPr lang="ko-KR" altLang="en-US" sz="1200">
                 <a:solidFill>
@@ -9686,7 +10012,7 @@
                   <a:ea typeface="맑은 고딕"/>
                   <a:cs typeface="맑은 고딕"/>
                 </a:rPr>
-                <a:t>·  지게차가 낀 조합 경고 15m / 위험 8m, 그 밖의 조합 5m / 3m</a:t>
+                <a:t>·  지게차가 끼면 경고 15m · 위험 8m,  사람끼리는 경고 5m · 위험 3m</a:t>
               </a:r>
             </a:p>
             <a:p>
@@ -9707,7 +10033,7 @@
                   <a:ea typeface="맑은 고딕"/>
                   <a:cs typeface="맑은 고딕"/>
                 </a:rPr>
-                <a:t>·  소리 · 진동 · 화면 3중 경보 — 소음 · 장갑 · 시야 중 하나가 막혀도 전달된다</a:t>
+                <a:t>·  소리 · 진동 · 화면으로 동시에 알린다 — 하나가 막혀도 나머지가 전달된다</a:t>
               </a:r>
             </a:p>
             <a:p>
@@ -9728,7 +10054,7 @@
                   <a:ea typeface="맑은 고딕"/>
                   <a:cs typeface="맑은 고딕"/>
                 </a:rPr>
-                <a:t>·  1바이트 비트팩 페이로드로 역할 · 상태 · 방향 · 위험도를 함께 보낸다</a:t>
+                <a:t>·  상대가 지게차인지 사람인지, 서 있는지 움직이는지, 후진 중인지까지 함께 보낸다</a:t>
               </a:r>
             </a:p>
             <a:p>
@@ -9749,7 +10075,7 @@
                   <a:ea typeface="맑은 고딕"/>
                   <a:cs typeface="맑은 고딕"/>
                 </a:rPr>
-                <a:t>·  자동 음소거 · 세이프존으로 울릴 곳에서만 울린다</a:t>
+                <a:t>·  안전 구역과 자동 소리 끄기로, 울릴 필요 없는 곳에서는 울리지 않는다</a:t>
               </a:r>
             </a:p>
             <a:p>
@@ -9770,7 +10096,7 @@
                   <a:ea typeface="맑은 고딕"/>
                   <a:cs typeface="맑은 고딕"/>
                 </a:rPr>
-                <a:t>v1.1.70 이 WF11 · WF21 · WF25 에서 운영 중이다.</a:t>
+                <a:t>지금 v1.1.70 이 WF11 · WF21 · WF25 에서 돌고 있다.</a:t>
               </a:r>
             </a:p>
             <a:p>
@@ -9791,7 +10117,7 @@
                   <a:ea typeface="맑은 고딕"/>
                   <a:cs typeface="맑은 고딕"/>
                 </a:rPr>
-                <a:t>추가 하드웨어 없이 I-PAS 가 비워 둔 조합을 지금 덮는다. 대상이 늘어도 구매가 없다.</a:t>
+                <a:t>아무 감지 수단도 없던 상태에서, 장비를 사지 않고 감지를 시작한 것이다. 사람이 늘어도 추가로 살 것이 없다.</a:t>
               </a:r>
             </a:p>
           </p:txBody>
@@ -9956,7 +10282,7 @@
                 <a:ea typeface="맑은 고딕"/>
                 <a:cs typeface="맑은 고딕"/>
               </a:rPr>
-              <a:t>I-PAS 가 3m 에서 장비를 세우기 전에, 15m · 8m 에서 사람이 먼저 안다. 태그를 사지 않고 덮는 조합이 늘어난다.</a:t>
+              <a:t>감지 수단이 0 이던 현장에, 장비 구매 없이 15m · 8m 경보가 생긴다. 사람이 늘어도 비용이 늘지 않는다.</a:t>
             </a:r>
             <a:endParaRPr lang="ko-KR" altLang="en-US" sz="1200">
               <a:solidFill>
@@ -9987,7 +10313,7 @@
                 <a:ea typeface="맑은 고딕"/>
                 <a:cs typeface="맑은 고딕"/>
               </a:rPr>
-              <a:t>“정확한 100% 판정이 아니라, 피할 시간을 만드는 것이 핵심입니다.”</a:t>
+              <a:t>“100% 정확한 감지가 목표가 아닙니다. 피할 시간을 만드는 것이 목표입니다.”</a:t>
             </a:r>
           </a:p>
         </p:txBody>
@@ -11173,7 +11499,7 @@
                           <a:ea typeface="맑은 고딕"/>
                           <a:cs typeface="맑은 고딕"/>
                         </a:rPr>
-                        <a:t>Phase 1  테스트 하네스 · CI 회귀 게이트</a:t>
+                        <a:t>1단계  자동 검사 체계 구축</a:t>
                       </a:r>
                       <a:endParaRPr lang="ko-KR" altLang="en-US" sz="1000" b="0" i="0" u="none" strike="noStrike">
                         <a:solidFill>
@@ -11851,7 +12177,7 @@
                           <a:ea typeface="맑은 고딕"/>
                           <a:cs typeface="맑은 고딕"/>
                         </a:rPr>
-                        <a:t>경보 이력 4주 집계 — 추정치를 실측으로 대체</a:t>
+                        <a:t>앱 경보 기록 4주 집계 — 추정치를 실제 숫자로 교체</a:t>
                       </a:r>
                       <a:endParaRPr lang="ko-KR" altLang="en-US" sz="1000" b="0" i="0" u="none" strike="noStrike">
                         <a:solidFill>
@@ -12529,7 +12855,7 @@
                           <a:ea typeface="맑은 고딕"/>
                           <a:cs typeface="맑은 고딕"/>
                         </a:rPr>
-                        <a:t>Phase 2  안전 경로 골든 테스트 + PDA 이식</a:t>
+                        <a:t>2단계  안전 동작 자동 검사 + 업무용 PDA 로 이전</a:t>
                       </a:r>
                       <a:endParaRPr lang="ko-KR" altLang="en-US" sz="1000" b="0" i="0" u="none" strike="noStrike">
                         <a:solidFill>
@@ -12868,7 +13194,7 @@
                           <a:ea typeface="맑은 고딕"/>
                           <a:cs typeface="맑은 고딕"/>
                         </a:rPr>
-                        <a:t>Phase 3~5  분해 · 상태 단일화 · 워커 분리</a:t>
+                        <a:t>3~5단계  경보 계산 코드 정리 · 장시간 안정성</a:t>
                       </a:r>
                       <a:endParaRPr lang="en-US" altLang="ko-KR" sz="1000" b="0" i="0" u="none" strike="noStrike">
                         <a:solidFill>
@@ -13034,7 +13360,7 @@
                           <a:ea typeface="맑은 고딕"/>
                           <a:cs typeface="맑은 고딕"/>
                         </a:rPr>
-                        <a:t>Phase 2 후</a:t>
+                        <a:t>2단계 후</a:t>
                       </a:r>
                       <a:endParaRPr lang="en-US" altLang="ko-KR" sz="1000" b="0" i="0" u="none" strike="noStrike">
                         <a:solidFill>
@@ -13207,7 +13533,7 @@
                           <a:ea typeface="맑은 고딕"/>
                           <a:cs typeface="맑은 고딕"/>
                         </a:rPr>
-                        <a:t>실사용 테스트 승인 절차 정리 · 확대 승인</a:t>
+                        <a:t>현장 사용 승인 절차 정리 · 확대 승인</a:t>
                       </a:r>
                       <a:endParaRPr lang="ko-KR" altLang="en-US" sz="1000" b="0" i="0" u="none" strike="noStrike">
                         <a:solidFill>
@@ -13546,7 +13872,7 @@
                           <a:ea typeface="맑은 고딕"/>
                           <a:cs typeface="맑은 고딕"/>
                         </a:rPr>
-                        <a:t>보안 검토 — 난독화 미적용 · 이력 평문 저장</a:t>
+                        <a:t>보안 검토 — 앱 보호 미적용 · 경보 기록 암호화 안 됨</a:t>
                       </a:r>
                       <a:endParaRPr lang="ko-KR" altLang="en-US" sz="1000" b="0" i="0" u="none" strike="noStrike">
                         <a:solidFill>
@@ -14414,7 +14740,7 @@
                           <a:ea typeface="맑은 고딕"/>
                           <a:cs typeface="맑은 고딕"/>
                         </a:rPr>
-                        <a:t>Phase 2 완료 후</a:t>
+                        <a:t>2단계 완료 후</a:t>
                       </a:r>
                       <a:endParaRPr lang="en-US" altLang="ko-KR" sz="1000" b="0" i="0" u="none" strike="noStrike">
                         <a:solidFill>
@@ -15480,7 +15806,7 @@
                 <a:ea typeface="맑은 고딕"/>
                 <a:cs typeface="맑은 고딕"/>
               </a:rPr>
-              <a:t>신뢰성 로드맵 Phase 1 ~ 5</a:t>
+              <a:t>앞으로의 개선 계획  1 ~ 5단계</a:t>
             </a:r>
             <a:r>
               <a:rPr sz="1050" b="0" i="0" u="none">
@@ -15491,7 +15817,7 @@
                 <a:ea typeface="맑은 고딕"/>
                 <a:cs typeface="맑은 고딕"/>
               </a:rPr>
-              <a:t>     새 기능이 아니라, 판정이 흔들리는 구조적 원인을 걷어내는 작업</a:t>
+              <a:t>     새 기능을 붙이는 게 아니라, 결과가 흔들리는 원인을 걷어내는 작업</a:t>
             </a:r>
           </a:p>
         </p:txBody>
@@ -15807,7 +16133,7 @@
                           <a:ea typeface="맑은 고딕"/>
                           <a:cs typeface="맑은 고딕"/>
                         </a:rPr>
-                        <a:t>테스트 하네스와 CI 회귀 게이트</a:t>
+                        <a:t>고친 문제마다 자동 검사를 붙인다</a:t>
                       </a:r>
                     </a:p>
                   </a:txBody>
@@ -15860,7 +16186,7 @@
                           <a:ea typeface="맑은 고딕"/>
                           <a:cs typeface="맑은 고딕"/>
                         </a:rPr>
-                        <a:t>설치 · 경보 동작이 이전과 같은가</a:t>
+                        <a:t>설치와 경보가 이전과 똑같이 되는가</a:t>
                       </a:r>
                     </a:p>
                   </a:txBody>
@@ -16021,7 +16347,7 @@
                           <a:ea typeface="맑은 고딕"/>
                           <a:cs typeface="맑은 고딕"/>
                         </a:rPr>
-                        <a:t>안전 크리티컬 경로 골든 테스트 + PDA 이식</a:t>
+                        <a:t>안전 동작을 자동 검사로 고정 + 업무용 PDA 로 이전</a:t>
                       </a:r>
                     </a:p>
                   </a:txBody>
@@ -16074,7 +16400,7 @@
                           <a:ea typeface="맑은 고딕"/>
                           <a:cs typeface="맑은 고딕"/>
                         </a:rPr>
-                        <a:t>천천히 접근하는 지게차에 경고가 뜨는가</a:t>
+                        <a:t>천천히 다가오는 지게차에 경고가 뜨는가</a:t>
                       </a:r>
                     </a:p>
                   </a:txBody>
@@ -16235,7 +16561,7 @@
                           <a:ea typeface="맑은 고딕"/>
                           <a:cs typeface="맑은 고딕"/>
                         </a:rPr>
-                        <a:t>BleService 분해 (약 1,000줄 판정 로직)</a:t>
+                        <a:t>한 파일에 몰린 경보 계산 코드를 나눈다</a:t>
                       </a:r>
                     </a:p>
                   </a:txBody>
@@ -16288,7 +16614,7 @@
                           <a:ea typeface="맑은 고딕"/>
                           <a:cs typeface="맑은 고딕"/>
                         </a:rPr>
-                        <a:t>달라진 게 없는가 — 동작 보존</a:t>
+                        <a:t>나누기 전과 동작이 똑같은가</a:t>
                       </a:r>
                     </a:p>
                   </a:txBody>
@@ -16449,7 +16775,7 @@
                           <a:ea typeface="맑은 고딕"/>
                           <a:cs typeface="맑은 고딕"/>
                         </a:rPr>
-                        <a:t>기기 상태 단일화</a:t>
+                        <a:t>기기 상태 관리 방식을 하나로 통일한다</a:t>
                       </a:r>
                     </a:p>
                   </a:txBody>
@@ -16502,7 +16828,7 @@
                           <a:ea typeface="맑은 고딕"/>
                           <a:cs typeface="맑은 고딕"/>
                         </a:rPr>
-                        <a:t>2시간 이상 구동 후에도 느려지지 않는가</a:t>
+                        <a:t>2시간 넘게 켜 둬도 느려지지 않는가</a:t>
                       </a:r>
                     </a:p>
                   </a:txBody>
@@ -16663,7 +16989,7 @@
                           <a:ea typeface="맑은 고딕"/>
                           <a:cs typeface="맑은 고딕"/>
                         </a:rPr>
-                        <a:t>판정 워커 분리 (스캔 콜백 = 메인 스레드 해소)</a:t>
+                        <a:t>경보 계산을 화면과 분리해 따로 돌린다</a:t>
                       </a:r>
                     </a:p>
                   </a:txBody>
@@ -16716,7 +17042,7 @@
                           <a:ea typeface="맑은 고딕"/>
                           <a:cs typeface="맑은 고딕"/>
                         </a:rPr>
-                        <a:t>20대 이상에서 화면이 끊기지 않는가</a:t>
+                        <a:t>폰 20대 이상에서 화면이 끊기지 않는가</a:t>
                       </a:r>
                     </a:p>
                   </a:txBody>
@@ -16885,7 +17211,7 @@
                 <a:ea typeface="맑은 고딕"/>
                 <a:cs typeface="맑은 고딕"/>
               </a:rPr>
-              <a:t>①  측정 수단이 먼저다</a:t>
+              <a:t>①  재는 방법을 먼저 만든다</a:t>
             </a:r>
             <a:r>
               <a:rPr sz="1000" b="0" i="0" u="none">
@@ -16896,7 +17222,7 @@
                 <a:ea typeface="맑은 고딕"/>
                 <a:cs typeface="맑은 고딕"/>
               </a:rPr>
-              <a:t>  —  테스트 0건 상태에서 안전 로직을 분해하면, 회귀를 현장에서 발견하는 방식이 그대로 남는다.</a:t>
+              <a:t>  —  검사가 하나도 없는 상태에서 안전 코드를 건드리면, 문제를 현장에서 발견하게 된다.</a:t>
             </a:r>
           </a:p>
         </p:txBody>
@@ -16937,7 +17263,7 @@
                 <a:ea typeface="맑은 고딕"/>
                 <a:cs typeface="맑은 고딕"/>
               </a:rPr>
-              <a:t>②  단계마다 단독 배포한다</a:t>
+              <a:t>②  단계마다 따로 배포한다</a:t>
             </a:r>
             <a:r>
               <a:rPr sz="1000" b="0" i="0" u="none">
@@ -16948,7 +17274,7 @@
                 <a:ea typeface="맑은 고딕"/>
                 <a:cs typeface="맑은 고딕"/>
               </a:rPr>
-              <a:t>  —  변경을 섞어 내보내면 현장에서 회귀가 나도 어느 변경 탓인지 특정할 수 없다.</a:t>
+              <a:t>  —  여러 변경을 한꺼번에 내보내면, 문제가 생겨도 어느 것 때문인지 알 수 없다.</a:t>
             </a:r>
           </a:p>
         </p:txBody>
@@ -16989,7 +17315,7 @@
                 <a:ea typeface="맑은 고딕"/>
                 <a:cs typeface="맑은 고딕"/>
               </a:rPr>
-              <a:t>③  전 단계가 출하 가능하다</a:t>
+              <a:t>③  어느 단계에서 멈춰도 쓸 수 있다</a:t>
             </a:r>
             <a:r>
               <a:rPr sz="1000" b="0" i="0" u="none">
@@ -17000,7 +17326,7 @@
                 <a:ea typeface="맑은 고딕"/>
                 <a:cs typeface="맑은 고딕"/>
               </a:rPr>
-              <a:t>  —  로드맵이 멈춰도 v1.1.70 이 현장에서 그대로 돌아 보호가 끊기지 않는다.</a:t>
+              <a:t>  —  개선이 중간에 멈춰도 지금 버전이 현장에서 그대로 돌아 경보가 끊기지 않는다.</a:t>
             </a:r>
           </a:p>
         </p:txBody>
@@ -18183,7 +18509,7 @@
                 <a:ea typeface="맑은 고딕"/>
                 <a:cs typeface="맑은 고딕"/>
               </a:rPr>
-              <a:t>네 지표 모두 목표를 숫자로 둔다</a:t>
+              <a:t>네 가지 모두 숫자로 재기로 했다</a:t>
             </a:r>
             <a:r>
               <a:rPr sz="850" b="0" i="0" u="sng">
@@ -18321,7 +18647,7 @@
                 <a:ea typeface="맑은 고딕"/>
                 <a:cs typeface="맑은 고딕"/>
               </a:rPr>
-              <a:t>KPI 1   </a:t>
+              <a:t>지표 1   </a:t>
             </a:r>
             <a:r>
               <a:rPr sz="1050" b="1" i="0" u="none">
@@ -18332,7 +18658,7 @@
                 <a:ea typeface="맑은 고딕"/>
                 <a:cs typeface="맑은 고딕"/>
               </a:rPr>
-              <a:t>접근 조우</a:t>
+              <a:t>가까워진 횟수</a:t>
             </a:r>
           </a:p>
         </p:txBody>
@@ -18373,7 +18699,7 @@
                 <a:ea typeface="맑은 고딕"/>
                 <a:cs typeface="맑은 고딕"/>
               </a:rPr>
-              <a:t>경고 반경 15m 진입</a:t>
+              <a:t>15m 안까지 접근</a:t>
             </a:r>
           </a:p>
         </p:txBody>
@@ -18414,7 +18740,7 @@
                 <a:ea typeface="맑은 고딕"/>
                 <a:cs typeface="맑은 고딕"/>
               </a:rPr>
-              <a:t>교대당 95회</a:t>
+              <a:t>1교대 95회</a:t>
             </a:r>
           </a:p>
         </p:txBody>
@@ -18541,7 +18867,7 @@
                 <a:ea typeface="맑은 고딕"/>
                 <a:cs typeface="맑은 고딕"/>
               </a:rPr>
-              <a:t>KPI 2   </a:t>
+              <a:t>지표 2   </a:t>
             </a:r>
             <a:r>
               <a:rPr sz="1050" b="1" i="0" u="none">
@@ -18552,7 +18878,7 @@
                 <a:ea typeface="맑은 고딕"/>
                 <a:cs typeface="맑은 고딕"/>
               </a:rPr>
-              <a:t>위험 조우</a:t>
+              <a:t>위험하게 가까워진 횟수</a:t>
             </a:r>
           </a:p>
         </p:txBody>
@@ -18593,7 +18919,7 @@
                 <a:ea typeface="맑은 고딕"/>
                 <a:cs typeface="맑은 고딕"/>
               </a:rPr>
-              <a:t>위험 반경 8m 진입</a:t>
+              <a:t>8m 안까지 접근</a:t>
             </a:r>
           </a:p>
         </p:txBody>
@@ -18634,7 +18960,7 @@
                 <a:ea typeface="맑은 고딕"/>
                 <a:cs typeface="맑은 고딕"/>
               </a:rPr>
-              <a:t>교대당 27회</a:t>
+              <a:t>1교대 27회</a:t>
             </a:r>
           </a:p>
         </p:txBody>
@@ -18761,7 +19087,7 @@
                 <a:ea typeface="맑은 고딕"/>
                 <a:cs typeface="맑은 고딕"/>
               </a:rPr>
-              <a:t>KPI 3   </a:t>
+              <a:t>지표 3   </a:t>
             </a:r>
             <a:r>
               <a:rPr sz="1050" b="1" i="0" u="none">
@@ -18772,7 +19098,7 @@
                 <a:ea typeface="맑은 고딕"/>
                 <a:cs typeface="맑은 고딕"/>
               </a:rPr>
-              <a:t>오발령</a:t>
+              <a:t>쓸데없이 울린 횟수</a:t>
             </a:r>
           </a:p>
         </p:txBody>
@@ -18813,7 +19139,7 @@
                 <a:ea typeface="맑은 고딕"/>
                 <a:cs typeface="맑은 고딕"/>
               </a:rPr>
-              <a:t>정지 중 반복 · 이탈 후 재발령</a:t>
+              <a:t>서 있는데 계속 울림 · 멀어졌는데 다시 울림</a:t>
             </a:r>
           </a:p>
         </p:txBody>
@@ -18854,7 +19180,7 @@
                 <a:ea typeface="맑은 고딕"/>
                 <a:cs typeface="맑은 고딕"/>
               </a:rPr>
-              <a:t>교대당 3회 미만</a:t>
+              <a:t>1교대 3회 미만</a:t>
             </a:r>
           </a:p>
         </p:txBody>
@@ -18981,7 +19307,7 @@
                 <a:ea typeface="맑은 고딕"/>
                 <a:cs typeface="맑은 고딕"/>
               </a:rPr>
-              <a:t>KPI 4   </a:t>
+              <a:t>지표 4   </a:t>
             </a:r>
             <a:r>
               <a:rPr sz="1050" b="1" i="0" u="none">
@@ -18992,7 +19318,7 @@
                 <a:ea typeface="맑은 고딕"/>
                 <a:cs typeface="맑은 고딕"/>
               </a:rPr>
-              <a:t>체감 만족도</a:t>
+              <a:t>작업자 만족도</a:t>
             </a:r>
           </a:p>
         </p:txBody>
@@ -19033,7 +19359,7 @@
                 <a:ea typeface="맑은 고딕"/>
                 <a:cs typeface="맑은 고딕"/>
               </a:rPr>
-              <a:t>경보 타이밍 · 거리 정확도</a:t>
+              <a:t>울리는 시점과 거리가 맞는가</a:t>
             </a:r>
           </a:p>
         </p:txBody>
@@ -19074,7 +19400,7 @@
                 <a:ea typeface="맑은 고딕"/>
                 <a:cs typeface="맑은 고딕"/>
               </a:rPr>
-              <a:t>7.0 / 10</a:t>
+              <a:t>10점 중 7.0점</a:t>
             </a:r>
           </a:p>
         </p:txBody>
@@ -19115,7 +19441,7 @@
                 <a:ea typeface="맑은 고딕"/>
                 <a:cs typeface="맑은 고딕"/>
               </a:rPr>
-              <a:t>「미발령 0건」은 지표에서 뺐다</a:t>
+              <a:t>‘울렸어야 하는데 안 울린 횟수’ 는 지표에서 뺐다</a:t>
             </a:r>
             <a:r>
               <a:rPr sz="900" b="0" i="0" u="none">
@@ -19126,7 +19452,7 @@
                 <a:ea typeface="맑은 고딕"/>
                 <a:cs typeface="맑은 고딕"/>
               </a:rPr>
-              <a:t>  —  미발령은 정의상 관측되지 않는다. 서베이의 ‘경보가 늦었다’ 응답으로 간접 관측한다.</a:t>
+              <a:t>  —  아무 일도 일어나지 않은 것이라 셀 방법이 없다. 작업자 설문의 ‘경보가 늦었다’ 응답으로 대신 본다.</a:t>
             </a:r>
           </a:p>
         </p:txBody>
@@ -19167,7 +19493,7 @@
                 <a:ea typeface="맑은 고딕"/>
                 <a:cs typeface="맑은 고딕"/>
               </a:rPr>
-              <a:t>산출 근거 — 가정값은 하나뿐이다</a:t>
+              <a:t>이 숫자는 이렇게 나왔다 — 가정한 값은 하나뿐</a:t>
             </a:r>
           </a:p>
         </p:txBody>
@@ -19192,8 +19518,8 @@
               </a:tblPr>
               <a:tblGrid>
                 <a:gridCol w="1207008"/>
-                <a:gridCol w="1170432"/>
-                <a:gridCol w="2596896"/>
+                <a:gridCol w="1005840"/>
+                <a:gridCol w="2761488"/>
               </a:tblGrid>
               <a:tr h="246888">
                 <a:tc>
@@ -19376,7 +19702,7 @@
                           <a:ea typeface="맑은 고딕"/>
                           <a:cs typeface="맑은 고딕"/>
                         </a:rPr>
-                        <a:t>감지 쌍</a:t>
+                        <a:t>서로 감지되는 짝</a:t>
                       </a:r>
                     </a:p>
                   </a:txBody>
@@ -19429,7 +19755,7 @@
                           <a:ea typeface="맑은 고딕"/>
                           <a:cs typeface="맑은 고딕"/>
                         </a:rPr>
-                        <a:t>21쌍</a:t>
+                        <a:t>21가지</a:t>
                       </a:r>
                     </a:p>
                   </a:txBody>
@@ -19482,7 +19808,7 @@
                           <a:ea typeface="맑은 고딕"/>
                           <a:cs typeface="맑은 고딕"/>
                         </a:rPr>
-                        <a:t>차량 4 + 상시 3 = 7대, C(7,2) — 실측</a:t>
+                        <a:t>지게차 4 + 사람 3 = 7대의 짝 수</a:t>
                       </a:r>
                     </a:p>
                   </a:txBody>
@@ -19537,7 +19863,7 @@
                           <a:ea typeface="맑은 고딕"/>
                           <a:cs typeface="맑은 고딕"/>
                         </a:rPr>
-                        <a:t>쌍당 경고 조우</a:t>
+                        <a:t>짝당 시간당 접근</a:t>
                       </a:r>
                     </a:p>
                   </a:txBody>
@@ -19590,7 +19916,7 @@
                           <a:ea typeface="맑은 고딕"/>
                           <a:cs typeface="맑은 고딕"/>
                         </a:rPr>
-                        <a:t>0.5회 / 시간</a:t>
+                        <a:t>0.5회</a:t>
                       </a:r>
                     </a:p>
                   </a:txBody>
@@ -19643,7 +19969,7 @@
                           <a:ea typeface="맑은 고딕"/>
                           <a:cs typeface="맑은 고딕"/>
                         </a:rPr>
-                        <a:t>보수적 가정 — </a:t>
+                        <a:t>보수적으로 잡은 값 — </a:t>
                       </a:r>
                       <a:r>
                         <a:rPr sz="850" b="1" i="0" u="none">
@@ -19654,7 +19980,7 @@
                           <a:ea typeface="맑은 고딕"/>
                           <a:cs typeface="맑은 고딕"/>
                         </a:rPr>
-                        <a:t>유일한 가정값</a:t>
+                        <a:t>유일한 가정</a:t>
                       </a:r>
                     </a:p>
                   </a:txBody>
@@ -19709,7 +20035,7 @@
                           <a:ea typeface="맑은 고딕"/>
                           <a:cs typeface="맑은 고딕"/>
                         </a:rPr>
-                        <a:t>경고 조우</a:t>
+                        <a:t>1교대 15m 접근</a:t>
                       </a:r>
                     </a:p>
                   </a:txBody>
@@ -19762,7 +20088,7 @@
                           <a:ea typeface="맑은 고딕"/>
                           <a:cs typeface="맑은 고딕"/>
                         </a:rPr>
-                        <a:t>교대당 95회</a:t>
+                        <a:t>95회</a:t>
                       </a:r>
                     </a:p>
                   </a:txBody>
@@ -19815,7 +20141,7 @@
                           <a:ea typeface="맑은 고딕"/>
                           <a:cs typeface="맑은 고딕"/>
                         </a:rPr>
-                        <a:t>21 × 9시간 × 0.5 = 94.5</a:t>
+                        <a:t>21가지 × 9시간 × 0.5 = 94.5</a:t>
                       </a:r>
                     </a:p>
                   </a:txBody>
@@ -19870,7 +20196,7 @@
                           <a:ea typeface="맑은 고딕"/>
                           <a:cs typeface="맑은 고딕"/>
                         </a:rPr>
-                        <a:t>위험 전이율</a:t>
+                        <a:t>8m 까지 갈 비율</a:t>
                       </a:r>
                     </a:p>
                   </a:txBody>
@@ -19976,7 +20302,7 @@
                           <a:ea typeface="맑은 고딕"/>
                           <a:cs typeface="맑은 고딕"/>
                         </a:rPr>
-                        <a:t>반경 비의 제곱 (8m / 15m)²</a:t>
+                        <a:t>거리 비의 제곱 (8m ÷ 15m)²</a:t>
                       </a:r>
                     </a:p>
                   </a:txBody>
@@ -20031,7 +20357,7 @@
                           <a:ea typeface="맑은 고딕"/>
                           <a:cs typeface="맑은 고딕"/>
                         </a:rPr>
-                        <a:t>위험 조우</a:t>
+                        <a:t>1교대 8m 접근</a:t>
                       </a:r>
                     </a:p>
                   </a:txBody>
@@ -20084,7 +20410,7 @@
                           <a:ea typeface="맑은 고딕"/>
                           <a:cs typeface="맑은 고딕"/>
                         </a:rPr>
-                        <a:t>교대당 27회</a:t>
+                        <a:t>27회</a:t>
                       </a:r>
                     </a:p>
                   </a:txBody>
@@ -20192,7 +20518,7 @@
                           <a:ea typeface="맑은 고딕"/>
                           <a:cs typeface="맑은 고딕"/>
                         </a:rPr>
-                        <a:t>오발령</a:t>
+                        <a:t>쓸데없이 울린 횟수</a:t>
                       </a:r>
                     </a:p>
                   </a:txBody>
@@ -20245,7 +20571,7 @@
                           <a:ea typeface="맑은 고딕"/>
                           <a:cs typeface="맑은 고딕"/>
                         </a:rPr>
-                        <a:t>교대당 3회 미만</a:t>
+                        <a:t>1교대 3회 미만</a:t>
                       </a:r>
                     </a:p>
                   </a:txBody>
@@ -20298,7 +20624,7 @@
                           <a:ea typeface="맑은 고딕"/>
                           <a:cs typeface="맑은 고딕"/>
                         </a:rPr>
-                        <a:t>자동 음소거 · 이탈 억제 적용 후</a:t>
+                        <a:t>자동 소리 끄기 · 재발령 억제 후</a:t>
                       </a:r>
                     </a:p>
                   </a:txBody>
@@ -20353,7 +20679,7 @@
                           <a:ea typeface="맑은 고딕"/>
                           <a:cs typeface="맑은 고딕"/>
                         </a:rPr>
-                        <a:t>체감 만족도</a:t>
+                        <a:t>작업자 만족도</a:t>
                       </a:r>
                     </a:p>
                   </a:txBody>
@@ -20406,7 +20732,7 @@
                           <a:ea typeface="맑은 고딕"/>
                           <a:cs typeface="맑은 고딕"/>
                         </a:rPr>
-                        <a:t>7.0 / 10</a:t>
+                        <a:t>10점 중 7.0점</a:t>
                       </a:r>
                     </a:p>
                   </a:txBody>
@@ -20459,7 +20785,7 @@
                           <a:ea typeface="맑은 고딕"/>
                           <a:cs typeface="맑은 고딕"/>
                         </a:rPr>
-                        <a:t>요구 4건 전량 반영 · 3개 센터 사용 지속</a:t>
+                        <a:t>요구 4건 반영 · 3개 센터 사용 중</a:t>
                       </a:r>
                     </a:p>
                   </a:txBody>
@@ -20506,8 +20832,8 @@
         </p:nvSpPr>
         <p:spPr>
           <a:xfrm>
-            <a:off x="6382512" y="4873752"/>
-            <a:ext cx="4901183" cy="306324"/>
+            <a:off x="6382512" y="4946904"/>
+            <a:ext cx="4901183" cy="310896"/>
           </a:xfrm>
           <a:prstGeom prst="rect">
             <a:avLst/>
@@ -20534,10 +20860,10 @@
                 <a:ea typeface="맑은 고딕"/>
                 <a:cs typeface="맑은 고딕"/>
               </a:rPr>
-              <a:t>·  경보 이력은 이미 쌓이고 있다 — </a:t>
+              <a:t>·  </a:t>
             </a:r>
             <a:r>
-              <a:rPr sz="850" b="1" i="0" u="none">
+              <a:rPr sz="900" b="1" i="0" u="none">
                 <a:solidFill>
                   <a:srgbClr val="404040"/>
                 </a:solidFill>
@@ -20545,18 +20871,18 @@
                 <a:ea typeface="맑은 고딕"/>
                 <a:cs typeface="맑은 고딕"/>
               </a:rPr>
-              <a:t>alerts/{yyyyMMdd} = timestamp · deviceId · walkerId · rssi · alertLevel</a:t>
+              <a:t>앱이 경보를 울릴 때마다 시각 · 상대 · 거리 · 등급이 서버에 기록되고 있다</a:t>
             </a:r>
             <a:r>
-              <a:rPr sz="850" b="0" i="0" u="none">
+              <a:rPr sz="900" b="0" i="0" u="none">
                 <a:solidFill>
-                  <a:srgbClr val="9AA0A6"/>
+                  <a:srgbClr val="404040"/>
                 </a:solidFill>
                 <a:latin typeface="맑은 고딕"/>
                 <a:ea typeface="맑은 고딕"/>
                 <a:cs typeface="맑은 고딕"/>
               </a:rPr>
-              <a:t>  (FirebaseManager.kt:15-29)</a:t>
+              <a:t> — 따로 만들 것이 없다.</a:t>
             </a:r>
           </a:p>
         </p:txBody>
@@ -20569,8 +20895,8 @@
         </p:nvSpPr>
         <p:spPr>
           <a:xfrm>
-            <a:off x="6382512" y="5180076"/>
-            <a:ext cx="4901183" cy="306324"/>
+            <a:off x="6382512" y="5257800"/>
+            <a:ext cx="4901183" cy="310896"/>
           </a:xfrm>
           <a:prstGeom prst="rect">
             <a:avLst/>
@@ -20597,7 +20923,7 @@
                 <a:ea typeface="맑은 고딕"/>
                 <a:cs typeface="맑은 고딕"/>
               </a:rPr>
-              <a:t>·  기기당 1분 1회 스로틀(BleService.kt:2529) 이라 1건 = 조우 1분이다. 중복이 걷힌 값이라 아차사고 대리지표로 쓴다 — 사고 건수가 아니다.</a:t>
+              <a:t>·  같은 상대는 1분에 한 번만 기록되므로 1건 = 가까워진 1분이다. 사고 건수가 아니라 위험했던 순간의 대용 지표로 쓴다.</a:t>
             </a:r>
           </a:p>
         </p:txBody>
@@ -20610,8 +20936,8 @@
         </p:nvSpPr>
         <p:spPr>
           <a:xfrm>
-            <a:off x="6382512" y="5486400"/>
-            <a:ext cx="4901183" cy="306324"/>
+            <a:off x="6382512" y="5568696"/>
+            <a:ext cx="4901183" cy="310896"/>
           </a:xfrm>
           <a:prstGeom prst="rect">
             <a:avLst/>
@@ -20638,7 +20964,7 @@
                 <a:ea typeface="맑은 고딕"/>
                 <a:cs typeface="맑은 고딕"/>
               </a:rPr>
-              <a:t>·  4주 집계 한 번이면 가정값이 실측으로 바뀌고, 위 표의 나머지가 전부 따라 교체된다.</a:t>
+              <a:t>·  4주만 모으면 가정한 값이 실제 숫자로 바뀌고, 위 표의 나머지가 전부 따라 바뀐다.</a:t>
             </a:r>
           </a:p>
         </p:txBody>
@@ -20651,49 +20977,8 @@
         </p:nvSpPr>
         <p:spPr>
           <a:xfrm>
-            <a:off x="6382512" y="5792724"/>
-            <a:ext cx="4901183" cy="306324"/>
-          </a:xfrm>
-          <a:prstGeom prst="rect">
-            <a:avLst/>
-          </a:prstGeom>
-          <a:noFill/>
-        </p:spPr>
-        <p:txBody>
-          <a:bodyPr wrap="square" lIns="18288" rIns="18288" tIns="0" bIns="0">
-            <a:spAutoFit/>
-          </a:bodyPr>
-          <a:lstStyle/>
-          <a:p>
-            <a:pPr algn="l">
-              <a:lnSpc>
-                <a:spcPct val="120000"/>
-              </a:lnSpc>
-            </a:pPr>
-            <a:r>
-              <a:rPr sz="900" b="0" i="0" u="none">
-                <a:solidFill>
-                  <a:srgbClr val="404040"/>
-                </a:solidFill>
-                <a:latin typeface="맑은 고딕"/>
-                <a:ea typeface="맑은 고딕"/>
-                <a:cs typeface="맑은 고딕"/>
-              </a:rPr>
-              <a:t>·  회귀 재발은 CI 골든 테스트가 잡는다 — 실패 시 릴리스가 자동 차단된다 (Phase 1, 동작 중).</a:t>
-            </a:r>
-          </a:p>
-        </p:txBody>
-      </p:sp>
-      <p:sp>
-        <p:nvSpPr>
-          <p:cNvPr id="47" name="TextBox 46"/>
-          <p:cNvSpPr txBox="1"/>
-          <p:nvPr/>
-        </p:nvSpPr>
-        <p:spPr>
-          <a:xfrm>
-            <a:off x="6382512" y="6099048"/>
-            <a:ext cx="4901183" cy="306324"/>
+            <a:off x="6382512" y="5879592"/>
+            <a:ext cx="4901183" cy="310896"/>
           </a:xfrm>
           <a:prstGeom prst="rect">
             <a:avLst/>
@@ -20720,7 +21005,7 @@
                 <a:ea typeface="맑은 고딕"/>
                 <a:cs typeface="맑은 고딕"/>
               </a:rPr>
-              <a:t>·  사고 건수 · 셧다운 건수는 회사 데이터로 존재하지 않아 지표에서 제외했다.</a:t>
+              <a:t>·  사고 건수는 회사 데이터로 존재하지 않아 지표에 넣지 않았다.</a:t>
             </a:r>
           </a:p>
         </p:txBody>
@@ -21954,7 +22239,7 @@
                 <a:ea typeface="맑은 고딕"/>
                 <a:cs typeface="맑은 고딕"/>
               </a:rPr>
-              <a:t>미발령</a:t>
+              <a:t>경보가 안 울렸다</a:t>
             </a:r>
             <a:r>
               <a:rPr sz="850" b="1" i="0" u="none">
@@ -22006,7 +22291,7 @@
                 <a:ea typeface="맑은 고딕"/>
                 <a:cs typeface="맑은 고딕"/>
               </a:rPr>
-              <a:t>접근했는데 경보가 뜨지 않은 사례 1건이라도</a:t>
+              <a:t>가까워졌는데 경보가 뜨지 않은 사례 1건이라도</a:t>
             </a:r>
           </a:p>
         </p:txBody>
@@ -22047,7 +22332,7 @@
                 <a:ea typeface="맑은 고딕"/>
                 <a:cs typeface="맑은 고딕"/>
               </a:rPr>
-              <a:t>오발령 지속</a:t>
+              <a:t>쓸데없이 계속 울린다</a:t>
             </a:r>
             <a:r>
               <a:rPr sz="850" b="1" i="0" u="none">
@@ -22099,7 +22384,7 @@
                 <a:ea typeface="맑은 고딕"/>
                 <a:cs typeface="맑은 고딕"/>
               </a:rPr>
-              <a:t>정지 중 계속 울림 · 이탈 후 다시 울림이 반복</a:t>
+              <a:t>서 있는데 계속 울림 · 멀어졌는데 다시 울림이 반복</a:t>
             </a:r>
           </a:p>
         </p:txBody>
@@ -22140,7 +22425,7 @@
                 <a:ea typeface="맑은 고딕"/>
                 <a:cs typeface="맑은 고딕"/>
               </a:rPr>
-              <a:t>감지 중단</a:t>
+              <a:t>감지가 멈췄다</a:t>
             </a:r>
             <a:r>
               <a:rPr sz="850" b="1" i="0" u="none">
@@ -22192,7 +22477,7 @@
                 <a:ea typeface="맑은 고딕"/>
                 <a:cs typeface="맑은 고딕"/>
               </a:rPr>
-              <a:t>상시 알림이 ‘이상’ 으로 바뀌거나 사라짐</a:t>
+              <a:t>알림 표시줄이 ‘이상’ 으로 바뀌거나 사라짐</a:t>
             </a:r>
           </a:p>
         </p:txBody>
@@ -22233,7 +22518,7 @@
                 <a:ea typeface="맑은 고딕"/>
                 <a:cs typeface="맑은 고딕"/>
               </a:rPr>
-              <a:t>경보 피로</a:t>
+              <a:t>작업자가 꺼 둔다</a:t>
             </a:r>
             <a:r>
               <a:rPr sz="850" b="1" i="0" u="none">
@@ -22285,7 +22570,7 @@
                 <a:ea typeface="맑은 고딕"/>
                 <a:cs typeface="맑은 고딕"/>
               </a:rPr>
-              <a:t>무음으로 두거나 앱을 꺼 둔 단말이 늘어남</a:t>
+              <a:t>소리를 끄거나 앱을 꺼 둔 폰이 늘어남</a:t>
             </a:r>
           </a:p>
         </p:txBody>
@@ -22367,7 +22652,7 @@
                 <a:ea typeface="맑은 고딕"/>
                 <a:cs typeface="맑은 고딕"/>
               </a:rPr>
-              <a:t>버전 혼재</a:t>
+              <a:t>옛 버전과 안 통한다</a:t>
             </a:r>
             <a:r>
               <a:rPr sz="850" b="1" i="0" u="none">
@@ -22419,7 +22704,7 @@
                 <a:ea typeface="맑은 고딕"/>
                 <a:cs typeface="맑은 고딕"/>
               </a:rPr>
-              <a:t>구버전 단말이 신버전을 감지하지 못함</a:t>
+              <a:t>옛 버전 폰이 새 버전 폰을 감지하지 못함</a:t>
             </a:r>
           </a:p>
         </p:txBody>
@@ -22460,7 +22745,7 @@
                 <a:ea typeface="맑은 고딕"/>
                 <a:cs typeface="맑은 고딕"/>
               </a:rPr>
-              <a:t>회귀 재발</a:t>
+              <a:t>고쳤던 문제가 재발</a:t>
             </a:r>
             <a:r>
               <a:rPr sz="850" b="1" i="0" u="none">
@@ -22512,7 +22797,7 @@
                 <a:ea typeface="맑은 고딕"/>
                 <a:cs typeface="맑은 고딕"/>
               </a:rPr>
-              <a:t>이전에 고친 증상이 다시 관측됨</a:t>
+              <a:t>이전에 고친 증상이 다시 나타남</a:t>
             </a:r>
           </a:p>
         </p:txBody>
@@ -22553,7 +22838,7 @@
                 <a:ea typeface="맑은 고딕"/>
                 <a:cs typeface="맑은 고딕"/>
               </a:rPr>
-              <a:t>보호 공백</a:t>
+              <a:t>업데이트 중 무방비</a:t>
             </a:r>
             <a:r>
               <a:rPr sz="850" b="1" i="0" u="none">
@@ -22605,7 +22890,7 @@
                 <a:ea typeface="맑은 고딕"/>
                 <a:cs typeface="맑은 고딕"/>
               </a:rPr>
-              <a:t>작업 시간 중 일괄 업데이트 — 교대 전환 때만 배포</a:t>
+              <a:t>작업 시간 중 일괄 업데이트 금지 — 교대 전환 때만 배포</a:t>
             </a:r>
           </a:p>
         </p:txBody>
@@ -22646,7 +22931,7 @@
                 <a:ea typeface="맑은 고딕"/>
                 <a:cs typeface="맑은 고딕"/>
               </a:rPr>
-              <a:t>서비스 미기동</a:t>
+              <a:t>업데이트 후 안 켜진다</a:t>
             </a:r>
             <a:r>
               <a:rPr sz="850" b="1" i="0" u="none">
@@ -22698,7 +22983,7 @@
                 <a:ea typeface="맑은 고딕"/>
                 <a:cs typeface="맑은 고딕"/>
               </a:rPr>
-              <a:t>업데이트 · 역할 전환 후 백그라운드 실행 미복구</a:t>
+              <a:t>업데이트나 역할 변경 뒤 앱이 다시 켜지지 않음</a:t>
             </a:r>
           </a:p>
         </p:txBody>
@@ -22780,7 +23065,7 @@
                 <a:ea typeface="맑은 고딕"/>
                 <a:cs typeface="맑은 고딕"/>
               </a:rPr>
-              <a:t>·  미발령 · 오발령 — 작업자 신고와 Firebase 경보 이력을 맞춰 판정한다.</a:t>
+              <a:t>·  경보 누락 · 오작동 — 작업자 신고와 서버에 남은 경보 기록을 대조한다.</a:t>
             </a:r>
           </a:p>
         </p:txBody>
@@ -22821,7 +23106,7 @@
                 <a:ea typeface="맑은 고딕"/>
                 <a:cs typeface="맑은 고딕"/>
               </a:rPr>
-              <a:t>·  감지 중단 · 서비스 미기동 — 상시 알림이 스스로 이상 상태를 드러낸다 (v1.1.64).</a:t>
+              <a:t>·  감지 멈춤 · 앱 안 켜짐 — 알림 표시줄이 스스로 ‘이상’ 을 띄운다 (v1.1.64).</a:t>
             </a:r>
           </a:p>
         </p:txBody>
@@ -22862,7 +23147,7 @@
                 <a:ea typeface="맑은 고딕"/>
                 <a:cs typeface="맑은 고딕"/>
               </a:rPr>
-              <a:t>·  버전 혼재 — 배포 후 전 단말 버전 확인. 1바이트 프로토콜은 구버전과 호환된다.</a:t>
+              <a:t>·  버전 섞임 — 배포 뒤 모든 폰의 버전을 확인한다. 신호 형식은 옛 버전과도 통하게 만들었다.</a:t>
             </a:r>
           </a:p>
         </p:txBody>
@@ -22903,7 +23188,7 @@
                 <a:ea typeface="맑은 고딕"/>
                 <a:cs typeface="맑은 고딕"/>
               </a:rPr>
-              <a:t>·  회귀 재발 — CI 골든 테스트가 잡는다. 실패 시 릴리스 자동 차단.</a:t>
+              <a:t>·  재발 — 자동 검사가 잡는다. 검사가 실패하면 새 버전이 나가지 않는다.</a:t>
             </a:r>
           </a:p>
         </p:txBody>
@@ -22944,7 +23229,7 @@
                 <a:ea typeface="맑은 고딕"/>
                 <a:cs typeface="맑은 고딕"/>
               </a:rPr>
-              <a:t>·  경보 피로 — 서베이와 무음 설정 비율로 본다.</a:t>
+              <a:t>·  꺼 두는 사람 — 작업자 설문과 소리 끔 설정 비율로 본다.</a:t>
             </a:r>
           </a:p>
         </p:txBody>
@@ -22985,7 +23270,7 @@
                 <a:ea typeface="맑은 고딕"/>
                 <a:cs typeface="맑은 고딕"/>
               </a:rPr>
-              <a:t>Rollback 기준</a:t>
+              <a:t>문제가 생기면 이렇게 되돌린다</a:t>
             </a:r>
           </a:p>
         </p:txBody>
@@ -23026,7 +23311,7 @@
                 <a:ea typeface="맑은 고딕"/>
                 <a:cs typeface="맑은 고딕"/>
               </a:rPr>
-              <a:t>즉시 롤백</a:t>
+              <a:t>즉시 되돌리기</a:t>
             </a:r>
           </a:p>
           <a:p>
@@ -23044,7 +23329,7 @@
                 <a:ea typeface="맑은 고딕"/>
                 <a:cs typeface="맑은 고딕"/>
               </a:rPr>
-              <a:t>직전 태그 APK 로 되돌린다 — 현장 재설치 없이 배포된다</a:t>
+              <a:t>직전 버전으로 되돌린다 — 현장에서 다시 설치할 필요가 없다</a:t>
             </a:r>
           </a:p>
         </p:txBody>
@@ -23085,7 +23370,7 @@
                 <a:ea typeface="맑은 고딕"/>
                 <a:cs typeface="맑은 고딕"/>
               </a:rPr>
-              <a:t>선행 확인</a:t>
+              <a:t>먼저 1대에서</a:t>
             </a:r>
           </a:p>
           <a:p>
@@ -23103,7 +23388,7 @@
                 <a:ea typeface="맑은 고딕"/>
                 <a:cs typeface="맑은 고딕"/>
               </a:rPr>
-              <a:t>전 단말 배포 전 1대에서 먼저 확인한다</a:t>
+              <a:t>모든 폰에 배포하기 전에 1대에서 먼저 확인한다</a:t>
             </a:r>
           </a:p>
         </p:txBody>
@@ -23144,7 +23429,7 @@
                 <a:ea typeface="맑은 고딕"/>
                 <a:cs typeface="맑은 고딕"/>
               </a:rPr>
-              <a:t>빌드 차단</a:t>
+              <a:t>배포 차단</a:t>
             </a:r>
           </a:p>
           <a:p>
@@ -23162,7 +23447,7 @@
                 <a:ea typeface="맑은 고딕"/>
                 <a:cs typeface="맑은 고딕"/>
               </a:rPr>
-              <a:t>골든 테스트가 실패하면 릴리스가 자동 차단된다 (동작 중)</a:t>
+              <a:t>자동 검사가 실패하면 새 버전이 아예 나가지 않는다 (동작 중)</a:t>
             </a:r>
           </a:p>
         </p:txBody>
@@ -23203,7 +23488,7 @@
                 <a:ea typeface="맑은 고딕"/>
                 <a:cs typeface="맑은 고딕"/>
               </a:rPr>
-              <a:t>원인 귀속</a:t>
+              <a:t>원인 특정</a:t>
             </a:r>
           </a:p>
           <a:p>
@@ -23221,7 +23506,7 @@
                 <a:ea typeface="맑은 고딕"/>
                 <a:cs typeface="맑은 고딕"/>
               </a:rPr>
-              <a:t>단계를 단독 배포하므로 어느 변경 탓인지 특정된다</a:t>
+              <a:t>단계를 하나씩 따로 배포하므로 어느 변경 탓인지 알 수 있다</a:t>
             </a:r>
           </a:p>
         </p:txBody>
@@ -23280,7 +23565,7 @@
                 <a:ea typeface="맑은 고딕"/>
                 <a:cs typeface="맑은 고딕"/>
               </a:rPr>
-              <a:t>실패한 상황을 테스트로 고정한 뒤에만 다음 단계로</a:t>
+              <a:t>실패한 상황을 자동 검사로 만들어 둔 뒤에만 다음 단계로</a:t>
             </a:r>
           </a:p>
         </p:txBody>
@@ -24350,7 +24635,7 @@
                   <a:ea typeface="맑은 고딕"/>
                   <a:cs typeface="맑은 고딕"/>
                 </a:rPr>
-                <a:t>① 실측 확보</a:t>
+                <a:t>① 실제 숫자 확보</a:t>
               </a:r>
               <a:r>
                 <a:rPr sz="1050" b="0" i="0" u="none">
@@ -24361,29 +24646,7 @@
                   <a:ea typeface="맑은 고딕"/>
                   <a:cs typeface="맑은 고딕"/>
                 </a:rPr>
-                <a:t>  경보 이력 4주 집계 · WF11 · WF21 · WF25 서베이 회수 — 추정치를 실측으로 교체한다.</a:t>
-              </a:r>
-              <a:r>
-                <a:rPr sz="1050" b="1" i="0" u="none">
-                  <a:solidFill>
-                    <a:srgbClr val="053866"/>
-                  </a:solidFill>
-                  <a:latin typeface="맑은 고딕"/>
-                  <a:ea typeface="맑은 고딕"/>
-                  <a:cs typeface="맑은 고딕"/>
-                </a:rPr>
-                <a:t>        ② PDA 이식</a:t>
-              </a:r>
-              <a:r>
-                <a:rPr sz="1050" b="0" i="0" u="none">
-                  <a:solidFill>
-                    <a:srgbClr val="404040"/>
-                  </a:solidFill>
-                  <a:latin typeface="맑은 고딕"/>
-                  <a:ea typeface="맑은 고딕"/>
-                  <a:cs typeface="맑은 고딕"/>
-                </a:rPr>
-                <a:t>  Phase 2 에서 업무 단말로 옮겨 개인 폰 임시 설치를 끝낸다.</a:t>
+                <a:t>  앱 경보 기록 4주 집계 · WF11 · WF21 · WF25 작업자 설문 회수 — 추정치를 실제 숫자로 바꾼다.</a:t>
               </a:r>
               <a:endParaRPr lang="ko-KR" altLang="en-US" sz="1200">
                 <a:solidFill>
@@ -24414,6 +24677,38 @@
                   <a:ea typeface="맑은 고딕"/>
                   <a:cs typeface="맑은 고딕"/>
                 </a:rPr>
+                <a:t>② 업무용 PDA 로 이전</a:t>
+              </a:r>
+              <a:r>
+                <a:rPr sz="1050" b="0" i="0" u="none">
+                  <a:solidFill>
+                    <a:srgbClr val="404040"/>
+                  </a:solidFill>
+                  <a:latin typeface="맑은 고딕"/>
+                  <a:ea typeface="맑은 고딕"/>
+                  <a:cs typeface="맑은 고딕"/>
+                </a:rPr>
+                <a:t>  2단계에서 개인 폰에 임시로 깔아 둔 상태를 끝낸다.</a:t>
+              </a:r>
+            </a:p>
+            <a:p>
+              <a:pPr algn="l">
+                <a:lnSpc>
+                  <a:spcPct val="135000"/>
+                </a:lnSpc>
+                <a:spcBef>
+                  <a:spcPts val="500"/>
+                </a:spcBef>
+              </a:pPr>
+              <a:r>
+                <a:rPr sz="1050" b="1" i="0" u="none">
+                  <a:solidFill>
+                    <a:srgbClr val="053866"/>
+                  </a:solidFill>
+                  <a:latin typeface="맑은 고딕"/>
+                  <a:ea typeface="맑은 고딕"/>
+                  <a:cs typeface="맑은 고딕"/>
+                </a:rPr>
                 <a:t>③ 확산</a:t>
               </a:r>
               <a:r>
@@ -24425,7 +24720,7 @@
                   <a:ea typeface="맑은 고딕"/>
                   <a:cs typeface="맑은 고딕"/>
                 </a:rPr>
-                <a:t>  정식 과제 등록 후 17개 센터로 — 추가 하드웨어 구매 없이 앱 배포만으로 확산한다. 확산 전에 보안 검토(난독화 · 이력 평문 저장)를 선행한다.</a:t>
+                <a:t>  정식 과제로 등록한 뒤 17개 센터로 — 장비를 사지 않고 앱 배포만으로 늘린다. 확산 전에 보안 검토를 먼저 받는다.</a:t>
               </a:r>
             </a:p>
           </p:txBody>
@@ -24961,7 +25256,7 @@
                           <a:ea typeface="맑은 고딕"/>
                           <a:cs typeface="맑은 고딕"/>
                         </a:rPr>
-                        <a:t>같은 등급 5초 이상이면 자동 음소거</a:t>
+                        <a:t>같은 등급이 5초 넘으면 소리 끄기</a:t>
                       </a:r>
                     </a:p>
                   </a:txBody>
@@ -25014,7 +25309,7 @@
                           <a:ea typeface="맑은 고딕"/>
                           <a:cs typeface="맑은 고딕"/>
                         </a:rPr>
-                        <a:t>등급 오르면 즉시 재발령</a:t>
+                        <a:t>더 가까워지면 즉시 다시 울림</a:t>
                       </a:r>
                     </a:p>
                   </a:txBody>
@@ -25122,7 +25417,7 @@
                           <a:ea typeface="맑은 고딕"/>
                           <a:cs typeface="맑은 고딕"/>
                         </a:rPr>
-                        <a:t>세이프존 — 비콘으로 경보 억제</a:t>
+                        <a:t>휴게실 · 충전 구역을 안전 구역으로</a:t>
                       </a:r>
                     </a:p>
                   </a:txBody>
@@ -25175,7 +25470,7 @@
                           <a:ea typeface="맑은 고딕"/>
                           <a:cs typeface="맑은 고딕"/>
                         </a:rPr>
-                        <a:t>존 안은 상대에게도 안전</a:t>
+                        <a:t>그 안에서는 서로 울리지 않음</a:t>
                       </a:r>
                     </a:p>
                   </a:txBody>
@@ -25418,7 +25713,7 @@
                           <a:ea typeface="맑은 고딕"/>
                           <a:cs typeface="맑은 고딕"/>
                         </a:rPr>
-                        <a:t>보호 상태</a:t>
+                        <a:t>앱 상태</a:t>
                       </a:r>
                     </a:p>
                   </a:txBody>
@@ -25471,7 +25766,7 @@
                           <a:ea typeface="맑은 고딕"/>
                           <a:cs typeface="맑은 고딕"/>
                         </a:rPr>
-                        <a:t>끊겨도 알 수 없음</a:t>
+                        <a:t>꺼져도 알 수 없음</a:t>
                       </a:r>
                     </a:p>
                   </a:txBody>
@@ -25524,7 +25819,7 @@
                           <a:ea typeface="맑은 고딕"/>
                           <a:cs typeface="맑은 고딕"/>
                         </a:rPr>
-                        <a:t>상시 알림에 이상 표시</a:t>
+                        <a:t>알림 표시줄에 ‘이상’ 표시</a:t>
                       </a:r>
                     </a:p>
                   </a:txBody>
@@ -25579,7 +25874,7 @@
                           <a:ea typeface="맑은 고딕"/>
                           <a:cs typeface="맑은 고딕"/>
                         </a:rPr>
-                        <a:t>이탈 후</a:t>
+                        <a:t>멀어진 뒤</a:t>
                       </a:r>
                     </a:p>
                   </a:txBody>
@@ -25685,7 +25980,7 @@
                           <a:ea typeface="맑은 고딕"/>
                           <a:cs typeface="맑은 고딕"/>
                         </a:rPr>
-                        <a:t>경고 범위 재발령 억제</a:t>
+                        <a:t>경고 거리에서는 다시 울리지 않음</a:t>
                       </a:r>
                     </a:p>
                   </a:txBody>
@@ -25932,7 +26227,7 @@
                 <a:ea typeface="맑은 고딕"/>
                 <a:cs typeface="맑은 고딕"/>
               </a:rPr>
-              <a:t>리뷰 1·2·3차 v1.1.60 · v1.1.61 · v1.1.62,  보호 끊김 v1.1.64,  이탈 재발령 v1.1.51,  알림 본문 탭 v1.1.68,  사이드바 v1.1.69 · v1.1.70</a:t>
+              <a:t>리뷰 1·2·3차 v1.1.60 · v1.1.61 · v1.1.62,  앱 상태 표시 v1.1.64,  재발령 억제 v1.1.51,  알림 눌러 끄기 v1.1.68,  화면 가장자리 경보 v1.1.69 · v1.1.70</a:t>
             </a:r>
           </a:p>
         </p:txBody>
@@ -26678,7 +26973,7 @@
           </a:fontRef>
         </p:style>
         <p:txBody>
-          <a:bodyPr lIns="274320" tIns="91440" rIns="274320" bIns="73152" rtlCol="0" anchor="ctr" wrap="square"/>
+          <a:bodyPr lIns="292608" tIns="91440" rIns="292608" bIns="73152" rtlCol="0" anchor="ctr" wrap="square"/>
           <a:lstStyle/>
           <a:p>
             <a:pPr algn="l">
@@ -26687,7 +26982,7 @@
               </a:lnSpc>
             </a:pPr>
             <a:r>
-              <a:rPr sz="1500" b="1" i="0" u="none">
+              <a:rPr sz="1100" b="1" i="0" u="none">
                 <a:solidFill>
                   <a:srgbClr val="9AA0A6"/>
                 </a:solidFill>
@@ -26695,10 +26990,21 @@
                 <a:ea typeface="맑은 고딕"/>
                 <a:cs typeface="맑은 고딕"/>
               </a:rPr>
-              <a:t>1.  </a:t>
+              <a:t>문제</a:t>
             </a:r>
             <a:r>
-              <a:rPr sz="1500" b="1" i="0" u="none">
+              <a:rPr sz="1100" b="0" i="0" u="none">
+                <a:solidFill>
+                  <a:srgbClr val="404040"/>
+                </a:solidFill>
+                <a:latin typeface="맑은 고딕"/>
+                <a:ea typeface="맑은 고딕"/>
+                <a:cs typeface="맑은 고딕"/>
+              </a:rPr>
+              <a:t>      </a:t>
+            </a:r>
+            <a:r>
+              <a:rPr sz="1550" b="1" i="0" u="none">
                 <a:solidFill>
                   <a:srgbClr val="053866"/>
                 </a:solidFill>
@@ -26706,7 +27012,7 @@
                 <a:ea typeface="맑은 고딕"/>
                 <a:cs typeface="맑은 고딕"/>
               </a:rPr>
-              <a:t>I-PAS 가 못 보는 조합을, 이미 지급된 단말이 본다</a:t>
+              <a:t>우리 센터에는 지게차 접근을 알려주는 장치가 하나도 없습니다</a:t>
             </a:r>
             <a:endParaRPr lang="ko-KR" altLang="en-US" sz="2100">
               <a:solidFill>
@@ -26723,19 +27029,19 @@
                 <a:spcPct val="135000"/>
               </a:lnSpc>
               <a:spcBef>
-                <a:spcPts val="400"/>
+                <a:spcPts val="500"/>
               </a:spcBef>
             </a:pPr>
             <a:r>
               <a:rPr sz="1100" b="0" i="0" u="none">
                 <a:solidFill>
-                  <a:srgbClr val="6B7278"/>
+                  <a:srgbClr val="404040"/>
                 </a:solidFill>
                 <a:latin typeface="맑은 고딕"/>
                 <a:ea typeface="맑은 고딕"/>
                 <a:cs typeface="맑은 고딕"/>
               </a:rPr>
-              <a:t>보행자끼리 · EPJ · 미장착 장비 — 태그를 사지 않고 덮는다.  추가 하드웨어 0원.</a:t>
+              <a:t>시야는 적재 파렛트에 막히고 경적은 장비 소음에 묻힙니다. 지금은 작업자의 주의력이 사실상 유일한 안전장치입니다.</a:t>
             </a:r>
           </a:p>
         </p:txBody>
@@ -26793,7 +27099,7 @@
           </a:fontRef>
         </p:style>
         <p:txBody>
-          <a:bodyPr lIns="274320" tIns="91440" rIns="274320" bIns="73152" rtlCol="0" anchor="ctr" wrap="square"/>
+          <a:bodyPr lIns="292608" tIns="91440" rIns="292608" bIns="73152" rtlCol="0" anchor="ctr" wrap="square"/>
           <a:lstStyle/>
           <a:p>
             <a:pPr algn="l">
@@ -26802,7 +27108,7 @@
               </a:lnSpc>
             </a:pPr>
             <a:r>
-              <a:rPr sz="1500" b="1" i="0" u="none">
+              <a:rPr sz="1100" b="1" i="0" u="none">
                 <a:solidFill>
                   <a:srgbClr val="9AA0A6"/>
                 </a:solidFill>
@@ -26810,10 +27116,21 @@
                 <a:ea typeface="맑은 고딕"/>
                 <a:cs typeface="맑은 고딕"/>
               </a:rPr>
-              <a:t>3.  </a:t>
+              <a:t>증거</a:t>
             </a:r>
             <a:r>
-              <a:rPr sz="1500" b="1" i="0" u="none">
+              <a:rPr sz="1100" b="0" i="0" u="none">
+                <a:solidFill>
+                  <a:srgbClr val="404040"/>
+                </a:solidFill>
+                <a:latin typeface="맑은 고딕"/>
+                <a:ea typeface="맑은 고딕"/>
+                <a:cs typeface="맑은 고딕"/>
+              </a:rPr>
+              <a:t>      </a:t>
+            </a:r>
+            <a:r>
+              <a:rPr sz="1550" b="1" i="0" u="none">
                 <a:solidFill>
                   <a:srgbClr val="053866"/>
                 </a:solidFill>
@@ -26821,7 +27138,7 @@
                 <a:ea typeface="맑은 고딕"/>
                 <a:cs typeface="맑은 고딕"/>
               </a:rPr>
-              <a:t>태그는 인원에 비례해 늘고, 앱은 제곱으로 는다</a:t>
+              <a:t>만들겠다는 계획이 아니라, 이미 쓰고 있는 앱입니다</a:t>
             </a:r>
             <a:endParaRPr lang="en-US" altLang="ko-KR" sz="2100">
               <a:solidFill>
@@ -26838,19 +27155,41 @@
                 <a:spcPct val="135000"/>
               </a:lnSpc>
               <a:spcBef>
-                <a:spcPts val="400"/>
+                <a:spcPts val="500"/>
               </a:spcBef>
             </a:pPr>
             <a:r>
               <a:rPr sz="1100" b="0" i="0" u="none">
                 <a:solidFill>
-                  <a:srgbClr val="6B7278"/>
+                  <a:srgbClr val="404040"/>
                 </a:solidFill>
                 <a:latin typeface="맑은 고딕"/>
                 <a:ea typeface="맑은 고딕"/>
                 <a:cs typeface="맑은 고딕"/>
               </a:rPr>
-              <a:t>현장 20명 기준 태그 80쌍 vs 앱 276쌍.  대상이 늘어도 추가 구매가 없다.</a:t>
+              <a:t>3개월 동안 70번 넘게 고쳐가며 </a:t>
+            </a:r>
+            <a:r>
+              <a:rPr sz="1100" b="1" i="0" u="none">
+                <a:solidFill>
+                  <a:srgbClr val="1B8A6B"/>
+                </a:solidFill>
+                <a:latin typeface="맑은 고딕"/>
+                <a:ea typeface="맑은 고딕"/>
+                <a:cs typeface="맑은 고딕"/>
+              </a:rPr>
+              <a:t>WF11 · WF21 · WF25 세 개 센터에서 실제로 돌고 있습니다</a:t>
+            </a:r>
+            <a:r>
+              <a:rPr sz="1100" b="0" i="0" u="none">
+                <a:solidFill>
+                  <a:srgbClr val="404040"/>
+                </a:solidFill>
+                <a:latin typeface="맑은 고딕"/>
+                <a:ea typeface="맑은 고딕"/>
+                <a:cs typeface="맑은 고딕"/>
+              </a:rPr>
+              <a:t>.  같은 기능을 장비로 갖추면 센터당 331만원이 들지만(타 조직 도입 사례 기준), 이 앱은 추가 비용이 없습니다.</a:t>
             </a:r>
           </a:p>
         </p:txBody>
@@ -27006,7 +27345,7 @@
           </a:fontRef>
         </p:style>
         <p:txBody>
-          <a:bodyPr lIns="274320" tIns="91440" rIns="274320" bIns="73152" rtlCol="0" anchor="ctr" wrap="square"/>
+          <a:bodyPr lIns="292608" tIns="91440" rIns="292608" bIns="73152" rtlCol="0" anchor="ctr" wrap="square"/>
           <a:lstStyle/>
           <a:p>
             <a:pPr algn="l">
@@ -27015,7 +27354,7 @@
               </a:lnSpc>
             </a:pPr>
             <a:r>
-              <a:rPr sz="1500" b="1" i="0" u="none">
+              <a:rPr sz="1100" b="1" i="0" u="none">
                 <a:solidFill>
                   <a:srgbClr val="9AA0A6"/>
                 </a:solidFill>
@@ -27023,10 +27362,21 @@
                 <a:ea typeface="맑은 고딕"/>
                 <a:cs typeface="맑은 고딕"/>
               </a:rPr>
-              <a:t>2.  </a:t>
+              <a:t>해결</a:t>
             </a:r>
             <a:r>
-              <a:rPr sz="1500" b="1" i="0" u="none">
+              <a:rPr sz="1100" b="0" i="0" u="none">
+                <a:solidFill>
+                  <a:srgbClr val="404040"/>
+                </a:solidFill>
+                <a:latin typeface="맑은 고딕"/>
+                <a:ea typeface="맑은 고딕"/>
+                <a:cs typeface="맑은 고딕"/>
+              </a:rPr>
+              <a:t>      </a:t>
+            </a:r>
+            <a:r>
+              <a:rPr sz="1550" b="1" i="0" u="none">
                 <a:solidFill>
                   <a:srgbClr val="053866"/>
                 </a:solidFill>
@@ -27034,7 +27384,7 @@
                 <a:ea typeface="맑은 고딕"/>
                 <a:cs typeface="맑은 고딕"/>
               </a:rPr>
-              <a:t>제안이 아니라 이미 돌고 있다</a:t>
+              <a:t>이미 나눠준 스마트폰끼리 서로를 감지하게 만들었습니다</a:t>
             </a:r>
             <a:endParaRPr lang="ko-KR" sz="2100">
               <a:solidFill>
@@ -27051,19 +27401,19 @@
                 <a:spcPct val="135000"/>
               </a:lnSpc>
               <a:spcBef>
-                <a:spcPts val="400"/>
+                <a:spcPts val="500"/>
               </a:spcBef>
             </a:pPr>
             <a:r>
               <a:rPr sz="1100" b="0" i="0" u="none">
                 <a:solidFill>
-                  <a:srgbClr val="6B7278"/>
+                  <a:srgbClr val="404040"/>
                 </a:solidFill>
                 <a:latin typeface="맑은 고딕"/>
                 <a:ea typeface="맑은 고딕"/>
                 <a:cs typeface="맑은 고딕"/>
               </a:rPr>
-              <a:t>v1.0.1 → v1.1.70, 3개월 70회+ 배포.  WF11 · WF21 · WF25 에서 실사용 중.</a:t>
+              <a:t>앱만 깔면 15m 에서 경고, 8m 에서 위험 경보가 소리 · 진동 · 화면으로 울립니다. 장비를 사거나 센터에 무엇을 설치할 필요가 없습니다.</a:t>
             </a:r>
           </a:p>
         </p:txBody>
@@ -27963,7 +28313,7 @@
                   <a:ea typeface="맑은 고딕"/>
                   <a:cs typeface="맑은 고딕"/>
                 </a:rPr>
-                <a:t>I-PAS 는 태그를 단 장비 · 인원만 덮는다. 보행자끼리 · EPJ · 미장착 장비 구간에는 감지도 알림도 없어, 적재 파렛트에 시야가 가리고 소음에 경적이 묻히는 교차 구간이 주의력에만 맡겨져 있다.</a:t>
+                <a:t>우리 센터에는 지게차와 보행자가 서로 다가오는 것을 알려주는 장치가 없다. 존과 로케이션 사이 교차 구간은 적재 파렛트에 시야가 막히고 장비 소음에 경적이 묻혀, 서로를 보지 못한 채 가까워진다.</a:t>
               </a:r>
               <a:endParaRPr lang="ko-KR" altLang="en-US" sz="1200">
                 <a:solidFill>
@@ -28144,7 +28494,7 @@
                   <a:ea typeface="맑은 고딕"/>
                   <a:cs typeface="맑은 고딕"/>
                 </a:rPr>
-                <a:t>이미 지급된 단말에 앱을 설치해 BLE 로 서로를 감지한다.</a:t>
+                <a:t>이미 나눠준 스마트폰에 앱을 깔면, 폰끼리 신호를 주고받아 서로를 감지한다.</a:t>
               </a:r>
               <a:endParaRPr lang="ko-KR" altLang="en-US" sz="1200">
                 <a:solidFill>
@@ -28175,7 +28525,7 @@
                   <a:ea typeface="맑은 고딕"/>
                   <a:cs typeface="맑은 고딕"/>
                 </a:rPr>
-                <a:t>앵커 · 배선 · 서버가 없다. 착용할 태그도 없다.</a:t>
+                <a:t>따로 살 장비도, 몸에 달 태그도, 센터에 설치할 것도 없다.</a:t>
               </a:r>
             </a:p>
             <a:p>
@@ -28188,7 +28538,7 @@
                 </a:spcBef>
               </a:pPr>
               <a:r>
-                <a:rPr sz="1100" b="1" i="0" u="none">
+                <a:rPr sz="1050" b="1" i="0" u="none">
                   <a:solidFill>
                     <a:srgbClr val="053866"/>
                   </a:solidFill>
@@ -28196,28 +28546,7 @@
                   <a:ea typeface="맑은 고딕"/>
                   <a:cs typeface="맑은 고딕"/>
                 </a:rPr>
-                <a:t>신호 수신  →  거리 추정  →  등급 판정  →  3중 경보</a:t>
-              </a:r>
-            </a:p>
-            <a:p>
-              <a:pPr algn="l">
-                <a:lnSpc>
-                  <a:spcPct val="130000"/>
-                </a:lnSpc>
-                <a:spcBef>
-                  <a:spcPts val="500"/>
-                </a:spcBef>
-              </a:pPr>
-              <a:r>
-                <a:rPr sz="900" b="0" i="1" u="none">
-                  <a:solidFill>
-                    <a:srgbClr val="9AA0A6"/>
-                  </a:solidFill>
-                  <a:latin typeface="맑은 고딕"/>
-                  <a:ea typeface="맑은 고딕"/>
-                  <a:cs typeface="맑은 고딕"/>
-                </a:rPr>
-                <a:t>BLE 광고  →  3단 필터  →  상태머신  →  소리 · 진동 · 화면</a:t>
+                <a:t>신호 받기  →  거리 계산  →  위험도 판단  →  소리 · 진동 · 화면 경보</a:t>
               </a:r>
             </a:p>
             <a:p>
@@ -28238,7 +28567,7 @@
                   <a:ea typeface="맑은 고딕"/>
                   <a:cs typeface="맑은 고딕"/>
                 </a:rPr>
-                <a:t>판정 반경 — 지게차가 낀 조합 경고 15m / 위험 8m,  그 밖의 조합 5m / 3m.</a:t>
+                <a:t>경보 거리 — 지게차가 끼면 경고 15m · 위험 8m,  사람끼리는 경고 5m · 위험 3m.</a:t>
               </a:r>
             </a:p>
             <a:p>
@@ -28259,7 +28588,7 @@
                   <a:ea typeface="맑은 고딕"/>
                   <a:cs typeface="맑은 고딕"/>
                 </a:rPr>
-                <a:t>장비 정지는 하지 않는다. 3m 자동 셧다운은 I-PAS EOD 가 그대로 맡는다.</a:t>
+                <a:t>장비를 자동으로 멈추지는 못한다. 사람에게 알리는 데까지가 이 앱의 역할이다.</a:t>
               </a:r>
             </a:p>
           </p:txBody>
@@ -28535,7 +28864,7 @@
         </p:nvSpPr>
         <p:spPr>
           <a:xfrm>
-            <a:off x="5980176" y="2651760"/>
+            <a:off x="5980176" y="2633472"/>
             <a:ext cx="5294375" cy="219456"/>
           </a:xfrm>
           <a:prstGeom prst="rect">
@@ -28563,7 +28892,7 @@
                 <a:ea typeface="맑은 고딕"/>
                 <a:cs typeface="맑은 고딕"/>
               </a:rPr>
-              <a:t>덮이는 접근 조합 — 현장 인원이 늘 때</a:t>
+              <a:t>서로 감지되는 경우의 수 — 현장 인원이 늘어날수록</a:t>
             </a:r>
           </a:p>
         </p:txBody>
@@ -28577,7 +28906,7 @@
           <p:nvPr/>
         </p:nvGraphicFramePr>
         <p:xfrm>
-          <a:off x="5888736" y="2907791"/>
+          <a:off x="5888736" y="2889504"/>
           <a:ext cx="5477255" cy="1755648"/>
         </p:xfrm>
         <a:graphic>
@@ -28594,7 +28923,48 @@
         </p:nvSpPr>
         <p:spPr>
           <a:xfrm>
-            <a:off x="5980176" y="4791456"/>
+            <a:off x="5980176" y="4736592"/>
+            <a:ext cx="5294375" cy="201168"/>
+          </a:xfrm>
+          <a:prstGeom prst="rect">
+            <a:avLst/>
+          </a:prstGeom>
+          <a:noFill/>
+        </p:spPr>
+        <p:txBody>
+          <a:bodyPr wrap="square" lIns="18288" rIns="18288" tIns="0" bIns="0">
+            <a:spAutoFit/>
+          </a:bodyPr>
+          <a:lstStyle/>
+          <a:p>
+            <a:pPr algn="l">
+              <a:lnSpc>
+                <a:spcPct val="120000"/>
+              </a:lnSpc>
+            </a:pPr>
+            <a:r>
+              <a:rPr sz="850" b="0" i="0" u="none">
+                <a:solidFill>
+                  <a:srgbClr val="6B7278"/>
+                </a:solidFill>
+                <a:latin typeface="맑은 고딕"/>
+                <a:ea typeface="맑은 고딕"/>
+                <a:cs typeface="맑은 고딕"/>
+              </a:rPr>
+              <a:t>지게차 4대 기준. 장비 방식은 태그를 산 사람만 감지되지만, 앱은 폰을 가진 모두가 서로 감지된다.</a:t>
+            </a:r>
+          </a:p>
+        </p:txBody>
+      </p:sp>
+      <p:sp>
+        <p:nvSpPr>
+          <p:cNvPr id="27" name="TextBox 26"/>
+          <p:cNvSpPr txBox="1"/>
+          <p:nvPr/>
+        </p:nvSpPr>
+        <p:spPr>
+          <a:xfrm>
+            <a:off x="5980176" y="5010912"/>
             <a:ext cx="5294375" cy="219456"/>
           </a:xfrm>
           <a:prstGeom prst="rect">
@@ -28622,7 +28992,7 @@
                 <a:ea typeface="맑은 고딕"/>
                 <a:cs typeface="맑은 고딕"/>
               </a:rPr>
-              <a:t>1교대(9시간) 접근 조우 추정</a:t>
+              <a:t>1교대(9시간) 동안 몇 번이나 가까워지는가</a:t>
             </a:r>
             <a:r>
               <a:rPr sz="850" b="0" i="0" u="sng">
@@ -28640,14 +29010,14 @@
       </p:sp>
       <p:sp>
         <p:nvSpPr>
-          <p:cNvPr id="27" name="Rounded Rectangle 26"/>
+          <p:cNvPr id="28" name="Rounded Rectangle 27"/>
           <p:cNvSpPr/>
           <p:nvPr/>
         </p:nvSpPr>
         <p:spPr>
           <a:xfrm>
-            <a:off x="5943600" y="5047488"/>
-            <a:ext cx="2578608" cy="896112"/>
+            <a:off x="5943600" y="5285231"/>
+            <a:ext cx="2578608" cy="841248"/>
           </a:xfrm>
           <a:prstGeom prst="roundRect">
             <a:avLst/>
@@ -28684,14 +29054,14 @@
       </p:sp>
       <p:sp>
         <p:nvSpPr>
-          <p:cNvPr id="28" name="Rectangle 27"/>
+          <p:cNvPr id="29" name="Rectangle 28"/>
           <p:cNvSpPr/>
           <p:nvPr/>
         </p:nvSpPr>
         <p:spPr>
           <a:xfrm>
-            <a:off x="6035040" y="5148072"/>
-            <a:ext cx="50292" cy="694944"/>
+            <a:off x="6035040" y="5385816"/>
+            <a:ext cx="50292" cy="640080"/>
           </a:xfrm>
           <a:prstGeom prst="rect">
             <a:avLst/>
@@ -28726,13 +29096,13 @@
       </p:sp>
       <p:sp>
         <p:nvSpPr>
-          <p:cNvPr id="29" name="TextBox 28"/>
+          <p:cNvPr id="30" name="TextBox 29"/>
           <p:cNvSpPr txBox="1"/>
           <p:nvPr/>
         </p:nvSpPr>
         <p:spPr>
           <a:xfrm>
-            <a:off x="6181344" y="5111496"/>
+            <a:off x="6181344" y="5349240"/>
             <a:ext cx="2212848" cy="182880"/>
           </a:xfrm>
           <a:prstGeom prst="rect">
@@ -28771,20 +29141,20 @@
                 <a:ea typeface="맑은 고딕"/>
                 <a:cs typeface="맑은 고딕"/>
               </a:rPr>
-              <a:t>경고 반경 15m</a:t>
+              <a:t>경고 거리 15m 안</a:t>
             </a:r>
           </a:p>
         </p:txBody>
       </p:sp>
       <p:sp>
         <p:nvSpPr>
-          <p:cNvPr id="30" name="TextBox 29"/>
+          <p:cNvPr id="31" name="TextBox 30"/>
           <p:cNvSpPr txBox="1"/>
           <p:nvPr/>
         </p:nvSpPr>
         <p:spPr>
           <a:xfrm>
-            <a:off x="6181344" y="5303520"/>
+            <a:off x="6181344" y="5541264"/>
             <a:ext cx="2212848" cy="182880"/>
           </a:xfrm>
           <a:prstGeom prst="rect">
@@ -28812,20 +29182,20 @@
                 <a:ea typeface="맑은 고딕"/>
                 <a:cs typeface="맑은 고딕"/>
               </a:rPr>
-              <a:t>Firebase 경보 이력 집계 예정</a:t>
+              <a:t>앱 경보 기록으로 실측 예정</a:t>
             </a:r>
           </a:p>
         </p:txBody>
       </p:sp>
       <p:sp>
         <p:nvSpPr>
-          <p:cNvPr id="31" name="TextBox 30"/>
+          <p:cNvPr id="32" name="TextBox 31"/>
           <p:cNvSpPr txBox="1"/>
           <p:nvPr/>
         </p:nvSpPr>
         <p:spPr>
           <a:xfrm>
-            <a:off x="6181344" y="5669280"/>
+            <a:off x="6181344" y="5852159"/>
             <a:ext cx="2212848" cy="219456"/>
           </a:xfrm>
           <a:prstGeom prst="rect">
@@ -28860,14 +29230,14 @@
       </p:sp>
       <p:sp>
         <p:nvSpPr>
-          <p:cNvPr id="32" name="Rounded Rectangle 31"/>
+          <p:cNvPr id="33" name="Rounded Rectangle 32"/>
           <p:cNvSpPr/>
           <p:nvPr/>
         </p:nvSpPr>
         <p:spPr>
           <a:xfrm>
-            <a:off x="8668512" y="5047488"/>
-            <a:ext cx="2578608" cy="896112"/>
+            <a:off x="8668512" y="5285231"/>
+            <a:ext cx="2578608" cy="841248"/>
           </a:xfrm>
           <a:prstGeom prst="roundRect">
             <a:avLst/>
@@ -28904,14 +29274,14 @@
       </p:sp>
       <p:sp>
         <p:nvSpPr>
-          <p:cNvPr id="33" name="Rectangle 32"/>
+          <p:cNvPr id="34" name="Rectangle 33"/>
           <p:cNvSpPr/>
           <p:nvPr/>
         </p:nvSpPr>
         <p:spPr>
           <a:xfrm>
-            <a:off x="8759952" y="5148072"/>
-            <a:ext cx="50292" cy="694944"/>
+            <a:off x="8759952" y="5385816"/>
+            <a:ext cx="50292" cy="640080"/>
           </a:xfrm>
           <a:prstGeom prst="rect">
             <a:avLst/>
@@ -28946,13 +29316,13 @@
       </p:sp>
       <p:sp>
         <p:nvSpPr>
-          <p:cNvPr id="34" name="TextBox 33"/>
+          <p:cNvPr id="35" name="TextBox 34"/>
           <p:cNvSpPr txBox="1"/>
           <p:nvPr/>
         </p:nvSpPr>
         <p:spPr>
           <a:xfrm>
-            <a:off x="8906256" y="5111496"/>
+            <a:off x="8906256" y="5349240"/>
             <a:ext cx="2212848" cy="182880"/>
           </a:xfrm>
           <a:prstGeom prst="rect">
@@ -28991,20 +29361,20 @@
                 <a:ea typeface="맑은 고딕"/>
                 <a:cs typeface="맑은 고딕"/>
               </a:rPr>
-              <a:t>위험 반경 8m</a:t>
+              <a:t>위험 거리 8m 안</a:t>
             </a:r>
           </a:p>
         </p:txBody>
       </p:sp>
       <p:sp>
         <p:nvSpPr>
-          <p:cNvPr id="35" name="TextBox 34"/>
+          <p:cNvPr id="36" name="TextBox 35"/>
           <p:cNvSpPr txBox="1"/>
           <p:nvPr/>
         </p:nvSpPr>
         <p:spPr>
           <a:xfrm>
-            <a:off x="8906256" y="5303520"/>
+            <a:off x="8906256" y="5541264"/>
             <a:ext cx="2212848" cy="182880"/>
           </a:xfrm>
           <a:prstGeom prst="rect">
@@ -29032,20 +29402,20 @@
                 <a:ea typeface="맑은 고딕"/>
                 <a:cs typeface="맑은 고딕"/>
               </a:rPr>
-              <a:t>Firebase 경보 이력 집계 예정</a:t>
+              <a:t>앱 경보 기록으로 실측 예정</a:t>
             </a:r>
           </a:p>
         </p:txBody>
       </p:sp>
       <p:sp>
         <p:nvSpPr>
-          <p:cNvPr id="36" name="TextBox 35"/>
+          <p:cNvPr id="37" name="TextBox 36"/>
           <p:cNvSpPr txBox="1"/>
           <p:nvPr/>
         </p:nvSpPr>
         <p:spPr>
           <a:xfrm>
-            <a:off x="8906256" y="5669280"/>
+            <a:off x="8906256" y="5852159"/>
             <a:ext cx="2212848" cy="219456"/>
           </a:xfrm>
           <a:prstGeom prst="rect">
@@ -29080,13 +29450,13 @@
       </p:sp>
       <p:sp>
         <p:nvSpPr>
-          <p:cNvPr id="37" name="TextBox 36"/>
+          <p:cNvPr id="38" name="TextBox 37"/>
           <p:cNvSpPr txBox="1"/>
           <p:nvPr/>
         </p:nvSpPr>
         <p:spPr>
           <a:xfrm>
-            <a:off x="5980176" y="6053328"/>
+            <a:off x="5980176" y="6217920"/>
             <a:ext cx="5294375" cy="201168"/>
           </a:xfrm>
           <a:prstGeom prst="rect">
@@ -29114,7 +29484,7 @@
                 <a:ea typeface="맑은 고딕"/>
                 <a:cs typeface="맑은 고딕"/>
               </a:rPr>
-              <a:t>산출 근거 12장 · 가정값은 ‘쌍당 시간당 0.5회’ 하나뿐이다</a:t>
+              <a:t>산출 근거는 12장. 가정한 값은 ‘한 짝이 한 시간에 0.5번 가까워진다’ 하나뿐이다.</a:t>
             </a:r>
           </a:p>
         </p:txBody>
@@ -30028,7 +30398,7 @@
                 <a:ea typeface="맑은 고딕"/>
                 <a:cs typeface="맑은 고딕"/>
               </a:rPr>
-              <a:t>무엇이 어떻게 보이는가</a:t>
+              <a:t>어떻게 동작하는가</a:t>
             </a:r>
             <a:r>
               <a:rPr sz="1050" b="0" i="0" u="none">
@@ -30039,7 +30409,7 @@
                 <a:ea typeface="맑은 고딕"/>
                 <a:cs typeface="맑은 고딕"/>
               </a:rPr>
-              <a:t>     상시 알림 · 경보 화면 · 판정 반경</a:t>
+              <a:t>     경보 거리 · 감지되는 경우의 수 · 안전 구역</a:t>
             </a:r>
           </a:p>
         </p:txBody>
@@ -30104,7 +30474,7 @@
                 <a:ea typeface="맑은 고딕"/>
                 <a:cs typeface="맑은 고딕"/>
               </a:rPr>
-              <a:t>역할 조합별 판정 반경 — 실제 비례 축척</a:t>
+              <a:t>경보가 울리는 거리 — 실제 비례로 그린 것</a:t>
             </a:r>
           </a:p>
         </p:txBody>
@@ -30169,7 +30539,7 @@
                 <a:ea typeface="맑은 고딕"/>
                 <a:cs typeface="맑은 고딕"/>
               </a:rPr>
-              <a:t>단말이 늘수록 감지쌍은 제곱으로 (3대 3쌍 → 10대 45쌍)</a:t>
+              <a:t>폰이 늘수록 서로 감지되는 경우의 수는 제곱으로 (3대 3가지 → 10대 45가지)</a:t>
             </a:r>
           </a:p>
         </p:txBody>
@@ -30234,7 +30604,7 @@
                 <a:ea typeface="맑은 고딕"/>
                 <a:cs typeface="맑은 고딕"/>
               </a:rPr>
-              <a:t>세이프존 — 존 안에서는 경보를 억제한다</a:t>
+              <a:t>안전 구역 안에서는 경보가 울리지 않는다</a:t>
             </a:r>
           </a:p>
         </p:txBody>
@@ -30286,7 +30656,7 @@
                 <a:ea typeface="맑은 고딕"/>
                 <a:cs typeface="맑은 고딕"/>
               </a:rPr>
-              <a:t>경보는 소리 · 진동 · 화면 세 갈래로 동시에 난다</a:t>
+              <a:t>경보는 소리 · 진동 · 화면 세 가지로 동시에 울린다</a:t>
             </a:r>
             <a:r>
               <a:rPr sz="1000" b="0" i="0" u="none">
@@ -30297,7 +30667,7 @@
                 <a:ea typeface="맑은 고딕"/>
                 <a:cs typeface="맑은 고딕"/>
               </a:rPr>
-              <a:t>  —  소음 · 장갑 · 시야 어느 하나가 막혀도 나머지가 전달된다</a:t>
+              <a:t>  —  소음 때문에 못 듣거나, 장갑 때문에 진동을 놓치거나, 화면을 안 봐도 나머지 하나는 전달된다</a:t>
             </a:r>
           </a:p>
         </p:txBody>
@@ -30349,7 +30719,7 @@
                 <a:ea typeface="맑은 고딕"/>
                 <a:cs typeface="맑은 고딕"/>
               </a:rPr>
-              <a:t>같은 기기 · 같은 등급에 5초 이상 머물면 자동 음소거</a:t>
+              <a:t>같은 상대와 같은 등급이 5초 넘게 이어지면 소리를 끈다</a:t>
             </a:r>
             <a:r>
               <a:rPr sz="1000" b="0" i="0" u="none">
@@ -30360,7 +30730,7 @@
                 <a:ea typeface="맑은 고딕"/>
                 <a:cs typeface="맑은 고딕"/>
               </a:rPr>
-              <a:t>  —  표시 · 기록은 유지하고, 등급이 오르면 즉시 재발령 (v1.1.61)</a:t>
+              <a:t>  —  화면 표시와 기록은 그대로 두고, 더 가까워지면 즉시 다시 울린다 (v1.1.61)</a:t>
             </a:r>
           </a:p>
         </p:txBody>
@@ -30412,7 +30782,7 @@
                 <a:ea typeface="맑은 고딕"/>
                 <a:cs typeface="맑은 고딕"/>
               </a:rPr>
-              <a:t>휴게실 · 충전 구역에는 세이프존 비콘</a:t>
+              <a:t>휴게실 · 충전 구역은 ‘안전 구역’ 으로 지정한다</a:t>
             </a:r>
             <a:r>
               <a:rPr sz="1000" b="0" i="0" u="none">
@@ -30423,7 +30793,7 @@
                 <a:ea typeface="맑은 고딕"/>
                 <a:cs typeface="맑은 고딕"/>
               </a:rPr>
-              <a:t>  —  존 안의 기기는 상대에게도 안전으로 보인다 (v1.1.62)</a:t>
+              <a:t>  —  그 안에 있는 사람은 경보를 받지도, 남에게 울리게 하지도 않는다 (v1.1.62)</a:t>
             </a:r>
           </a:p>
         </p:txBody>
@@ -30475,7 +30845,7 @@
                 <a:ea typeface="맑은 고딕"/>
                 <a:cs typeface="맑은 고딕"/>
               </a:rPr>
-              <a:t>감지가 멈추면 상시 알림에 이상 표시</a:t>
+              <a:t>감지가 멈추면 알림 표시줄에 ‘이상’ 이 뜬다</a:t>
             </a:r>
             <a:r>
               <a:rPr sz="1000" b="0" i="0" u="none">
@@ -30486,7 +30856,7 @@
                 <a:ea typeface="맑은 고딕"/>
                 <a:cs typeface="맑은 고딕"/>
               </a:rPr>
-              <a:t>  —  꺼진 줄 모르고 쓰는 상황을 없앤다 (v1.1.64)</a:t>
+              <a:t>  —  앱이 꺼진 줄 모르고 일하는 상황을 막는다 (v1.1.64)</a:t>
             </a:r>
           </a:p>
         </p:txBody>
@@ -31400,7 +31770,7 @@
                   <a:ea typeface="맑은 고딕"/>
                   <a:cs typeface="맑은 고딕"/>
                 </a:rPr>
-                <a:t>존과 로케이션 사이 교차 구간에서 PIT 와 보행자가 서로를 보지 못한 채 접근한다.</a:t>
+                <a:t>우리 센터에는 지게차와 보행자의 접근을 감지하는 장치가 설치돼 있지 않다.</a:t>
               </a:r>
               <a:endParaRPr lang="ko-KR" altLang="en-US">
                 <a:solidFill>
@@ -31450,7 +31820,7 @@
                   <a:ea typeface="맑은 고딕"/>
                   <a:cs typeface="맑은 고딕"/>
                 </a:rPr>
-                <a:t>적재 파렛트가 시야를 가리고, 장비 소음에 경적이 묻혀 인지가 늦다.</a:t>
+                <a:t>존과 로케이션 사이 교차 구간에서 적재 파렛트가 시야를 가리고, 장비 소음에 경적이 묻혀 서로를 알아채는 것이 늦다.</a:t>
               </a:r>
             </a:p>
             <a:p>
@@ -31471,7 +31841,7 @@
                   <a:ea typeface="맑은 고딕"/>
                   <a:cs typeface="맑은 고딕"/>
                 </a:rPr>
-                <a:t>현행 I-PAS 는 3m 안에서 장비를 자동 셧다운한다. 그 앞 구간, 그리고 태그가 없는 조합에는 감지 수단이 없다.</a:t>
+                <a:t>접근을 알려주는 수단이 없으니, 위험했던 순간이 몇 번이었는지조차 기록되지 않는다.</a:t>
               </a:r>
             </a:p>
           </p:txBody>
@@ -31828,7 +32198,7 @@
                   <a:ea typeface="맑은 고딕"/>
                   <a:cs typeface="맑은 고딕"/>
                 </a:rPr>
-                <a:t>접근을 사전에 감지해 사람에게 알린다 — 태그 유무와 무관하게.</a:t>
+                <a:t>서로 다가오는 것을 부딪히기 전에 감지해 사람에게 알린다.</a:t>
               </a:r>
               <a:endParaRPr lang="en-US">
                 <a:solidFill>
@@ -31878,7 +32248,7 @@
                   <a:ea typeface="맑은 고딕"/>
                   <a:cs typeface="맑은 고딕"/>
                 </a:rPr>
-                <a:t>장비가 3m 에서 멈추기 전에, 15m · 8m 에서 사람이 먼저 안다.</a:t>
+                <a:t>현장에 있는 모든 사람과 장비가 서로의 접근을 알 수 있는 상태.</a:t>
               </a:r>
             </a:p>
           </p:txBody>
@@ -32087,7 +32457,29 @@
                   <a:ea typeface="맑은 고딕"/>
                   <a:cs typeface="맑은 고딕"/>
                 </a:rPr>
-                <a:t>덮이는 접근 조합은 12쌍 (차량 4대 × 상시 3명). 태그를 산 만큼만 는다.</a:t>
+                <a:t>현재 서로를 감지하는 장비는 </a:t>
+              </a:r>
+              <a:r>
+                <a:rPr sz="1000" b="1" i="0" u="none">
+                  <a:solidFill>
+                    <a:srgbClr val="C0392B"/>
+                  </a:solidFill>
+                  <a:latin typeface="맑은 고딕"/>
+                  <a:ea typeface="맑은 고딕"/>
+                  <a:cs typeface="맑은 고딕"/>
+                </a:rPr>
+                <a:t>0대</a:t>
+              </a:r>
+              <a:r>
+                <a:rPr sz="1000" b="0" i="0" u="none">
+                  <a:solidFill>
+                    <a:srgbClr val="404040"/>
+                  </a:solidFill>
+                  <a:latin typeface="맑은 고딕"/>
+                  <a:ea typeface="맑은 고딕"/>
+                  <a:cs typeface="맑은 고딕"/>
+                </a:rPr>
+                <a:t>. 지게차 4대와 상시 인원 3명 모두 감지 대상이 아니다.</a:t>
               </a:r>
               <a:endParaRPr lang="en-US">
                 <a:solidFill>
@@ -32137,7 +32529,7 @@
                   <a:ea typeface="맑은 고딕"/>
                   <a:cs typeface="맑은 고딕"/>
                 </a:rPr>
-                <a:t>보행자끼리 · EPJ · 미장착 장비는 대상 밖 — 위험을 확인할 방법 자체가 없다.</a:t>
+                <a:t>감지 수단이 없으니 사고도 아차사고도 집계된 적이 없다.</a:t>
               </a:r>
             </a:p>
           </p:txBody>
@@ -32250,7 +32642,7 @@
                 <a:ea typeface="맑은 고딕"/>
                 <a:cs typeface="맑은 고딕"/>
               </a:rPr>
-              <a:t>1. 사각지대 해소</a:t>
+              <a:t>1. 부딪히기 전에 알린다</a:t>
             </a:r>
             <a:r>
               <a:rPr sz="1250" b="1" i="0" u="none">
@@ -32261,7 +32653,7 @@
                 <a:ea typeface="맑은 고딕"/>
                 <a:cs typeface="맑은 고딕"/>
               </a:rPr>
-              <a:t>        2. 인프라 없는 확산</a:t>
+              <a:t>      2. 장비를 사지 않는다</a:t>
             </a:r>
             <a:r>
               <a:rPr sz="1250" b="1" i="0" u="none">
@@ -32272,7 +32664,7 @@
                 <a:ea typeface="맑은 고딕"/>
                 <a:cs typeface="맑은 고딕"/>
               </a:rPr>
-              <a:t>        3. 오경보 억제</a:t>
+              <a:t>      3. 쓸데없이 울리지 않는다</a:t>
             </a:r>
             <a:r>
               <a:rPr sz="1250" b="1" i="0" u="none">
@@ -32283,7 +32675,7 @@
                 <a:ea typeface="맑은 고딕"/>
                 <a:cs typeface="맑은 고딕"/>
               </a:rPr>
-              <a:t>        4. 조용한 실패 제거</a:t>
+              <a:t>      4. 꺼져도 바로 안다</a:t>
             </a:r>
           </a:p>
         </p:txBody>
@@ -32296,7 +32688,7 @@
         </p:nvSpPr>
         <p:spPr>
           <a:xfrm>
-            <a:off x="960120" y="5248656"/>
+            <a:off x="960120" y="5266944"/>
             <a:ext cx="10277856" cy="256032"/>
           </a:xfrm>
           <a:prstGeom prst="rect">
@@ -32316,7 +32708,7 @@
               </a:lnSpc>
             </a:pPr>
             <a:r>
-              <a:rPr sz="1100" b="0" i="0" u="none">
+              <a:rPr sz="1150" b="0" i="0" u="none">
                 <a:solidFill>
                   <a:srgbClr val="404040"/>
                 </a:solidFill>
@@ -32324,10 +32716,10 @@
                 <a:ea typeface="맑은 고딕"/>
                 <a:cs typeface="맑은 고딕"/>
               </a:rPr>
-              <a:t>1교대(9시간) 기준 경고 반경 진입 </a:t>
+              <a:t>1교대(9시간) 동안 15m 안까지 가까워지는 횟수 </a:t>
             </a:r>
             <a:r>
-              <a:rPr sz="1100" b="1" i="0" u="sng">
+              <a:rPr sz="1150" b="1" i="0" u="sng">
                 <a:solidFill>
                   <a:srgbClr val="C0392B"/>
                 </a:solidFill>
@@ -32338,7 +32730,7 @@
               <a:t>약 95회</a:t>
             </a:r>
             <a:r>
-              <a:rPr sz="1100" b="0" i="0" u="none">
+              <a:rPr sz="1150" b="0" i="0" u="none">
                 <a:solidFill>
                   <a:srgbClr val="404040"/>
                 </a:solidFill>
@@ -32346,10 +32738,10 @@
                 <a:ea typeface="맑은 고딕"/>
                 <a:cs typeface="맑은 고딕"/>
               </a:rPr>
-              <a:t>, 그중 위험 반경까지 </a:t>
+              <a:t>,  그중 8m 안까지 </a:t>
             </a:r>
             <a:r>
-              <a:rPr sz="1100" b="1" i="0" u="sng">
+              <a:rPr sz="1150" b="1" i="0" u="sng">
                 <a:solidFill>
                   <a:srgbClr val="C0392B"/>
                 </a:solidFill>
@@ -32358,17 +32750,6 @@
                 <a:cs typeface="맑은 고딕"/>
               </a:rPr>
               <a:t>약 27회</a:t>
-            </a:r>
-            <a:r>
-              <a:rPr sz="1000" b="0" i="0" u="none">
-                <a:solidFill>
-                  <a:srgbClr val="6B7278"/>
-                </a:solidFill>
-                <a:latin typeface="맑은 고딕"/>
-                <a:ea typeface="맑은 고딕"/>
-                <a:cs typeface="맑은 고딕"/>
-              </a:rPr>
-              <a:t>  (밑줄 = 추정치, 산출 근거 12장).  사고 건수는 감지 수단이 없어 집계된 적이 없다.</a:t>
             </a:r>
           </a:p>
         </p:txBody>
@@ -32381,7 +32762,48 @@
         </p:nvSpPr>
         <p:spPr>
           <a:xfrm>
-            <a:off x="960120" y="5632704"/>
+            <a:off x="960120" y="5541264"/>
+            <a:ext cx="10277856" cy="237744"/>
+          </a:xfrm>
+          <a:prstGeom prst="rect">
+            <a:avLst/>
+          </a:prstGeom>
+          <a:noFill/>
+        </p:spPr>
+        <p:txBody>
+          <a:bodyPr wrap="square" lIns="18288" rIns="18288" tIns="0" bIns="0">
+            <a:spAutoFit/>
+          </a:bodyPr>
+          <a:lstStyle/>
+          <a:p>
+            <a:pPr algn="ctr">
+              <a:lnSpc>
+                <a:spcPct val="120000"/>
+              </a:lnSpc>
+            </a:pPr>
+            <a:r>
+              <a:rPr sz="950" b="0" i="0" u="none">
+                <a:solidFill>
+                  <a:srgbClr val="6B7278"/>
+                </a:solidFill>
+                <a:latin typeface="맑은 고딕"/>
+                <a:ea typeface="맑은 고딕"/>
+                <a:cs typeface="맑은 고딕"/>
+              </a:rPr>
+              <a:t>밑줄은 추정치다 (산출 근거 12장). 감지 수단이 없어 실제로 세어 본 적이 없다.</a:t>
+            </a:r>
+          </a:p>
+        </p:txBody>
+      </p:sp>
+      <p:sp>
+        <p:nvSpPr>
+          <p:cNvPr id="33" name="TextBox 32"/>
+          <p:cNvSpPr txBox="1"/>
+          <p:nvPr/>
+        </p:nvSpPr>
+        <p:spPr>
+          <a:xfrm>
+            <a:off x="960120" y="5833872"/>
             <a:ext cx="10277856" cy="256032"/>
           </a:xfrm>
           <a:prstGeom prst="rect">
@@ -32409,7 +32831,7 @@
                 <a:ea typeface="맑은 고딕"/>
                 <a:cs typeface="맑은 고딕"/>
               </a:rPr>
-              <a:t>“지금 이 구간은 </a:t>
+              <a:t>“지금 이 구간을 지키는 것은 설비가 아니라 </a:t>
             </a:r>
             <a:r>
               <a:rPr sz="1050" b="1" i="1" u="none">
@@ -32420,7 +32842,7 @@
                 <a:ea typeface="맑은 고딕"/>
                 <a:cs typeface="맑은 고딕"/>
               </a:rPr>
-              <a:t>설비가 아니라 사람의 주의력</a:t>
+              <a:t>작업자의 주의력</a:t>
             </a:r>
             <a:r>
               <a:rPr sz="1050" b="0" i="1" u="none">
@@ -32431,7 +32853,7 @@
                 <a:ea typeface="맑은 고딕"/>
                 <a:cs typeface="맑은 고딕"/>
               </a:rPr>
-              <a:t>이 지키고 있습니다. 주의력은 교대 끝에 떨어집니다.”</a:t>
+              <a:t> 하나뿐입니다. 그리고 주의력은 교대 끝으로 갈수록 떨어집니다.”</a:t>
             </a:r>
           </a:p>
         </p:txBody>
@@ -33382,7 +33804,7 @@
                           <a:ea typeface="맑은 고딕"/>
                           <a:cs typeface="맑은 고딕"/>
                         </a:rPr>
-                        <a:t>왜 사각지대에서 위험한가?</a:t>
+                        <a:t>왜 교차 구간에서 위험한가?</a:t>
                       </a:r>
                       <a:endParaRPr lang="ko-KR" altLang="en-US" sz="1000" b="0" i="0">
                         <a:solidFill>
@@ -33561,7 +33983,7 @@
                           <a:ea typeface="맑은 고딕"/>
                           <a:cs typeface="맑은 고딕"/>
                         </a:rPr>
-                        <a:t>서로를 보지 못한 채 접근하기 때문이다.</a:t>
+                        <a:t>서로를 보지 못한 채 가까워지기 때문이다.</a:t>
                       </a:r>
                       <a:endParaRPr lang="ko-KR" altLang="en-US" sz="1000" b="0" i="0">
                         <a:solidFill>
@@ -34088,7 +34510,7 @@
                           <a:ea typeface="맑은 고딕"/>
                           <a:cs typeface="맑은 고딕"/>
                         </a:rPr>
-                        <a:t>왜 그 구간에 보완 수단이 없는가?</a:t>
+                        <a:t>왜 눈과 경적에만 의존하는가?</a:t>
                       </a:r>
                       <a:endParaRPr lang="ko-KR" altLang="en-US" sz="1000" b="0" i="0">
                         <a:solidFill>
@@ -34267,7 +34689,7 @@
                           <a:ea typeface="맑은 고딕"/>
                           <a:cs typeface="맑은 고딕"/>
                         </a:rPr>
-                        <a:t>안전 설비를 장비 단위로 도입해 왔기 때문이다 — 차량에 리더를 달고, 그 차량이 감지한다.</a:t>
+                        <a:t>접근을 대신 알려주는 장치가 설치돼 있지 않기 때문이다.</a:t>
                       </a:r>
                       <a:endParaRPr lang="ko-KR" altLang="en-US" sz="1000" b="0" i="0">
                         <a:solidFill>
@@ -34441,7 +34863,7 @@
                           <a:ea typeface="맑은 고딕"/>
                           <a:cs typeface="맑은 고딕"/>
                         </a:rPr>
-                        <a:t>왜 장비 단위인가?</a:t>
+                        <a:t>왜 설치되지 않았는가?</a:t>
                       </a:r>
                       <a:endParaRPr lang="ko-KR" altLang="en-US" sz="1000" b="0" i="0">
                         <a:solidFill>
@@ -34620,7 +35042,7 @@
                           <a:ea typeface="맑은 고딕"/>
                           <a:cs typeface="맑은 고딕"/>
                         </a:rPr>
-                        <a:t>감지 대상이 ‘차량’ 으로 정의돼 있고, 사람은 태그를 받은 만큼만 대상이 되기 때문이다.</a:t>
+                        <a:t>시중 감지 장비는 차량과 사람 모두에게 태그를 달아야 하고, 대상이 늘 때마다 태그를 더 사야 한다.</a:t>
                       </a:r>
                       <a:endParaRPr lang="ko-KR" altLang="en-US" sz="1000" b="0" i="0">
                         <a:solidFill>
@@ -34794,7 +35216,7 @@
                           <a:ea typeface="맑은 고딕"/>
                           <a:cs typeface="맑은 고딕"/>
                         </a:rPr>
-                        <a:t>왜 인원 전원이 대상이 아닌가?</a:t>
+                        <a:t>왜 그 방법뿐이라고 보았는가?</a:t>
                       </a:r>
                       <a:endParaRPr lang="ko-KR" altLang="en-US" sz="1000" b="0" i="0">
                         <a:solidFill>
@@ -34973,7 +35395,7 @@
                           <a:ea typeface="맑은 고딕"/>
                           <a:cs typeface="맑은 고딕"/>
                         </a:rPr>
-                        <a:t>인원 수만큼 태그를 사야 하는 구조라, 대상을 상시 인원 3명으로 한정했기 때문이다.</a:t>
+                        <a:t>접근 감지를 ‘장비를 사는 일’ 로만 봤기 때문이다. 이미 나눠준 업무용 스마트폰이 같은 일을 할 수 있다는 것을 검토한 적이 없다.</a:t>
                       </a:r>
                       <a:endParaRPr lang="ko-KR" altLang="en-US" sz="1000" b="0" i="0">
                         <a:solidFill>
@@ -35099,7 +35521,7 @@
                 <a:ea typeface="맑은 고딕"/>
                 <a:cs typeface="맑은 고딕"/>
               </a:rPr>
-              <a:t>감지 대상이 태그를 단 장비와 태그를 받은 인원으로만 정의돼 있다</a:t>
+              <a:t>지게차와 보행자가 서로 다가오는 것을 알려주는 장치가 설치돼 있지 않다</a:t>
             </a:r>
             <a:endParaRPr lang="ko-KR" altLang="en-US" sz="1200">
               <a:solidFill>
@@ -35167,7 +35589,7 @@
                 <a:ea typeface="맑은 고딕"/>
                 <a:cs typeface="맑은 고딕"/>
               </a:rPr>
-              <a:t>감지 대상 범위가 안전 요구가 아니라 태그 구매 수량으로 결정되고 있다</a:t>
+              <a:t>접근 감지를 ‘장비를 사는 일’ 로만 봐 왔고, 예산이 서지 않으면 대책이 0 인 상태가 유지됐다</a:t>
             </a:r>
             <a:r>
               <a:rPr sz="900" b="0" i="0" u="none">
@@ -35178,7 +35600,7 @@
                 <a:ea typeface="맑은 고딕"/>
                 <a:cs typeface="맑은 고딕"/>
               </a:rPr>
-              <a:t>   (외부 상용 제품도 같은 구조 — 8장)</a:t>
+              <a:t>   (시중 제품이 모두 태그 방식이라 — 8장)</a:t>
             </a:r>
             <a:endParaRPr kumimoji="1" lang="ko-KR" altLang="en-US" sz="1200">
               <a:solidFill>
@@ -36553,7 +36975,7 @@
                 <a:ea typeface="맑은 고딕"/>
                 <a:cs typeface="맑은 고딕"/>
               </a:rPr>
-              <a:t>배포 속도  vs.  판정 재현성</a:t>
+              <a:t>빨리 고치기  vs.  같은 결과 내기</a:t>
             </a:r>
           </a:p>
           <a:p>
@@ -36574,7 +36996,7 @@
                 <a:ea typeface="맑은 고딕"/>
                 <a:cs typeface="맑은 고딕"/>
               </a:rPr>
-              <a:t>3개월 70회 배포로 즉시 대응했지만, 고친 증상이 되돌아왔다.</a:t>
+              <a:t>3개월에 70번 고쳤지만, 고쳤던 문제가 다시 나타났다.</a:t>
             </a:r>
           </a:p>
         </p:txBody>
@@ -36649,7 +37071,7 @@
                 <a:ea typeface="맑은 고딕"/>
                 <a:cs typeface="맑은 고딕"/>
               </a:rPr>
-              <a:t>재현성을 택하고, 속도를 늦췄다</a:t>
+              <a:t>속도를 늦추고, 같은 결과를 택했다</a:t>
             </a:r>
           </a:p>
           <a:p>
@@ -36670,7 +37092,7 @@
                 <a:ea typeface="맑은 고딕"/>
                 <a:cs typeface="맑은 고딕"/>
               </a:rPr>
-              <a:t>고친 증상을 테스트로 고정한다. 안전 크리티컬 경로 골든 테스트가 실패하면 릴리스가 자동 차단된다 (Phase 1 완료).</a:t>
+              <a:t>고친 문제마다 자동 검사를 붙여 둔다. 안전과 직결된 검사가 하나라도 실패하면 새 버전이 아예 나가지 않는다 (1단계 완료, 현재 동작 중).</a:t>
             </a:r>
           </a:p>
         </p:txBody>

--- a/docs/presentation/contest/SafeAlert_CouSolve_Contest.pptx
+++ b/docs/presentation/contest/SafeAlert_CouSolve_Contest.pptx
@@ -10096,7 +10096,7 @@
                   <a:ea typeface="맑은 고딕"/>
                   <a:cs typeface="맑은 고딕"/>
                 </a:rPr>
-                <a:t>지금 v1.1.70 이 WF11 · WF21 · WF25 에서 돌고 있다.</a:t>
+                <a:t>지금 v1.1.71 이 WF11 · WF21 · WF25 에서 돌고 있다.</a:t>
               </a:r>
             </a:p>
             <a:p>
@@ -11838,7 +11838,7 @@
                           <a:ea typeface="맑은 고딕"/>
                           <a:cs typeface="맑은 고딕"/>
                         </a:rPr>
-                        <a:t>v1.0.1 ~ v1.1.70 현장 배포 · 3개 센터 실사용</a:t>
+                        <a:t>v1.0.1 ~ v1.1.71 현장 배포 · 3개 센터 실사용</a:t>
                       </a:r>
                       <a:endParaRPr lang="ko-KR" altLang="en-US" sz="1000" b="0" i="0" u="none" strike="noStrike">
                         <a:solidFill>
@@ -27116,7 +27116,7 @@
                 <a:ea typeface="맑은 고딕"/>
                 <a:cs typeface="맑은 고딕"/>
               </a:rPr>
-              <a:t>증거</a:t>
+              <a:t>확인</a:t>
             </a:r>
             <a:r>
               <a:rPr sz="1100" b="0" i="0" u="none">
@@ -27138,7 +27138,7 @@
                 <a:ea typeface="맑은 고딕"/>
                 <a:cs typeface="맑은 고딕"/>
               </a:rPr>
-              <a:t>만들겠다는 계획이 아니라, 이미 쓰고 있는 앱입니다</a:t>
+              <a:t>계획이 아니라, 지금 돌아가고 있는 앱입니다</a:t>
             </a:r>
             <a:endParaRPr lang="en-US" altLang="ko-KR" sz="2100">
               <a:solidFill>
@@ -27167,10 +27167,53 @@
                 <a:ea typeface="맑은 고딕"/>
                 <a:cs typeface="맑은 고딕"/>
               </a:rPr>
-              <a:t>3개월 동안 70번 넘게 고쳐가며 </a:t>
+              <a:t>WF11 · WF21 · WF25 세 개 센터에서 실사용 중, 3개월간 71번 배포했습니다.</a:t>
+            </a:r>
+          </a:p>
+          <a:p>
+            <a:pPr algn="l">
+              <a:lnSpc>
+                <a:spcPct val="135000"/>
+              </a:lnSpc>
+              <a:spcBef>
+                <a:spcPts val="500"/>
+              </a:spcBef>
+            </a:pPr>
+            <a:r>
+              <a:rPr sz="1000" b="0" i="0" u="none">
+                <a:solidFill>
+                  <a:srgbClr val="9AA0A6"/>
+                </a:solidFill>
+                <a:latin typeface="맑은 고딕"/>
+                <a:ea typeface="맑은 고딕"/>
+                <a:cs typeface="맑은 고딕"/>
+              </a:rPr>
+              <a:t>코드 · 배포 이력  </a:t>
             </a:r>
             <a:r>
-              <a:rPr sz="1100" b="1" i="0" u="none">
+              <a:rPr sz="1150" b="1" i="0" u="none">
+                <a:solidFill>
+                  <a:srgbClr val="053866"/>
+                </a:solidFill>
+                <a:latin typeface="맑은 고딕"/>
+                <a:ea typeface="맑은 고딕"/>
+                <a:cs typeface="맑은 고딕"/>
+              </a:rPr>
+              <a:t>github.com/pslymzero-cyber/SafeAlert</a:t>
+            </a:r>
+            <a:r>
+              <a:rPr sz="1000" b="0" i="0" u="none">
+                <a:solidFill>
+                  <a:srgbClr val="6B7278"/>
+                </a:solidFill>
+                <a:latin typeface="맑은 고딕"/>
+                <a:ea typeface="맑은 고딕"/>
+                <a:cs typeface="맑은 고딕"/>
+              </a:rPr>
+              <a:t>      최신 버전 </a:t>
+            </a:r>
+            <a:r>
+              <a:rPr sz="1050" b="1" i="0" u="none">
                 <a:solidFill>
                   <a:srgbClr val="1B8A6B"/>
                 </a:solidFill>
@@ -27178,18 +27221,18 @@
                 <a:ea typeface="맑은 고딕"/>
                 <a:cs typeface="맑은 고딕"/>
               </a:rPr>
-              <a:t>WF11 · WF21 · WF25 세 개 센터에서 실제로 돌고 있습니다</a:t>
+              <a:t>v1.1.71</a:t>
             </a:r>
             <a:r>
-              <a:rPr sz="1100" b="0" i="0" u="none">
+              <a:rPr sz="1000" b="0" i="0" u="none">
                 <a:solidFill>
-                  <a:srgbClr val="404040"/>
+                  <a:srgbClr val="6B7278"/>
                 </a:solidFill>
                 <a:latin typeface="맑은 고딕"/>
                 <a:ea typeface="맑은 고딕"/>
                 <a:cs typeface="맑은 고딕"/>
               </a:rPr>
-              <a:t>.  같은 기능을 장비로 갖추면 센터당 331만원이 들지만(타 조직 도입 사례 기준), 이 앱은 추가 비용이 없습니다.</a:t>
+              <a:t>  (2026.09.01 배포)</a:t>
             </a:r>
           </a:p>
         </p:txBody>
@@ -27413,7 +27456,29 @@
                 <a:ea typeface="맑은 고딕"/>
                 <a:cs typeface="맑은 고딕"/>
               </a:rPr>
-              <a:t>앱만 깔면 15m 에서 경고, 8m 에서 위험 경보가 소리 · 진동 · 화면으로 울립니다. 장비를 사거나 센터에 무엇을 설치할 필요가 없습니다.</a:t>
+              <a:t>앱만 깔면 15m 에서 경고, 8m 에서 위험 경보가 소리 · 진동 · 화면으로 울립니다. 같은 기능을 장비로 갖추면 센터당 331만원이 들지만, </a:t>
+            </a:r>
+            <a:r>
+              <a:rPr sz="1100" b="1" i="0" u="none">
+                <a:solidFill>
+                  <a:srgbClr val="1B8A6B"/>
+                </a:solidFill>
+                <a:latin typeface="맑은 고딕"/>
+                <a:ea typeface="맑은 고딕"/>
+                <a:cs typeface="맑은 고딕"/>
+              </a:rPr>
+              <a:t>이 앱은 추가 비용이 없습니다</a:t>
+            </a:r>
+            <a:r>
+              <a:rPr sz="1100" b="0" i="0" u="none">
+                <a:solidFill>
+                  <a:srgbClr val="404040"/>
+                </a:solidFill>
+                <a:latin typeface="맑은 고딕"/>
+                <a:ea typeface="맑은 고딕"/>
+                <a:cs typeface="맑은 고딕"/>
+              </a:rPr>
+              <a:t>.</a:t>
             </a:r>
           </a:p>
         </p:txBody>
@@ -36996,7 +37061,7 @@
                 <a:ea typeface="맑은 고딕"/>
                 <a:cs typeface="맑은 고딕"/>
               </a:rPr>
-              <a:t>3개월에 70번 고쳤지만, 고쳤던 문제가 다시 나타났다.</a:t>
+              <a:t>3개월에 71번 고쳤지만, 고쳤던 문제가 다시 나타났다.</a:t>
             </a:r>
           </a:p>
         </p:txBody>

--- a/docs/presentation/contest/SafeAlert_CouSolve_Contest.pptx
+++ b/docs/presentation/contest/SafeAlert_CouSolve_Contest.pptx
@@ -13872,7 +13872,7 @@
                           <a:ea typeface="맑은 고딕"/>
                           <a:cs typeface="맑은 고딕"/>
                         </a:rPr>
-                        <a:t>보안 검토 — 앱 보호 미적용 · 경보 기록 암호화 안 됨</a:t>
+                        <a:t>보안 조치 — 릴리스 서명 키 발급 · 업데이트 APK 검증</a:t>
                       </a:r>
                       <a:endParaRPr lang="ko-KR" altLang="en-US" sz="1000" b="0" i="0" u="none" strike="noStrike">
                         <a:solidFill>
@@ -13955,7 +13955,7 @@
                           <a:ea typeface="맑은 고딕"/>
                           <a:cs typeface="맑은 고딕"/>
                         </a:rPr>
-                        <a:t>보안</a:t>
+                        <a:t>제안자 · 보안</a:t>
                       </a:r>
                       <a:endParaRPr lang="en-US" sz="1000" b="0" i="0" u="none" strike="noStrike">
                         <a:solidFill>

--- a/docs/presentation/contest/SafeAlert_CouSolve_Contest.pptx
+++ b/docs/presentation/contest/SafeAlert_CouSolve_Contest.pptx
@@ -9671,7 +9671,7 @@
                   <a:ea typeface="맑은 고딕"/>
                   <a:cs typeface="맑은 고딕"/>
                 </a:rPr>
-                <a:t>같은 상황에서 항상 같게 동작하도록 다듬고, 업무용 PDA 로 옮긴다</a:t>
+                <a:t>같은 상황에서 항상 같게 동작하도록 다듬는 작업 — 5단계 중 4단계까지 마쳤다</a:t>
               </a:r>
               <a:endParaRPr lang="ko-KR" altLang="en-US" sz="1200">
                 <a:solidFill>
@@ -9702,7 +9702,7 @@
                   <a:ea typeface="맑은 고딕"/>
                   <a:cs typeface="맑은 고딕"/>
                 </a:rPr>
-                <a:t>·  새 기능을 붙이는 작업이 아니다. 결과가 흔들리는 원인을 걷어내는 작업이다</a:t>
+                <a:t>·  1 · 2단계 완료 — 자동 검사 체계를 붙이고, 안전과 직결된 동작을 고정했다</a:t>
               </a:r>
             </a:p>
             <a:p>
@@ -9723,7 +9723,7 @@
                   <a:ea typeface="맑은 고딕"/>
                   <a:cs typeface="맑은 고딕"/>
                 </a:rPr>
-                <a:t>·  1단계 완료 — 자동 검사 체계를 붙였다 (지금 동작 중)</a:t>
+                <a:t>·  3단계 완료 — 한 파일에 몰려 있던 경보 계산 코드를 나눴다 (3,674줄 → 1,971줄)</a:t>
               </a:r>
             </a:p>
             <a:p>
@@ -9744,7 +9744,7 @@
                   <a:ea typeface="맑은 고딕"/>
                   <a:cs typeface="맑은 고딕"/>
                 </a:rPr>
-                <a:t>·  2단계 — 안전과 직결된 동작을 자동 검사로 고정하고, 업무용 PDA 로 옮긴다</a:t>
+                <a:t>·  4단계 완료 — 기기 상태 관리 경로를 하나로 통일했다</a:t>
               </a:r>
             </a:p>
             <a:p>
@@ -9765,7 +9765,7 @@
                   <a:ea typeface="맑은 고딕"/>
                   <a:cs typeface="맑은 고딕"/>
                 </a:rPr>
-                <a:t>·  3~5단계 — 경보 계산 코드를 나누고, 오래 켜 둬도 느려지지 않게 만든다</a:t>
+                <a:t>·  5단계 남음 — 경보 계산을 화면과 분리해, 폰이 많아도 화면이 끊기지 않게 한다</a:t>
               </a:r>
             </a:p>
             <a:p>
@@ -9786,7 +9786,7 @@
                   <a:ea typeface="맑은 고딕"/>
                   <a:cs typeface="맑은 고딕"/>
                 </a:rPr>
-                <a:t>PDA 로 옮기면 개인 폰에 임시로 깔아 둔 상태가 끝난다.</a:t>
+                <a:t>자동 검사 51건이 릴리스마다 돌고 있다.</a:t>
               </a:r>
             </a:p>
             <a:p>
@@ -9807,7 +9807,7 @@
                   <a:ea typeface="맑은 고딕"/>
                   <a:cs typeface="맑은 고딕"/>
                 </a:rPr>
-                <a:t>업무용 단말이라 배포와 회수 경로가 이미 있고, 개인 폰 배터리를 쓰는 문제도 없어진다.</a:t>
+                <a:t>그중 24건은 경보 동작을 프레임 단위로 고정한 검사다 — 코드를 나눠도 동작이 1비트도 달라지지 않았음을 이 검사로 확인했다.</a:t>
               </a:r>
             </a:p>
           </p:txBody>
@@ -11499,7 +11499,7 @@
                           <a:ea typeface="맑은 고딕"/>
                           <a:cs typeface="맑은 고딕"/>
                         </a:rPr>
-                        <a:t>1단계  자동 검사 체계 구축</a:t>
+                        <a:t>1 · 2단계  자동 검사 체계 · 안전 동작 고정 (저속 접근 포함)</a:t>
                       </a:r>
                       <a:endParaRPr lang="ko-KR" altLang="en-US" sz="1000" b="0" i="0" u="none" strike="noStrike">
                         <a:solidFill>
@@ -11838,6 +11838,1023 @@
                           <a:ea typeface="맑은 고딕"/>
                           <a:cs typeface="맑은 고딕"/>
                         </a:rPr>
+                        <a:t>3단계  경보 계산 코드 분리 (3,674줄 → 1,971줄)</a:t>
+                      </a:r>
+                      <a:endParaRPr lang="ko-KR" altLang="en-US" sz="1000" b="0" i="0" u="none" strike="noStrike">
+                        <a:solidFill>
+                          <a:srgbClr val="000000"/>
+                        </a:solidFill>
+                        <a:effectLst/>
+                        <a:latin typeface="맑은 고딕" panose="020B0503020000020004" pitchFamily="50" charset="-127"/>
+                        <a:ea typeface="맑은 고딕" panose="020B0503020000020004" pitchFamily="50" charset="-127"/>
+                      </a:endParaRPr>
+                    </a:p>
+                  </a:txBody>
+                  <a:tcPr marL="128016" marR="128016" marT="18288" anchor="ctr" marB="18288">
+                    <a:lnL w="6350" cap="flat" cmpd="sng" algn="ctr">
+                      <a:solidFill>
+                        <a:schemeClr val="tx1">
+                          <a:lumMod val="50000"/>
+                          <a:lumOff val="50000"/>
+                        </a:schemeClr>
+                      </a:solidFill>
+                      <a:prstDash val="solid"/>
+                      <a:round/>
+                      <a:headEnd type="none" w="med" len="med"/>
+                      <a:tailEnd type="none" w="med" len="med"/>
+                    </a:lnL>
+                    <a:lnR w="6350" cap="flat" cmpd="sng" algn="ctr">
+                      <a:solidFill>
+                        <a:schemeClr val="tx1">
+                          <a:lumMod val="50000"/>
+                          <a:lumOff val="50000"/>
+                        </a:schemeClr>
+                      </a:solidFill>
+                      <a:prstDash val="solid"/>
+                      <a:round/>
+                      <a:headEnd type="none" w="med" len="med"/>
+                      <a:tailEnd type="none" w="med" len="med"/>
+                    </a:lnR>
+                    <a:lnT w="6350" cap="flat" cmpd="sng" algn="ctr">
+                      <a:solidFill>
+                        <a:schemeClr val="tx1">
+                          <a:lumMod val="50000"/>
+                          <a:lumOff val="50000"/>
+                        </a:schemeClr>
+                      </a:solidFill>
+                      <a:prstDash val="solid"/>
+                      <a:round/>
+                      <a:headEnd type="none" w="med" len="med"/>
+                      <a:tailEnd type="none" w="med" len="med"/>
+                    </a:lnT>
+                    <a:lnB w="6350" cap="flat" cmpd="sng" algn="ctr">
+                      <a:solidFill>
+                        <a:schemeClr val="tx1">
+                          <a:lumMod val="50000"/>
+                          <a:lumOff val="50000"/>
+                        </a:schemeClr>
+                      </a:solidFill>
+                      <a:prstDash val="solid"/>
+                      <a:round/>
+                      <a:headEnd type="none" w="med" len="med"/>
+                      <a:tailEnd type="none" w="med" len="med"/>
+                    </a:lnB>
+                    <a:noFill/>
+                  </a:tcPr>
+                </a:tc>
+                <a:tc>
+                  <a:txBody>
+                    <a:bodyPr wrap="square"/>
+                    <a:lstStyle/>
+                    <a:p>
+                      <a:pPr algn="ctr" fontAlgn="ctr">
+                        <a:lnSpc>
+                          <a:spcPct val="115000"/>
+                        </a:lnSpc>
+                      </a:pPr>
+                      <a:r>
+                        <a:rPr sz="1050" b="0" i="0" u="none">
+                          <a:solidFill>
+                            <a:srgbClr val="404040"/>
+                          </a:solidFill>
+                          <a:latin typeface="맑은 고딕"/>
+                          <a:ea typeface="맑은 고딕"/>
+                          <a:cs typeface="맑은 고딕"/>
+                        </a:rPr>
+                        <a:t>제안자</a:t>
+                      </a:r>
+                      <a:endParaRPr lang="en-US" sz="1000" b="0" i="0" u="none" strike="noStrike">
+                        <a:solidFill>
+                          <a:srgbClr val="000000"/>
+                        </a:solidFill>
+                        <a:effectLst/>
+                        <a:latin typeface="맑은 고딕" panose="020B0503020000020004" pitchFamily="50" charset="-127"/>
+                        <a:ea typeface="맑은 고딕" panose="020B0503020000020004" pitchFamily="50" charset="-127"/>
+                      </a:endParaRPr>
+                    </a:p>
+                  </a:txBody>
+                  <a:tcPr marL="54864" marR="54864" marT="18288" anchor="ctr" marB="18288">
+                    <a:lnL w="6350" cap="flat" cmpd="sng" algn="ctr">
+                      <a:solidFill>
+                        <a:schemeClr val="tx1">
+                          <a:lumMod val="50000"/>
+                          <a:lumOff val="50000"/>
+                        </a:schemeClr>
+                      </a:solidFill>
+                      <a:prstDash val="solid"/>
+                      <a:round/>
+                      <a:headEnd type="none" w="med" len="med"/>
+                      <a:tailEnd type="none" w="med" len="med"/>
+                    </a:lnL>
+                    <a:lnR w="6350" cap="flat" cmpd="sng" algn="ctr">
+                      <a:solidFill>
+                        <a:schemeClr val="tx1">
+                          <a:lumMod val="50000"/>
+                          <a:lumOff val="50000"/>
+                        </a:schemeClr>
+                      </a:solidFill>
+                      <a:prstDash val="solid"/>
+                      <a:round/>
+                      <a:headEnd type="none" w="med" len="med"/>
+                      <a:tailEnd type="none" w="med" len="med"/>
+                    </a:lnR>
+                    <a:lnT w="6350" cap="flat" cmpd="sng" algn="ctr">
+                      <a:solidFill>
+                        <a:schemeClr val="tx1">
+                          <a:lumMod val="50000"/>
+                          <a:lumOff val="50000"/>
+                        </a:schemeClr>
+                      </a:solidFill>
+                      <a:prstDash val="solid"/>
+                      <a:round/>
+                      <a:headEnd type="none" w="med" len="med"/>
+                      <a:tailEnd type="none" w="med" len="med"/>
+                    </a:lnT>
+                    <a:lnB w="6350" cap="flat" cmpd="sng" algn="ctr">
+                      <a:solidFill>
+                        <a:schemeClr val="tx1">
+                          <a:lumMod val="50000"/>
+                          <a:lumOff val="50000"/>
+                        </a:schemeClr>
+                      </a:solidFill>
+                      <a:prstDash val="solid"/>
+                      <a:round/>
+                      <a:headEnd type="none" w="med" len="med"/>
+                      <a:tailEnd type="none" w="med" len="med"/>
+                    </a:lnB>
+                    <a:noFill/>
+                  </a:tcPr>
+                </a:tc>
+                <a:tc>
+                  <a:txBody>
+                    <a:bodyPr wrap="square"/>
+                    <a:lstStyle/>
+                    <a:p>
+                      <a:pPr algn="ctr" fontAlgn="ctr">
+                        <a:lnSpc>
+                          <a:spcPct val="115000"/>
+                        </a:lnSpc>
+                      </a:pPr>
+                      <a:r>
+                        <a:rPr sz="1050" b="0" i="0" u="none">
+                          <a:solidFill>
+                            <a:srgbClr val="404040"/>
+                          </a:solidFill>
+                          <a:latin typeface="맑은 고딕"/>
+                          <a:ea typeface="맑은 고딕"/>
+                          <a:cs typeface="맑은 고딕"/>
+                        </a:rPr>
+                        <a:t>완료</a:t>
+                      </a:r>
+                      <a:endParaRPr lang="en-US" altLang="ko-KR" sz="1000" b="0" i="0" u="none" strike="noStrike">
+                        <a:solidFill>
+                          <a:srgbClr val="000000"/>
+                        </a:solidFill>
+                        <a:effectLst/>
+                        <a:latin typeface="맑은 고딕" panose="020B0503020000020004" pitchFamily="50" charset="-127"/>
+                        <a:ea typeface="맑은 고딕" panose="020B0503020000020004" pitchFamily="50" charset="-127"/>
+                      </a:endParaRPr>
+                    </a:p>
+                  </a:txBody>
+                  <a:tcPr marL="54864" marR="54864" marT="18288" anchor="ctr" marB="18288">
+                    <a:lnL w="6350" cap="flat" cmpd="sng" algn="ctr">
+                      <a:solidFill>
+                        <a:schemeClr val="tx1">
+                          <a:lumMod val="50000"/>
+                          <a:lumOff val="50000"/>
+                        </a:schemeClr>
+                      </a:solidFill>
+                      <a:prstDash val="solid"/>
+                      <a:round/>
+                      <a:headEnd type="none" w="med" len="med"/>
+                      <a:tailEnd type="none" w="med" len="med"/>
+                    </a:lnL>
+                    <a:lnR w="6350" cap="flat" cmpd="sng" algn="ctr">
+                      <a:solidFill>
+                        <a:schemeClr val="tx1">
+                          <a:lumMod val="50000"/>
+                          <a:lumOff val="50000"/>
+                        </a:schemeClr>
+                      </a:solidFill>
+                      <a:prstDash val="solid"/>
+                      <a:round/>
+                      <a:headEnd type="none" w="med" len="med"/>
+                      <a:tailEnd type="none" w="med" len="med"/>
+                    </a:lnR>
+                    <a:lnT w="6350" cap="flat" cmpd="sng" algn="ctr">
+                      <a:solidFill>
+                        <a:schemeClr val="tx1">
+                          <a:lumMod val="50000"/>
+                          <a:lumOff val="50000"/>
+                        </a:schemeClr>
+                      </a:solidFill>
+                      <a:prstDash val="solid"/>
+                      <a:round/>
+                      <a:headEnd type="none" w="med" len="med"/>
+                      <a:tailEnd type="none" w="med" len="med"/>
+                    </a:lnT>
+                    <a:lnB w="6350" cap="flat" cmpd="sng" algn="ctr">
+                      <a:solidFill>
+                        <a:schemeClr val="tx1">
+                          <a:lumMod val="50000"/>
+                          <a:lumOff val="50000"/>
+                        </a:schemeClr>
+                      </a:solidFill>
+                      <a:prstDash val="solid"/>
+                      <a:round/>
+                      <a:headEnd type="none" w="med" len="med"/>
+                      <a:tailEnd type="none" w="med" len="med"/>
+                    </a:lnB>
+                    <a:noFill/>
+                  </a:tcPr>
+                </a:tc>
+                <a:tc>
+                  <a:txBody>
+                    <a:bodyPr wrap="square"/>
+                    <a:lstStyle/>
+                    <a:p>
+                      <a:pPr algn="ctr" fontAlgn="ctr">
+                        <a:lnSpc>
+                          <a:spcPct val="115000"/>
+                        </a:lnSpc>
+                      </a:pPr>
+                      <a:r>
+                        <a:rPr sz="1050" b="1" i="0" u="none">
+                          <a:solidFill>
+                            <a:srgbClr val="1B8A6B"/>
+                          </a:solidFill>
+                          <a:latin typeface="맑은 고딕"/>
+                          <a:ea typeface="맑은 고딕"/>
+                          <a:cs typeface="맑은 고딕"/>
+                        </a:rPr>
+                        <a:t>완료</a:t>
+                      </a:r>
+                      <a:endParaRPr lang="ko-KR" altLang="en-US" sz="1000" b="0" i="0" u="none" strike="noStrike">
+                        <a:solidFill>
+                          <a:srgbClr val="000000"/>
+                        </a:solidFill>
+                        <a:effectLst/>
+                        <a:latin typeface="맑은 고딕" panose="020B0503020000020004" pitchFamily="50" charset="-127"/>
+                        <a:ea typeface="맑은 고딕" panose="020B0503020000020004" pitchFamily="50" charset="-127"/>
+                      </a:endParaRPr>
+                    </a:p>
+                  </a:txBody>
+                  <a:tcPr marL="54864" marR="54864" marT="18288" anchor="ctr" marB="18288">
+                    <a:lnL w="6350" cap="flat" cmpd="sng" algn="ctr">
+                      <a:solidFill>
+                        <a:schemeClr val="tx1">
+                          <a:lumMod val="50000"/>
+                          <a:lumOff val="50000"/>
+                        </a:schemeClr>
+                      </a:solidFill>
+                      <a:prstDash val="solid"/>
+                      <a:round/>
+                      <a:headEnd type="none" w="med" len="med"/>
+                      <a:tailEnd type="none" w="med" len="med"/>
+                    </a:lnL>
+                    <a:lnR w="6350" cap="flat" cmpd="sng" algn="ctr">
+                      <a:solidFill>
+                        <a:schemeClr val="tx1">
+                          <a:lumMod val="50000"/>
+                          <a:lumOff val="50000"/>
+                        </a:schemeClr>
+                      </a:solidFill>
+                      <a:prstDash val="solid"/>
+                      <a:round/>
+                      <a:headEnd type="none" w="med" len="med"/>
+                      <a:tailEnd type="none" w="med" len="med"/>
+                    </a:lnR>
+                    <a:lnT w="6350" cap="flat" cmpd="sng" algn="ctr">
+                      <a:solidFill>
+                        <a:schemeClr val="tx1">
+                          <a:lumMod val="50000"/>
+                          <a:lumOff val="50000"/>
+                        </a:schemeClr>
+                      </a:solidFill>
+                      <a:prstDash val="solid"/>
+                      <a:round/>
+                      <a:headEnd type="none" w="med" len="med"/>
+                      <a:tailEnd type="none" w="med" len="med"/>
+                    </a:lnT>
+                    <a:lnB w="6350" cap="flat" cmpd="sng" algn="ctr">
+                      <a:solidFill>
+                        <a:schemeClr val="tx1">
+                          <a:lumMod val="50000"/>
+                          <a:lumOff val="50000"/>
+                        </a:schemeClr>
+                      </a:solidFill>
+                      <a:prstDash val="solid"/>
+                      <a:round/>
+                      <a:headEnd type="none" w="med" len="med"/>
+                      <a:tailEnd type="none" w="med" len="med"/>
+                    </a:lnB>
+                    <a:noFill/>
+                  </a:tcPr>
+                </a:tc>
+                <a:extLst>
+                  <a:ext uri="{0D108BD9-81ED-4DB2-BD59-A6C34878D82A}">
+                    <a16:rowId xmlns:a16="http://schemas.microsoft.com/office/drawing/2014/main" val="3977275645"/>
+                  </a:ext>
+                </a:extLst>
+              </a:tr>
+              <a:tr h="379701">
+                <a:tc>
+                  <a:txBody>
+                    <a:bodyPr wrap="square"/>
+                    <a:lstStyle/>
+                    <a:p>
+                      <a:pPr algn="l" fontAlgn="ctr">
+                        <a:lnSpc>
+                          <a:spcPct val="115000"/>
+                        </a:lnSpc>
+                      </a:pPr>
+                      <a:r>
+                        <a:rPr sz="1050" b="0" i="0" u="none">
+                          <a:solidFill>
+                            <a:srgbClr val="404040"/>
+                          </a:solidFill>
+                          <a:latin typeface="맑은 고딕"/>
+                          <a:ea typeface="맑은 고딕"/>
+                          <a:cs typeface="맑은 고딕"/>
+                        </a:rPr>
+                        <a:t>4단계  기기 상태 관리 경로 일원화</a:t>
+                      </a:r>
+                      <a:endParaRPr lang="ko-KR" altLang="en-US" sz="1000" b="0" i="0" u="none" strike="noStrike">
+                        <a:solidFill>
+                          <a:srgbClr val="000000"/>
+                        </a:solidFill>
+                        <a:effectLst/>
+                        <a:latin typeface="맑은 고딕" panose="020B0503020000020004" pitchFamily="50" charset="-127"/>
+                        <a:ea typeface="맑은 고딕" panose="020B0503020000020004" pitchFamily="50" charset="-127"/>
+                      </a:endParaRPr>
+                    </a:p>
+                  </a:txBody>
+                  <a:tcPr marL="128016" marR="128016" marT="18288" anchor="ctr" marB="18288">
+                    <a:lnL w="6350" cap="flat" cmpd="sng" algn="ctr">
+                      <a:solidFill>
+                        <a:schemeClr val="tx1">
+                          <a:lumMod val="50000"/>
+                          <a:lumOff val="50000"/>
+                        </a:schemeClr>
+                      </a:solidFill>
+                      <a:prstDash val="solid"/>
+                      <a:round/>
+                      <a:headEnd type="none" w="med" len="med"/>
+                      <a:tailEnd type="none" w="med" len="med"/>
+                    </a:lnL>
+                    <a:lnR w="6350" cap="flat" cmpd="sng" algn="ctr">
+                      <a:solidFill>
+                        <a:schemeClr val="tx1">
+                          <a:lumMod val="50000"/>
+                          <a:lumOff val="50000"/>
+                        </a:schemeClr>
+                      </a:solidFill>
+                      <a:prstDash val="solid"/>
+                      <a:round/>
+                      <a:headEnd type="none" w="med" len="med"/>
+                      <a:tailEnd type="none" w="med" len="med"/>
+                    </a:lnR>
+                    <a:lnT w="6350" cap="flat" cmpd="sng" algn="ctr">
+                      <a:solidFill>
+                        <a:schemeClr val="tx1">
+                          <a:lumMod val="50000"/>
+                          <a:lumOff val="50000"/>
+                        </a:schemeClr>
+                      </a:solidFill>
+                      <a:prstDash val="solid"/>
+                      <a:round/>
+                      <a:headEnd type="none" w="med" len="med"/>
+                      <a:tailEnd type="none" w="med" len="med"/>
+                    </a:lnT>
+                    <a:lnB w="6350" cap="flat" cmpd="sng" algn="ctr">
+                      <a:solidFill>
+                        <a:schemeClr val="tx1">
+                          <a:lumMod val="50000"/>
+                          <a:lumOff val="50000"/>
+                        </a:schemeClr>
+                      </a:solidFill>
+                      <a:prstDash val="solid"/>
+                      <a:round/>
+                      <a:headEnd type="none" w="med" len="med"/>
+                      <a:tailEnd type="none" w="med" len="med"/>
+                    </a:lnB>
+                    <a:noFill/>
+                  </a:tcPr>
+                </a:tc>
+                <a:tc>
+                  <a:txBody>
+                    <a:bodyPr wrap="square"/>
+                    <a:lstStyle/>
+                    <a:p>
+                      <a:pPr algn="ctr" fontAlgn="ctr">
+                        <a:lnSpc>
+                          <a:spcPct val="115000"/>
+                        </a:lnSpc>
+                      </a:pPr>
+                      <a:r>
+                        <a:rPr sz="1050" b="0" i="0" u="none">
+                          <a:solidFill>
+                            <a:srgbClr val="404040"/>
+                          </a:solidFill>
+                          <a:latin typeface="맑은 고딕"/>
+                          <a:ea typeface="맑은 고딕"/>
+                          <a:cs typeface="맑은 고딕"/>
+                        </a:rPr>
+                        <a:t>제안자</a:t>
+                      </a:r>
+                      <a:endParaRPr lang="en-US" sz="1000" b="0" i="0" u="none" strike="noStrike">
+                        <a:solidFill>
+                          <a:srgbClr val="000000"/>
+                        </a:solidFill>
+                        <a:effectLst/>
+                        <a:latin typeface="맑은 고딕" panose="020B0503020000020004" pitchFamily="50" charset="-127"/>
+                        <a:ea typeface="맑은 고딕" panose="020B0503020000020004" pitchFamily="50" charset="-127"/>
+                      </a:endParaRPr>
+                    </a:p>
+                  </a:txBody>
+                  <a:tcPr marL="54864" marR="54864" marT="18288" anchor="ctr" marB="18288">
+                    <a:lnL w="6350" cap="flat" cmpd="sng" algn="ctr">
+                      <a:solidFill>
+                        <a:schemeClr val="tx1">
+                          <a:lumMod val="50000"/>
+                          <a:lumOff val="50000"/>
+                        </a:schemeClr>
+                      </a:solidFill>
+                      <a:prstDash val="solid"/>
+                      <a:round/>
+                      <a:headEnd type="none" w="med" len="med"/>
+                      <a:tailEnd type="none" w="med" len="med"/>
+                    </a:lnL>
+                    <a:lnR w="6350" cap="flat" cmpd="sng" algn="ctr">
+                      <a:solidFill>
+                        <a:schemeClr val="tx1">
+                          <a:lumMod val="50000"/>
+                          <a:lumOff val="50000"/>
+                        </a:schemeClr>
+                      </a:solidFill>
+                      <a:prstDash val="solid"/>
+                      <a:round/>
+                      <a:headEnd type="none" w="med" len="med"/>
+                      <a:tailEnd type="none" w="med" len="med"/>
+                    </a:lnR>
+                    <a:lnT w="6350" cap="flat" cmpd="sng" algn="ctr">
+                      <a:solidFill>
+                        <a:schemeClr val="tx1">
+                          <a:lumMod val="50000"/>
+                          <a:lumOff val="50000"/>
+                        </a:schemeClr>
+                      </a:solidFill>
+                      <a:prstDash val="solid"/>
+                      <a:round/>
+                      <a:headEnd type="none" w="med" len="med"/>
+                      <a:tailEnd type="none" w="med" len="med"/>
+                    </a:lnT>
+                    <a:lnB w="6350" cap="flat" cmpd="sng" algn="ctr">
+                      <a:solidFill>
+                        <a:schemeClr val="tx1">
+                          <a:lumMod val="50000"/>
+                          <a:lumOff val="50000"/>
+                        </a:schemeClr>
+                      </a:solidFill>
+                      <a:prstDash val="solid"/>
+                      <a:round/>
+                      <a:headEnd type="none" w="med" len="med"/>
+                      <a:tailEnd type="none" w="med" len="med"/>
+                    </a:lnB>
+                    <a:noFill/>
+                  </a:tcPr>
+                </a:tc>
+                <a:tc>
+                  <a:txBody>
+                    <a:bodyPr wrap="square"/>
+                    <a:lstStyle/>
+                    <a:p>
+                      <a:pPr algn="ctr" fontAlgn="ctr">
+                        <a:lnSpc>
+                          <a:spcPct val="115000"/>
+                        </a:lnSpc>
+                      </a:pPr>
+                      <a:r>
+                        <a:rPr sz="1050" b="0" i="0" u="none">
+                          <a:solidFill>
+                            <a:srgbClr val="404040"/>
+                          </a:solidFill>
+                          <a:latin typeface="맑은 고딕"/>
+                          <a:ea typeface="맑은 고딕"/>
+                          <a:cs typeface="맑은 고딕"/>
+                        </a:rPr>
+                        <a:t>완료</a:t>
+                      </a:r>
+                      <a:endParaRPr lang="en-US" altLang="ko-KR" sz="1000" b="0" i="0" u="none" strike="noStrike">
+                        <a:solidFill>
+                          <a:srgbClr val="000000"/>
+                        </a:solidFill>
+                        <a:effectLst/>
+                        <a:latin typeface="맑은 고딕" panose="020B0503020000020004" pitchFamily="50" charset="-127"/>
+                        <a:ea typeface="맑은 고딕" panose="020B0503020000020004" pitchFamily="50" charset="-127"/>
+                      </a:endParaRPr>
+                    </a:p>
+                  </a:txBody>
+                  <a:tcPr marL="54864" marR="54864" marT="18288" anchor="ctr" marB="18288">
+                    <a:lnL w="6350" cap="flat" cmpd="sng" algn="ctr">
+                      <a:solidFill>
+                        <a:schemeClr val="tx1">
+                          <a:lumMod val="50000"/>
+                          <a:lumOff val="50000"/>
+                        </a:schemeClr>
+                      </a:solidFill>
+                      <a:prstDash val="solid"/>
+                      <a:round/>
+                      <a:headEnd type="none" w="med" len="med"/>
+                      <a:tailEnd type="none" w="med" len="med"/>
+                    </a:lnL>
+                    <a:lnR w="6350" cap="flat" cmpd="sng" algn="ctr">
+                      <a:solidFill>
+                        <a:schemeClr val="tx1">
+                          <a:lumMod val="50000"/>
+                          <a:lumOff val="50000"/>
+                        </a:schemeClr>
+                      </a:solidFill>
+                      <a:prstDash val="solid"/>
+                      <a:round/>
+                      <a:headEnd type="none" w="med" len="med"/>
+                      <a:tailEnd type="none" w="med" len="med"/>
+                    </a:lnR>
+                    <a:lnT w="6350" cap="flat" cmpd="sng" algn="ctr">
+                      <a:solidFill>
+                        <a:schemeClr val="tx1">
+                          <a:lumMod val="50000"/>
+                          <a:lumOff val="50000"/>
+                        </a:schemeClr>
+                      </a:solidFill>
+                      <a:prstDash val="solid"/>
+                      <a:round/>
+                      <a:headEnd type="none" w="med" len="med"/>
+                      <a:tailEnd type="none" w="med" len="med"/>
+                    </a:lnT>
+                    <a:lnB w="6350" cap="flat" cmpd="sng" algn="ctr">
+                      <a:solidFill>
+                        <a:schemeClr val="tx1">
+                          <a:lumMod val="50000"/>
+                          <a:lumOff val="50000"/>
+                        </a:schemeClr>
+                      </a:solidFill>
+                      <a:prstDash val="solid"/>
+                      <a:round/>
+                      <a:headEnd type="none" w="med" len="med"/>
+                      <a:tailEnd type="none" w="med" len="med"/>
+                    </a:lnB>
+                    <a:noFill/>
+                  </a:tcPr>
+                </a:tc>
+                <a:tc>
+                  <a:txBody>
+                    <a:bodyPr wrap="square"/>
+                    <a:lstStyle/>
+                    <a:p>
+                      <a:pPr algn="ctr" fontAlgn="ctr">
+                        <a:lnSpc>
+                          <a:spcPct val="115000"/>
+                        </a:lnSpc>
+                      </a:pPr>
+                      <a:r>
+                        <a:rPr sz="1050" b="1" i="0" u="none">
+                          <a:solidFill>
+                            <a:srgbClr val="1B8A6B"/>
+                          </a:solidFill>
+                          <a:latin typeface="맑은 고딕"/>
+                          <a:ea typeface="맑은 고딕"/>
+                          <a:cs typeface="맑은 고딕"/>
+                        </a:rPr>
+                        <a:t>완료</a:t>
+                      </a:r>
+                      <a:endParaRPr lang="ko-KR" altLang="en-US" sz="1000" b="0" i="0" u="none" strike="noStrike">
+                        <a:solidFill>
+                          <a:srgbClr val="000000"/>
+                        </a:solidFill>
+                        <a:effectLst/>
+                        <a:latin typeface="맑은 고딕" panose="020B0503020000020004" pitchFamily="50" charset="-127"/>
+                        <a:ea typeface="맑은 고딕" panose="020B0503020000020004" pitchFamily="50" charset="-127"/>
+                      </a:endParaRPr>
+                    </a:p>
+                  </a:txBody>
+                  <a:tcPr marL="54864" marR="54864" marT="18288" anchor="ctr" marB="18288">
+                    <a:lnL w="6350" cap="flat" cmpd="sng" algn="ctr">
+                      <a:solidFill>
+                        <a:schemeClr val="tx1">
+                          <a:lumMod val="50000"/>
+                          <a:lumOff val="50000"/>
+                        </a:schemeClr>
+                      </a:solidFill>
+                      <a:prstDash val="solid"/>
+                      <a:round/>
+                      <a:headEnd type="none" w="med" len="med"/>
+                      <a:tailEnd type="none" w="med" len="med"/>
+                    </a:lnL>
+                    <a:lnR w="6350" cap="flat" cmpd="sng" algn="ctr">
+                      <a:solidFill>
+                        <a:schemeClr val="tx1">
+                          <a:lumMod val="50000"/>
+                          <a:lumOff val="50000"/>
+                        </a:schemeClr>
+                      </a:solidFill>
+                      <a:prstDash val="solid"/>
+                      <a:round/>
+                      <a:headEnd type="none" w="med" len="med"/>
+                      <a:tailEnd type="none" w="med" len="med"/>
+                    </a:lnR>
+                    <a:lnT w="6350" cap="flat" cmpd="sng" algn="ctr">
+                      <a:solidFill>
+                        <a:schemeClr val="tx1">
+                          <a:lumMod val="50000"/>
+                          <a:lumOff val="50000"/>
+                        </a:schemeClr>
+                      </a:solidFill>
+                      <a:prstDash val="solid"/>
+                      <a:round/>
+                      <a:headEnd type="none" w="med" len="med"/>
+                      <a:tailEnd type="none" w="med" len="med"/>
+                    </a:lnT>
+                    <a:lnB w="6350" cap="flat" cmpd="sng" algn="ctr">
+                      <a:solidFill>
+                        <a:schemeClr val="tx1">
+                          <a:lumMod val="50000"/>
+                          <a:lumOff val="50000"/>
+                        </a:schemeClr>
+                      </a:solidFill>
+                      <a:prstDash val="solid"/>
+                      <a:round/>
+                      <a:headEnd type="none" w="med" len="med"/>
+                      <a:tailEnd type="none" w="med" len="med"/>
+                    </a:lnB>
+                    <a:noFill/>
+                  </a:tcPr>
+                </a:tc>
+                <a:extLst>
+                  <a:ext uri="{0D108BD9-81ED-4DB2-BD59-A6C34878D82A}">
+                    <a16:rowId xmlns:a16="http://schemas.microsoft.com/office/drawing/2014/main" val="1393886245"/>
+                  </a:ext>
+                </a:extLst>
+              </a:tr>
+              <a:tr h="379701">
+                <a:tc>
+                  <a:txBody>
+                    <a:bodyPr wrap="square"/>
+                    <a:lstStyle/>
+                    <a:p>
+                      <a:pPr algn="l" fontAlgn="ctr">
+                        <a:lnSpc>
+                          <a:spcPct val="115000"/>
+                        </a:lnSpc>
+                      </a:pPr>
+                      <a:r>
+                        <a:rPr sz="1050" b="0" i="0" u="none">
+                          <a:solidFill>
+                            <a:srgbClr val="404040"/>
+                          </a:solidFill>
+                          <a:latin typeface="맑은 고딕"/>
+                          <a:ea typeface="맑은 고딕"/>
+                          <a:cs typeface="맑은 고딕"/>
+                        </a:rPr>
+                        <a:t>DB 보안 규칙 잠금 · 업데이트 채널 정비</a:t>
+                      </a:r>
+                      <a:endParaRPr lang="ko-KR" altLang="en-US" sz="1000" b="0" i="0" u="none" strike="noStrike">
+                        <a:solidFill>
+                          <a:srgbClr val="000000"/>
+                        </a:solidFill>
+                        <a:effectLst/>
+                        <a:latin typeface="맑은 고딕" panose="020B0503020000020004" pitchFamily="50" charset="-127"/>
+                        <a:ea typeface="맑은 고딕" panose="020B0503020000020004" pitchFamily="50" charset="-127"/>
+                      </a:endParaRPr>
+                    </a:p>
+                  </a:txBody>
+                  <a:tcPr marL="128016" marR="128016" marT="18288" anchor="ctr" marB="18288">
+                    <a:lnL w="6350" cap="flat" cmpd="sng" algn="ctr">
+                      <a:solidFill>
+                        <a:schemeClr val="tx1">
+                          <a:lumMod val="50000"/>
+                          <a:lumOff val="50000"/>
+                        </a:schemeClr>
+                      </a:solidFill>
+                      <a:prstDash val="solid"/>
+                      <a:round/>
+                      <a:headEnd type="none" w="med" len="med"/>
+                      <a:tailEnd type="none" w="med" len="med"/>
+                    </a:lnL>
+                    <a:lnR w="6350" cap="flat" cmpd="sng" algn="ctr">
+                      <a:solidFill>
+                        <a:schemeClr val="tx1">
+                          <a:lumMod val="50000"/>
+                          <a:lumOff val="50000"/>
+                        </a:schemeClr>
+                      </a:solidFill>
+                      <a:prstDash val="solid"/>
+                      <a:round/>
+                      <a:headEnd type="none" w="med" len="med"/>
+                      <a:tailEnd type="none" w="med" len="med"/>
+                    </a:lnR>
+                    <a:lnT w="6350" cap="flat" cmpd="sng" algn="ctr">
+                      <a:solidFill>
+                        <a:schemeClr val="tx1">
+                          <a:lumMod val="50000"/>
+                          <a:lumOff val="50000"/>
+                        </a:schemeClr>
+                      </a:solidFill>
+                      <a:prstDash val="solid"/>
+                      <a:round/>
+                      <a:headEnd type="none" w="med" len="med"/>
+                      <a:tailEnd type="none" w="med" len="med"/>
+                    </a:lnT>
+                    <a:lnB w="6350" cap="flat" cmpd="sng" algn="ctr">
+                      <a:solidFill>
+                        <a:schemeClr val="tx1">
+                          <a:lumMod val="50000"/>
+                          <a:lumOff val="50000"/>
+                        </a:schemeClr>
+                      </a:solidFill>
+                      <a:prstDash val="solid"/>
+                      <a:round/>
+                      <a:headEnd type="none" w="med" len="med"/>
+                      <a:tailEnd type="none" w="med" len="med"/>
+                    </a:lnB>
+                    <a:noFill/>
+                  </a:tcPr>
+                </a:tc>
+                <a:tc>
+                  <a:txBody>
+                    <a:bodyPr wrap="square"/>
+                    <a:lstStyle/>
+                    <a:p>
+                      <a:pPr algn="ctr" fontAlgn="ctr">
+                        <a:lnSpc>
+                          <a:spcPct val="115000"/>
+                        </a:lnSpc>
+                      </a:pPr>
+                      <a:r>
+                        <a:rPr sz="1050" b="0" i="0" u="none">
+                          <a:solidFill>
+                            <a:srgbClr val="404040"/>
+                          </a:solidFill>
+                          <a:latin typeface="맑은 고딕"/>
+                          <a:ea typeface="맑은 고딕"/>
+                          <a:cs typeface="맑은 고딕"/>
+                        </a:rPr>
+                        <a:t>제안자</a:t>
+                      </a:r>
+                      <a:endParaRPr lang="en-US" sz="1000" b="0" i="0" u="none" strike="noStrike">
+                        <a:solidFill>
+                          <a:srgbClr val="000000"/>
+                        </a:solidFill>
+                        <a:effectLst/>
+                        <a:latin typeface="맑은 고딕" panose="020B0503020000020004" pitchFamily="50" charset="-127"/>
+                        <a:ea typeface="맑은 고딕" panose="020B0503020000020004" pitchFamily="50" charset="-127"/>
+                      </a:endParaRPr>
+                    </a:p>
+                  </a:txBody>
+                  <a:tcPr marL="54864" marR="54864" marT="18288" anchor="ctr" marB="18288">
+                    <a:lnL w="6350" cap="flat" cmpd="sng" algn="ctr">
+                      <a:solidFill>
+                        <a:schemeClr val="tx1">
+                          <a:lumMod val="50000"/>
+                          <a:lumOff val="50000"/>
+                        </a:schemeClr>
+                      </a:solidFill>
+                      <a:prstDash val="solid"/>
+                      <a:round/>
+                      <a:headEnd type="none" w="med" len="med"/>
+                      <a:tailEnd type="none" w="med" len="med"/>
+                    </a:lnL>
+                    <a:lnR w="6350" cap="flat" cmpd="sng" algn="ctr">
+                      <a:solidFill>
+                        <a:schemeClr val="tx1">
+                          <a:lumMod val="50000"/>
+                          <a:lumOff val="50000"/>
+                        </a:schemeClr>
+                      </a:solidFill>
+                      <a:prstDash val="solid"/>
+                      <a:round/>
+                      <a:headEnd type="none" w="med" len="med"/>
+                      <a:tailEnd type="none" w="med" len="med"/>
+                    </a:lnR>
+                    <a:lnT w="6350" cap="flat" cmpd="sng" algn="ctr">
+                      <a:solidFill>
+                        <a:schemeClr val="tx1">
+                          <a:lumMod val="50000"/>
+                          <a:lumOff val="50000"/>
+                        </a:schemeClr>
+                      </a:solidFill>
+                      <a:prstDash val="solid"/>
+                      <a:round/>
+                      <a:headEnd type="none" w="med" len="med"/>
+                      <a:tailEnd type="none" w="med" len="med"/>
+                    </a:lnT>
+                    <a:lnB w="6350" cap="flat" cmpd="sng" algn="ctr">
+                      <a:solidFill>
+                        <a:schemeClr val="tx1">
+                          <a:lumMod val="50000"/>
+                          <a:lumOff val="50000"/>
+                        </a:schemeClr>
+                      </a:solidFill>
+                      <a:prstDash val="solid"/>
+                      <a:round/>
+                      <a:headEnd type="none" w="med" len="med"/>
+                      <a:tailEnd type="none" w="med" len="med"/>
+                    </a:lnB>
+                    <a:noFill/>
+                  </a:tcPr>
+                </a:tc>
+                <a:tc>
+                  <a:txBody>
+                    <a:bodyPr wrap="square"/>
+                    <a:lstStyle/>
+                    <a:p>
+                      <a:pPr algn="ctr" fontAlgn="ctr">
+                        <a:lnSpc>
+                          <a:spcPct val="115000"/>
+                        </a:lnSpc>
+                      </a:pPr>
+                      <a:r>
+                        <a:rPr sz="1050" b="0" i="0" u="none">
+                          <a:solidFill>
+                            <a:srgbClr val="404040"/>
+                          </a:solidFill>
+                          <a:latin typeface="맑은 고딕"/>
+                          <a:ea typeface="맑은 고딕"/>
+                          <a:cs typeface="맑은 고딕"/>
+                        </a:rPr>
+                        <a:t>완료 (v1.1.71)</a:t>
+                      </a:r>
+                      <a:endParaRPr lang="en-US" altLang="ko-KR" sz="1000" b="0" i="0" u="none" strike="noStrike">
+                        <a:solidFill>
+                          <a:srgbClr val="000000"/>
+                        </a:solidFill>
+                        <a:effectLst/>
+                        <a:latin typeface="맑은 고딕" panose="020B0503020000020004" pitchFamily="50" charset="-127"/>
+                        <a:ea typeface="맑은 고딕" panose="020B0503020000020004" pitchFamily="50" charset="-127"/>
+                      </a:endParaRPr>
+                    </a:p>
+                  </a:txBody>
+                  <a:tcPr marL="54864" marR="54864" marT="18288" anchor="ctr" marB="18288">
+                    <a:lnL w="6350" cap="flat" cmpd="sng" algn="ctr">
+                      <a:solidFill>
+                        <a:schemeClr val="tx1">
+                          <a:lumMod val="50000"/>
+                          <a:lumOff val="50000"/>
+                        </a:schemeClr>
+                      </a:solidFill>
+                      <a:prstDash val="solid"/>
+                      <a:round/>
+                      <a:headEnd type="none" w="med" len="med"/>
+                      <a:tailEnd type="none" w="med" len="med"/>
+                    </a:lnL>
+                    <a:lnR w="6350" cap="flat" cmpd="sng" algn="ctr">
+                      <a:solidFill>
+                        <a:schemeClr val="tx1">
+                          <a:lumMod val="50000"/>
+                          <a:lumOff val="50000"/>
+                        </a:schemeClr>
+                      </a:solidFill>
+                      <a:prstDash val="solid"/>
+                      <a:round/>
+                      <a:headEnd type="none" w="med" len="med"/>
+                      <a:tailEnd type="none" w="med" len="med"/>
+                    </a:lnR>
+                    <a:lnT w="6350" cap="flat" cmpd="sng" algn="ctr">
+                      <a:solidFill>
+                        <a:schemeClr val="tx1">
+                          <a:lumMod val="50000"/>
+                          <a:lumOff val="50000"/>
+                        </a:schemeClr>
+                      </a:solidFill>
+                      <a:prstDash val="solid"/>
+                      <a:round/>
+                      <a:headEnd type="none" w="med" len="med"/>
+                      <a:tailEnd type="none" w="med" len="med"/>
+                    </a:lnT>
+                    <a:lnB w="6350" cap="flat" cmpd="sng" algn="ctr">
+                      <a:solidFill>
+                        <a:schemeClr val="tx1">
+                          <a:lumMod val="50000"/>
+                          <a:lumOff val="50000"/>
+                        </a:schemeClr>
+                      </a:solidFill>
+                      <a:prstDash val="solid"/>
+                      <a:round/>
+                      <a:headEnd type="none" w="med" len="med"/>
+                      <a:tailEnd type="none" w="med" len="med"/>
+                    </a:lnB>
+                    <a:noFill/>
+                  </a:tcPr>
+                </a:tc>
+                <a:tc>
+                  <a:txBody>
+                    <a:bodyPr wrap="square"/>
+                    <a:lstStyle/>
+                    <a:p>
+                      <a:pPr algn="ctr" fontAlgn="ctr">
+                        <a:lnSpc>
+                          <a:spcPct val="115000"/>
+                        </a:lnSpc>
+                      </a:pPr>
+                      <a:r>
+                        <a:rPr sz="1050" b="1" i="0" u="none">
+                          <a:solidFill>
+                            <a:srgbClr val="1B8A6B"/>
+                          </a:solidFill>
+                          <a:latin typeface="맑은 고딕"/>
+                          <a:ea typeface="맑은 고딕"/>
+                          <a:cs typeface="맑은 고딕"/>
+                        </a:rPr>
+                        <a:t>완료</a:t>
+                      </a:r>
+                      <a:endParaRPr lang="ko-KR" altLang="en-US" sz="1000" b="0" i="0" u="none" strike="noStrike">
+                        <a:solidFill>
+                          <a:srgbClr val="000000"/>
+                        </a:solidFill>
+                        <a:effectLst/>
+                        <a:latin typeface="맑은 고딕" panose="020B0503020000020004" pitchFamily="50" charset="-127"/>
+                        <a:ea typeface="맑은 고딕" panose="020B0503020000020004" pitchFamily="50" charset="-127"/>
+                      </a:endParaRPr>
+                    </a:p>
+                  </a:txBody>
+                  <a:tcPr marL="54864" marR="54864" marT="18288" anchor="ctr" marB="18288">
+                    <a:lnL w="6350" cap="flat" cmpd="sng" algn="ctr">
+                      <a:solidFill>
+                        <a:schemeClr val="tx1">
+                          <a:lumMod val="50000"/>
+                          <a:lumOff val="50000"/>
+                        </a:schemeClr>
+                      </a:solidFill>
+                      <a:prstDash val="solid"/>
+                      <a:round/>
+                      <a:headEnd type="none" w="med" len="med"/>
+                      <a:tailEnd type="none" w="med" len="med"/>
+                    </a:lnL>
+                    <a:lnR w="6350" cap="flat" cmpd="sng" algn="ctr">
+                      <a:solidFill>
+                        <a:schemeClr val="tx1">
+                          <a:lumMod val="50000"/>
+                          <a:lumOff val="50000"/>
+                        </a:schemeClr>
+                      </a:solidFill>
+                      <a:prstDash val="solid"/>
+                      <a:round/>
+                      <a:headEnd type="none" w="med" len="med"/>
+                      <a:tailEnd type="none" w="med" len="med"/>
+                    </a:lnR>
+                    <a:lnT w="6350" cap="flat" cmpd="sng" algn="ctr">
+                      <a:solidFill>
+                        <a:schemeClr val="tx1">
+                          <a:lumMod val="50000"/>
+                          <a:lumOff val="50000"/>
+                        </a:schemeClr>
+                      </a:solidFill>
+                      <a:prstDash val="solid"/>
+                      <a:round/>
+                      <a:headEnd type="none" w="med" len="med"/>
+                      <a:tailEnd type="none" w="med" len="med"/>
+                    </a:lnT>
+                    <a:lnB w="6350" cap="flat" cmpd="sng" algn="ctr">
+                      <a:solidFill>
+                        <a:schemeClr val="tx1">
+                          <a:lumMod val="50000"/>
+                          <a:lumOff val="50000"/>
+                        </a:schemeClr>
+                      </a:solidFill>
+                      <a:prstDash val="solid"/>
+                      <a:round/>
+                      <a:headEnd type="none" w="med" len="med"/>
+                      <a:tailEnd type="none" w="med" len="med"/>
+                    </a:lnB>
+                    <a:noFill/>
+                  </a:tcPr>
+                </a:tc>
+                <a:extLst>
+                  <a:ext uri="{0D108BD9-81ED-4DB2-BD59-A6C34878D82A}">
+                    <a16:rowId xmlns:a16="http://schemas.microsoft.com/office/drawing/2014/main" val="4122717012"/>
+                  </a:ext>
+                </a:extLst>
+              </a:tr>
+              <a:tr h="379701">
+                <a:tc>
+                  <a:txBody>
+                    <a:bodyPr wrap="square"/>
+                    <a:lstStyle/>
+                    <a:p>
+                      <a:pPr algn="l" fontAlgn="ctr">
+                        <a:lnSpc>
+                          <a:spcPct val="115000"/>
+                        </a:lnSpc>
+                      </a:pPr>
+                      <a:r>
+                        <a:rPr sz="1050" b="0" i="0" u="none">
+                          <a:solidFill>
+                            <a:srgbClr val="404040"/>
+                          </a:solidFill>
+                          <a:latin typeface="맑은 고딕"/>
+                          <a:ea typeface="맑은 고딕"/>
+                          <a:cs typeface="맑은 고딕"/>
+                        </a:rPr>
                         <a:t>v1.0.1 ~ v1.1.71 현장 배포 · 3개 센터 실사용</a:t>
                       </a:r>
                       <a:endParaRPr lang="ko-KR" altLang="en-US" sz="1000" b="0" i="0" u="none" strike="noStrike">
@@ -12153,7 +13170,7 @@
                 </a:tc>
                 <a:extLst>
                   <a:ext uri="{0D108BD9-81ED-4DB2-BD59-A6C34878D82A}">
-                    <a16:rowId xmlns:a16="http://schemas.microsoft.com/office/drawing/2014/main" val="3977275645"/>
+                    <a16:rowId xmlns:a16="http://schemas.microsoft.com/office/drawing/2014/main" val="2710345523"/>
                   </a:ext>
                 </a:extLst>
               </a:tr>
@@ -12177,7 +13194,346 @@
                           <a:ea typeface="맑은 고딕"/>
                           <a:cs typeface="맑은 고딕"/>
                         </a:rPr>
-                        <a:t>앱 경보 기록 4주 집계 — 추정치를 실제 숫자로 교체</a:t>
+                        <a:t>앱 경보 기록 4주 집계 · 작업자 설문 회수</a:t>
+                      </a:r>
+                      <a:endParaRPr lang="en-US" altLang="ko-KR" sz="1000" b="0" i="0" u="none" strike="noStrike">
+                        <a:solidFill>
+                          <a:srgbClr val="000000"/>
+                        </a:solidFill>
+                        <a:effectLst/>
+                        <a:latin typeface="맑은 고딕" panose="020B0503020000020004" pitchFamily="50" charset="-127"/>
+                        <a:ea typeface="맑은 고딕" panose="020B0503020000020004" pitchFamily="50" charset="-127"/>
+                      </a:endParaRPr>
+                    </a:p>
+                  </a:txBody>
+                  <a:tcPr marL="128016" marR="128016" marT="18288" anchor="ctr" marB="18288">
+                    <a:lnL w="6350" cap="flat" cmpd="sng" algn="ctr">
+                      <a:solidFill>
+                        <a:schemeClr val="tx1">
+                          <a:lumMod val="50000"/>
+                          <a:lumOff val="50000"/>
+                        </a:schemeClr>
+                      </a:solidFill>
+                      <a:prstDash val="solid"/>
+                      <a:round/>
+                      <a:headEnd type="none" w="med" len="med"/>
+                      <a:tailEnd type="none" w="med" len="med"/>
+                    </a:lnL>
+                    <a:lnR w="6350" cap="flat" cmpd="sng" algn="ctr">
+                      <a:solidFill>
+                        <a:schemeClr val="tx1">
+                          <a:lumMod val="50000"/>
+                          <a:lumOff val="50000"/>
+                        </a:schemeClr>
+                      </a:solidFill>
+                      <a:prstDash val="solid"/>
+                      <a:round/>
+                      <a:headEnd type="none" w="med" len="med"/>
+                      <a:tailEnd type="none" w="med" len="med"/>
+                    </a:lnR>
+                    <a:lnT w="6350" cap="flat" cmpd="sng" algn="ctr">
+                      <a:solidFill>
+                        <a:schemeClr val="tx1">
+                          <a:lumMod val="50000"/>
+                          <a:lumOff val="50000"/>
+                        </a:schemeClr>
+                      </a:solidFill>
+                      <a:prstDash val="solid"/>
+                      <a:round/>
+                      <a:headEnd type="none" w="med" len="med"/>
+                      <a:tailEnd type="none" w="med" len="med"/>
+                    </a:lnT>
+                    <a:lnB w="6350" cap="flat" cmpd="sng" algn="ctr">
+                      <a:solidFill>
+                        <a:schemeClr val="tx1">
+                          <a:lumMod val="50000"/>
+                          <a:lumOff val="50000"/>
+                        </a:schemeClr>
+                      </a:solidFill>
+                      <a:prstDash val="solid"/>
+                      <a:round/>
+                      <a:headEnd type="none" w="med" len="med"/>
+                      <a:tailEnd type="none" w="med" len="med"/>
+                    </a:lnB>
+                    <a:noFill/>
+                  </a:tcPr>
+                </a:tc>
+                <a:tc>
+                  <a:txBody>
+                    <a:bodyPr wrap="square"/>
+                    <a:lstStyle/>
+                    <a:p>
+                      <a:pPr algn="ctr" fontAlgn="ctr">
+                        <a:lnSpc>
+                          <a:spcPct val="115000"/>
+                        </a:lnSpc>
+                      </a:pPr>
+                      <a:r>
+                        <a:rPr sz="1050" b="0" i="0" u="none">
+                          <a:solidFill>
+                            <a:srgbClr val="404040"/>
+                          </a:solidFill>
+                          <a:latin typeface="맑은 고딕"/>
+                          <a:ea typeface="맑은 고딕"/>
+                          <a:cs typeface="맑은 고딕"/>
+                        </a:rPr>
+                        <a:t>제안자 · 현장</a:t>
+                      </a:r>
+                      <a:endParaRPr lang="en-US" sz="1000" b="0" i="0" u="none" strike="noStrike">
+                        <a:solidFill>
+                          <a:srgbClr val="000000"/>
+                        </a:solidFill>
+                        <a:effectLst/>
+                        <a:latin typeface="맑은 고딕" panose="020B0503020000020004" pitchFamily="50" charset="-127"/>
+                        <a:ea typeface="맑은 고딕" panose="020B0503020000020004" pitchFamily="50" charset="-127"/>
+                      </a:endParaRPr>
+                    </a:p>
+                  </a:txBody>
+                  <a:tcPr marL="54864" marR="54864" marT="18288" anchor="ctr" marB="18288">
+                    <a:lnL w="6350" cap="flat" cmpd="sng" algn="ctr">
+                      <a:solidFill>
+                        <a:schemeClr val="tx1">
+                          <a:lumMod val="50000"/>
+                          <a:lumOff val="50000"/>
+                        </a:schemeClr>
+                      </a:solidFill>
+                      <a:prstDash val="solid"/>
+                      <a:round/>
+                      <a:headEnd type="none" w="med" len="med"/>
+                      <a:tailEnd type="none" w="med" len="med"/>
+                    </a:lnL>
+                    <a:lnR w="6350" cap="flat" cmpd="sng" algn="ctr">
+                      <a:solidFill>
+                        <a:schemeClr val="tx1">
+                          <a:lumMod val="50000"/>
+                          <a:lumOff val="50000"/>
+                        </a:schemeClr>
+                      </a:solidFill>
+                      <a:prstDash val="solid"/>
+                      <a:round/>
+                      <a:headEnd type="none" w="med" len="med"/>
+                      <a:tailEnd type="none" w="med" len="med"/>
+                    </a:lnR>
+                    <a:lnT w="6350" cap="flat" cmpd="sng" algn="ctr">
+                      <a:solidFill>
+                        <a:schemeClr val="tx1">
+                          <a:lumMod val="50000"/>
+                          <a:lumOff val="50000"/>
+                        </a:schemeClr>
+                      </a:solidFill>
+                      <a:prstDash val="solid"/>
+                      <a:round/>
+                      <a:headEnd type="none" w="med" len="med"/>
+                      <a:tailEnd type="none" w="med" len="med"/>
+                    </a:lnT>
+                    <a:lnB w="6350" cap="flat" cmpd="sng" algn="ctr">
+                      <a:solidFill>
+                        <a:schemeClr val="tx1">
+                          <a:lumMod val="50000"/>
+                          <a:lumOff val="50000"/>
+                        </a:schemeClr>
+                      </a:solidFill>
+                      <a:prstDash val="solid"/>
+                      <a:round/>
+                      <a:headEnd type="none" w="med" len="med"/>
+                      <a:tailEnd type="none" w="med" len="med"/>
+                    </a:lnB>
+                    <a:noFill/>
+                  </a:tcPr>
+                </a:tc>
+                <a:tc>
+                  <a:txBody>
+                    <a:bodyPr wrap="square"/>
+                    <a:lstStyle/>
+                    <a:p>
+                      <a:pPr algn="ctr" fontAlgn="ctr">
+                        <a:lnSpc>
+                          <a:spcPct val="115000"/>
+                        </a:lnSpc>
+                      </a:pPr>
+                      <a:r>
+                        <a:rPr sz="1050" b="0" i="0" u="none">
+                          <a:solidFill>
+                            <a:srgbClr val="404040"/>
+                          </a:solidFill>
+                          <a:latin typeface="맑은 고딕"/>
+                          <a:ea typeface="맑은 고딕"/>
+                          <a:cs typeface="맑은 고딕"/>
+                        </a:rPr>
+                        <a:t>9월 중</a:t>
+                      </a:r>
+                      <a:endParaRPr lang="en-US" altLang="ko-KR" sz="1000" b="0" i="0" u="none" strike="noStrike">
+                        <a:solidFill>
+                          <a:srgbClr val="000000"/>
+                        </a:solidFill>
+                        <a:effectLst/>
+                        <a:latin typeface="맑은 고딕" panose="020B0503020000020004" pitchFamily="50" charset="-127"/>
+                        <a:ea typeface="맑은 고딕" panose="020B0503020000020004" pitchFamily="50" charset="-127"/>
+                      </a:endParaRPr>
+                    </a:p>
+                  </a:txBody>
+                  <a:tcPr marL="54864" marR="54864" marT="18288" anchor="ctr" marB="18288">
+                    <a:lnL w="6350" cap="flat" cmpd="sng" algn="ctr">
+                      <a:solidFill>
+                        <a:schemeClr val="tx1">
+                          <a:lumMod val="50000"/>
+                          <a:lumOff val="50000"/>
+                        </a:schemeClr>
+                      </a:solidFill>
+                      <a:prstDash val="solid"/>
+                      <a:round/>
+                      <a:headEnd type="none" w="med" len="med"/>
+                      <a:tailEnd type="none" w="med" len="med"/>
+                    </a:lnL>
+                    <a:lnR w="6350" cap="flat" cmpd="sng" algn="ctr">
+                      <a:solidFill>
+                        <a:schemeClr val="tx1">
+                          <a:lumMod val="50000"/>
+                          <a:lumOff val="50000"/>
+                        </a:schemeClr>
+                      </a:solidFill>
+                      <a:prstDash val="solid"/>
+                      <a:round/>
+                      <a:headEnd type="none" w="med" len="med"/>
+                      <a:tailEnd type="none" w="med" len="med"/>
+                    </a:lnR>
+                    <a:lnT w="6350" cap="flat" cmpd="sng" algn="ctr">
+                      <a:solidFill>
+                        <a:schemeClr val="tx1">
+                          <a:lumMod val="50000"/>
+                          <a:lumOff val="50000"/>
+                        </a:schemeClr>
+                      </a:solidFill>
+                      <a:prstDash val="solid"/>
+                      <a:round/>
+                      <a:headEnd type="none" w="med" len="med"/>
+                      <a:tailEnd type="none" w="med" len="med"/>
+                    </a:lnT>
+                    <a:lnB w="6350" cap="flat" cmpd="sng" algn="ctr">
+                      <a:solidFill>
+                        <a:schemeClr val="tx1">
+                          <a:lumMod val="50000"/>
+                          <a:lumOff val="50000"/>
+                        </a:schemeClr>
+                      </a:solidFill>
+                      <a:prstDash val="solid"/>
+                      <a:round/>
+                      <a:headEnd type="none" w="med" len="med"/>
+                      <a:tailEnd type="none" w="med" len="med"/>
+                    </a:lnB>
+                    <a:noFill/>
+                  </a:tcPr>
+                </a:tc>
+                <a:tc>
+                  <a:txBody>
+                    <a:bodyPr wrap="square"/>
+                    <a:lstStyle/>
+                    <a:p>
+                      <a:pPr algn="ctr" fontAlgn="ctr">
+                        <a:lnSpc>
+                          <a:spcPct val="115000"/>
+                        </a:lnSpc>
+                      </a:pPr>
+                      <a:r>
+                        <a:rPr sz="1050" b="1" i="0" u="none">
+                          <a:solidFill>
+                            <a:srgbClr val="1B8A6B"/>
+                          </a:solidFill>
+                          <a:latin typeface="맑은 고딕"/>
+                          <a:ea typeface="맑은 고딕"/>
+                          <a:cs typeface="맑은 고딕"/>
+                        </a:rPr>
+                        <a:t>진행</a:t>
+                      </a:r>
+                      <a:endParaRPr lang="ko-KR" altLang="en-US" sz="1000" b="0" i="0" u="none" strike="noStrike">
+                        <a:solidFill>
+                          <a:srgbClr val="000000"/>
+                        </a:solidFill>
+                        <a:effectLst/>
+                        <a:latin typeface="맑은 고딕" panose="020B0503020000020004" pitchFamily="50" charset="-127"/>
+                        <a:ea typeface="맑은 고딕" panose="020B0503020000020004" pitchFamily="50" charset="-127"/>
+                      </a:endParaRPr>
+                    </a:p>
+                  </a:txBody>
+                  <a:tcPr marL="54864" marR="54864" marT="18288" anchor="ctr" marB="18288">
+                    <a:lnL w="6350" cap="flat" cmpd="sng" algn="ctr">
+                      <a:solidFill>
+                        <a:schemeClr val="tx1">
+                          <a:lumMod val="50000"/>
+                          <a:lumOff val="50000"/>
+                        </a:schemeClr>
+                      </a:solidFill>
+                      <a:prstDash val="solid"/>
+                      <a:round/>
+                      <a:headEnd type="none" w="med" len="med"/>
+                      <a:tailEnd type="none" w="med" len="med"/>
+                    </a:lnL>
+                    <a:lnR w="6350" cap="flat" cmpd="sng" algn="ctr">
+                      <a:solidFill>
+                        <a:schemeClr val="tx1">
+                          <a:lumMod val="50000"/>
+                          <a:lumOff val="50000"/>
+                        </a:schemeClr>
+                      </a:solidFill>
+                      <a:prstDash val="solid"/>
+                      <a:round/>
+                      <a:headEnd type="none" w="med" len="med"/>
+                      <a:tailEnd type="none" w="med" len="med"/>
+                    </a:lnR>
+                    <a:lnT w="6350" cap="flat" cmpd="sng" algn="ctr">
+                      <a:solidFill>
+                        <a:schemeClr val="tx1">
+                          <a:lumMod val="50000"/>
+                          <a:lumOff val="50000"/>
+                        </a:schemeClr>
+                      </a:solidFill>
+                      <a:prstDash val="solid"/>
+                      <a:round/>
+                      <a:headEnd type="none" w="med" len="med"/>
+                      <a:tailEnd type="none" w="med" len="med"/>
+                    </a:lnT>
+                    <a:lnB w="6350" cap="flat" cmpd="sng" algn="ctr">
+                      <a:solidFill>
+                        <a:schemeClr val="tx1">
+                          <a:lumMod val="50000"/>
+                          <a:lumOff val="50000"/>
+                        </a:schemeClr>
+                      </a:solidFill>
+                      <a:prstDash val="solid"/>
+                      <a:round/>
+                      <a:headEnd type="none" w="med" len="med"/>
+                      <a:tailEnd type="none" w="med" len="med"/>
+                    </a:lnB>
+                    <a:noFill/>
+                  </a:tcPr>
+                </a:tc>
+                <a:extLst>
+                  <a:ext uri="{0D108BD9-81ED-4DB2-BD59-A6C34878D82A}">
+                    <a16:rowId xmlns:a16="http://schemas.microsoft.com/office/drawing/2014/main" val="2003406257"/>
+                  </a:ext>
+                </a:extLst>
+              </a:tr>
+              <a:tr h="379701">
+                <a:tc>
+                  <a:txBody>
+                    <a:bodyPr wrap="square"/>
+                    <a:lstStyle/>
+                    <a:p>
+                      <a:pPr algn="l" fontAlgn="ctr">
+                        <a:lnSpc>
+                          <a:spcPct val="115000"/>
+                        </a:lnSpc>
+                      </a:pPr>
+                      <a:r>
+                        <a:rPr sz="1050" b="0" i="0" u="none">
+                          <a:solidFill>
+                            <a:srgbClr val="404040"/>
+                          </a:solidFill>
+                          <a:latin typeface="맑은 고딕"/>
+                          <a:ea typeface="맑은 고딕"/>
+                          <a:cs typeface="맑은 고딕"/>
+                        </a:rPr>
+                        <a:t>5단계  경보 계산을 화면과 분리</a:t>
                       </a:r>
                       <a:endParaRPr lang="ko-KR" altLang="en-US" sz="1000" b="0" i="0" u="none" strike="noStrike">
                         <a:solidFill>
@@ -12343,7 +13699,7 @@
                           <a:ea typeface="맑은 고딕"/>
                           <a:cs typeface="맑은 고딕"/>
                         </a:rPr>
-                        <a:t>9월 중</a:t>
+                        <a:t>10월</a:t>
                       </a:r>
                       <a:endParaRPr lang="en-US" altLang="ko-KR" sz="1000" b="0" i="0" u="none" strike="noStrike">
                         <a:solidFill>
@@ -12420,13 +13776,13 @@
                       <a:r>
                         <a:rPr sz="1050" b="1" i="0" u="none">
                           <a:solidFill>
-                            <a:srgbClr val="1B8A6B"/>
+                            <a:srgbClr val="6B7278"/>
                           </a:solidFill>
                           <a:latin typeface="맑은 고딕"/>
                           <a:ea typeface="맑은 고딕"/>
                           <a:cs typeface="맑은 고딕"/>
                         </a:rPr>
-                        <a:t>진행</a:t>
+                        <a:t>예정</a:t>
                       </a:r>
                       <a:endParaRPr lang="ko-KR" altLang="en-US" sz="1000" b="0" i="0" u="none" strike="noStrike">
                         <a:solidFill>
@@ -12492,7 +13848,7 @@
                 </a:tc>
                 <a:extLst>
                   <a:ext uri="{0D108BD9-81ED-4DB2-BD59-A6C34878D82A}">
-                    <a16:rowId xmlns:a16="http://schemas.microsoft.com/office/drawing/2014/main" val="1393886245"/>
+                    <a16:rowId xmlns:a16="http://schemas.microsoft.com/office/drawing/2014/main" val="4042454525"/>
                   </a:ext>
                 </a:extLst>
               </a:tr>
@@ -12516,346 +13872,7 @@
                           <a:ea typeface="맑은 고딕"/>
                           <a:cs typeface="맑은 고딕"/>
                         </a:rPr>
-                        <a:t>서베이 회수 · 집계 (WF11 · WF21 · WF25)</a:t>
-                      </a:r>
-                      <a:endParaRPr lang="ko-KR" altLang="en-US" sz="1000" b="0" i="0" u="none" strike="noStrike">
-                        <a:solidFill>
-                          <a:srgbClr val="000000"/>
-                        </a:solidFill>
-                        <a:effectLst/>
-                        <a:latin typeface="맑은 고딕" panose="020B0503020000020004" pitchFamily="50" charset="-127"/>
-                        <a:ea typeface="맑은 고딕" panose="020B0503020000020004" pitchFamily="50" charset="-127"/>
-                      </a:endParaRPr>
-                    </a:p>
-                  </a:txBody>
-                  <a:tcPr marL="128016" marR="128016" marT="18288" anchor="ctr" marB="18288">
-                    <a:lnL w="6350" cap="flat" cmpd="sng" algn="ctr">
-                      <a:solidFill>
-                        <a:schemeClr val="tx1">
-                          <a:lumMod val="50000"/>
-                          <a:lumOff val="50000"/>
-                        </a:schemeClr>
-                      </a:solidFill>
-                      <a:prstDash val="solid"/>
-                      <a:round/>
-                      <a:headEnd type="none" w="med" len="med"/>
-                      <a:tailEnd type="none" w="med" len="med"/>
-                    </a:lnL>
-                    <a:lnR w="6350" cap="flat" cmpd="sng" algn="ctr">
-                      <a:solidFill>
-                        <a:schemeClr val="tx1">
-                          <a:lumMod val="50000"/>
-                          <a:lumOff val="50000"/>
-                        </a:schemeClr>
-                      </a:solidFill>
-                      <a:prstDash val="solid"/>
-                      <a:round/>
-                      <a:headEnd type="none" w="med" len="med"/>
-                      <a:tailEnd type="none" w="med" len="med"/>
-                    </a:lnR>
-                    <a:lnT w="6350" cap="flat" cmpd="sng" algn="ctr">
-                      <a:solidFill>
-                        <a:schemeClr val="tx1">
-                          <a:lumMod val="50000"/>
-                          <a:lumOff val="50000"/>
-                        </a:schemeClr>
-                      </a:solidFill>
-                      <a:prstDash val="solid"/>
-                      <a:round/>
-                      <a:headEnd type="none" w="med" len="med"/>
-                      <a:tailEnd type="none" w="med" len="med"/>
-                    </a:lnT>
-                    <a:lnB w="6350" cap="flat" cmpd="sng" algn="ctr">
-                      <a:solidFill>
-                        <a:schemeClr val="tx1">
-                          <a:lumMod val="50000"/>
-                          <a:lumOff val="50000"/>
-                        </a:schemeClr>
-                      </a:solidFill>
-                      <a:prstDash val="solid"/>
-                      <a:round/>
-                      <a:headEnd type="none" w="med" len="med"/>
-                      <a:tailEnd type="none" w="med" len="med"/>
-                    </a:lnB>
-                    <a:noFill/>
-                  </a:tcPr>
-                </a:tc>
-                <a:tc>
-                  <a:txBody>
-                    <a:bodyPr wrap="square"/>
-                    <a:lstStyle/>
-                    <a:p>
-                      <a:pPr algn="ctr" fontAlgn="ctr">
-                        <a:lnSpc>
-                          <a:spcPct val="115000"/>
-                        </a:lnSpc>
-                      </a:pPr>
-                      <a:r>
-                        <a:rPr sz="1050" b="0" i="0" u="none">
-                          <a:solidFill>
-                            <a:srgbClr val="404040"/>
-                          </a:solidFill>
-                          <a:latin typeface="맑은 고딕"/>
-                          <a:ea typeface="맑은 고딕"/>
-                          <a:cs typeface="맑은 고딕"/>
-                        </a:rPr>
-                        <a:t>제안자 · 현장</a:t>
-                      </a:r>
-                      <a:endParaRPr lang="en-US" sz="1000" b="0" i="0" u="none" strike="noStrike">
-                        <a:solidFill>
-                          <a:srgbClr val="000000"/>
-                        </a:solidFill>
-                        <a:effectLst/>
-                        <a:latin typeface="맑은 고딕" panose="020B0503020000020004" pitchFamily="50" charset="-127"/>
-                        <a:ea typeface="맑은 고딕" panose="020B0503020000020004" pitchFamily="50" charset="-127"/>
-                      </a:endParaRPr>
-                    </a:p>
-                  </a:txBody>
-                  <a:tcPr marL="54864" marR="54864" marT="18288" anchor="ctr" marB="18288">
-                    <a:lnL w="6350" cap="flat" cmpd="sng" algn="ctr">
-                      <a:solidFill>
-                        <a:schemeClr val="tx1">
-                          <a:lumMod val="50000"/>
-                          <a:lumOff val="50000"/>
-                        </a:schemeClr>
-                      </a:solidFill>
-                      <a:prstDash val="solid"/>
-                      <a:round/>
-                      <a:headEnd type="none" w="med" len="med"/>
-                      <a:tailEnd type="none" w="med" len="med"/>
-                    </a:lnL>
-                    <a:lnR w="6350" cap="flat" cmpd="sng" algn="ctr">
-                      <a:solidFill>
-                        <a:schemeClr val="tx1">
-                          <a:lumMod val="50000"/>
-                          <a:lumOff val="50000"/>
-                        </a:schemeClr>
-                      </a:solidFill>
-                      <a:prstDash val="solid"/>
-                      <a:round/>
-                      <a:headEnd type="none" w="med" len="med"/>
-                      <a:tailEnd type="none" w="med" len="med"/>
-                    </a:lnR>
-                    <a:lnT w="6350" cap="flat" cmpd="sng" algn="ctr">
-                      <a:solidFill>
-                        <a:schemeClr val="tx1">
-                          <a:lumMod val="50000"/>
-                          <a:lumOff val="50000"/>
-                        </a:schemeClr>
-                      </a:solidFill>
-                      <a:prstDash val="solid"/>
-                      <a:round/>
-                      <a:headEnd type="none" w="med" len="med"/>
-                      <a:tailEnd type="none" w="med" len="med"/>
-                    </a:lnT>
-                    <a:lnB w="6350" cap="flat" cmpd="sng" algn="ctr">
-                      <a:solidFill>
-                        <a:schemeClr val="tx1">
-                          <a:lumMod val="50000"/>
-                          <a:lumOff val="50000"/>
-                        </a:schemeClr>
-                      </a:solidFill>
-                      <a:prstDash val="solid"/>
-                      <a:round/>
-                      <a:headEnd type="none" w="med" len="med"/>
-                      <a:tailEnd type="none" w="med" len="med"/>
-                    </a:lnB>
-                    <a:noFill/>
-                  </a:tcPr>
-                </a:tc>
-                <a:tc>
-                  <a:txBody>
-                    <a:bodyPr wrap="square"/>
-                    <a:lstStyle/>
-                    <a:p>
-                      <a:pPr algn="ctr" fontAlgn="ctr">
-                        <a:lnSpc>
-                          <a:spcPct val="115000"/>
-                        </a:lnSpc>
-                      </a:pPr>
-                      <a:r>
-                        <a:rPr sz="1050" b="0" i="0" u="none">
-                          <a:solidFill>
-                            <a:srgbClr val="404040"/>
-                          </a:solidFill>
-                          <a:latin typeface="맑은 고딕"/>
-                          <a:ea typeface="맑은 고딕"/>
-                          <a:cs typeface="맑은 고딕"/>
-                        </a:rPr>
-                        <a:t>9월 중</a:t>
-                      </a:r>
-                      <a:endParaRPr lang="en-US" altLang="ko-KR" sz="1000" b="0" i="0" u="none" strike="noStrike">
-                        <a:solidFill>
-                          <a:srgbClr val="000000"/>
-                        </a:solidFill>
-                        <a:effectLst/>
-                        <a:latin typeface="맑은 고딕" panose="020B0503020000020004" pitchFamily="50" charset="-127"/>
-                        <a:ea typeface="맑은 고딕" panose="020B0503020000020004" pitchFamily="50" charset="-127"/>
-                      </a:endParaRPr>
-                    </a:p>
-                  </a:txBody>
-                  <a:tcPr marL="54864" marR="54864" marT="18288" anchor="ctr" marB="18288">
-                    <a:lnL w="6350" cap="flat" cmpd="sng" algn="ctr">
-                      <a:solidFill>
-                        <a:schemeClr val="tx1">
-                          <a:lumMod val="50000"/>
-                          <a:lumOff val="50000"/>
-                        </a:schemeClr>
-                      </a:solidFill>
-                      <a:prstDash val="solid"/>
-                      <a:round/>
-                      <a:headEnd type="none" w="med" len="med"/>
-                      <a:tailEnd type="none" w="med" len="med"/>
-                    </a:lnL>
-                    <a:lnR w="6350" cap="flat" cmpd="sng" algn="ctr">
-                      <a:solidFill>
-                        <a:schemeClr val="tx1">
-                          <a:lumMod val="50000"/>
-                          <a:lumOff val="50000"/>
-                        </a:schemeClr>
-                      </a:solidFill>
-                      <a:prstDash val="solid"/>
-                      <a:round/>
-                      <a:headEnd type="none" w="med" len="med"/>
-                      <a:tailEnd type="none" w="med" len="med"/>
-                    </a:lnR>
-                    <a:lnT w="6350" cap="flat" cmpd="sng" algn="ctr">
-                      <a:solidFill>
-                        <a:schemeClr val="tx1">
-                          <a:lumMod val="50000"/>
-                          <a:lumOff val="50000"/>
-                        </a:schemeClr>
-                      </a:solidFill>
-                      <a:prstDash val="solid"/>
-                      <a:round/>
-                      <a:headEnd type="none" w="med" len="med"/>
-                      <a:tailEnd type="none" w="med" len="med"/>
-                    </a:lnT>
-                    <a:lnB w="6350" cap="flat" cmpd="sng" algn="ctr">
-                      <a:solidFill>
-                        <a:schemeClr val="tx1">
-                          <a:lumMod val="50000"/>
-                          <a:lumOff val="50000"/>
-                        </a:schemeClr>
-                      </a:solidFill>
-                      <a:prstDash val="solid"/>
-                      <a:round/>
-                      <a:headEnd type="none" w="med" len="med"/>
-                      <a:tailEnd type="none" w="med" len="med"/>
-                    </a:lnB>
-                    <a:noFill/>
-                  </a:tcPr>
-                </a:tc>
-                <a:tc>
-                  <a:txBody>
-                    <a:bodyPr wrap="square"/>
-                    <a:lstStyle/>
-                    <a:p>
-                      <a:pPr algn="ctr" fontAlgn="ctr">
-                        <a:lnSpc>
-                          <a:spcPct val="115000"/>
-                        </a:lnSpc>
-                      </a:pPr>
-                      <a:r>
-                        <a:rPr sz="1050" b="1" i="0" u="none">
-                          <a:solidFill>
-                            <a:srgbClr val="1B8A6B"/>
-                          </a:solidFill>
-                          <a:latin typeface="맑은 고딕"/>
-                          <a:ea typeface="맑은 고딕"/>
-                          <a:cs typeface="맑은 고딕"/>
-                        </a:rPr>
-                        <a:t>진행</a:t>
-                      </a:r>
-                      <a:endParaRPr lang="ko-KR" altLang="en-US" sz="1000" b="0" i="0" u="none" strike="noStrike">
-                        <a:solidFill>
-                          <a:srgbClr val="000000"/>
-                        </a:solidFill>
-                        <a:effectLst/>
-                        <a:latin typeface="맑은 고딕" panose="020B0503020000020004" pitchFamily="50" charset="-127"/>
-                        <a:ea typeface="맑은 고딕" panose="020B0503020000020004" pitchFamily="50" charset="-127"/>
-                      </a:endParaRPr>
-                    </a:p>
-                  </a:txBody>
-                  <a:tcPr marL="54864" marR="54864" marT="18288" anchor="ctr" marB="18288">
-                    <a:lnL w="6350" cap="flat" cmpd="sng" algn="ctr">
-                      <a:solidFill>
-                        <a:schemeClr val="tx1">
-                          <a:lumMod val="50000"/>
-                          <a:lumOff val="50000"/>
-                        </a:schemeClr>
-                      </a:solidFill>
-                      <a:prstDash val="solid"/>
-                      <a:round/>
-                      <a:headEnd type="none" w="med" len="med"/>
-                      <a:tailEnd type="none" w="med" len="med"/>
-                    </a:lnL>
-                    <a:lnR w="6350" cap="flat" cmpd="sng" algn="ctr">
-                      <a:solidFill>
-                        <a:schemeClr val="tx1">
-                          <a:lumMod val="50000"/>
-                          <a:lumOff val="50000"/>
-                        </a:schemeClr>
-                      </a:solidFill>
-                      <a:prstDash val="solid"/>
-                      <a:round/>
-                      <a:headEnd type="none" w="med" len="med"/>
-                      <a:tailEnd type="none" w="med" len="med"/>
-                    </a:lnR>
-                    <a:lnT w="6350" cap="flat" cmpd="sng" algn="ctr">
-                      <a:solidFill>
-                        <a:schemeClr val="tx1">
-                          <a:lumMod val="50000"/>
-                          <a:lumOff val="50000"/>
-                        </a:schemeClr>
-                      </a:solidFill>
-                      <a:prstDash val="solid"/>
-                      <a:round/>
-                      <a:headEnd type="none" w="med" len="med"/>
-                      <a:tailEnd type="none" w="med" len="med"/>
-                    </a:lnT>
-                    <a:lnB w="6350" cap="flat" cmpd="sng" algn="ctr">
-                      <a:solidFill>
-                        <a:schemeClr val="tx1">
-                          <a:lumMod val="50000"/>
-                          <a:lumOff val="50000"/>
-                        </a:schemeClr>
-                      </a:solidFill>
-                      <a:prstDash val="solid"/>
-                      <a:round/>
-                      <a:headEnd type="none" w="med" len="med"/>
-                      <a:tailEnd type="none" w="med" len="med"/>
-                    </a:lnB>
-                    <a:noFill/>
-                  </a:tcPr>
-                </a:tc>
-                <a:extLst>
-                  <a:ext uri="{0D108BD9-81ED-4DB2-BD59-A6C34878D82A}">
-                    <a16:rowId xmlns:a16="http://schemas.microsoft.com/office/drawing/2014/main" val="4122717012"/>
-                  </a:ext>
-                </a:extLst>
-              </a:tr>
-              <a:tr h="379701">
-                <a:tc>
-                  <a:txBody>
-                    <a:bodyPr wrap="square"/>
-                    <a:lstStyle/>
-                    <a:p>
-                      <a:pPr algn="l" fontAlgn="ctr">
-                        <a:lnSpc>
-                          <a:spcPct val="115000"/>
-                        </a:lnSpc>
-                      </a:pPr>
-                      <a:r>
-                        <a:rPr sz="1050" b="0" i="0" u="none">
-                          <a:solidFill>
-                            <a:srgbClr val="404040"/>
-                          </a:solidFill>
-                          <a:latin typeface="맑은 고딕"/>
-                          <a:ea typeface="맑은 고딕"/>
-                          <a:cs typeface="맑은 고딕"/>
-                        </a:rPr>
-                        <a:t>2단계  안전 동작 자동 검사 + 업무용 PDA 로 이전</a:t>
+                        <a:t>업무용 PDA 로 이전 — 개인 폰 임시 설치 종료</a:t>
                       </a:r>
                       <a:endParaRPr lang="ko-KR" altLang="en-US" sz="1000" b="0" i="0" u="none" strike="noStrike">
                         <a:solidFill>
@@ -13170,346 +14187,7 @@
                 </a:tc>
                 <a:extLst>
                   <a:ext uri="{0D108BD9-81ED-4DB2-BD59-A6C34878D82A}">
-                    <a16:rowId xmlns:a16="http://schemas.microsoft.com/office/drawing/2014/main" val="2710345523"/>
-                  </a:ext>
-                </a:extLst>
-              </a:tr>
-              <a:tr h="379701">
-                <a:tc>
-                  <a:txBody>
-                    <a:bodyPr wrap="square"/>
-                    <a:lstStyle/>
-                    <a:p>
-                      <a:pPr algn="l" fontAlgn="ctr">
-                        <a:lnSpc>
-                          <a:spcPct val="115000"/>
-                        </a:lnSpc>
-                      </a:pPr>
-                      <a:r>
-                        <a:rPr sz="1050" b="0" i="0" u="none">
-                          <a:solidFill>
-                            <a:srgbClr val="404040"/>
-                          </a:solidFill>
-                          <a:latin typeface="맑은 고딕"/>
-                          <a:ea typeface="맑은 고딕"/>
-                          <a:cs typeface="맑은 고딕"/>
-                        </a:rPr>
-                        <a:t>3~5단계  경보 계산 코드 정리 · 장시간 안정성</a:t>
-                      </a:r>
-                      <a:endParaRPr lang="en-US" altLang="ko-KR" sz="1000" b="0" i="0" u="none" strike="noStrike">
-                        <a:solidFill>
-                          <a:srgbClr val="000000"/>
-                        </a:solidFill>
-                        <a:effectLst/>
-                        <a:latin typeface="맑은 고딕" panose="020B0503020000020004" pitchFamily="50" charset="-127"/>
-                        <a:ea typeface="맑은 고딕" panose="020B0503020000020004" pitchFamily="50" charset="-127"/>
-                      </a:endParaRPr>
-                    </a:p>
-                  </a:txBody>
-                  <a:tcPr marL="128016" marR="128016" marT="18288" anchor="ctr" marB="18288">
-                    <a:lnL w="6350" cap="flat" cmpd="sng" algn="ctr">
-                      <a:solidFill>
-                        <a:schemeClr val="tx1">
-                          <a:lumMod val="50000"/>
-                          <a:lumOff val="50000"/>
-                        </a:schemeClr>
-                      </a:solidFill>
-                      <a:prstDash val="solid"/>
-                      <a:round/>
-                      <a:headEnd type="none" w="med" len="med"/>
-                      <a:tailEnd type="none" w="med" len="med"/>
-                    </a:lnL>
-                    <a:lnR w="6350" cap="flat" cmpd="sng" algn="ctr">
-                      <a:solidFill>
-                        <a:schemeClr val="tx1">
-                          <a:lumMod val="50000"/>
-                          <a:lumOff val="50000"/>
-                        </a:schemeClr>
-                      </a:solidFill>
-                      <a:prstDash val="solid"/>
-                      <a:round/>
-                      <a:headEnd type="none" w="med" len="med"/>
-                      <a:tailEnd type="none" w="med" len="med"/>
-                    </a:lnR>
-                    <a:lnT w="6350" cap="flat" cmpd="sng" algn="ctr">
-                      <a:solidFill>
-                        <a:schemeClr val="tx1">
-                          <a:lumMod val="50000"/>
-                          <a:lumOff val="50000"/>
-                        </a:schemeClr>
-                      </a:solidFill>
-                      <a:prstDash val="solid"/>
-                      <a:round/>
-                      <a:headEnd type="none" w="med" len="med"/>
-                      <a:tailEnd type="none" w="med" len="med"/>
-                    </a:lnT>
-                    <a:lnB w="6350" cap="flat" cmpd="sng" algn="ctr">
-                      <a:solidFill>
-                        <a:schemeClr val="tx1">
-                          <a:lumMod val="50000"/>
-                          <a:lumOff val="50000"/>
-                        </a:schemeClr>
-                      </a:solidFill>
-                      <a:prstDash val="solid"/>
-                      <a:round/>
-                      <a:headEnd type="none" w="med" len="med"/>
-                      <a:tailEnd type="none" w="med" len="med"/>
-                    </a:lnB>
-                    <a:noFill/>
-                  </a:tcPr>
-                </a:tc>
-                <a:tc>
-                  <a:txBody>
-                    <a:bodyPr wrap="square"/>
-                    <a:lstStyle/>
-                    <a:p>
-                      <a:pPr algn="ctr" fontAlgn="ctr">
-                        <a:lnSpc>
-                          <a:spcPct val="115000"/>
-                        </a:lnSpc>
-                      </a:pPr>
-                      <a:r>
-                        <a:rPr sz="1050" b="0" i="0" u="none">
-                          <a:solidFill>
-                            <a:srgbClr val="404040"/>
-                          </a:solidFill>
-                          <a:latin typeface="맑은 고딕"/>
-                          <a:ea typeface="맑은 고딕"/>
-                          <a:cs typeface="맑은 고딕"/>
-                        </a:rPr>
-                        <a:t>제안자</a:t>
-                      </a:r>
-                      <a:endParaRPr lang="en-US" sz="1000" b="0" i="0" u="none" strike="noStrike">
-                        <a:solidFill>
-                          <a:srgbClr val="000000"/>
-                        </a:solidFill>
-                        <a:effectLst/>
-                        <a:latin typeface="맑은 고딕" panose="020B0503020000020004" pitchFamily="50" charset="-127"/>
-                        <a:ea typeface="맑은 고딕" panose="020B0503020000020004" pitchFamily="50" charset="-127"/>
-                      </a:endParaRPr>
-                    </a:p>
-                  </a:txBody>
-                  <a:tcPr marL="54864" marR="54864" marT="18288" anchor="ctr" marB="18288">
-                    <a:lnL w="6350" cap="flat" cmpd="sng" algn="ctr">
-                      <a:solidFill>
-                        <a:schemeClr val="tx1">
-                          <a:lumMod val="50000"/>
-                          <a:lumOff val="50000"/>
-                        </a:schemeClr>
-                      </a:solidFill>
-                      <a:prstDash val="solid"/>
-                      <a:round/>
-                      <a:headEnd type="none" w="med" len="med"/>
-                      <a:tailEnd type="none" w="med" len="med"/>
-                    </a:lnL>
-                    <a:lnR w="6350" cap="flat" cmpd="sng" algn="ctr">
-                      <a:solidFill>
-                        <a:schemeClr val="tx1">
-                          <a:lumMod val="50000"/>
-                          <a:lumOff val="50000"/>
-                        </a:schemeClr>
-                      </a:solidFill>
-                      <a:prstDash val="solid"/>
-                      <a:round/>
-                      <a:headEnd type="none" w="med" len="med"/>
-                      <a:tailEnd type="none" w="med" len="med"/>
-                    </a:lnR>
-                    <a:lnT w="6350" cap="flat" cmpd="sng" algn="ctr">
-                      <a:solidFill>
-                        <a:schemeClr val="tx1">
-                          <a:lumMod val="50000"/>
-                          <a:lumOff val="50000"/>
-                        </a:schemeClr>
-                      </a:solidFill>
-                      <a:prstDash val="solid"/>
-                      <a:round/>
-                      <a:headEnd type="none" w="med" len="med"/>
-                      <a:tailEnd type="none" w="med" len="med"/>
-                    </a:lnT>
-                    <a:lnB w="6350" cap="flat" cmpd="sng" algn="ctr">
-                      <a:solidFill>
-                        <a:schemeClr val="tx1">
-                          <a:lumMod val="50000"/>
-                          <a:lumOff val="50000"/>
-                        </a:schemeClr>
-                      </a:solidFill>
-                      <a:prstDash val="solid"/>
-                      <a:round/>
-                      <a:headEnd type="none" w="med" len="med"/>
-                      <a:tailEnd type="none" w="med" len="med"/>
-                    </a:lnB>
-                    <a:noFill/>
-                  </a:tcPr>
-                </a:tc>
-                <a:tc>
-                  <a:txBody>
-                    <a:bodyPr wrap="square"/>
-                    <a:lstStyle/>
-                    <a:p>
-                      <a:pPr algn="ctr" fontAlgn="ctr">
-                        <a:lnSpc>
-                          <a:spcPct val="115000"/>
-                        </a:lnSpc>
-                      </a:pPr>
-                      <a:r>
-                        <a:rPr sz="1050" b="0" i="0" u="none">
-                          <a:solidFill>
-                            <a:srgbClr val="404040"/>
-                          </a:solidFill>
-                          <a:latin typeface="맑은 고딕"/>
-                          <a:ea typeface="맑은 고딕"/>
-                          <a:cs typeface="맑은 고딕"/>
-                        </a:rPr>
-                        <a:t>2단계 후</a:t>
-                      </a:r>
-                      <a:endParaRPr lang="en-US" altLang="ko-KR" sz="1000" b="0" i="0" u="none" strike="noStrike">
-                        <a:solidFill>
-                          <a:srgbClr val="000000"/>
-                        </a:solidFill>
-                        <a:effectLst/>
-                        <a:latin typeface="맑은 고딕" panose="020B0503020000020004" pitchFamily="50" charset="-127"/>
-                        <a:ea typeface="맑은 고딕" panose="020B0503020000020004" pitchFamily="50" charset="-127"/>
-                      </a:endParaRPr>
-                    </a:p>
-                  </a:txBody>
-                  <a:tcPr marL="54864" marR="54864" marT="18288" anchor="ctr" marB="18288">
-                    <a:lnL w="6350" cap="flat" cmpd="sng" algn="ctr">
-                      <a:solidFill>
-                        <a:schemeClr val="tx1">
-                          <a:lumMod val="50000"/>
-                          <a:lumOff val="50000"/>
-                        </a:schemeClr>
-                      </a:solidFill>
-                      <a:prstDash val="solid"/>
-                      <a:round/>
-                      <a:headEnd type="none" w="med" len="med"/>
-                      <a:tailEnd type="none" w="med" len="med"/>
-                    </a:lnL>
-                    <a:lnR w="6350" cap="flat" cmpd="sng" algn="ctr">
-                      <a:solidFill>
-                        <a:schemeClr val="tx1">
-                          <a:lumMod val="50000"/>
-                          <a:lumOff val="50000"/>
-                        </a:schemeClr>
-                      </a:solidFill>
-                      <a:prstDash val="solid"/>
-                      <a:round/>
-                      <a:headEnd type="none" w="med" len="med"/>
-                      <a:tailEnd type="none" w="med" len="med"/>
-                    </a:lnR>
-                    <a:lnT w="6350" cap="flat" cmpd="sng" algn="ctr">
-                      <a:solidFill>
-                        <a:schemeClr val="tx1">
-                          <a:lumMod val="50000"/>
-                          <a:lumOff val="50000"/>
-                        </a:schemeClr>
-                      </a:solidFill>
-                      <a:prstDash val="solid"/>
-                      <a:round/>
-                      <a:headEnd type="none" w="med" len="med"/>
-                      <a:tailEnd type="none" w="med" len="med"/>
-                    </a:lnT>
-                    <a:lnB w="6350" cap="flat" cmpd="sng" algn="ctr">
-                      <a:solidFill>
-                        <a:schemeClr val="tx1">
-                          <a:lumMod val="50000"/>
-                          <a:lumOff val="50000"/>
-                        </a:schemeClr>
-                      </a:solidFill>
-                      <a:prstDash val="solid"/>
-                      <a:round/>
-                      <a:headEnd type="none" w="med" len="med"/>
-                      <a:tailEnd type="none" w="med" len="med"/>
-                    </a:lnB>
-                    <a:noFill/>
-                  </a:tcPr>
-                </a:tc>
-                <a:tc>
-                  <a:txBody>
-                    <a:bodyPr wrap="square"/>
-                    <a:lstStyle/>
-                    <a:p>
-                      <a:pPr algn="ctr" fontAlgn="ctr">
-                        <a:lnSpc>
-                          <a:spcPct val="115000"/>
-                        </a:lnSpc>
-                      </a:pPr>
-                      <a:r>
-                        <a:rPr sz="1050" b="1" i="0" u="none">
-                          <a:solidFill>
-                            <a:srgbClr val="6B7278"/>
-                          </a:solidFill>
-                          <a:latin typeface="맑은 고딕"/>
-                          <a:ea typeface="맑은 고딕"/>
-                          <a:cs typeface="맑은 고딕"/>
-                        </a:rPr>
-                        <a:t>예정</a:t>
-                      </a:r>
-                      <a:endParaRPr lang="ko-KR" altLang="en-US" sz="1000" b="0" i="0" u="none" strike="noStrike">
-                        <a:solidFill>
-                          <a:srgbClr val="000000"/>
-                        </a:solidFill>
-                        <a:effectLst/>
-                        <a:latin typeface="맑은 고딕" panose="020B0503020000020004" pitchFamily="50" charset="-127"/>
-                        <a:ea typeface="맑은 고딕" panose="020B0503020000020004" pitchFamily="50" charset="-127"/>
-                      </a:endParaRPr>
-                    </a:p>
-                  </a:txBody>
-                  <a:tcPr marL="54864" marR="54864" marT="18288" anchor="ctr" marB="18288">
-                    <a:lnL w="6350" cap="flat" cmpd="sng" algn="ctr">
-                      <a:solidFill>
-                        <a:schemeClr val="tx1">
-                          <a:lumMod val="50000"/>
-                          <a:lumOff val="50000"/>
-                        </a:schemeClr>
-                      </a:solidFill>
-                      <a:prstDash val="solid"/>
-                      <a:round/>
-                      <a:headEnd type="none" w="med" len="med"/>
-                      <a:tailEnd type="none" w="med" len="med"/>
-                    </a:lnL>
-                    <a:lnR w="6350" cap="flat" cmpd="sng" algn="ctr">
-                      <a:solidFill>
-                        <a:schemeClr val="tx1">
-                          <a:lumMod val="50000"/>
-                          <a:lumOff val="50000"/>
-                        </a:schemeClr>
-                      </a:solidFill>
-                      <a:prstDash val="solid"/>
-                      <a:round/>
-                      <a:headEnd type="none" w="med" len="med"/>
-                      <a:tailEnd type="none" w="med" len="med"/>
-                    </a:lnR>
-                    <a:lnT w="6350" cap="flat" cmpd="sng" algn="ctr">
-                      <a:solidFill>
-                        <a:schemeClr val="tx1">
-                          <a:lumMod val="50000"/>
-                          <a:lumOff val="50000"/>
-                        </a:schemeClr>
-                      </a:solidFill>
-                      <a:prstDash val="solid"/>
-                      <a:round/>
-                      <a:headEnd type="none" w="med" len="med"/>
-                      <a:tailEnd type="none" w="med" len="med"/>
-                    </a:lnT>
-                    <a:lnB w="6350" cap="flat" cmpd="sng" algn="ctr">
-                      <a:solidFill>
-                        <a:schemeClr val="tx1">
-                          <a:lumMod val="50000"/>
-                          <a:lumOff val="50000"/>
-                        </a:schemeClr>
-                      </a:solidFill>
-                      <a:prstDash val="solid"/>
-                      <a:round/>
-                      <a:headEnd type="none" w="med" len="med"/>
-                      <a:tailEnd type="none" w="med" len="med"/>
-                    </a:lnB>
-                    <a:noFill/>
-                  </a:tcPr>
-                </a:tc>
-                <a:extLst>
-                  <a:ext uri="{0D108BD9-81ED-4DB2-BD59-A6C34878D82A}">
-                    <a16:rowId xmlns:a16="http://schemas.microsoft.com/office/drawing/2014/main" val="2003406257"/>
+                    <a16:rowId xmlns:a16="http://schemas.microsoft.com/office/drawing/2014/main" val="3646139239"/>
                   </a:ext>
                 </a:extLst>
               </a:tr>
@@ -13617,684 +14295,6 @@
                           <a:cs typeface="맑은 고딕"/>
                         </a:rPr>
                         <a:t>안전 · 운영</a:t>
-                      </a:r>
-                      <a:endParaRPr lang="en-US" sz="1000" b="0" i="0" u="none" strike="noStrike">
-                        <a:solidFill>
-                          <a:srgbClr val="000000"/>
-                        </a:solidFill>
-                        <a:effectLst/>
-                        <a:latin typeface="맑은 고딕" panose="020B0503020000020004" pitchFamily="50" charset="-127"/>
-                        <a:ea typeface="맑은 고딕" panose="020B0503020000020004" pitchFamily="50" charset="-127"/>
-                      </a:endParaRPr>
-                    </a:p>
-                  </a:txBody>
-                  <a:tcPr marL="54864" marR="54864" marT="18288" anchor="ctr" marB="18288">
-                    <a:lnL w="6350" cap="flat" cmpd="sng" algn="ctr">
-                      <a:solidFill>
-                        <a:schemeClr val="tx1">
-                          <a:lumMod val="50000"/>
-                          <a:lumOff val="50000"/>
-                        </a:schemeClr>
-                      </a:solidFill>
-                      <a:prstDash val="solid"/>
-                      <a:round/>
-                      <a:headEnd type="none" w="med" len="med"/>
-                      <a:tailEnd type="none" w="med" len="med"/>
-                    </a:lnL>
-                    <a:lnR w="6350" cap="flat" cmpd="sng" algn="ctr">
-                      <a:solidFill>
-                        <a:schemeClr val="tx1">
-                          <a:lumMod val="50000"/>
-                          <a:lumOff val="50000"/>
-                        </a:schemeClr>
-                      </a:solidFill>
-                      <a:prstDash val="solid"/>
-                      <a:round/>
-                      <a:headEnd type="none" w="med" len="med"/>
-                      <a:tailEnd type="none" w="med" len="med"/>
-                    </a:lnR>
-                    <a:lnT w="6350" cap="flat" cmpd="sng" algn="ctr">
-                      <a:solidFill>
-                        <a:schemeClr val="tx1">
-                          <a:lumMod val="50000"/>
-                          <a:lumOff val="50000"/>
-                        </a:schemeClr>
-                      </a:solidFill>
-                      <a:prstDash val="solid"/>
-                      <a:round/>
-                      <a:headEnd type="none" w="med" len="med"/>
-                      <a:tailEnd type="none" w="med" len="med"/>
-                    </a:lnT>
-                    <a:lnB w="6350" cap="flat" cmpd="sng" algn="ctr">
-                      <a:solidFill>
-                        <a:schemeClr val="tx1">
-                          <a:lumMod val="50000"/>
-                          <a:lumOff val="50000"/>
-                        </a:schemeClr>
-                      </a:solidFill>
-                      <a:prstDash val="solid"/>
-                      <a:round/>
-                      <a:headEnd type="none" w="med" len="med"/>
-                      <a:tailEnd type="none" w="med" len="med"/>
-                    </a:lnB>
-                    <a:noFill/>
-                  </a:tcPr>
-                </a:tc>
-                <a:tc>
-                  <a:txBody>
-                    <a:bodyPr wrap="square"/>
-                    <a:lstStyle/>
-                    <a:p>
-                      <a:pPr algn="ctr" fontAlgn="ctr">
-                        <a:lnSpc>
-                          <a:spcPct val="115000"/>
-                        </a:lnSpc>
-                      </a:pPr>
-                      <a:r>
-                        <a:rPr sz="1050" b="0" i="0" u="none">
-                          <a:solidFill>
-                            <a:srgbClr val="404040"/>
-                          </a:solidFill>
-                          <a:latin typeface="맑은 고딕"/>
-                          <a:ea typeface="맑은 고딕"/>
-                          <a:cs typeface="맑은 고딕"/>
-                        </a:rPr>
-                        <a:t>확산 전</a:t>
-                      </a:r>
-                      <a:endParaRPr lang="en-US" altLang="ko-KR" sz="1000" b="0" i="0" u="none" strike="noStrike">
-                        <a:solidFill>
-                          <a:srgbClr val="000000"/>
-                        </a:solidFill>
-                        <a:effectLst/>
-                        <a:latin typeface="맑은 고딕" panose="020B0503020000020004" pitchFamily="50" charset="-127"/>
-                        <a:ea typeface="맑은 고딕" panose="020B0503020000020004" pitchFamily="50" charset="-127"/>
-                      </a:endParaRPr>
-                    </a:p>
-                  </a:txBody>
-                  <a:tcPr marL="54864" marR="54864" marT="18288" anchor="ctr" marB="18288">
-                    <a:lnL w="6350" cap="flat" cmpd="sng" algn="ctr">
-                      <a:solidFill>
-                        <a:schemeClr val="tx1">
-                          <a:lumMod val="50000"/>
-                          <a:lumOff val="50000"/>
-                        </a:schemeClr>
-                      </a:solidFill>
-                      <a:prstDash val="solid"/>
-                      <a:round/>
-                      <a:headEnd type="none" w="med" len="med"/>
-                      <a:tailEnd type="none" w="med" len="med"/>
-                    </a:lnL>
-                    <a:lnR w="6350" cap="flat" cmpd="sng" algn="ctr">
-                      <a:solidFill>
-                        <a:schemeClr val="tx1">
-                          <a:lumMod val="50000"/>
-                          <a:lumOff val="50000"/>
-                        </a:schemeClr>
-                      </a:solidFill>
-                      <a:prstDash val="solid"/>
-                      <a:round/>
-                      <a:headEnd type="none" w="med" len="med"/>
-                      <a:tailEnd type="none" w="med" len="med"/>
-                    </a:lnR>
-                    <a:lnT w="6350" cap="flat" cmpd="sng" algn="ctr">
-                      <a:solidFill>
-                        <a:schemeClr val="tx1">
-                          <a:lumMod val="50000"/>
-                          <a:lumOff val="50000"/>
-                        </a:schemeClr>
-                      </a:solidFill>
-                      <a:prstDash val="solid"/>
-                      <a:round/>
-                      <a:headEnd type="none" w="med" len="med"/>
-                      <a:tailEnd type="none" w="med" len="med"/>
-                    </a:lnT>
-                    <a:lnB w="6350" cap="flat" cmpd="sng" algn="ctr">
-                      <a:solidFill>
-                        <a:schemeClr val="tx1">
-                          <a:lumMod val="50000"/>
-                          <a:lumOff val="50000"/>
-                        </a:schemeClr>
-                      </a:solidFill>
-                      <a:prstDash val="solid"/>
-                      <a:round/>
-                      <a:headEnd type="none" w="med" len="med"/>
-                      <a:tailEnd type="none" w="med" len="med"/>
-                    </a:lnB>
-                    <a:noFill/>
-                  </a:tcPr>
-                </a:tc>
-                <a:tc>
-                  <a:txBody>
-                    <a:bodyPr wrap="square"/>
-                    <a:lstStyle/>
-                    <a:p>
-                      <a:pPr algn="ctr" fontAlgn="ctr">
-                        <a:lnSpc>
-                          <a:spcPct val="115000"/>
-                        </a:lnSpc>
-                      </a:pPr>
-                      <a:r>
-                        <a:rPr sz="1050" b="1" i="0" u="none">
-                          <a:solidFill>
-                            <a:srgbClr val="B9770B"/>
-                          </a:solidFill>
-                          <a:latin typeface="맑은 고딕"/>
-                          <a:ea typeface="맑은 고딕"/>
-                          <a:cs typeface="맑은 고딕"/>
-                        </a:rPr>
-                        <a:t>협조</a:t>
-                      </a:r>
-                      <a:endParaRPr lang="ko-KR" altLang="en-US" sz="1000" b="0" i="0" u="none" strike="noStrike">
-                        <a:solidFill>
-                          <a:srgbClr val="000000"/>
-                        </a:solidFill>
-                        <a:effectLst/>
-                        <a:latin typeface="맑은 고딕" panose="020B0503020000020004" pitchFamily="50" charset="-127"/>
-                        <a:ea typeface="맑은 고딕" panose="020B0503020000020004" pitchFamily="50" charset="-127"/>
-                      </a:endParaRPr>
-                    </a:p>
-                  </a:txBody>
-                  <a:tcPr marL="54864" marR="54864" marT="18288" anchor="ctr" marB="18288">
-                    <a:lnL w="6350" cap="flat" cmpd="sng" algn="ctr">
-                      <a:solidFill>
-                        <a:schemeClr val="tx1">
-                          <a:lumMod val="50000"/>
-                          <a:lumOff val="50000"/>
-                        </a:schemeClr>
-                      </a:solidFill>
-                      <a:prstDash val="solid"/>
-                      <a:round/>
-                      <a:headEnd type="none" w="med" len="med"/>
-                      <a:tailEnd type="none" w="med" len="med"/>
-                    </a:lnL>
-                    <a:lnR w="6350" cap="flat" cmpd="sng" algn="ctr">
-                      <a:solidFill>
-                        <a:schemeClr val="tx1">
-                          <a:lumMod val="50000"/>
-                          <a:lumOff val="50000"/>
-                        </a:schemeClr>
-                      </a:solidFill>
-                      <a:prstDash val="solid"/>
-                      <a:round/>
-                      <a:headEnd type="none" w="med" len="med"/>
-                      <a:tailEnd type="none" w="med" len="med"/>
-                    </a:lnR>
-                    <a:lnT w="6350" cap="flat" cmpd="sng" algn="ctr">
-                      <a:solidFill>
-                        <a:schemeClr val="tx1">
-                          <a:lumMod val="50000"/>
-                          <a:lumOff val="50000"/>
-                        </a:schemeClr>
-                      </a:solidFill>
-                      <a:prstDash val="solid"/>
-                      <a:round/>
-                      <a:headEnd type="none" w="med" len="med"/>
-                      <a:tailEnd type="none" w="med" len="med"/>
-                    </a:lnT>
-                    <a:lnB w="6350" cap="flat" cmpd="sng" algn="ctr">
-                      <a:solidFill>
-                        <a:schemeClr val="tx1">
-                          <a:lumMod val="50000"/>
-                          <a:lumOff val="50000"/>
-                        </a:schemeClr>
-                      </a:solidFill>
-                      <a:prstDash val="solid"/>
-                      <a:round/>
-                      <a:headEnd type="none" w="med" len="med"/>
-                      <a:tailEnd type="none" w="med" len="med"/>
-                    </a:lnB>
-                    <a:noFill/>
-                  </a:tcPr>
-                </a:tc>
-                <a:extLst>
-                  <a:ext uri="{0D108BD9-81ED-4DB2-BD59-A6C34878D82A}">
-                    <a16:rowId xmlns:a16="http://schemas.microsoft.com/office/drawing/2014/main" val="4042454525"/>
-                  </a:ext>
-                </a:extLst>
-              </a:tr>
-              <a:tr h="379701">
-                <a:tc>
-                  <a:txBody>
-                    <a:bodyPr wrap="square"/>
-                    <a:lstStyle/>
-                    <a:p>
-                      <a:pPr algn="l" fontAlgn="ctr">
-                        <a:lnSpc>
-                          <a:spcPct val="115000"/>
-                        </a:lnSpc>
-                      </a:pPr>
-                      <a:r>
-                        <a:rPr sz="1050" b="0" i="0" u="none">
-                          <a:solidFill>
-                            <a:srgbClr val="404040"/>
-                          </a:solidFill>
-                          <a:latin typeface="맑은 고딕"/>
-                          <a:ea typeface="맑은 고딕"/>
-                          <a:cs typeface="맑은 고딕"/>
-                        </a:rPr>
-                        <a:t>보안 조치 — 릴리스 서명 키 발급 · 업데이트 APK 검증</a:t>
-                      </a:r>
-                      <a:endParaRPr lang="ko-KR" altLang="en-US" sz="1000" b="0" i="0" u="none" strike="noStrike">
-                        <a:solidFill>
-                          <a:srgbClr val="000000"/>
-                        </a:solidFill>
-                        <a:effectLst/>
-                        <a:latin typeface="맑은 고딕" panose="020B0503020000020004" pitchFamily="50" charset="-127"/>
-                        <a:ea typeface="맑은 고딕" panose="020B0503020000020004" pitchFamily="50" charset="-127"/>
-                      </a:endParaRPr>
-                    </a:p>
-                  </a:txBody>
-                  <a:tcPr marL="128016" marR="128016" marT="18288" anchor="ctr" marB="18288">
-                    <a:lnL w="6350" cap="flat" cmpd="sng" algn="ctr">
-                      <a:solidFill>
-                        <a:schemeClr val="tx1">
-                          <a:lumMod val="50000"/>
-                          <a:lumOff val="50000"/>
-                        </a:schemeClr>
-                      </a:solidFill>
-                      <a:prstDash val="solid"/>
-                      <a:round/>
-                      <a:headEnd type="none" w="med" len="med"/>
-                      <a:tailEnd type="none" w="med" len="med"/>
-                    </a:lnL>
-                    <a:lnR w="6350" cap="flat" cmpd="sng" algn="ctr">
-                      <a:solidFill>
-                        <a:schemeClr val="tx1">
-                          <a:lumMod val="50000"/>
-                          <a:lumOff val="50000"/>
-                        </a:schemeClr>
-                      </a:solidFill>
-                      <a:prstDash val="solid"/>
-                      <a:round/>
-                      <a:headEnd type="none" w="med" len="med"/>
-                      <a:tailEnd type="none" w="med" len="med"/>
-                    </a:lnR>
-                    <a:lnT w="6350" cap="flat" cmpd="sng" algn="ctr">
-                      <a:solidFill>
-                        <a:schemeClr val="tx1">
-                          <a:lumMod val="50000"/>
-                          <a:lumOff val="50000"/>
-                        </a:schemeClr>
-                      </a:solidFill>
-                      <a:prstDash val="solid"/>
-                      <a:round/>
-                      <a:headEnd type="none" w="med" len="med"/>
-                      <a:tailEnd type="none" w="med" len="med"/>
-                    </a:lnT>
-                    <a:lnB w="6350" cap="flat" cmpd="sng" algn="ctr">
-                      <a:solidFill>
-                        <a:schemeClr val="tx1">
-                          <a:lumMod val="50000"/>
-                          <a:lumOff val="50000"/>
-                        </a:schemeClr>
-                      </a:solidFill>
-                      <a:prstDash val="solid"/>
-                      <a:round/>
-                      <a:headEnd type="none" w="med" len="med"/>
-                      <a:tailEnd type="none" w="med" len="med"/>
-                    </a:lnB>
-                    <a:noFill/>
-                  </a:tcPr>
-                </a:tc>
-                <a:tc>
-                  <a:txBody>
-                    <a:bodyPr wrap="square"/>
-                    <a:lstStyle/>
-                    <a:p>
-                      <a:pPr algn="ctr" fontAlgn="ctr">
-                        <a:lnSpc>
-                          <a:spcPct val="115000"/>
-                        </a:lnSpc>
-                      </a:pPr>
-                      <a:r>
-                        <a:rPr sz="1050" b="0" i="0" u="none">
-                          <a:solidFill>
-                            <a:srgbClr val="404040"/>
-                          </a:solidFill>
-                          <a:latin typeface="맑은 고딕"/>
-                          <a:ea typeface="맑은 고딕"/>
-                          <a:cs typeface="맑은 고딕"/>
-                        </a:rPr>
-                        <a:t>제안자 · 보안</a:t>
-                      </a:r>
-                      <a:endParaRPr lang="en-US" sz="1000" b="0" i="0" u="none" strike="noStrike">
-                        <a:solidFill>
-                          <a:srgbClr val="000000"/>
-                        </a:solidFill>
-                        <a:effectLst/>
-                        <a:latin typeface="맑은 고딕" panose="020B0503020000020004" pitchFamily="50" charset="-127"/>
-                        <a:ea typeface="맑은 고딕" panose="020B0503020000020004" pitchFamily="50" charset="-127"/>
-                      </a:endParaRPr>
-                    </a:p>
-                  </a:txBody>
-                  <a:tcPr marL="54864" marR="54864" marT="18288" anchor="ctr" marB="18288">
-                    <a:lnL w="6350" cap="flat" cmpd="sng" algn="ctr">
-                      <a:solidFill>
-                        <a:schemeClr val="tx1">
-                          <a:lumMod val="50000"/>
-                          <a:lumOff val="50000"/>
-                        </a:schemeClr>
-                      </a:solidFill>
-                      <a:prstDash val="solid"/>
-                      <a:round/>
-                      <a:headEnd type="none" w="med" len="med"/>
-                      <a:tailEnd type="none" w="med" len="med"/>
-                    </a:lnL>
-                    <a:lnR w="6350" cap="flat" cmpd="sng" algn="ctr">
-                      <a:solidFill>
-                        <a:schemeClr val="tx1">
-                          <a:lumMod val="50000"/>
-                          <a:lumOff val="50000"/>
-                        </a:schemeClr>
-                      </a:solidFill>
-                      <a:prstDash val="solid"/>
-                      <a:round/>
-                      <a:headEnd type="none" w="med" len="med"/>
-                      <a:tailEnd type="none" w="med" len="med"/>
-                    </a:lnR>
-                    <a:lnT w="6350" cap="flat" cmpd="sng" algn="ctr">
-                      <a:solidFill>
-                        <a:schemeClr val="tx1">
-                          <a:lumMod val="50000"/>
-                          <a:lumOff val="50000"/>
-                        </a:schemeClr>
-                      </a:solidFill>
-                      <a:prstDash val="solid"/>
-                      <a:round/>
-                      <a:headEnd type="none" w="med" len="med"/>
-                      <a:tailEnd type="none" w="med" len="med"/>
-                    </a:lnT>
-                    <a:lnB w="6350" cap="flat" cmpd="sng" algn="ctr">
-                      <a:solidFill>
-                        <a:schemeClr val="tx1">
-                          <a:lumMod val="50000"/>
-                          <a:lumOff val="50000"/>
-                        </a:schemeClr>
-                      </a:solidFill>
-                      <a:prstDash val="solid"/>
-                      <a:round/>
-                      <a:headEnd type="none" w="med" len="med"/>
-                      <a:tailEnd type="none" w="med" len="med"/>
-                    </a:lnB>
-                    <a:noFill/>
-                  </a:tcPr>
-                </a:tc>
-                <a:tc>
-                  <a:txBody>
-                    <a:bodyPr wrap="square"/>
-                    <a:lstStyle/>
-                    <a:p>
-                      <a:pPr algn="ctr" fontAlgn="ctr">
-                        <a:lnSpc>
-                          <a:spcPct val="115000"/>
-                        </a:lnSpc>
-                      </a:pPr>
-                      <a:r>
-                        <a:rPr sz="1050" b="0" i="0" u="none">
-                          <a:solidFill>
-                            <a:srgbClr val="404040"/>
-                          </a:solidFill>
-                          <a:latin typeface="맑은 고딕"/>
-                          <a:ea typeface="맑은 고딕"/>
-                          <a:cs typeface="맑은 고딕"/>
-                        </a:rPr>
-                        <a:t>확산 전</a:t>
-                      </a:r>
-                      <a:endParaRPr lang="en-US" altLang="ko-KR" sz="1000" b="0" i="0" u="none" strike="noStrike">
-                        <a:solidFill>
-                          <a:srgbClr val="000000"/>
-                        </a:solidFill>
-                        <a:effectLst/>
-                        <a:latin typeface="맑은 고딕" panose="020B0503020000020004" pitchFamily="50" charset="-127"/>
-                        <a:ea typeface="맑은 고딕" panose="020B0503020000020004" pitchFamily="50" charset="-127"/>
-                      </a:endParaRPr>
-                    </a:p>
-                  </a:txBody>
-                  <a:tcPr marL="54864" marR="54864" marT="18288" anchor="ctr" marB="18288">
-                    <a:lnL w="6350" cap="flat" cmpd="sng" algn="ctr">
-                      <a:solidFill>
-                        <a:schemeClr val="tx1">
-                          <a:lumMod val="50000"/>
-                          <a:lumOff val="50000"/>
-                        </a:schemeClr>
-                      </a:solidFill>
-                      <a:prstDash val="solid"/>
-                      <a:round/>
-                      <a:headEnd type="none" w="med" len="med"/>
-                      <a:tailEnd type="none" w="med" len="med"/>
-                    </a:lnL>
-                    <a:lnR w="6350" cap="flat" cmpd="sng" algn="ctr">
-                      <a:solidFill>
-                        <a:schemeClr val="tx1">
-                          <a:lumMod val="50000"/>
-                          <a:lumOff val="50000"/>
-                        </a:schemeClr>
-                      </a:solidFill>
-                      <a:prstDash val="solid"/>
-                      <a:round/>
-                      <a:headEnd type="none" w="med" len="med"/>
-                      <a:tailEnd type="none" w="med" len="med"/>
-                    </a:lnR>
-                    <a:lnT w="6350" cap="flat" cmpd="sng" algn="ctr">
-                      <a:solidFill>
-                        <a:schemeClr val="tx1">
-                          <a:lumMod val="50000"/>
-                          <a:lumOff val="50000"/>
-                        </a:schemeClr>
-                      </a:solidFill>
-                      <a:prstDash val="solid"/>
-                      <a:round/>
-                      <a:headEnd type="none" w="med" len="med"/>
-                      <a:tailEnd type="none" w="med" len="med"/>
-                    </a:lnT>
-                    <a:lnB w="6350" cap="flat" cmpd="sng" algn="ctr">
-                      <a:solidFill>
-                        <a:schemeClr val="tx1">
-                          <a:lumMod val="50000"/>
-                          <a:lumOff val="50000"/>
-                        </a:schemeClr>
-                      </a:solidFill>
-                      <a:prstDash val="solid"/>
-                      <a:round/>
-                      <a:headEnd type="none" w="med" len="med"/>
-                      <a:tailEnd type="none" w="med" len="med"/>
-                    </a:lnB>
-                    <a:noFill/>
-                  </a:tcPr>
-                </a:tc>
-                <a:tc>
-                  <a:txBody>
-                    <a:bodyPr wrap="square"/>
-                    <a:lstStyle/>
-                    <a:p>
-                      <a:pPr algn="ctr" fontAlgn="ctr">
-                        <a:lnSpc>
-                          <a:spcPct val="115000"/>
-                        </a:lnSpc>
-                      </a:pPr>
-                      <a:r>
-                        <a:rPr sz="1050" b="1" i="0" u="none">
-                          <a:solidFill>
-                            <a:srgbClr val="B9770B"/>
-                          </a:solidFill>
-                          <a:latin typeface="맑은 고딕"/>
-                          <a:ea typeface="맑은 고딕"/>
-                          <a:cs typeface="맑은 고딕"/>
-                        </a:rPr>
-                        <a:t>협조</a:t>
-                      </a:r>
-                      <a:endParaRPr lang="ko-KR" altLang="en-US" sz="1000" b="0" i="0" u="none" strike="noStrike">
-                        <a:solidFill>
-                          <a:srgbClr val="000000"/>
-                        </a:solidFill>
-                        <a:effectLst/>
-                        <a:latin typeface="맑은 고딕" panose="020B0503020000020004" pitchFamily="50" charset="-127"/>
-                        <a:ea typeface="맑은 고딕" panose="020B0503020000020004" pitchFamily="50" charset="-127"/>
-                      </a:endParaRPr>
-                    </a:p>
-                  </a:txBody>
-                  <a:tcPr marL="54864" marR="54864" marT="18288" anchor="ctr" marB="18288">
-                    <a:lnL w="6350" cap="flat" cmpd="sng" algn="ctr">
-                      <a:solidFill>
-                        <a:schemeClr val="tx1">
-                          <a:lumMod val="50000"/>
-                          <a:lumOff val="50000"/>
-                        </a:schemeClr>
-                      </a:solidFill>
-                      <a:prstDash val="solid"/>
-                      <a:round/>
-                      <a:headEnd type="none" w="med" len="med"/>
-                      <a:tailEnd type="none" w="med" len="med"/>
-                    </a:lnL>
-                    <a:lnR w="6350" cap="flat" cmpd="sng" algn="ctr">
-                      <a:solidFill>
-                        <a:schemeClr val="tx1">
-                          <a:lumMod val="50000"/>
-                          <a:lumOff val="50000"/>
-                        </a:schemeClr>
-                      </a:solidFill>
-                      <a:prstDash val="solid"/>
-                      <a:round/>
-                      <a:headEnd type="none" w="med" len="med"/>
-                      <a:tailEnd type="none" w="med" len="med"/>
-                    </a:lnR>
-                    <a:lnT w="6350" cap="flat" cmpd="sng" algn="ctr">
-                      <a:solidFill>
-                        <a:schemeClr val="tx1">
-                          <a:lumMod val="50000"/>
-                          <a:lumOff val="50000"/>
-                        </a:schemeClr>
-                      </a:solidFill>
-                      <a:prstDash val="solid"/>
-                      <a:round/>
-                      <a:headEnd type="none" w="med" len="med"/>
-                      <a:tailEnd type="none" w="med" len="med"/>
-                    </a:lnT>
-                    <a:lnB w="6350" cap="flat" cmpd="sng" algn="ctr">
-                      <a:solidFill>
-                        <a:schemeClr val="tx1">
-                          <a:lumMod val="50000"/>
-                          <a:lumOff val="50000"/>
-                        </a:schemeClr>
-                      </a:solidFill>
-                      <a:prstDash val="solid"/>
-                      <a:round/>
-                      <a:headEnd type="none" w="med" len="med"/>
-                      <a:tailEnd type="none" w="med" len="med"/>
-                    </a:lnB>
-                    <a:noFill/>
-                  </a:tcPr>
-                </a:tc>
-                <a:extLst>
-                  <a:ext uri="{0D108BD9-81ED-4DB2-BD59-A6C34878D82A}">
-                    <a16:rowId xmlns:a16="http://schemas.microsoft.com/office/drawing/2014/main" val="3646139239"/>
-                  </a:ext>
-                </a:extLst>
-              </a:tr>
-              <a:tr h="379701">
-                <a:tc>
-                  <a:txBody>
-                    <a:bodyPr wrap="square"/>
-                    <a:lstStyle/>
-                    <a:p>
-                      <a:pPr algn="l" fontAlgn="ctr">
-                        <a:lnSpc>
-                          <a:spcPct val="115000"/>
-                        </a:lnSpc>
-                      </a:pPr>
-                      <a:r>
-                        <a:rPr sz="1050" b="0" i="0" u="none">
-                          <a:solidFill>
-                            <a:srgbClr val="404040"/>
-                          </a:solidFill>
-                          <a:latin typeface="맑은 고딕"/>
-                          <a:ea typeface="맑은 고딕"/>
-                          <a:cs typeface="맑은 고딕"/>
-                        </a:rPr>
-                        <a:t>정식 과제 등록 · 유지보수 주체 지정</a:t>
-                      </a:r>
-                      <a:endParaRPr lang="ko-KR" altLang="en-US" sz="1000" b="0" i="0" u="none" strike="noStrike">
-                        <a:solidFill>
-                          <a:srgbClr val="000000"/>
-                        </a:solidFill>
-                        <a:effectLst/>
-                        <a:latin typeface="맑은 고딕" panose="020B0503020000020004" pitchFamily="50" charset="-127"/>
-                        <a:ea typeface="맑은 고딕" panose="020B0503020000020004" pitchFamily="50" charset="-127"/>
-                      </a:endParaRPr>
-                    </a:p>
-                  </a:txBody>
-                  <a:tcPr marL="128016" marR="128016" marT="18288" anchor="ctr" marB="18288">
-                    <a:lnL w="6350" cap="flat" cmpd="sng" algn="ctr">
-                      <a:solidFill>
-                        <a:schemeClr val="tx1">
-                          <a:lumMod val="50000"/>
-                          <a:lumOff val="50000"/>
-                        </a:schemeClr>
-                      </a:solidFill>
-                      <a:prstDash val="solid"/>
-                      <a:round/>
-                      <a:headEnd type="none" w="med" len="med"/>
-                      <a:tailEnd type="none" w="med" len="med"/>
-                    </a:lnL>
-                    <a:lnR w="6350" cap="flat" cmpd="sng" algn="ctr">
-                      <a:solidFill>
-                        <a:schemeClr val="tx1">
-                          <a:lumMod val="50000"/>
-                          <a:lumOff val="50000"/>
-                        </a:schemeClr>
-                      </a:solidFill>
-                      <a:prstDash val="solid"/>
-                      <a:round/>
-                      <a:headEnd type="none" w="med" len="med"/>
-                      <a:tailEnd type="none" w="med" len="med"/>
-                    </a:lnR>
-                    <a:lnT w="6350" cap="flat" cmpd="sng" algn="ctr">
-                      <a:solidFill>
-                        <a:schemeClr val="tx1">
-                          <a:lumMod val="50000"/>
-                          <a:lumOff val="50000"/>
-                        </a:schemeClr>
-                      </a:solidFill>
-                      <a:prstDash val="solid"/>
-                      <a:round/>
-                      <a:headEnd type="none" w="med" len="med"/>
-                      <a:tailEnd type="none" w="med" len="med"/>
-                    </a:lnT>
-                    <a:lnB w="6350" cap="flat" cmpd="sng" algn="ctr">
-                      <a:solidFill>
-                        <a:schemeClr val="tx1">
-                          <a:lumMod val="50000"/>
-                          <a:lumOff val="50000"/>
-                        </a:schemeClr>
-                      </a:solidFill>
-                      <a:prstDash val="solid"/>
-                      <a:round/>
-                      <a:headEnd type="none" w="med" len="med"/>
-                      <a:tailEnd type="none" w="med" len="med"/>
-                    </a:lnB>
-                    <a:noFill/>
-                  </a:tcPr>
-                </a:tc>
-                <a:tc>
-                  <a:txBody>
-                    <a:bodyPr wrap="square"/>
-                    <a:lstStyle/>
-                    <a:p>
-                      <a:pPr algn="ctr" fontAlgn="ctr">
-                        <a:lnSpc>
-                          <a:spcPct val="115000"/>
-                        </a:lnSpc>
-                      </a:pPr>
-                      <a:r>
-                        <a:rPr sz="1050" b="0" i="0" u="none">
-                          <a:solidFill>
-                            <a:srgbClr val="404040"/>
-                          </a:solidFill>
-                          <a:latin typeface="맑은 고딕"/>
-                          <a:ea typeface="맑은 고딕"/>
-                          <a:cs typeface="맑은 고딕"/>
-                        </a:rPr>
-                        <a:t>운영 / 기획</a:t>
                       </a:r>
                       <a:endParaRPr lang="en-US" sz="1000" b="0" i="0" u="none" strike="noStrike">
                         <a:solidFill>
@@ -14740,7 +14740,7 @@
                           <a:ea typeface="맑은 고딕"/>
                           <a:cs typeface="맑은 고딕"/>
                         </a:rPr>
-                        <a:t>2단계 완료 후</a:t>
+                        <a:t>승인 후</a:t>
                       </a:r>
                       <a:endParaRPr lang="en-US" altLang="ko-KR" sz="1000" b="0" i="0" u="none" strike="noStrike">
                         <a:solidFill>
@@ -15806,7 +15806,7 @@
                 <a:ea typeface="맑은 고딕"/>
                 <a:cs typeface="맑은 고딕"/>
               </a:rPr>
-              <a:t>앞으로의 개선 계획  1 ~ 5단계</a:t>
+              <a:t>개선 계획  1 ~ 5단계  —  4단계까지 완료</a:t>
             </a:r>
             <a:r>
               <a:rPr sz="1050" b="0" i="0" u="none">
@@ -16231,9 +16231,9 @@
                         </a:lnSpc>
                       </a:pPr>
                       <a:r>
-                        <a:rPr sz="1000" b="0" i="0" u="none">
+                        <a:rPr sz="1000" b="1" i="0" u="none">
                           <a:solidFill>
-                            <a:srgbClr val="404040"/>
+                            <a:srgbClr val="1B8A6B"/>
                           </a:solidFill>
                           <a:latin typeface="맑은 고딕"/>
                           <a:ea typeface="맑은 고딕"/>
@@ -16347,7 +16347,7 @@
                           <a:ea typeface="맑은 고딕"/>
                           <a:cs typeface="맑은 고딕"/>
                         </a:rPr>
-                        <a:t>안전 동작을 자동 검사로 고정 + 업무용 PDA 로 이전</a:t>
+                        <a:t>안전 동작을 자동 검사로 고정한다</a:t>
                       </a:r>
                     </a:p>
                   </a:txBody>
@@ -16445,15 +16445,15 @@
                         </a:lnSpc>
                       </a:pPr>
                       <a:r>
-                        <a:rPr sz="1000" b="0" i="0" u="none">
+                        <a:rPr sz="1000" b="1" i="0" u="none">
                           <a:solidFill>
-                            <a:srgbClr val="404040"/>
+                            <a:srgbClr val="1B8A6B"/>
                           </a:solidFill>
                           <a:latin typeface="맑은 고딕"/>
                           <a:ea typeface="맑은 고딕"/>
                           <a:cs typeface="맑은 고딕"/>
                         </a:rPr>
-                        <a:t>예정</a:t>
+                        <a:t>완료</a:t>
                       </a:r>
                     </a:p>
                   </a:txBody>
@@ -16659,15 +16659,15 @@
                         </a:lnSpc>
                       </a:pPr>
                       <a:r>
-                        <a:rPr sz="1000" b="0" i="0" u="none">
+                        <a:rPr sz="1000" b="1" i="0" u="none">
                           <a:solidFill>
-                            <a:srgbClr val="404040"/>
+                            <a:srgbClr val="1B8A6B"/>
                           </a:solidFill>
                           <a:latin typeface="맑은 고딕"/>
                           <a:ea typeface="맑은 고딕"/>
                           <a:cs typeface="맑은 고딕"/>
                         </a:rPr>
-                        <a:t>예정</a:t>
+                        <a:t>완료</a:t>
                       </a:r>
                     </a:p>
                   </a:txBody>
@@ -16775,7 +16775,7 @@
                           <a:ea typeface="맑은 고딕"/>
                           <a:cs typeface="맑은 고딕"/>
                         </a:rPr>
-                        <a:t>기기 상태 관리 방식을 하나로 통일한다</a:t>
+                        <a:t>기기 상태 관리 경로를 하나로 통일한다</a:t>
                       </a:r>
                     </a:p>
                   </a:txBody>
@@ -16873,15 +16873,15 @@
                         </a:lnSpc>
                       </a:pPr>
                       <a:r>
-                        <a:rPr sz="1000" b="0" i="0" u="none">
+                        <a:rPr sz="1000" b="1" i="0" u="none">
                           <a:solidFill>
-                            <a:srgbClr val="404040"/>
+                            <a:srgbClr val="1B8A6B"/>
                           </a:solidFill>
                           <a:latin typeface="맑은 고딕"/>
                           <a:ea typeface="맑은 고딕"/>
                           <a:cs typeface="맑은 고딕"/>
                         </a:rPr>
-                        <a:t>예정</a:t>
+                        <a:t>완료</a:t>
                       </a:r>
                     </a:p>
                   </a:txBody>
@@ -17089,13 +17089,13 @@
                       <a:r>
                         <a:rPr sz="1000" b="0" i="0" u="none">
                           <a:solidFill>
-                            <a:srgbClr val="404040"/>
+                            <a:srgbClr val="6B7278"/>
                           </a:solidFill>
                           <a:latin typeface="맑은 고딕"/>
                           <a:ea typeface="맑은 고딕"/>
                           <a:cs typeface="맑은 고딕"/>
                         </a:rPr>
-                        <a:t>예정</a:t>
+                        <a:t>남음</a:t>
                       </a:r>
                     </a:p>
                   </a:txBody>
@@ -17326,7 +17326,59 @@
                 <a:ea typeface="맑은 고딕"/>
                 <a:cs typeface="맑은 고딕"/>
               </a:rPr>
-              <a:t>  —  개선이 중간에 멈춰도 지금 버전이 현장에서 그대로 돌아 경보가 끊기지 않는다.</a:t>
+              <a:t>  —  단계마다 현장에 그대로 배포했고, 지금 버전이 계속 돌고 있다. 개선이 멈춰도 경보는 끊기지 않는다.</a:t>
+            </a:r>
+          </a:p>
+        </p:txBody>
+      </p:sp>
+      <p:sp>
+        <p:nvSpPr>
+          <p:cNvPr id="24" name="TextBox 23"/>
+          <p:cNvSpPr txBox="1"/>
+          <p:nvPr/>
+        </p:nvSpPr>
+        <p:spPr>
+          <a:xfrm>
+            <a:off x="1005840" y="5907024"/>
+            <a:ext cx="10241280" cy="292608"/>
+          </a:xfrm>
+          <a:prstGeom prst="rect">
+            <a:avLst/>
+          </a:prstGeom>
+          <a:noFill/>
+        </p:spPr>
+        <p:txBody>
+          <a:bodyPr wrap="square" lIns="18288" rIns="18288" tIns="0" bIns="0">
+            <a:spAutoFit/>
+          </a:bodyPr>
+          <a:lstStyle/>
+          <a:p>
+            <a:pPr algn="l">
+              <a:lnSpc>
+                <a:spcPct val="120000"/>
+              </a:lnSpc>
+            </a:pPr>
+            <a:r>
+              <a:rPr sz="1000" b="1" i="0" u="none">
+                <a:solidFill>
+                  <a:srgbClr val="053866"/>
+                </a:solidFill>
+                <a:latin typeface="맑은 고딕"/>
+                <a:ea typeface="맑은 고딕"/>
+                <a:cs typeface="맑은 고딕"/>
+              </a:rPr>
+              <a:t>현재  </a:t>
+            </a:r>
+            <a:r>
+              <a:rPr sz="1000" b="0" i="0" u="none">
+                <a:solidFill>
+                  <a:srgbClr val="404040"/>
+                </a:solidFill>
+                <a:latin typeface="맑은 고딕"/>
+                <a:ea typeface="맑은 고딕"/>
+                <a:cs typeface="맑은 고딕"/>
+              </a:rPr>
+              <a:t>자동 검사 51건이 릴리스마다 돈다. 그중 24건은 경보 동작을 프레임 단위로 고정한 검사로, 3 · 4단계에서 코드를 나눌 때 동작이 1비트도 달라지지 않았음을 이 검사로 확인했다.</a:t>
             </a:r>
           </a:p>
         </p:txBody>
@@ -37157,7 +37209,7 @@
                 <a:ea typeface="맑은 고딕"/>
                 <a:cs typeface="맑은 고딕"/>
               </a:rPr>
-              <a:t>고친 문제마다 자동 검사를 붙여 둔다. 안전과 직결된 검사가 하나라도 실패하면 새 버전이 아예 나가지 않는다 (1단계 완료, 현재 동작 중).</a:t>
+              <a:t>고친 문제마다 자동 검사를 붙여 둔다. 지금 51건이 릴리스마다 돌고, 하나라도 실패하면 새 버전이 아예 나가지 않는다.</a:t>
             </a:r>
           </a:p>
         </p:txBody>

--- a/docs/presentation/contest/SafeAlert_CouSolve_Contest.pptx
+++ b/docs/presentation/contest/SafeAlert_CouSolve_Contest.pptx
@@ -6278,15 +6278,8 @@
                   <a:ea typeface="맑은 고딕"/>
                   <a:cs typeface="맑은 고딕"/>
                 </a:rPr>
-                <a:t>감지 거리 10~25m 는 이 앱의 경고 거리 15m 와 같은 범위 — 거리 설정이 업계 관행에서 벗어나 있지 않다.</a:t>
+                <a:t>감지 거리 10~25m 는 이 앱이 정밀 측위(UWB)를 쓸 때의 경고 거리 15m 와 같은 범위다.</a:t>
               </a:r>
-            </a:p>
-            <a:p>
-              <a:pPr algn="l">
-                <a:lnSpc>
-                  <a:spcPct val="130000"/>
-                </a:lnSpc>
-              </a:pPr>
               <a:r>
                 <a:rPr sz="850" b="0" i="0" u="none">
                   <a:solidFill>
@@ -6296,7 +6289,7 @@
                   <a:ea typeface="맑은 고딕"/>
                   <a:cs typeface="맑은 고딕"/>
                 </a:rPr>
-                <a:t>제품 정보는 벤더 공개 자료 기준 (2026.09 조회). 벤더가 주장하는 효과 수치는 인용하지 않았다.</a:t>
+                <a:t>   (제품 정보 — 벤더 공개 자료 2026.09 조회, 벤더 주장 효과 수치는 인용하지 않음)</a:t>
               </a:r>
             </a:p>
           </p:txBody>
@@ -6559,12 +6552,12 @@
                 <a:tableStyleId>{5C22544A-7EE6-4342-B048-85BDC9FD1C3A}</a:tableStyleId>
               </a:tblPr>
               <a:tblGrid>
-                <a:gridCol w="2331720"/>
-                <a:gridCol w="777240"/>
-                <a:gridCol w="3063240"/>
-                <a:gridCol w="1417320"/>
-                <a:gridCol w="1188720"/>
-                <a:gridCol w="1572768"/>
+                <a:gridCol w="2103120"/>
+                <a:gridCol w="960120"/>
+                <a:gridCol w="3520440"/>
+                <a:gridCol w="1280160"/>
+                <a:gridCol w="1051560"/>
+                <a:gridCol w="1435608"/>
               </a:tblGrid>
               <a:tr h="256032">
                 <a:tc>
@@ -8239,7 +8232,7 @@
                           <a:ea typeface="맑은 고딕"/>
                           <a:cs typeface="맑은 고딕"/>
                         </a:rPr>
-                        <a:t>BLE</a:t>
+                        <a:t>BLE + UWB</a:t>
                       </a:r>
                     </a:p>
                   </a:txBody>
@@ -8292,7 +8285,7 @@
                           <a:ea typeface="맑은 고딕"/>
                           <a:cs typeface="맑은 고딕"/>
                         </a:rPr>
-                        <a:t>경고 15m / 위험 8m</a:t>
+                        <a:t>UWB 폰끼리 15m / 8m · 그 외 신호 세기</a:t>
                       </a:r>
                     </a:p>
                   </a:txBody>
@@ -9671,7 +9664,7 @@
                   <a:ea typeface="맑은 고딕"/>
                   <a:cs typeface="맑은 고딕"/>
                 </a:rPr>
-                <a:t>같은 상황에서 항상 같게 동작하도록 다듬는 작업 — 5단계 중 4단계까지 마쳤다</a:t>
+                <a:t>결과가 흔들리지 않게 다듬는 작업 — 5단계 중 4단계 완료</a:t>
               </a:r>
               <a:endParaRPr lang="ko-KR" altLang="en-US" sz="1200">
                 <a:solidFill>
@@ -9807,7 +9800,7 @@
                   <a:ea typeface="맑은 고딕"/>
                   <a:cs typeface="맑은 고딕"/>
                 </a:rPr>
-                <a:t>그중 24건은 경보 동작을 프레임 단위로 고정한 검사다 — 코드를 나눠도 동작이 1비트도 달라지지 않았음을 이 검사로 확인했다.</a:t>
+                <a:t>그중 24건은 경보 동작을 프레임 단위로 고정한 검사다 — 코드를 나눠도 동작이 달라지지 않았음을 이 검사로 확인했다.</a:t>
               </a:r>
             </a:p>
           </p:txBody>
@@ -10012,7 +10005,28 @@
                   <a:ea typeface="맑은 고딕"/>
                   <a:cs typeface="맑은 고딕"/>
                 </a:rPr>
-                <a:t>·  지게차가 끼면 경고 15m · 위험 8m,  사람끼리는 경고 5m · 위험 3m</a:t>
+                <a:t>·  정밀 측위(UWB) 폰끼리는 실제 거리로 — 지게차가 끼면 15m · 8m, 사람끼리 5m · 3m</a:t>
+              </a:r>
+            </a:p>
+            <a:p>
+              <a:pPr algn="l">
+                <a:lnSpc>
+                  <a:spcPct val="132000"/>
+                </a:lnSpc>
+                <a:spcBef>
+                  <a:spcPts val="400"/>
+                </a:spcBef>
+              </a:pPr>
+              <a:r>
+                <a:rPr sz="1050" b="0" i="0" u="none">
+                  <a:solidFill>
+                    <a:srgbClr val="404040"/>
+                  </a:solidFill>
+                  <a:latin typeface="맑은 고딕"/>
+                  <a:ea typeface="맑은 고딕"/>
+                  <a:cs typeface="맑은 고딕"/>
+                </a:rPr>
+                <a:t>·  그 밖의 폰은 신호 세기로 판단한다 (창고에서는 거리로 환산하지 않는다)</a:t>
               </a:r>
             </a:p>
             <a:p>
@@ -10054,7 +10068,7 @@
                   <a:ea typeface="맑은 고딕"/>
                   <a:cs typeface="맑은 고딕"/>
                 </a:rPr>
-                <a:t>·  상대가 지게차인지 사람인지, 서 있는지 움직이는지, 후진 중인지까지 함께 보낸다</a:t>
+                <a:t>·  상대가 지게차인지 사람인지, 후진 중인지까지 함께 보낸다</a:t>
               </a:r>
             </a:p>
             <a:p>
@@ -10096,28 +10110,7 @@
                   <a:ea typeface="맑은 고딕"/>
                   <a:cs typeface="맑은 고딕"/>
                 </a:rPr>
-                <a:t>지금 v1.1.71 이 WF11 · WF21 · WF25 에서 돌고 있다.</a:t>
-              </a:r>
-            </a:p>
-            <a:p>
-              <a:pPr algn="l">
-                <a:lnSpc>
-                  <a:spcPct val="132000"/>
-                </a:lnSpc>
-                <a:spcBef>
-                  <a:spcPts val="400"/>
-                </a:spcBef>
-              </a:pPr>
-              <a:r>
-                <a:rPr sz="1000" b="0" i="0" u="none">
-                  <a:solidFill>
-                    <a:srgbClr val="6B7278"/>
-                  </a:solidFill>
-                  <a:latin typeface="맑은 고딕"/>
-                  <a:ea typeface="맑은 고딕"/>
-                  <a:cs typeface="맑은 고딕"/>
-                </a:rPr>
-                <a:t>아무 감지 수단도 없던 상태에서, 장비를 사지 않고 감지를 시작한 것이다. 사람이 늘어도 추가로 살 것이 없다.</a:t>
+                <a:t>아무 감지 수단도 없던 현장에서 시작해, 지금 v1.1.71 이 3개 센터에서 돌고 있다.</a:t>
               </a:r>
             </a:p>
           </p:txBody>
@@ -10282,7 +10275,7 @@
                 <a:ea typeface="맑은 고딕"/>
                 <a:cs typeface="맑은 고딕"/>
               </a:rPr>
-              <a:t>감지 수단이 0 이던 현장에, 장비 구매 없이 15m · 8m 경보가 생긴다. 사람이 늘어도 비용이 늘지 않는다.</a:t>
+              <a:t>감지 수단이 0 이던 현장에, 장비 구매 없이 접근 경보가 생긴다. 사람이 늘어도 비용이 늘지 않는다.</a:t>
             </a:r>
             <a:endParaRPr lang="ko-KR" altLang="en-US" sz="1200">
               <a:solidFill>
@@ -18710,7 +18703,7 @@
                 <a:ea typeface="맑은 고딕"/>
                 <a:cs typeface="맑은 고딕"/>
               </a:rPr>
-              <a:t>가까워진 횟수</a:t>
+              <a:t>경고 등급 경보</a:t>
             </a:r>
           </a:p>
         </p:txBody>
@@ -18751,7 +18744,7 @@
                 <a:ea typeface="맑은 고딕"/>
                 <a:cs typeface="맑은 고딕"/>
               </a:rPr>
-              <a:t>15m 안까지 접근</a:t>
+              <a:t>서로 접근 — 경고권 진입</a:t>
             </a:r>
           </a:p>
         </p:txBody>
@@ -18930,7 +18923,7 @@
                 <a:ea typeface="맑은 고딕"/>
                 <a:cs typeface="맑은 고딕"/>
               </a:rPr>
-              <a:t>위험하게 가까워진 횟수</a:t>
+              <a:t>위험 등급 경보</a:t>
             </a:r>
           </a:p>
         </p:txBody>
@@ -18971,7 +18964,7 @@
                 <a:ea typeface="맑은 고딕"/>
                 <a:cs typeface="맑은 고딕"/>
               </a:rPr>
-              <a:t>8m 안까지 접근</a:t>
+              <a:t>더 가까워짐 — 위험권 진입</a:t>
             </a:r>
           </a:p>
         </p:txBody>
@@ -20087,7 +20080,7 @@
                           <a:ea typeface="맑은 고딕"/>
                           <a:cs typeface="맑은 고딕"/>
                         </a:rPr>
-                        <a:t>1교대 15m 접근</a:t>
+                        <a:t>1교대 경고 경보</a:t>
                       </a:r>
                     </a:p>
                   </a:txBody>
@@ -20248,7 +20241,7 @@
                           <a:ea typeface="맑은 고딕"/>
                           <a:cs typeface="맑은 고딕"/>
                         </a:rPr>
-                        <a:t>8m 까지 갈 비율</a:t>
+                        <a:t>위험까지 갈 비율</a:t>
                       </a:r>
                     </a:p>
                   </a:txBody>
@@ -20354,7 +20347,7 @@
                           <a:ea typeface="맑은 고딕"/>
                           <a:cs typeface="맑은 고딕"/>
                         </a:rPr>
-                        <a:t>거리 비의 제곱 (8m ÷ 15m)²</a:t>
+                        <a:t>UWB 판정 반경 비의 제곱 (8m ÷ 15m)²</a:t>
                       </a:r>
                     </a:p>
                   </a:txBody>
@@ -20409,7 +20402,7 @@
                           <a:ea typeface="맑은 고딕"/>
                           <a:cs typeface="맑은 고딕"/>
                         </a:rPr>
-                        <a:t>1교대 8m 접근</a:t>
+                        <a:t>1교대 위험 경보</a:t>
                       </a:r>
                     </a:p>
                   </a:txBody>
@@ -20923,7 +20916,7 @@
                 <a:ea typeface="맑은 고딕"/>
                 <a:cs typeface="맑은 고딕"/>
               </a:rPr>
-              <a:t>앱이 경보를 울릴 때마다 시각 · 상대 · 거리 · 등급이 서버에 기록되고 있다</a:t>
+              <a:t>앱이 경보를 울릴 때마다 시각 · 상대 · 신호 세기 · 등급이 서버에 기록되고 있다</a:t>
             </a:r>
             <a:r>
               <a:rPr sz="900" b="0" i="0" u="none">
@@ -27219,7 +27212,7 @@
                 <a:ea typeface="맑은 고딕"/>
                 <a:cs typeface="맑은 고딕"/>
               </a:rPr>
-              <a:t>WF11 · WF21 · WF25 세 개 센터에서 실사용 중, 3개월간 71번 배포했습니다.</a:t>
+              <a:t>WF11 · WF21 · WF25 세 개 센터에서 실사용 중, 3개월간 97번 배포했습니다.</a:t>
             </a:r>
           </a:p>
           <a:p>
@@ -27508,7 +27501,7 @@
                 <a:ea typeface="맑은 고딕"/>
                 <a:cs typeface="맑은 고딕"/>
               </a:rPr>
-              <a:t>앱만 깔면 15m 에서 경고, 8m 에서 위험 경보가 소리 · 진동 · 화면으로 울립니다. 같은 기능을 장비로 갖추면 센터당 331만원이 들지만, </a:t>
+              <a:t>앱만 깔면 서로 다가오는 것을 감지해 소리 · 진동 · 화면으로 알립니다. 같은 기능을 장비로 갖추면 센터당 331만원이 들지만, </a:t>
             </a:r>
             <a:r>
               <a:rPr sz="1100" b="1" i="0" u="none">
@@ -28684,7 +28677,28 @@
                   <a:ea typeface="맑은 고딕"/>
                   <a:cs typeface="맑은 고딕"/>
                 </a:rPr>
-                <a:t>경보 거리 — 지게차가 끼면 경고 15m · 위험 8m,  사람끼리는 경고 5m · 위험 3m.</a:t>
+                <a:t>정밀 측위(UWB)를 지원하는 폰끼리는 실제 거리로 — 지게차가 끼면 경고 15m · 위험 8m, 사람끼리는 5m · 3m.</a:t>
+              </a:r>
+            </a:p>
+            <a:p>
+              <a:pPr algn="l">
+                <a:lnSpc>
+                  <a:spcPct val="130000"/>
+                </a:lnSpc>
+                <a:spcBef>
+                  <a:spcPts val="500"/>
+                </a:spcBef>
+              </a:pPr>
+              <a:r>
+                <a:rPr sz="1000" b="0" i="0" u="none">
+                  <a:solidFill>
+                    <a:srgbClr val="6B7278"/>
+                  </a:solidFill>
+                  <a:latin typeface="맑은 고딕"/>
+                  <a:ea typeface="맑은 고딕"/>
+                  <a:cs typeface="맑은 고딕"/>
+                </a:rPr>
+                <a:t>그 밖의 폰은 신호 세기로 판단한다. 창고는 랙과 적재물 때문에 신호 세기가 거리와 일정하게 대응하지 않아, 거리로 환산하지 않는다.</a:t>
               </a:r>
             </a:p>
             <a:p>
@@ -29109,7 +29123,7 @@
                 <a:ea typeface="맑은 고딕"/>
                 <a:cs typeface="맑은 고딕"/>
               </a:rPr>
-              <a:t>1교대(9시간) 동안 몇 번이나 가까워지는가</a:t>
+              <a:t>1교대(9시간) 동안 경보가 몇 번 울리는가</a:t>
             </a:r>
             <a:r>
               <a:rPr sz="850" b="0" i="0" u="sng">
@@ -29133,8 +29147,8 @@
         </p:nvSpPr>
         <p:spPr>
           <a:xfrm>
-            <a:off x="5943600" y="5285231"/>
-            <a:ext cx="2578608" cy="841248"/>
+            <a:off x="5943600" y="5230368"/>
+            <a:ext cx="2578608" cy="804672"/>
           </a:xfrm>
           <a:prstGeom prst="roundRect">
             <a:avLst/>
@@ -29177,8 +29191,8 @@
         </p:nvSpPr>
         <p:spPr>
           <a:xfrm>
-            <a:off x="6035040" y="5385816"/>
-            <a:ext cx="50292" cy="640080"/>
+            <a:off x="6035040" y="5330952"/>
+            <a:ext cx="50292" cy="603504"/>
           </a:xfrm>
           <a:prstGeom prst="rect">
             <a:avLst/>
@@ -29219,7 +29233,7 @@
         </p:nvSpPr>
         <p:spPr>
           <a:xfrm>
-            <a:off x="6181344" y="5349240"/>
+            <a:off x="6181344" y="5294376"/>
             <a:ext cx="2212848" cy="182880"/>
           </a:xfrm>
           <a:prstGeom prst="rect">
@@ -29258,7 +29272,7 @@
                 <a:ea typeface="맑은 고딕"/>
                 <a:cs typeface="맑은 고딕"/>
               </a:rPr>
-              <a:t>경고 거리 15m 안</a:t>
+              <a:t>경고 등급 경보</a:t>
             </a:r>
           </a:p>
         </p:txBody>
@@ -29271,7 +29285,7 @@
         </p:nvSpPr>
         <p:spPr>
           <a:xfrm>
-            <a:off x="6181344" y="5541264"/>
+            <a:off x="6181344" y="5486400"/>
             <a:ext cx="2212848" cy="182880"/>
           </a:xfrm>
           <a:prstGeom prst="rect">
@@ -29312,7 +29326,7 @@
         </p:nvSpPr>
         <p:spPr>
           <a:xfrm>
-            <a:off x="6181344" y="5852159"/>
+            <a:off x="6181344" y="5760720"/>
             <a:ext cx="2212848" cy="219456"/>
           </a:xfrm>
           <a:prstGeom prst="rect">
@@ -29353,8 +29367,8 @@
         </p:nvSpPr>
         <p:spPr>
           <a:xfrm>
-            <a:off x="8668512" y="5285231"/>
-            <a:ext cx="2578608" cy="841248"/>
+            <a:off x="8668512" y="5230368"/>
+            <a:ext cx="2578608" cy="804672"/>
           </a:xfrm>
           <a:prstGeom prst="roundRect">
             <a:avLst/>
@@ -29397,8 +29411,8 @@
         </p:nvSpPr>
         <p:spPr>
           <a:xfrm>
-            <a:off x="8759952" y="5385816"/>
-            <a:ext cx="50292" cy="640080"/>
+            <a:off x="8759952" y="5330952"/>
+            <a:ext cx="50292" cy="603504"/>
           </a:xfrm>
           <a:prstGeom prst="rect">
             <a:avLst/>
@@ -29439,7 +29453,7 @@
         </p:nvSpPr>
         <p:spPr>
           <a:xfrm>
-            <a:off x="8906256" y="5349240"/>
+            <a:off x="8906256" y="5294376"/>
             <a:ext cx="2212848" cy="182880"/>
           </a:xfrm>
           <a:prstGeom prst="rect">
@@ -29478,7 +29492,7 @@
                 <a:ea typeface="맑은 고딕"/>
                 <a:cs typeface="맑은 고딕"/>
               </a:rPr>
-              <a:t>위험 거리 8m 안</a:t>
+              <a:t>위험 등급 경보</a:t>
             </a:r>
           </a:p>
         </p:txBody>
@@ -29491,7 +29505,7 @@
         </p:nvSpPr>
         <p:spPr>
           <a:xfrm>
-            <a:off x="8906256" y="5541264"/>
+            <a:off x="8906256" y="5486400"/>
             <a:ext cx="2212848" cy="182880"/>
           </a:xfrm>
           <a:prstGeom prst="rect">
@@ -29532,7 +29546,7 @@
         </p:nvSpPr>
         <p:spPr>
           <a:xfrm>
-            <a:off x="8906256" y="5852159"/>
+            <a:off x="8906256" y="5760720"/>
             <a:ext cx="2212848" cy="219456"/>
           </a:xfrm>
           <a:prstGeom prst="rect">
@@ -29573,7 +29587,7 @@
         </p:nvSpPr>
         <p:spPr>
           <a:xfrm>
-            <a:off x="5980176" y="6217920"/>
+            <a:off x="5980176" y="6108192"/>
             <a:ext cx="5294375" cy="201168"/>
           </a:xfrm>
           <a:prstGeom prst="rect">
@@ -30591,7 +30605,7 @@
                 <a:ea typeface="맑은 고딕"/>
                 <a:cs typeface="맑은 고딕"/>
               </a:rPr>
-              <a:t>경보가 울리는 거리 — 실제 비례로 그린 것</a:t>
+              <a:t>정밀 측위 지원 폰끼리의 경보 거리 — 실제 비례로 그린 것</a:t>
             </a:r>
           </a:p>
         </p:txBody>
@@ -32833,7 +32847,7 @@
                 <a:ea typeface="맑은 고딕"/>
                 <a:cs typeface="맑은 고딕"/>
               </a:rPr>
-              <a:t>1교대(9시간) 동안 15m 안까지 가까워지는 횟수 </a:t>
+              <a:t>1교대(9시간) 동안 경고 등급 경보 </a:t>
             </a:r>
             <a:r>
               <a:rPr sz="1150" b="1" i="0" u="sng">
@@ -32855,7 +32869,7 @@
                 <a:ea typeface="맑은 고딕"/>
                 <a:cs typeface="맑은 고딕"/>
               </a:rPr>
-              <a:t>,  그중 8m 안까지 </a:t>
+              <a:t>,  그중 위험 등급 </a:t>
             </a:r>
             <a:r>
               <a:rPr sz="1150" b="1" i="0" u="sng">
@@ -36600,7 +36614,7 @@
                 <a:ea typeface="맑은 고딕"/>
                 <a:cs typeface="맑은 고딕"/>
               </a:rPr>
-              <a:t>감지 민감도  vs.  경보 피로</a:t>
+              <a:t>자주 울리기  vs.  꺼버리기</a:t>
             </a:r>
           </a:p>
           <a:p>
@@ -36621,7 +36635,7 @@
                 <a:ea typeface="맑은 고딕"/>
                 <a:cs typeface="맑은 고딕"/>
               </a:rPr>
-              <a:t>넓게 울리면 작업자가 꺼버린다. 꺼 둔 단말은 보호가 0 이다.</a:t>
+              <a:t>넓게 울리면 작업자가 앱을 꺼버린다. 꺼진 폰은 아무것도 못 한다.</a:t>
             </a:r>
           </a:p>
         </p:txBody>
@@ -36696,7 +36710,7 @@
                 <a:ea typeface="맑은 고딕"/>
                 <a:cs typeface="맑은 고딕"/>
               </a:rPr>
-              <a:t>민감도를 택하고, 울릴 곳을 좁혔다</a:t>
+              <a:t>자주 울리되, 울릴 곳을 좁혔다</a:t>
             </a:r>
           </a:p>
           <a:p>
@@ -36717,7 +36731,7 @@
                 <a:ea typeface="맑은 고딕"/>
                 <a:cs typeface="맑은 고딕"/>
               </a:rPr>
-              <a:t>같은 기기 · 같은 등급 5초 이상이면 자동 음소거 (v1.1.61) · 휴게실 · 충전 구역 세이프존 (v1.1.62) · 이탈 후 재발령 억제 (v1.1.51)</a:t>
+              <a:t>같은 상대와 같은 등급이 5초 넘게 이어지면 소리를 끈다 (v1.1.61) · 휴게실 · 충전 구역은 안전 구역으로 지정 (v1.1.62) · 멀어진 뒤 다시 울리지 않게 (v1.1.51)</a:t>
             </a:r>
           </a:p>
         </p:txBody>
@@ -36846,7 +36860,7 @@
                 <a:ea typeface="맑은 고딕"/>
                 <a:cs typeface="맑은 고딕"/>
               </a:rPr>
-              <a:t>앱 경보  vs.  물리적 정지</a:t>
+              <a:t>알리기만 하기  vs.  장비를 세우기</a:t>
             </a:r>
           </a:p>
           <a:p>
@@ -36867,7 +36881,7 @@
                 <a:ea typeface="맑은 고딕"/>
                 <a:cs typeface="맑은 고딕"/>
               </a:rPr>
-              <a:t>경보는 사람이 반응해야 효과가 난다. 통제 위계상 하위다.</a:t>
+              <a:t>장비를 자동으로 세우려면 지게차마다 제동 장치를 달아야 한다. 앱은 못 한다.</a:t>
             </a:r>
           </a:p>
         </p:txBody>
@@ -36942,7 +36956,7 @@
                 <a:ea typeface="맑은 고딕"/>
                 <a:cs typeface="맑은 고딕"/>
               </a:rPr>
-              <a:t>물리적 정지는 포기했다</a:t>
+              <a:t>알리는 것부터 시작했다</a:t>
             </a:r>
           </a:p>
           <a:p>
@@ -36963,7 +36977,7 @@
                 <a:ea typeface="맑은 고딕"/>
                 <a:cs typeface="맑은 고딕"/>
               </a:rPr>
-              <a:t>자동 정지(공학적 제어)가 상위, 경보(관리적 제어)가 하위다. 상위를 대체하지 않는다 — I-PAS EOD 를 그대로 두고, 상위가 닿지 않는 조합에만 하위를 새로 넣는다.</a:t>
+              <a:t>안전 대책은 ‘자동으로 멈추기’ 가 ‘사람에게 알리기’ 보다 확실하다. 그건 맞다. 다만 지금 우리 센터에는 둘 다 없다. 장비를 사지 않고 지금 당장 할 수 있는 쪽부터 넣었고, 자동 정지는 필요하다고 판단되면 별도 과제로 간다.</a:t>
             </a:r>
           </a:p>
         </p:txBody>
@@ -37113,7 +37127,7 @@
                 <a:ea typeface="맑은 고딕"/>
                 <a:cs typeface="맑은 고딕"/>
               </a:rPr>
-              <a:t>3개월에 71번 고쳤지만, 고쳤던 문제가 다시 나타났다.</a:t>
+              <a:t>3개월에 97번 고쳤지만, 고쳤던 문제가 다시 나타났다.</a:t>
             </a:r>
           </a:p>
         </p:txBody>

--- a/docs/presentation/contest/SafeAlert_CouSolve_Contest.pptx
+++ b/docs/presentation/contest/SafeAlert_CouSolve_Contest.pptx
@@ -13187,7 +13187,7 @@
                           <a:ea typeface="맑은 고딕"/>
                           <a:cs typeface="맑은 고딕"/>
                         </a:rPr>
-                        <a:t>앱 경보 기록 4주 집계 · 작업자 설문 회수</a:t>
+                        <a:t>작업자 설문 회수  (경보 기록 집계는 주간 자동화 완료)</a:t>
                       </a:r>
                       <a:endParaRPr lang="en-US" altLang="ko-KR" sz="1000" b="0" i="0" u="none" strike="noStrike">
                         <a:solidFill>
@@ -18554,7 +18554,7 @@
                 <a:ea typeface="맑은 고딕"/>
                 <a:cs typeface="맑은 고딕"/>
               </a:rPr>
-              <a:t>네 가지 모두 숫자로 재기로 했다</a:t>
+              <a:t>네 가지 중 둘은 이미 쟀다</a:t>
             </a:r>
             <a:r>
               <a:rPr sz="850" b="0" i="0" u="sng">
@@ -18565,7 +18565,7 @@
                 <a:ea typeface="맑은 고딕"/>
                 <a:cs typeface="맑은 고딕"/>
               </a:rPr>
-              <a:t>   밑줄 = 추정치</a:t>
+              <a:t>   밑줄 = 아직 추정</a:t>
             </a:r>
           </a:p>
         </p:txBody>
@@ -18777,7 +18777,7 @@
               </a:lnSpc>
             </a:pPr>
             <a:r>
-              <a:rPr sz="1200" b="1" i="0" u="sng">
+              <a:rPr sz="1200" b="1" i="0" u="none">
                 <a:solidFill>
                   <a:srgbClr val="B9770B"/>
                 </a:solidFill>
@@ -18785,7 +18785,7 @@
                 <a:ea typeface="맑은 고딕"/>
                 <a:cs typeface="맑은 고딕"/>
               </a:rPr>
-              <a:t>1교대 95회</a:t>
+              <a:t>하루 40.6회</a:t>
             </a:r>
           </a:p>
         </p:txBody>
@@ -18997,7 +18997,7 @@
               </a:lnSpc>
             </a:pPr>
             <a:r>
-              <a:rPr sz="1200" b="1" i="0" u="sng">
+              <a:rPr sz="1200" b="1" i="0" u="none">
                 <a:solidFill>
                   <a:srgbClr val="C0392B"/>
                 </a:solidFill>
@@ -19005,7 +19005,7 @@
                 <a:ea typeface="맑은 고딕"/>
                 <a:cs typeface="맑은 고딕"/>
               </a:rPr>
-              <a:t>1교대 27회</a:t>
+              <a:t>하루 24.2회</a:t>
             </a:r>
           </a:p>
         </p:txBody>
@@ -19225,7 +19225,7 @@
                 <a:ea typeface="맑은 고딕"/>
                 <a:cs typeface="맑은 고딕"/>
               </a:rPr>
-              <a:t>1교대 3회 미만</a:t>
+              <a:t>하루 3회 미만</a:t>
             </a:r>
           </a:p>
         </p:txBody>
@@ -19538,7 +19538,18 @@
                 <a:ea typeface="맑은 고딕"/>
                 <a:cs typeface="맑은 고딕"/>
               </a:rPr>
-              <a:t>이 숫자는 이렇게 나왔다 — 가정한 값은 하나뿐</a:t>
+              <a:t>먼저 추정했고, 4주 뒤 실제로 쟀다</a:t>
+            </a:r>
+            <a:r>
+              <a:rPr sz="850" b="0" i="0" u="none">
+                <a:solidFill>
+                  <a:srgbClr val="9AA0A6"/>
+                </a:solidFill>
+                <a:latin typeface="맑은 고딕"/>
+                <a:ea typeface="맑은 고딕"/>
+                <a:cs typeface="맑은 고딕"/>
+              </a:rPr>
+              <a:t>   WF11 · 2026.08.04~2026.09.01</a:t>
             </a:r>
           </a:p>
         </p:txBody>
@@ -19562,9 +19573,9 @@
                 <a:tableStyleId>{5C22544A-7EE6-4342-B048-85BDC9FD1C3A}</a:tableStyleId>
               </a:tblPr>
               <a:tblGrid>
-                <a:gridCol w="1207008"/>
-                <a:gridCol w="1005840"/>
-                <a:gridCol w="2761488"/>
+                <a:gridCol w="1225296"/>
+                <a:gridCol w="1097280"/>
+                <a:gridCol w="2651760"/>
               </a:tblGrid>
               <a:tr h="246888">
                 <a:tc>
@@ -19639,7 +19650,7 @@
                           <a:ea typeface="맑은 고딕"/>
                           <a:cs typeface="맑은 고딕"/>
                         </a:rPr>
-                        <a:t>값</a:t>
+                        <a:t>추정</a:t>
                       </a:r>
                     </a:p>
                   </a:txBody>
@@ -19692,7 +19703,7 @@
                           <a:ea typeface="맑은 고딕"/>
                           <a:cs typeface="맑은 고딕"/>
                         </a:rPr>
-                        <a:t>근거</a:t>
+                        <a:t>실측</a:t>
                       </a:r>
                     </a:p>
                   </a:txBody>
@@ -19792,7 +19803,7 @@
                         </a:lnSpc>
                       </a:pPr>
                       <a:r>
-                        <a:rPr sz="850" b="0" i="0" u="none">
+                        <a:rPr sz="850" b="0" i="0" u="sng">
                           <a:solidFill>
                             <a:srgbClr val="404040"/>
                           </a:solidFill>
@@ -19839,7 +19850,7 @@
                     <a:bodyPr wrap="square"/>
                     <a:lstStyle/>
                     <a:p>
-                      <a:pPr algn="l">
+                      <a:pPr algn="ctr">
                         <a:lnSpc>
                           <a:spcPct val="115000"/>
                         </a:lnSpc>
@@ -19853,7 +19864,7 @@
                           <a:ea typeface="맑은 고딕"/>
                           <a:cs typeface="맑은 고딕"/>
                         </a:rPr>
-                        <a:t>지게차 4 + 사람 3 = 7대의 짝 수</a:t>
+                        <a:t>41쌍  (단말 41대)</a:t>
                       </a:r>
                     </a:p>
                   </a:txBody>
@@ -20000,7 +20011,7 @@
                     <a:bodyPr wrap="square"/>
                     <a:lstStyle/>
                     <a:p>
-                      <a:pPr algn="l">
+                      <a:pPr algn="ctr">
                         <a:lnSpc>
                           <a:spcPct val="115000"/>
                         </a:lnSpc>
@@ -20014,18 +20025,7 @@
                           <a:ea typeface="맑은 고딕"/>
                           <a:cs typeface="맑은 고딕"/>
                         </a:rPr>
-                        <a:t>보수적으로 잡은 값 — </a:t>
-                      </a:r>
-                      <a:r>
-                        <a:rPr sz="850" b="1" i="0" u="none">
-                          <a:solidFill>
-                            <a:srgbClr val="C0392B"/>
-                          </a:solidFill>
-                          <a:latin typeface="맑은 고딕"/>
-                          <a:ea typeface="맑은 고딕"/>
-                          <a:cs typeface="맑은 고딕"/>
-                        </a:rPr>
-                        <a:t>유일한 가정</a:t>
+                        <a:t>0.11회</a:t>
                       </a:r>
                     </a:p>
                   </a:txBody>
@@ -20080,7 +20080,7 @@
                           <a:ea typeface="맑은 고딕"/>
                           <a:cs typeface="맑은 고딕"/>
                         </a:rPr>
-                        <a:t>1교대 경고 경보</a:t>
+                        <a:t>하루 경고 경보</a:t>
                       </a:r>
                     </a:p>
                   </a:txBody>
@@ -20172,13 +20172,13 @@
                     <a:bodyPr wrap="square"/>
                     <a:lstStyle/>
                     <a:p>
-                      <a:pPr algn="l">
+                      <a:pPr algn="ctr">
                         <a:lnSpc>
                           <a:spcPct val="115000"/>
                         </a:lnSpc>
                       </a:pPr>
                       <a:r>
-                        <a:rPr sz="850" b="0" i="0" u="none">
+                        <a:rPr sz="850" b="1" i="0" u="none">
                           <a:solidFill>
                             <a:srgbClr val="404040"/>
                           </a:solidFill>
@@ -20186,7 +20186,7 @@
                           <a:ea typeface="맑은 고딕"/>
                           <a:cs typeface="맑은 고딕"/>
                         </a:rPr>
-                        <a:t>21가지 × 9시간 × 0.5 = 94.5</a:t>
+                        <a:t>40.6회</a:t>
                       </a:r>
                     </a:p>
                   </a:txBody>
@@ -20333,7 +20333,7 @@
                     <a:bodyPr wrap="square"/>
                     <a:lstStyle/>
                     <a:p>
-                      <a:pPr algn="l">
+                      <a:pPr algn="ctr">
                         <a:lnSpc>
                           <a:spcPct val="115000"/>
                         </a:lnSpc>
@@ -20347,7 +20347,7 @@
                           <a:ea typeface="맑은 고딕"/>
                           <a:cs typeface="맑은 고딕"/>
                         </a:rPr>
-                        <a:t>UWB 판정 반경 비의 제곱 (8m ÷ 15m)²</a:t>
+                        <a:t>0.60</a:t>
                       </a:r>
                     </a:p>
                   </a:txBody>
@@ -20402,7 +20402,7 @@
                           <a:ea typeface="맑은 고딕"/>
                           <a:cs typeface="맑은 고딕"/>
                         </a:rPr>
-                        <a:t>1교대 위험 경보</a:t>
+                        <a:t>하루 위험 경보</a:t>
                       </a:r>
                     </a:p>
                   </a:txBody>
@@ -20494,21 +20494,21 @@
                     <a:bodyPr wrap="square"/>
                     <a:lstStyle/>
                     <a:p>
-                      <a:pPr algn="l">
+                      <a:pPr algn="ctr">
                         <a:lnSpc>
                           <a:spcPct val="115000"/>
                         </a:lnSpc>
                       </a:pPr>
                       <a:r>
-                        <a:rPr sz="850" b="0" i="0" u="none">
+                        <a:rPr sz="850" b="1" i="0" u="none">
                           <a:solidFill>
-                            <a:srgbClr val="404040"/>
+                            <a:srgbClr val="1B8A6B"/>
                           </a:solidFill>
                           <a:latin typeface="맑은 고딕"/>
                           <a:ea typeface="맑은 고딕"/>
                           <a:cs typeface="맑은 고딕"/>
                         </a:rPr>
-                        <a:t>95 × 0.28 = 26.6</a:t>
+                        <a:t>24.2회</a:t>
                       </a:r>
                     </a:p>
                   </a:txBody>
@@ -20616,7 +20616,7 @@
                           <a:ea typeface="맑은 고딕"/>
                           <a:cs typeface="맑은 고딕"/>
                         </a:rPr>
-                        <a:t>1교대 3회 미만</a:t>
+                        <a:t>하루 3회 미만</a:t>
                       </a:r>
                     </a:p>
                   </a:txBody>
@@ -20655,7 +20655,7 @@
                     <a:bodyPr wrap="square"/>
                     <a:lstStyle/>
                     <a:p>
-                      <a:pPr algn="l">
+                      <a:pPr algn="ctr">
                         <a:lnSpc>
                           <a:spcPct val="115000"/>
                         </a:lnSpc>
@@ -20669,7 +20669,7 @@
                           <a:ea typeface="맑은 고딕"/>
                           <a:cs typeface="맑은 고딕"/>
                         </a:rPr>
-                        <a:t>자동 소리 끄기 · 재발령 억제 후</a:t>
+                        <a:t>아직 못 쟀다</a:t>
                       </a:r>
                     </a:p>
                   </a:txBody>
@@ -20816,7 +20816,7 @@
                     <a:bodyPr wrap="square"/>
                     <a:lstStyle/>
                     <a:p>
-                      <a:pPr algn="l">
+                      <a:pPr algn="ctr">
                         <a:lnSpc>
                           <a:spcPct val="115000"/>
                         </a:lnSpc>
@@ -20830,7 +20830,7 @@
                           <a:ea typeface="맑은 고딕"/>
                           <a:cs typeface="맑은 고딕"/>
                         </a:rPr>
-                        <a:t>요구 4건 반영 · 3개 센터 사용 중</a:t>
+                        <a:t>설문 예정</a:t>
                       </a:r>
                     </a:p>
                   </a:txBody>
@@ -20905,7 +20905,7 @@
                 <a:ea typeface="맑은 고딕"/>
                 <a:cs typeface="맑은 고딕"/>
               </a:rPr>
-              <a:t>·  </a:t>
+              <a:t>·  경보가 울릴 때마다 시각 · 상대 · 신호 세기 · 등급이 서버에 남고, </a:t>
             </a:r>
             <a:r>
               <a:rPr sz="900" b="1" i="0" u="none">
@@ -20916,7 +20916,7 @@
                 <a:ea typeface="맑은 고딕"/>
                 <a:cs typeface="맑은 고딕"/>
               </a:rPr>
-              <a:t>앱이 경보를 울릴 때마다 시각 · 상대 · 신호 세기 · 등급이 서버에 기록되고 있다</a:t>
+              <a:t>GitHub Actions 가 매주 자동 집계한다</a:t>
             </a:r>
             <a:r>
               <a:rPr sz="900" b="0" i="0" u="none">
@@ -20927,7 +20927,7 @@
                 <a:ea typeface="맑은 고딕"/>
                 <a:cs typeface="맑은 고딕"/>
               </a:rPr>
-              <a:t> — 따로 만들 것이 없다.</a:t>
+              <a:t> — 손으로 만든 숫자가 아니다.</a:t>
             </a:r>
           </a:p>
         </p:txBody>
@@ -21009,7 +21009,29 @@
                 <a:ea typeface="맑은 고딕"/>
                 <a:cs typeface="맑은 고딕"/>
               </a:rPr>
-              <a:t>·  4주만 모으면 가정한 값이 실제 숫자로 바뀌고, 위 표의 나머지가 전부 따라 바뀐다.</a:t>
+              <a:t>·  가정은 ‘한 짝이 한 시간에 0.5번’ 하나뿐이었다. 짝은 두 배, 빈도는 1/5 — 오차가 상쇄돼 </a:t>
+            </a:r>
+            <a:r>
+              <a:rPr sz="900" b="1" i="0" u="none">
+                <a:solidFill>
+                  <a:srgbClr val="1B8A6B"/>
+                </a:solidFill>
+                <a:latin typeface="맑은 고딕"/>
+                <a:ea typeface="맑은 고딕"/>
+                <a:cs typeface="맑은 고딕"/>
+              </a:rPr>
+              <a:t>위험 경보는 추정 27회 → 실측 24.2회</a:t>
+            </a:r>
+            <a:r>
+              <a:rPr sz="900" b="0" i="0" u="none">
+                <a:solidFill>
+                  <a:srgbClr val="404040"/>
+                </a:solidFill>
+                <a:latin typeface="맑은 고딕"/>
+                <a:ea typeface="맑은 고딕"/>
+                <a:cs typeface="맑은 고딕"/>
+              </a:rPr>
+              <a:t>.</a:t>
             </a:r>
           </a:p>
         </p:txBody>
@@ -24691,7 +24713,7 @@
                   <a:ea typeface="맑은 고딕"/>
                   <a:cs typeface="맑은 고딕"/>
                 </a:rPr>
-                <a:t>  앱 경보 기록 4주 집계 · WF11 · WF21 · WF25 작업자 설문 회수 — 추정치를 실제 숫자로 바꾼다.</a:t>
+                <a:t>  경보 기록은 주간 자동 집계로 확보했다. 남은 것은 WF11 · WF21 · WF25 작업자 설문 회수.</a:t>
               </a:r>
               <a:endParaRPr lang="ko-KR" altLang="en-US" sz="1200">
                 <a:solidFill>
@@ -29123,10 +29145,10 @@
                 <a:ea typeface="맑은 고딕"/>
                 <a:cs typeface="맑은 고딕"/>
               </a:rPr>
-              <a:t>1교대(9시간) 동안 경보가 몇 번 울리는가</a:t>
+              <a:t>하루에 경보가 몇 번 울리는가</a:t>
             </a:r>
             <a:r>
-              <a:rPr sz="850" b="0" i="0" u="sng">
+              <a:rPr sz="850" b="0" i="0" u="none">
                 <a:solidFill>
                   <a:srgbClr val="9AA0A6"/>
                 </a:solidFill>
@@ -29134,7 +29156,7 @@
                 <a:ea typeface="맑은 고딕"/>
                 <a:cs typeface="맑은 고딕"/>
               </a:rPr>
-              <a:t>   밑줄 = 추정치</a:t>
+              <a:t>   앱이 남긴 기록으로 실측했다</a:t>
             </a:r>
           </a:p>
         </p:txBody>
@@ -29313,7 +29335,7 @@
                 <a:ea typeface="맑은 고딕"/>
                 <a:cs typeface="맑은 고딕"/>
               </a:rPr>
-              <a:t>앱 경보 기록으로 실측 예정</a:t>
+              <a:t>WF11 · 기록 12일 평균</a:t>
             </a:r>
           </a:p>
         </p:txBody>
@@ -29346,7 +29368,7 @@
               </a:lnSpc>
             </a:pPr>
             <a:r>
-              <a:rPr sz="1200" b="1" i="0" u="sng">
+              <a:rPr sz="1200" b="1" i="0" u="none">
                 <a:solidFill>
                   <a:srgbClr val="B9770B"/>
                 </a:solidFill>
@@ -29354,7 +29376,7 @@
                 <a:ea typeface="맑은 고딕"/>
                 <a:cs typeface="맑은 고딕"/>
               </a:rPr>
-              <a:t>95회</a:t>
+              <a:t>40.6회</a:t>
             </a:r>
           </a:p>
         </p:txBody>
@@ -29533,7 +29555,7 @@
                 <a:ea typeface="맑은 고딕"/>
                 <a:cs typeface="맑은 고딕"/>
               </a:rPr>
-              <a:t>앱 경보 기록으로 실측 예정</a:t>
+              <a:t>WF11 · 기록 12일 평균</a:t>
             </a:r>
           </a:p>
         </p:txBody>
@@ -29566,7 +29588,7 @@
               </a:lnSpc>
             </a:pPr>
             <a:r>
-              <a:rPr sz="1200" b="1" i="0" u="sng">
+              <a:rPr sz="1200" b="1" i="0" u="none">
                 <a:solidFill>
                   <a:srgbClr val="C0392B"/>
                 </a:solidFill>
@@ -29574,7 +29596,7 @@
                 <a:ea typeface="맑은 고딕"/>
                 <a:cs typeface="맑은 고딕"/>
               </a:rPr>
-              <a:t>27회</a:t>
+              <a:t>24.2회</a:t>
             </a:r>
           </a:p>
         </p:txBody>
@@ -29615,7 +29637,7 @@
                 <a:ea typeface="맑은 고딕"/>
                 <a:cs typeface="맑은 고딕"/>
               </a:rPr>
-              <a:t>산출 근거는 12장. 가정한 값은 ‘한 짝이 한 시간에 0.5번 가까워진다’ 하나뿐이다.</a:t>
+              <a:t>2026.08.04~2026.09.01 실측. 미리 추정했던 값과 얼마나 달랐는지는 12장.</a:t>
             </a:r>
           </a:p>
         </p:txBody>
@@ -31972,7 +31994,7 @@
                   <a:ea typeface="맑은 고딕"/>
                   <a:cs typeface="맑은 고딕"/>
                 </a:rPr>
-                <a:t>접근을 알려주는 수단이 없으니, 위험했던 순간이 몇 번이었는지조차 기록되지 않는다.</a:t>
+                <a:t>접근을 알려주는 수단이 없어, 앱을 깔기 전까지는 위험했던 순간이 몇 번이었는지조차 기록되지 않았다.</a:t>
               </a:r>
             </a:p>
           </p:txBody>
@@ -32660,7 +32682,7 @@
                   <a:ea typeface="맑은 고딕"/>
                   <a:cs typeface="맑은 고딕"/>
                 </a:rPr>
-                <a:t>감지 수단이 없으니 사고도 아차사고도 집계된 적이 없다.</a:t>
+                <a:t>사고도 아차사고도 회사 데이터에 집계된 적이 없다.</a:t>
               </a:r>
             </a:p>
           </p:txBody>
@@ -32847,10 +32869,10 @@
                 <a:ea typeface="맑은 고딕"/>
                 <a:cs typeface="맑은 고딕"/>
               </a:rPr>
-              <a:t>1교대(9시간) 동안 경고 등급 경보 </a:t>
+              <a:t>앱을 깔고 4주, 하루 평균 경고 등급 경보 </a:t>
             </a:r>
             <a:r>
-              <a:rPr sz="1150" b="1" i="0" u="sng">
+              <a:rPr sz="1150" b="1" i="0" u="none">
                 <a:solidFill>
                   <a:srgbClr val="C0392B"/>
                 </a:solidFill>
@@ -32858,7 +32880,7 @@
                 <a:ea typeface="맑은 고딕"/>
                 <a:cs typeface="맑은 고딕"/>
               </a:rPr>
-              <a:t>약 95회</a:t>
+              <a:t>40.6회</a:t>
             </a:r>
             <a:r>
               <a:rPr sz="1150" b="0" i="0" u="none">
@@ -32869,10 +32891,10 @@
                 <a:ea typeface="맑은 고딕"/>
                 <a:cs typeface="맑은 고딕"/>
               </a:rPr>
-              <a:t>,  그중 위험 등급 </a:t>
+              <a:t>,  위험 등급 </a:t>
             </a:r>
             <a:r>
-              <a:rPr sz="1150" b="1" i="0" u="sng">
+              <a:rPr sz="1150" b="1" i="0" u="none">
                 <a:solidFill>
                   <a:srgbClr val="C0392B"/>
                 </a:solidFill>
@@ -32880,7 +32902,18 @@
                 <a:ea typeface="맑은 고딕"/>
                 <a:cs typeface="맑은 고딕"/>
               </a:rPr>
-              <a:t>약 27회</a:t>
+              <a:t>24.2회</a:t>
+            </a:r>
+            <a:r>
+              <a:rPr sz="1150" b="0" i="0" u="none">
+                <a:solidFill>
+                  <a:srgbClr val="404040"/>
+                </a:solidFill>
+                <a:latin typeface="맑은 고딕"/>
+                <a:ea typeface="맑은 고딕"/>
+                <a:cs typeface="맑은 고딕"/>
+              </a:rPr>
+              <a:t>가 실제로 찍혔다</a:t>
             </a:r>
           </a:p>
         </p:txBody>
@@ -32921,7 +32954,7 @@
                 <a:ea typeface="맑은 고딕"/>
                 <a:cs typeface="맑은 고딕"/>
               </a:rPr>
-              <a:t>밑줄은 추정치다 (산출 근거 12장). 감지 수단이 없어 실제로 세어 본 적이 없다.</a:t>
+              <a:t>WF11 앱 경보 기록 실측 (2026.08.04~2026.09.01 중 기록 12일). 앱이 깔리기 전에는 이 숫자를 셀 수단 자체가 없었다.</a:t>
             </a:r>
           </a:p>
         </p:txBody>

--- a/docs/presentation/contest/SafeAlert_CouSolve_Contest.pptx
+++ b/docs/presentation/contest/SafeAlert_CouSolve_Contest.pptx
@@ -6289,7 +6289,7 @@
                   <a:ea typeface="맑은 고딕"/>
                   <a:cs typeface="맑은 고딕"/>
                 </a:rPr>
-                <a:t>   (제품 정보 — 벤더 공개 자료 2026.09 조회, 벤더 주장 효과 수치는 인용하지 않음)</a:t>
+                <a:t>   (제품 정보 — 제조사 공개 자료 2026.09 조회, 제조사 주장 효과 수치는 인용하지 않음)</a:t>
               </a:r>
             </a:p>
           </p:txBody>
@@ -6552,9 +6552,9 @@
                 <a:tableStyleId>{5C22544A-7EE6-4342-B048-85BDC9FD1C3A}</a:tableStyleId>
               </a:tblPr>
               <a:tblGrid>
-                <a:gridCol w="2103120"/>
-                <a:gridCol w="960120"/>
-                <a:gridCol w="3520440"/>
+                <a:gridCol w="2011680"/>
+                <a:gridCol w="1325880"/>
+                <a:gridCol w="3246120"/>
                 <a:gridCol w="1280160"/>
                 <a:gridCol w="1051560"/>
                 <a:gridCol w="1435608"/>
@@ -6952,7 +6952,7 @@
                           <a:ea typeface="맑은 고딕"/>
                           <a:cs typeface="맑은 고딕"/>
                         </a:rPr>
-                        <a:t>RFID</a:t>
+                        <a:t>무선 태그(RFID)</a:t>
                       </a:r>
                     </a:p>
                   </a:txBody>
@@ -7005,7 +7005,7 @@
                           <a:ea typeface="맑은 고딕"/>
                           <a:cs typeface="맑은 고딕"/>
                         </a:rPr>
-                        <a:t>차량 주위 360° 최대 10m</a:t>
+                        <a:t>차량 사방 최대 10m</a:t>
                       </a:r>
                     </a:p>
                   </a:txBody>
@@ -7272,7 +7272,7 @@
                           <a:ea typeface="맑은 고딕"/>
                           <a:cs typeface="맑은 고딕"/>
                         </a:rPr>
-                        <a:t>UWB</a:t>
+                        <a:t>정밀 측위(UWB)</a:t>
                       </a:r>
                     </a:p>
                   </a:txBody>
@@ -7592,7 +7592,7 @@
                           <a:ea typeface="맑은 고딕"/>
                           <a:cs typeface="맑은 고딕"/>
                         </a:rPr>
-                        <a:t>UWB</a:t>
+                        <a:t>정밀 측위(UWB)</a:t>
                       </a:r>
                     </a:p>
                   </a:txBody>
@@ -7645,7 +7645,7 @@
                           <a:ea typeface="맑은 고딕"/>
                           <a:cs typeface="맑은 고딕"/>
                         </a:rPr>
-                        <a:t>차량 주위 360° 최대 25m</a:t>
+                        <a:t>차량 사방 최대 25m</a:t>
                       </a:r>
                     </a:p>
                   </a:txBody>
@@ -8232,7 +8232,7 @@
                           <a:ea typeface="맑은 고딕"/>
                           <a:cs typeface="맑은 고딕"/>
                         </a:rPr>
-                        <a:t>BLE + UWB</a:t>
+                        <a:t>블루투스 + 정밀 측위</a:t>
                       </a:r>
                     </a:p>
                   </a:txBody>
@@ -8285,7 +8285,7 @@
                           <a:ea typeface="맑은 고딕"/>
                           <a:cs typeface="맑은 고딕"/>
                         </a:rPr>
-                        <a:t>UWB 폰끼리 15m / 8m · 그 외 신호 세기</a:t>
+                        <a:t>정밀 측위 폰끼리 15m / 8m · 그 외 신호 세기</a:t>
                       </a:r>
                     </a:p>
                   </a:txBody>
@@ -8530,7 +8530,7 @@
                 <a:ea typeface="맑은 고딕"/>
                 <a:cs typeface="맑은 고딕"/>
               </a:rPr>
-              <a:t>차량 태그 52.5만 × 지게차 4대  +  자동정지장치 22만 × 4대  +  보행자 태그 11만 × 상시 3명. 단가는 2026.08 기준이며, 사람이 늘면 1인당 11만원이 더 붙는다.</a:t>
+              <a:t>차량 태그 52.5만 × 4대 + 자동정지장치 22만 × 4대 + 보행자 태그 11만 × 3명 (2026.08 단가). 사람이 늘면 1인당 11만원 추가. 이 앱은 지급된 폰을 쓴다.</a:t>
             </a:r>
           </a:p>
         </p:txBody>
@@ -8675,7 +8675,7 @@
                 <a:ea typeface="맑은 고딕"/>
                 <a:cs typeface="맑은 고딕"/>
               </a:rPr>
-              <a:t>·  우리 센터 규모(지게차 4대 · 상시 3명)로 장비를 갖추면 331만원이다. 이 앱은 폰이 이미 있으니 0원이다.</a:t>
+              <a:t>·  우리 센터 규모(지게차 4대 · 상시 3명)로 장비를 갖추면 331만원, 감지되는 짝은 12가지. 이 앱은 0원, 21가지.</a:t>
             </a:r>
           </a:p>
         </p:txBody>
@@ -8710,13 +8710,24 @@
             <a:r>
               <a:rPr sz="1000" b="0" i="0" u="none">
                 <a:solidFill>
+                  <a:srgbClr val="404040"/>
+                </a:solidFill>
+                <a:latin typeface="맑은 고딕"/>
+                <a:ea typeface="맑은 고딕"/>
+                <a:cs typeface="맑은 고딕"/>
+              </a:rPr>
+              <a:t>·  I-PAS 는 3m 에서 세우고, 이 앱은 15m 에서 알린다. </a:t>
+            </a:r>
+            <a:r>
+              <a:rPr sz="1000" b="0" i="0" u="none">
+                <a:solidFill>
                   <a:srgbClr val="C0392B"/>
                 </a:solidFill>
                 <a:latin typeface="맑은 고딕"/>
                 <a:ea typeface="맑은 고딕"/>
                 <a:cs typeface="맑은 고딕"/>
               </a:rPr>
-              <a:t>·  대신 앱은 장비를 자동으로 세우지 못한다. 알리는 데까지가 한계다.</a:t>
+              <a:t>앱은 장비를 자동으로 세우지 못한다. 알리는 데까지가 한계다.</a:t>
             </a:r>
           </a:p>
         </p:txBody>
@@ -9664,7 +9675,7 @@
                   <a:ea typeface="맑은 고딕"/>
                   <a:cs typeface="맑은 고딕"/>
                 </a:rPr>
-                <a:t>결과가 흔들리지 않게 다듬는 작업 — 5단계 중 4단계 완료</a:t>
+                <a:t>장비를 사지 않고, 앱 설치만으로 17개 센터로 넓힌다</a:t>
               </a:r>
               <a:endParaRPr lang="ko-KR" altLang="en-US" sz="1200">
                 <a:solidFill>
@@ -9695,7 +9706,7 @@
                   <a:ea typeface="맑은 고딕"/>
                   <a:cs typeface="맑은 고딕"/>
                 </a:rPr>
-                <a:t>·  1 · 2단계 완료 — 자동 검사 체계를 붙이고, 안전과 직결된 동작을 고정했다</a:t>
+                <a:t>·  9월 — WF11 · WF21 · WF25 작업자 설문으로 만족도 · 늦은 경보를 잰다</a:t>
               </a:r>
             </a:p>
             <a:p>
@@ -9716,7 +9727,7 @@
                   <a:ea typeface="맑은 고딕"/>
                   <a:cs typeface="맑은 고딕"/>
                 </a:rPr>
-                <a:t>·  3단계 완료 — 한 파일에 몰려 있던 경보 계산 코드를 나눴다 (3,674줄 → 1,971줄)</a:t>
+                <a:t>·  10월 — 개인 폰 임시 설치를 끝내고 업무용 PDA 로 옮긴다</a:t>
               </a:r>
             </a:p>
             <a:p>
@@ -9737,7 +9748,7 @@
                   <a:ea typeface="맑은 고딕"/>
                   <a:cs typeface="맑은 고딕"/>
                 </a:rPr>
-                <a:t>·  4단계 완료 — 기기 상태 관리 경로를 하나로 통일했다</a:t>
+                <a:t>·  확산 전 — 정식 과제 등록 → 보안 검토 → 안전 · 운영 승인</a:t>
               </a:r>
             </a:p>
             <a:p>
@@ -9758,7 +9769,7 @@
                   <a:ea typeface="맑은 고딕"/>
                   <a:cs typeface="맑은 고딕"/>
                 </a:rPr>
-                <a:t>·  5단계 남음 — 경보 계산을 화면과 분리해, 폰이 많아도 화면이 끊기지 않게 한다</a:t>
+                <a:t>·  승인 후 — 17개 센터로. 센터에 설치할 것 없이 앱만 깔면 된다</a:t>
               </a:r>
             </a:p>
             <a:p>
@@ -9779,7 +9790,7 @@
                   <a:ea typeface="맑은 고딕"/>
                   <a:cs typeface="맑은 고딕"/>
                 </a:rPr>
-                <a:t>자동 검사 51건이 릴리스마다 돌고 있다.</a:t>
+                <a:t>사람이 늘어도, 센터가 늘어도 장비를 사지 않는다. 추가 비용 0원.</a:t>
               </a:r>
             </a:p>
             <a:p>
@@ -9800,7 +9811,7 @@
                   <a:ea typeface="맑은 고딕"/>
                   <a:cs typeface="맑은 고딕"/>
                 </a:rPr>
-                <a:t>그중 24건은 경보 동작을 프레임 단위로 고정한 검사다 — 코드를 나눠도 동작이 달라지지 않았음을 이 검사로 확인했다.</a:t>
+                <a:t>이 앱은 사람에게 알리는 데까지가 역할이다. 장비를 자동으로 세우는 것은 필요하면 별도 과제로 검토한다.</a:t>
               </a:r>
             </a:p>
           </p:txBody>
@@ -9974,7 +9985,7 @@
                   <a:ea typeface="맑은 고딕"/>
                   <a:cs typeface="맑은 고딕"/>
                 </a:rPr>
-                <a:t>업무용 스마트폰에 앱을 깔아, 폰끼리 서로를 감지하게 한다</a:t>
+                <a:t>업무용 스마트폰에 앱을 깔아, 폰끼리 서로 감지하게 한다</a:t>
               </a:r>
               <a:endParaRPr lang="ko-KR" altLang="en-US" sz="1200">
                 <a:solidFill>
@@ -10005,7 +10016,7 @@
                   <a:ea typeface="맑은 고딕"/>
                   <a:cs typeface="맑은 고딕"/>
                 </a:rPr>
-                <a:t>·  정밀 측위(UWB) 폰끼리는 실제 거리로 — 지게차가 끼면 15m · 8m, 사람끼리 5m · 3m</a:t>
+                <a:t>·  정밀 측위 폰끼리는 실제 거리로 — 경고 15m · 위험 8m, 사람끼리 5m · 3m</a:t>
               </a:r>
             </a:p>
             <a:p>
@@ -10068,7 +10079,7 @@
                   <a:ea typeface="맑은 고딕"/>
                   <a:cs typeface="맑은 고딕"/>
                 </a:rPr>
-                <a:t>·  상대가 지게차인지 사람인지, 후진 중인지까지 함께 보낸다</a:t>
+                <a:t>·  상대가 지게차인지 사람인지, 후진 중인지까지 신호에 실어 보낸다</a:t>
               </a:r>
             </a:p>
             <a:p>
@@ -10089,7 +10100,7 @@
                   <a:ea typeface="맑은 고딕"/>
                   <a:cs typeface="맑은 고딕"/>
                 </a:rPr>
-                <a:t>·  안전 구역과 자동 소리 끄기로, 울릴 필요 없는 곳에서는 울리지 않는다</a:t>
+                <a:t>·  안전 구역과 자동 소리 끄기로, 울릴 필요 없을 때는 울리지 않는다</a:t>
               </a:r>
             </a:p>
             <a:p>
@@ -10110,7 +10121,7 @@
                   <a:ea typeface="맑은 고딕"/>
                   <a:cs typeface="맑은 고딕"/>
                 </a:rPr>
-                <a:t>아무 감지 수단도 없던 현장에서 시작해, 지금 v1.1.71 이 3개 센터에서 돌고 있다.</a:t>
+                <a:t>아무 감지 수단도 없던 현장에서, 지금 3개 센터가 쓰고 있다.</a:t>
               </a:r>
             </a:p>
           </p:txBody>
@@ -10306,7 +10317,7 @@
                 <a:ea typeface="맑은 고딕"/>
                 <a:cs typeface="맑은 고딕"/>
               </a:rPr>
-              <a:t>“100% 정확한 감지가 목표가 아닙니다. 피할 시간을 만드는 것이 목표입니다.”</a:t>
+              <a:t>“100% 정확한 감지가 아니라, 피할 시간을 만드는 것이 목표입니다.”</a:t>
             </a:r>
           </a:p>
         </p:txBody>
@@ -11492,7 +11503,685 @@
                           <a:ea typeface="맑은 고딕"/>
                           <a:cs typeface="맑은 고딕"/>
                         </a:rPr>
-                        <a:t>1 · 2단계  자동 검사 체계 · 안전 동작 고정 (저속 접근 포함)</a:t>
+                        <a:t>WF11 첫 배포 · 현장 실사용 시작</a:t>
+                      </a:r>
+                      <a:endParaRPr lang="ko-KR" altLang="en-US" sz="1000" b="0" i="0" u="none" strike="noStrike">
+                        <a:solidFill>
+                          <a:srgbClr val="000000"/>
+                        </a:solidFill>
+                        <a:effectLst/>
+                        <a:latin typeface="맑은 고딕" panose="020B0503020000020004" pitchFamily="50" charset="-127"/>
+                        <a:ea typeface="맑은 고딕" panose="020B0503020000020004" pitchFamily="50" charset="-127"/>
+                      </a:endParaRPr>
+                    </a:p>
+                  </a:txBody>
+                  <a:tcPr marL="128016" marR="128016" marT="18288" anchor="ctr" marB="18288">
+                    <a:lnL w="6350" cap="flat" cmpd="sng" algn="ctr">
+                      <a:solidFill>
+                        <a:schemeClr val="tx1">
+                          <a:lumMod val="50000"/>
+                          <a:lumOff val="50000"/>
+                        </a:schemeClr>
+                      </a:solidFill>
+                      <a:prstDash val="solid"/>
+                      <a:round/>
+                      <a:headEnd type="none" w="med" len="med"/>
+                      <a:tailEnd type="none" w="med" len="med"/>
+                    </a:lnL>
+                    <a:lnR w="6350" cap="flat" cmpd="sng" algn="ctr">
+                      <a:solidFill>
+                        <a:schemeClr val="tx1">
+                          <a:lumMod val="50000"/>
+                          <a:lumOff val="50000"/>
+                        </a:schemeClr>
+                      </a:solidFill>
+                      <a:prstDash val="solid"/>
+                      <a:round/>
+                      <a:headEnd type="none" w="med" len="med"/>
+                      <a:tailEnd type="none" w="med" len="med"/>
+                    </a:lnR>
+                    <a:lnT w="6350" cap="flat" cmpd="sng" algn="ctr">
+                      <a:solidFill>
+                        <a:schemeClr val="tx1">
+                          <a:lumMod val="50000"/>
+                          <a:lumOff val="50000"/>
+                        </a:schemeClr>
+                      </a:solidFill>
+                      <a:prstDash val="solid"/>
+                      <a:round/>
+                      <a:headEnd type="none" w="med" len="med"/>
+                      <a:tailEnd type="none" w="med" len="med"/>
+                    </a:lnT>
+                    <a:lnB w="6350" cap="flat" cmpd="sng" algn="ctr">
+                      <a:solidFill>
+                        <a:schemeClr val="tx1">
+                          <a:lumMod val="50000"/>
+                          <a:lumOff val="50000"/>
+                        </a:schemeClr>
+                      </a:solidFill>
+                      <a:prstDash val="solid"/>
+                      <a:round/>
+                      <a:headEnd type="none" w="med" len="med"/>
+                      <a:tailEnd type="none" w="med" len="med"/>
+                    </a:lnB>
+                    <a:noFill/>
+                  </a:tcPr>
+                </a:tc>
+                <a:tc>
+                  <a:txBody>
+                    <a:bodyPr wrap="square"/>
+                    <a:lstStyle/>
+                    <a:p>
+                      <a:pPr algn="ctr" fontAlgn="ctr">
+                        <a:lnSpc>
+                          <a:spcPct val="115000"/>
+                        </a:lnSpc>
+                      </a:pPr>
+                      <a:r>
+                        <a:rPr sz="1050" b="0" i="0" u="none">
+                          <a:solidFill>
+                            <a:srgbClr val="404040"/>
+                          </a:solidFill>
+                          <a:latin typeface="맑은 고딕"/>
+                          <a:ea typeface="맑은 고딕"/>
+                          <a:cs typeface="맑은 고딕"/>
+                        </a:rPr>
+                        <a:t>제안자 · 현장</a:t>
+                      </a:r>
+                      <a:endParaRPr lang="en-US" sz="1000" b="0" i="0" u="none" strike="noStrike">
+                        <a:solidFill>
+                          <a:srgbClr val="000000"/>
+                        </a:solidFill>
+                        <a:effectLst/>
+                        <a:latin typeface="맑은 고딕" panose="020B0503020000020004" pitchFamily="50" charset="-127"/>
+                        <a:ea typeface="맑은 고딕" panose="020B0503020000020004" pitchFamily="50" charset="-127"/>
+                      </a:endParaRPr>
+                    </a:p>
+                  </a:txBody>
+                  <a:tcPr marL="54864" marR="54864" marT="18288" anchor="ctr" marB="18288">
+                    <a:lnL w="6350" cap="flat" cmpd="sng" algn="ctr">
+                      <a:solidFill>
+                        <a:schemeClr val="tx1">
+                          <a:lumMod val="50000"/>
+                          <a:lumOff val="50000"/>
+                        </a:schemeClr>
+                      </a:solidFill>
+                      <a:prstDash val="solid"/>
+                      <a:round/>
+                      <a:headEnd type="none" w="med" len="med"/>
+                      <a:tailEnd type="none" w="med" len="med"/>
+                    </a:lnL>
+                    <a:lnR w="6350" cap="flat" cmpd="sng" algn="ctr">
+                      <a:solidFill>
+                        <a:schemeClr val="tx1">
+                          <a:lumMod val="50000"/>
+                          <a:lumOff val="50000"/>
+                        </a:schemeClr>
+                      </a:solidFill>
+                      <a:prstDash val="solid"/>
+                      <a:round/>
+                      <a:headEnd type="none" w="med" len="med"/>
+                      <a:tailEnd type="none" w="med" len="med"/>
+                    </a:lnR>
+                    <a:lnT w="6350" cap="flat" cmpd="sng" algn="ctr">
+                      <a:solidFill>
+                        <a:schemeClr val="tx1">
+                          <a:lumMod val="50000"/>
+                          <a:lumOff val="50000"/>
+                        </a:schemeClr>
+                      </a:solidFill>
+                      <a:prstDash val="solid"/>
+                      <a:round/>
+                      <a:headEnd type="none" w="med" len="med"/>
+                      <a:tailEnd type="none" w="med" len="med"/>
+                    </a:lnT>
+                    <a:lnB w="6350" cap="flat" cmpd="sng" algn="ctr">
+                      <a:solidFill>
+                        <a:schemeClr val="tx1">
+                          <a:lumMod val="50000"/>
+                          <a:lumOff val="50000"/>
+                        </a:schemeClr>
+                      </a:solidFill>
+                      <a:prstDash val="solid"/>
+                      <a:round/>
+                      <a:headEnd type="none" w="med" len="med"/>
+                      <a:tailEnd type="none" w="med" len="med"/>
+                    </a:lnB>
+                    <a:noFill/>
+                  </a:tcPr>
+                </a:tc>
+                <a:tc>
+                  <a:txBody>
+                    <a:bodyPr wrap="square"/>
+                    <a:lstStyle/>
+                    <a:p>
+                      <a:pPr algn="ctr" fontAlgn="ctr">
+                        <a:lnSpc>
+                          <a:spcPct val="115000"/>
+                        </a:lnSpc>
+                      </a:pPr>
+                      <a:r>
+                        <a:rPr sz="1050" b="0" i="0" u="none">
+                          <a:solidFill>
+                            <a:srgbClr val="404040"/>
+                          </a:solidFill>
+                          <a:latin typeface="맑은 고딕"/>
+                          <a:ea typeface="맑은 고딕"/>
+                          <a:cs typeface="맑은 고딕"/>
+                        </a:rPr>
+                        <a:t>2026.06</a:t>
+                      </a:r>
+                      <a:endParaRPr lang="en-US" altLang="ko-KR" sz="1000" b="0" i="0" u="none" strike="noStrike">
+                        <a:solidFill>
+                          <a:srgbClr val="000000"/>
+                        </a:solidFill>
+                        <a:effectLst/>
+                        <a:latin typeface="맑은 고딕" panose="020B0503020000020004" pitchFamily="50" charset="-127"/>
+                        <a:ea typeface="맑은 고딕" panose="020B0503020000020004" pitchFamily="50" charset="-127"/>
+                      </a:endParaRPr>
+                    </a:p>
+                  </a:txBody>
+                  <a:tcPr marL="54864" marR="54864" marT="18288" anchor="ctr" marB="18288">
+                    <a:lnL w="6350" cap="flat" cmpd="sng" algn="ctr">
+                      <a:solidFill>
+                        <a:schemeClr val="tx1">
+                          <a:lumMod val="50000"/>
+                          <a:lumOff val="50000"/>
+                        </a:schemeClr>
+                      </a:solidFill>
+                      <a:prstDash val="solid"/>
+                      <a:round/>
+                      <a:headEnd type="none" w="med" len="med"/>
+                      <a:tailEnd type="none" w="med" len="med"/>
+                    </a:lnL>
+                    <a:lnR w="6350" cap="flat" cmpd="sng" algn="ctr">
+                      <a:solidFill>
+                        <a:schemeClr val="tx1">
+                          <a:lumMod val="50000"/>
+                          <a:lumOff val="50000"/>
+                        </a:schemeClr>
+                      </a:solidFill>
+                      <a:prstDash val="solid"/>
+                      <a:round/>
+                      <a:headEnd type="none" w="med" len="med"/>
+                      <a:tailEnd type="none" w="med" len="med"/>
+                    </a:lnR>
+                    <a:lnT w="6350" cap="flat" cmpd="sng" algn="ctr">
+                      <a:solidFill>
+                        <a:schemeClr val="tx1">
+                          <a:lumMod val="50000"/>
+                          <a:lumOff val="50000"/>
+                        </a:schemeClr>
+                      </a:solidFill>
+                      <a:prstDash val="solid"/>
+                      <a:round/>
+                      <a:headEnd type="none" w="med" len="med"/>
+                      <a:tailEnd type="none" w="med" len="med"/>
+                    </a:lnT>
+                    <a:lnB w="6350" cap="flat" cmpd="sng" algn="ctr">
+                      <a:solidFill>
+                        <a:schemeClr val="tx1">
+                          <a:lumMod val="50000"/>
+                          <a:lumOff val="50000"/>
+                        </a:schemeClr>
+                      </a:solidFill>
+                      <a:prstDash val="solid"/>
+                      <a:round/>
+                      <a:headEnd type="none" w="med" len="med"/>
+                      <a:tailEnd type="none" w="med" len="med"/>
+                    </a:lnB>
+                    <a:noFill/>
+                  </a:tcPr>
+                </a:tc>
+                <a:tc>
+                  <a:txBody>
+                    <a:bodyPr wrap="square"/>
+                    <a:lstStyle/>
+                    <a:p>
+                      <a:pPr algn="ctr" fontAlgn="ctr">
+                        <a:lnSpc>
+                          <a:spcPct val="115000"/>
+                        </a:lnSpc>
+                      </a:pPr>
+                      <a:r>
+                        <a:rPr sz="1050" b="1" i="0" u="none">
+                          <a:solidFill>
+                            <a:srgbClr val="1B8A6B"/>
+                          </a:solidFill>
+                          <a:latin typeface="맑은 고딕"/>
+                          <a:ea typeface="맑은 고딕"/>
+                          <a:cs typeface="맑은 고딕"/>
+                        </a:rPr>
+                        <a:t>완료</a:t>
+                      </a:r>
+                      <a:endParaRPr lang="ko-KR" altLang="en-US" sz="1000" b="0" i="0" u="none" strike="noStrike">
+                        <a:solidFill>
+                          <a:srgbClr val="000000"/>
+                        </a:solidFill>
+                        <a:effectLst/>
+                        <a:latin typeface="맑은 고딕" panose="020B0503020000020004" pitchFamily="50" charset="-127"/>
+                        <a:ea typeface="맑은 고딕" panose="020B0503020000020004" pitchFamily="50" charset="-127"/>
+                      </a:endParaRPr>
+                    </a:p>
+                  </a:txBody>
+                  <a:tcPr marL="54864" marR="54864" marT="18288" anchor="ctr" marB="18288">
+                    <a:lnL w="6350" cap="flat" cmpd="sng" algn="ctr">
+                      <a:solidFill>
+                        <a:schemeClr val="tx1">
+                          <a:lumMod val="50000"/>
+                          <a:lumOff val="50000"/>
+                        </a:schemeClr>
+                      </a:solidFill>
+                      <a:prstDash val="solid"/>
+                      <a:round/>
+                      <a:headEnd type="none" w="med" len="med"/>
+                      <a:tailEnd type="none" w="med" len="med"/>
+                    </a:lnL>
+                    <a:lnR w="6350" cap="flat" cmpd="sng" algn="ctr">
+                      <a:solidFill>
+                        <a:schemeClr val="tx1">
+                          <a:lumMod val="50000"/>
+                          <a:lumOff val="50000"/>
+                        </a:schemeClr>
+                      </a:solidFill>
+                      <a:prstDash val="solid"/>
+                      <a:round/>
+                      <a:headEnd type="none" w="med" len="med"/>
+                      <a:tailEnd type="none" w="med" len="med"/>
+                    </a:lnR>
+                    <a:lnT w="6350" cap="flat" cmpd="sng" algn="ctr">
+                      <a:solidFill>
+                        <a:schemeClr val="tx1">
+                          <a:lumMod val="50000"/>
+                          <a:lumOff val="50000"/>
+                        </a:schemeClr>
+                      </a:solidFill>
+                      <a:prstDash val="solid"/>
+                      <a:round/>
+                      <a:headEnd type="none" w="med" len="med"/>
+                      <a:tailEnd type="none" w="med" len="med"/>
+                    </a:lnT>
+                    <a:lnB w="6350" cap="flat" cmpd="sng" algn="ctr">
+                      <a:solidFill>
+                        <a:schemeClr val="tx1">
+                          <a:lumMod val="50000"/>
+                          <a:lumOff val="50000"/>
+                        </a:schemeClr>
+                      </a:solidFill>
+                      <a:prstDash val="solid"/>
+                      <a:round/>
+                      <a:headEnd type="none" w="med" len="med"/>
+                      <a:tailEnd type="none" w="med" len="med"/>
+                    </a:lnB>
+                    <a:noFill/>
+                  </a:tcPr>
+                </a:tc>
+                <a:extLst>
+                  <a:ext uri="{0D108BD9-81ED-4DB2-BD59-A6C34878D82A}">
+                    <a16:rowId xmlns:a16="http://schemas.microsoft.com/office/drawing/2014/main" val="2832801422"/>
+                  </a:ext>
+                </a:extLst>
+              </a:tr>
+              <a:tr h="379701">
+                <a:tc>
+                  <a:txBody>
+                    <a:bodyPr wrap="square"/>
+                    <a:lstStyle/>
+                    <a:p>
+                      <a:pPr algn="l" fontAlgn="ctr">
+                        <a:lnSpc>
+                          <a:spcPct val="115000"/>
+                        </a:lnSpc>
+                      </a:pPr>
+                      <a:r>
+                        <a:rPr sz="1050" b="0" i="0" u="none">
+                          <a:solidFill>
+                            <a:srgbClr val="404040"/>
+                          </a:solidFill>
+                          <a:latin typeface="맑은 고딕"/>
+                          <a:ea typeface="맑은 고딕"/>
+                          <a:cs typeface="맑은 고딕"/>
+                        </a:rPr>
+                        <a:t>작업자 의견 3차례 반영 (역할 전환 · 안전 구역 등)</a:t>
+                      </a:r>
+                      <a:endParaRPr lang="ko-KR" altLang="en-US" sz="1000" b="0" i="0" u="none" strike="noStrike">
+                        <a:solidFill>
+                          <a:srgbClr val="000000"/>
+                        </a:solidFill>
+                        <a:effectLst/>
+                        <a:latin typeface="맑은 고딕" panose="020B0503020000020004" pitchFamily="50" charset="-127"/>
+                        <a:ea typeface="맑은 고딕" panose="020B0503020000020004" pitchFamily="50" charset="-127"/>
+                      </a:endParaRPr>
+                    </a:p>
+                  </a:txBody>
+                  <a:tcPr marL="128016" marR="128016" marT="18288" anchor="ctr" marB="18288">
+                    <a:lnL w="6350" cap="flat" cmpd="sng" algn="ctr">
+                      <a:solidFill>
+                        <a:schemeClr val="tx1">
+                          <a:lumMod val="50000"/>
+                          <a:lumOff val="50000"/>
+                        </a:schemeClr>
+                      </a:solidFill>
+                      <a:prstDash val="solid"/>
+                      <a:round/>
+                      <a:headEnd type="none" w="med" len="med"/>
+                      <a:tailEnd type="none" w="med" len="med"/>
+                    </a:lnL>
+                    <a:lnR w="6350" cap="flat" cmpd="sng" algn="ctr">
+                      <a:solidFill>
+                        <a:schemeClr val="tx1">
+                          <a:lumMod val="50000"/>
+                          <a:lumOff val="50000"/>
+                        </a:schemeClr>
+                      </a:solidFill>
+                      <a:prstDash val="solid"/>
+                      <a:round/>
+                      <a:headEnd type="none" w="med" len="med"/>
+                      <a:tailEnd type="none" w="med" len="med"/>
+                    </a:lnR>
+                    <a:lnT w="6350" cap="flat" cmpd="sng" algn="ctr">
+                      <a:solidFill>
+                        <a:schemeClr val="tx1">
+                          <a:lumMod val="50000"/>
+                          <a:lumOff val="50000"/>
+                        </a:schemeClr>
+                      </a:solidFill>
+                      <a:prstDash val="solid"/>
+                      <a:round/>
+                      <a:headEnd type="none" w="med" len="med"/>
+                      <a:tailEnd type="none" w="med" len="med"/>
+                    </a:lnT>
+                    <a:lnB w="6350" cap="flat" cmpd="sng" algn="ctr">
+                      <a:solidFill>
+                        <a:schemeClr val="tx1">
+                          <a:lumMod val="50000"/>
+                          <a:lumOff val="50000"/>
+                        </a:schemeClr>
+                      </a:solidFill>
+                      <a:prstDash val="solid"/>
+                      <a:round/>
+                      <a:headEnd type="none" w="med" len="med"/>
+                      <a:tailEnd type="none" w="med" len="med"/>
+                    </a:lnB>
+                    <a:noFill/>
+                  </a:tcPr>
+                </a:tc>
+                <a:tc>
+                  <a:txBody>
+                    <a:bodyPr wrap="square"/>
+                    <a:lstStyle/>
+                    <a:p>
+                      <a:pPr algn="ctr" fontAlgn="ctr">
+                        <a:lnSpc>
+                          <a:spcPct val="115000"/>
+                        </a:lnSpc>
+                      </a:pPr>
+                      <a:r>
+                        <a:rPr sz="1050" b="0" i="0" u="none">
+                          <a:solidFill>
+                            <a:srgbClr val="404040"/>
+                          </a:solidFill>
+                          <a:latin typeface="맑은 고딕"/>
+                          <a:ea typeface="맑은 고딕"/>
+                          <a:cs typeface="맑은 고딕"/>
+                        </a:rPr>
+                        <a:t>제안자 · 현장</a:t>
+                      </a:r>
+                      <a:endParaRPr lang="en-US" sz="1000" b="0" i="0" u="none" strike="noStrike">
+                        <a:solidFill>
+                          <a:srgbClr val="000000"/>
+                        </a:solidFill>
+                        <a:effectLst/>
+                        <a:latin typeface="맑은 고딕" panose="020B0503020000020004" pitchFamily="50" charset="-127"/>
+                        <a:ea typeface="맑은 고딕" panose="020B0503020000020004" pitchFamily="50" charset="-127"/>
+                      </a:endParaRPr>
+                    </a:p>
+                  </a:txBody>
+                  <a:tcPr marL="54864" marR="54864" marT="18288" anchor="ctr" marB="18288">
+                    <a:lnL w="6350" cap="flat" cmpd="sng" algn="ctr">
+                      <a:solidFill>
+                        <a:schemeClr val="tx1">
+                          <a:lumMod val="50000"/>
+                          <a:lumOff val="50000"/>
+                        </a:schemeClr>
+                      </a:solidFill>
+                      <a:prstDash val="solid"/>
+                      <a:round/>
+                      <a:headEnd type="none" w="med" len="med"/>
+                      <a:tailEnd type="none" w="med" len="med"/>
+                    </a:lnL>
+                    <a:lnR w="6350" cap="flat" cmpd="sng" algn="ctr">
+                      <a:solidFill>
+                        <a:schemeClr val="tx1">
+                          <a:lumMod val="50000"/>
+                          <a:lumOff val="50000"/>
+                        </a:schemeClr>
+                      </a:solidFill>
+                      <a:prstDash val="solid"/>
+                      <a:round/>
+                      <a:headEnd type="none" w="med" len="med"/>
+                      <a:tailEnd type="none" w="med" len="med"/>
+                    </a:lnR>
+                    <a:lnT w="6350" cap="flat" cmpd="sng" algn="ctr">
+                      <a:solidFill>
+                        <a:schemeClr val="tx1">
+                          <a:lumMod val="50000"/>
+                          <a:lumOff val="50000"/>
+                        </a:schemeClr>
+                      </a:solidFill>
+                      <a:prstDash val="solid"/>
+                      <a:round/>
+                      <a:headEnd type="none" w="med" len="med"/>
+                      <a:tailEnd type="none" w="med" len="med"/>
+                    </a:lnT>
+                    <a:lnB w="6350" cap="flat" cmpd="sng" algn="ctr">
+                      <a:solidFill>
+                        <a:schemeClr val="tx1">
+                          <a:lumMod val="50000"/>
+                          <a:lumOff val="50000"/>
+                        </a:schemeClr>
+                      </a:solidFill>
+                      <a:prstDash val="solid"/>
+                      <a:round/>
+                      <a:headEnd type="none" w="med" len="med"/>
+                      <a:tailEnd type="none" w="med" len="med"/>
+                    </a:lnB>
+                    <a:noFill/>
+                  </a:tcPr>
+                </a:tc>
+                <a:tc>
+                  <a:txBody>
+                    <a:bodyPr wrap="square"/>
+                    <a:lstStyle/>
+                    <a:p>
+                      <a:pPr algn="ctr" fontAlgn="ctr">
+                        <a:lnSpc>
+                          <a:spcPct val="115000"/>
+                        </a:lnSpc>
+                      </a:pPr>
+                      <a:r>
+                        <a:rPr sz="1050" b="0" i="0" u="none">
+                          <a:solidFill>
+                            <a:srgbClr val="404040"/>
+                          </a:solidFill>
+                          <a:latin typeface="맑은 고딕"/>
+                          <a:ea typeface="맑은 고딕"/>
+                          <a:cs typeface="맑은 고딕"/>
+                        </a:rPr>
+                        <a:t>수시</a:t>
+                      </a:r>
+                      <a:endParaRPr lang="en-US" altLang="ko-KR" sz="1000" b="0" i="0" u="none" strike="noStrike">
+                        <a:solidFill>
+                          <a:srgbClr val="000000"/>
+                        </a:solidFill>
+                        <a:effectLst/>
+                        <a:latin typeface="맑은 고딕" panose="020B0503020000020004" pitchFamily="50" charset="-127"/>
+                        <a:ea typeface="맑은 고딕" panose="020B0503020000020004" pitchFamily="50" charset="-127"/>
+                      </a:endParaRPr>
+                    </a:p>
+                  </a:txBody>
+                  <a:tcPr marL="54864" marR="54864" marT="18288" anchor="ctr" marB="18288">
+                    <a:lnL w="6350" cap="flat" cmpd="sng" algn="ctr">
+                      <a:solidFill>
+                        <a:schemeClr val="tx1">
+                          <a:lumMod val="50000"/>
+                          <a:lumOff val="50000"/>
+                        </a:schemeClr>
+                      </a:solidFill>
+                      <a:prstDash val="solid"/>
+                      <a:round/>
+                      <a:headEnd type="none" w="med" len="med"/>
+                      <a:tailEnd type="none" w="med" len="med"/>
+                    </a:lnL>
+                    <a:lnR w="6350" cap="flat" cmpd="sng" algn="ctr">
+                      <a:solidFill>
+                        <a:schemeClr val="tx1">
+                          <a:lumMod val="50000"/>
+                          <a:lumOff val="50000"/>
+                        </a:schemeClr>
+                      </a:solidFill>
+                      <a:prstDash val="solid"/>
+                      <a:round/>
+                      <a:headEnd type="none" w="med" len="med"/>
+                      <a:tailEnd type="none" w="med" len="med"/>
+                    </a:lnR>
+                    <a:lnT w="6350" cap="flat" cmpd="sng" algn="ctr">
+                      <a:solidFill>
+                        <a:schemeClr val="tx1">
+                          <a:lumMod val="50000"/>
+                          <a:lumOff val="50000"/>
+                        </a:schemeClr>
+                      </a:solidFill>
+                      <a:prstDash val="solid"/>
+                      <a:round/>
+                      <a:headEnd type="none" w="med" len="med"/>
+                      <a:tailEnd type="none" w="med" len="med"/>
+                    </a:lnT>
+                    <a:lnB w="6350" cap="flat" cmpd="sng" algn="ctr">
+                      <a:solidFill>
+                        <a:schemeClr val="tx1">
+                          <a:lumMod val="50000"/>
+                          <a:lumOff val="50000"/>
+                        </a:schemeClr>
+                      </a:solidFill>
+                      <a:prstDash val="solid"/>
+                      <a:round/>
+                      <a:headEnd type="none" w="med" len="med"/>
+                      <a:tailEnd type="none" w="med" len="med"/>
+                    </a:lnB>
+                    <a:noFill/>
+                  </a:tcPr>
+                </a:tc>
+                <a:tc>
+                  <a:txBody>
+                    <a:bodyPr wrap="square"/>
+                    <a:lstStyle/>
+                    <a:p>
+                      <a:pPr algn="ctr" fontAlgn="ctr">
+                        <a:lnSpc>
+                          <a:spcPct val="115000"/>
+                        </a:lnSpc>
+                      </a:pPr>
+                      <a:r>
+                        <a:rPr sz="1050" b="1" i="0" u="none">
+                          <a:solidFill>
+                            <a:srgbClr val="1B8A6B"/>
+                          </a:solidFill>
+                          <a:latin typeface="맑은 고딕"/>
+                          <a:ea typeface="맑은 고딕"/>
+                          <a:cs typeface="맑은 고딕"/>
+                        </a:rPr>
+                        <a:t>완료</a:t>
+                      </a:r>
+                      <a:endParaRPr lang="ko-KR" altLang="en-US" sz="1000" b="0" i="0" u="none" strike="noStrike">
+                        <a:solidFill>
+                          <a:srgbClr val="000000"/>
+                        </a:solidFill>
+                        <a:effectLst/>
+                        <a:latin typeface="맑은 고딕" panose="020B0503020000020004" pitchFamily="50" charset="-127"/>
+                        <a:ea typeface="맑은 고딕" panose="020B0503020000020004" pitchFamily="50" charset="-127"/>
+                      </a:endParaRPr>
+                    </a:p>
+                  </a:txBody>
+                  <a:tcPr marL="54864" marR="54864" marT="18288" anchor="ctr" marB="18288">
+                    <a:lnL w="6350" cap="flat" cmpd="sng" algn="ctr">
+                      <a:solidFill>
+                        <a:schemeClr val="tx1">
+                          <a:lumMod val="50000"/>
+                          <a:lumOff val="50000"/>
+                        </a:schemeClr>
+                      </a:solidFill>
+                      <a:prstDash val="solid"/>
+                      <a:round/>
+                      <a:headEnd type="none" w="med" len="med"/>
+                      <a:tailEnd type="none" w="med" len="med"/>
+                    </a:lnL>
+                    <a:lnR w="6350" cap="flat" cmpd="sng" algn="ctr">
+                      <a:solidFill>
+                        <a:schemeClr val="tx1">
+                          <a:lumMod val="50000"/>
+                          <a:lumOff val="50000"/>
+                        </a:schemeClr>
+                      </a:solidFill>
+                      <a:prstDash val="solid"/>
+                      <a:round/>
+                      <a:headEnd type="none" w="med" len="med"/>
+                      <a:tailEnd type="none" w="med" len="med"/>
+                    </a:lnR>
+                    <a:lnT w="6350" cap="flat" cmpd="sng" algn="ctr">
+                      <a:solidFill>
+                        <a:schemeClr val="tx1">
+                          <a:lumMod val="50000"/>
+                          <a:lumOff val="50000"/>
+                        </a:schemeClr>
+                      </a:solidFill>
+                      <a:prstDash val="solid"/>
+                      <a:round/>
+                      <a:headEnd type="none" w="med" len="med"/>
+                      <a:tailEnd type="none" w="med" len="med"/>
+                    </a:lnT>
+                    <a:lnB w="6350" cap="flat" cmpd="sng" algn="ctr">
+                      <a:solidFill>
+                        <a:schemeClr val="tx1">
+                          <a:lumMod val="50000"/>
+                          <a:lumOff val="50000"/>
+                        </a:schemeClr>
+                      </a:solidFill>
+                      <a:prstDash val="solid"/>
+                      <a:round/>
+                      <a:headEnd type="none" w="med" len="med"/>
+                      <a:tailEnd type="none" w="med" len="med"/>
+                    </a:lnB>
+                    <a:noFill/>
+                  </a:tcPr>
+                </a:tc>
+                <a:extLst>
+                  <a:ext uri="{0D108BD9-81ED-4DB2-BD59-A6C34878D82A}">
+                    <a16:rowId xmlns:a16="http://schemas.microsoft.com/office/drawing/2014/main" val="3977275645"/>
+                  </a:ext>
+                </a:extLst>
+              </a:tr>
+              <a:tr h="379701">
+                <a:tc>
+                  <a:txBody>
+                    <a:bodyPr wrap="square"/>
+                    <a:lstStyle/>
+                    <a:p>
+                      <a:pPr algn="l" fontAlgn="ctr">
+                        <a:lnSpc>
+                          <a:spcPct val="115000"/>
+                        </a:lnSpc>
+                      </a:pPr>
+                      <a:r>
+                        <a:rPr sz="1050" b="0" i="0" u="none">
+                          <a:solidFill>
+                            <a:srgbClr val="404040"/>
+                          </a:solidFill>
+                          <a:latin typeface="맑은 고딕"/>
+                          <a:ea typeface="맑은 고딕"/>
+                          <a:cs typeface="맑은 고딕"/>
+                        </a:rPr>
+                        <a:t>경보 기록 서버 저장 · 매주 자동 집계</a:t>
                       </a:r>
                       <a:endParaRPr lang="ko-KR" altLang="en-US" sz="1000" b="0" i="0" u="none" strike="noStrike">
                         <a:solidFill>
@@ -11658,7 +12347,7 @@
                           <a:ea typeface="맑은 고딕"/>
                           <a:cs typeface="맑은 고딕"/>
                         </a:rPr>
-                        <a:t>완료</a:t>
+                        <a:t>2026.08</a:t>
                       </a:r>
                       <a:endParaRPr lang="en-US" altLang="ko-KR" sz="1000" b="0" i="0" u="none" strike="noStrike">
                         <a:solidFill>
@@ -11807,7 +12496,7 @@
                 </a:tc>
                 <a:extLst>
                   <a:ext uri="{0D108BD9-81ED-4DB2-BD59-A6C34878D82A}">
-                    <a16:rowId xmlns:a16="http://schemas.microsoft.com/office/drawing/2014/main" val="2832801422"/>
+                    <a16:rowId xmlns:a16="http://schemas.microsoft.com/office/drawing/2014/main" val="1393886245"/>
                   </a:ext>
                 </a:extLst>
               </a:tr>
@@ -11831,7 +12520,1024 @@
                           <a:ea typeface="맑은 고딕"/>
                           <a:cs typeface="맑은 고딕"/>
                         </a:rPr>
-                        <a:t>3단계  경보 계산 코드 분리 (3,674줄 → 1,971줄)</a:t>
+                        <a:t>WF11 · WF21 · WF25 세 센터 실사용</a:t>
+                      </a:r>
+                      <a:endParaRPr lang="ko-KR" altLang="en-US" sz="1000" b="0" i="0" u="none" strike="noStrike">
+                        <a:solidFill>
+                          <a:srgbClr val="000000"/>
+                        </a:solidFill>
+                        <a:effectLst/>
+                        <a:latin typeface="맑은 고딕" panose="020B0503020000020004" pitchFamily="50" charset="-127"/>
+                        <a:ea typeface="맑은 고딕" panose="020B0503020000020004" pitchFamily="50" charset="-127"/>
+                      </a:endParaRPr>
+                    </a:p>
+                  </a:txBody>
+                  <a:tcPr marL="128016" marR="128016" marT="18288" anchor="ctr" marB="18288">
+                    <a:lnL w="6350" cap="flat" cmpd="sng" algn="ctr">
+                      <a:solidFill>
+                        <a:schemeClr val="tx1">
+                          <a:lumMod val="50000"/>
+                          <a:lumOff val="50000"/>
+                        </a:schemeClr>
+                      </a:solidFill>
+                      <a:prstDash val="solid"/>
+                      <a:round/>
+                      <a:headEnd type="none" w="med" len="med"/>
+                      <a:tailEnd type="none" w="med" len="med"/>
+                    </a:lnL>
+                    <a:lnR w="6350" cap="flat" cmpd="sng" algn="ctr">
+                      <a:solidFill>
+                        <a:schemeClr val="tx1">
+                          <a:lumMod val="50000"/>
+                          <a:lumOff val="50000"/>
+                        </a:schemeClr>
+                      </a:solidFill>
+                      <a:prstDash val="solid"/>
+                      <a:round/>
+                      <a:headEnd type="none" w="med" len="med"/>
+                      <a:tailEnd type="none" w="med" len="med"/>
+                    </a:lnR>
+                    <a:lnT w="6350" cap="flat" cmpd="sng" algn="ctr">
+                      <a:solidFill>
+                        <a:schemeClr val="tx1">
+                          <a:lumMod val="50000"/>
+                          <a:lumOff val="50000"/>
+                        </a:schemeClr>
+                      </a:solidFill>
+                      <a:prstDash val="solid"/>
+                      <a:round/>
+                      <a:headEnd type="none" w="med" len="med"/>
+                      <a:tailEnd type="none" w="med" len="med"/>
+                    </a:lnT>
+                    <a:lnB w="6350" cap="flat" cmpd="sng" algn="ctr">
+                      <a:solidFill>
+                        <a:schemeClr val="tx1">
+                          <a:lumMod val="50000"/>
+                          <a:lumOff val="50000"/>
+                        </a:schemeClr>
+                      </a:solidFill>
+                      <a:prstDash val="solid"/>
+                      <a:round/>
+                      <a:headEnd type="none" w="med" len="med"/>
+                      <a:tailEnd type="none" w="med" len="med"/>
+                    </a:lnB>
+                    <a:noFill/>
+                  </a:tcPr>
+                </a:tc>
+                <a:tc>
+                  <a:txBody>
+                    <a:bodyPr wrap="square"/>
+                    <a:lstStyle/>
+                    <a:p>
+                      <a:pPr algn="ctr" fontAlgn="ctr">
+                        <a:lnSpc>
+                          <a:spcPct val="115000"/>
+                        </a:lnSpc>
+                      </a:pPr>
+                      <a:r>
+                        <a:rPr sz="1050" b="0" i="0" u="none">
+                          <a:solidFill>
+                            <a:srgbClr val="404040"/>
+                          </a:solidFill>
+                          <a:latin typeface="맑은 고딕"/>
+                          <a:ea typeface="맑은 고딕"/>
+                          <a:cs typeface="맑은 고딕"/>
+                        </a:rPr>
+                        <a:t>제안자 · 현장</a:t>
+                      </a:r>
+                      <a:endParaRPr lang="en-US" sz="1000" b="0" i="0" u="none" strike="noStrike">
+                        <a:solidFill>
+                          <a:srgbClr val="000000"/>
+                        </a:solidFill>
+                        <a:effectLst/>
+                        <a:latin typeface="맑은 고딕" panose="020B0503020000020004" pitchFamily="50" charset="-127"/>
+                        <a:ea typeface="맑은 고딕" panose="020B0503020000020004" pitchFamily="50" charset="-127"/>
+                      </a:endParaRPr>
+                    </a:p>
+                  </a:txBody>
+                  <a:tcPr marL="54864" marR="54864" marT="18288" anchor="ctr" marB="18288">
+                    <a:lnL w="6350" cap="flat" cmpd="sng" algn="ctr">
+                      <a:solidFill>
+                        <a:schemeClr val="tx1">
+                          <a:lumMod val="50000"/>
+                          <a:lumOff val="50000"/>
+                        </a:schemeClr>
+                      </a:solidFill>
+                      <a:prstDash val="solid"/>
+                      <a:round/>
+                      <a:headEnd type="none" w="med" len="med"/>
+                      <a:tailEnd type="none" w="med" len="med"/>
+                    </a:lnL>
+                    <a:lnR w="6350" cap="flat" cmpd="sng" algn="ctr">
+                      <a:solidFill>
+                        <a:schemeClr val="tx1">
+                          <a:lumMod val="50000"/>
+                          <a:lumOff val="50000"/>
+                        </a:schemeClr>
+                      </a:solidFill>
+                      <a:prstDash val="solid"/>
+                      <a:round/>
+                      <a:headEnd type="none" w="med" len="med"/>
+                      <a:tailEnd type="none" w="med" len="med"/>
+                    </a:lnR>
+                    <a:lnT w="6350" cap="flat" cmpd="sng" algn="ctr">
+                      <a:solidFill>
+                        <a:schemeClr val="tx1">
+                          <a:lumMod val="50000"/>
+                          <a:lumOff val="50000"/>
+                        </a:schemeClr>
+                      </a:solidFill>
+                      <a:prstDash val="solid"/>
+                      <a:round/>
+                      <a:headEnd type="none" w="med" len="med"/>
+                      <a:tailEnd type="none" w="med" len="med"/>
+                    </a:lnT>
+                    <a:lnB w="6350" cap="flat" cmpd="sng" algn="ctr">
+                      <a:solidFill>
+                        <a:schemeClr val="tx1">
+                          <a:lumMod val="50000"/>
+                          <a:lumOff val="50000"/>
+                        </a:schemeClr>
+                      </a:solidFill>
+                      <a:prstDash val="solid"/>
+                      <a:round/>
+                      <a:headEnd type="none" w="med" len="med"/>
+                      <a:tailEnd type="none" w="med" len="med"/>
+                    </a:lnB>
+                    <a:noFill/>
+                  </a:tcPr>
+                </a:tc>
+                <a:tc>
+                  <a:txBody>
+                    <a:bodyPr wrap="square"/>
+                    <a:lstStyle/>
+                    <a:p>
+                      <a:pPr algn="ctr" fontAlgn="ctr">
+                        <a:lnSpc>
+                          <a:spcPct val="115000"/>
+                        </a:lnSpc>
+                      </a:pPr>
+                      <a:r>
+                        <a:rPr sz="1050" b="0" i="0" u="none">
+                          <a:solidFill>
+                            <a:srgbClr val="404040"/>
+                          </a:solidFill>
+                          <a:latin typeface="맑은 고딕"/>
+                          <a:ea typeface="맑은 고딕"/>
+                          <a:cs typeface="맑은 고딕"/>
+                        </a:rPr>
+                        <a:t>진행 중</a:t>
+                      </a:r>
+                      <a:endParaRPr lang="en-US" altLang="ko-KR" sz="1000" b="0" i="0" u="none" strike="noStrike">
+                        <a:solidFill>
+                          <a:srgbClr val="000000"/>
+                        </a:solidFill>
+                        <a:effectLst/>
+                        <a:latin typeface="맑은 고딕" panose="020B0503020000020004" pitchFamily="50" charset="-127"/>
+                        <a:ea typeface="맑은 고딕" panose="020B0503020000020004" pitchFamily="50" charset="-127"/>
+                      </a:endParaRPr>
+                    </a:p>
+                  </a:txBody>
+                  <a:tcPr marL="54864" marR="54864" marT="18288" anchor="ctr" marB="18288">
+                    <a:lnL w="6350" cap="flat" cmpd="sng" algn="ctr">
+                      <a:solidFill>
+                        <a:schemeClr val="tx1">
+                          <a:lumMod val="50000"/>
+                          <a:lumOff val="50000"/>
+                        </a:schemeClr>
+                      </a:solidFill>
+                      <a:prstDash val="solid"/>
+                      <a:round/>
+                      <a:headEnd type="none" w="med" len="med"/>
+                      <a:tailEnd type="none" w="med" len="med"/>
+                    </a:lnL>
+                    <a:lnR w="6350" cap="flat" cmpd="sng" algn="ctr">
+                      <a:solidFill>
+                        <a:schemeClr val="tx1">
+                          <a:lumMod val="50000"/>
+                          <a:lumOff val="50000"/>
+                        </a:schemeClr>
+                      </a:solidFill>
+                      <a:prstDash val="solid"/>
+                      <a:round/>
+                      <a:headEnd type="none" w="med" len="med"/>
+                      <a:tailEnd type="none" w="med" len="med"/>
+                    </a:lnR>
+                    <a:lnT w="6350" cap="flat" cmpd="sng" algn="ctr">
+                      <a:solidFill>
+                        <a:schemeClr val="tx1">
+                          <a:lumMod val="50000"/>
+                          <a:lumOff val="50000"/>
+                        </a:schemeClr>
+                      </a:solidFill>
+                      <a:prstDash val="solid"/>
+                      <a:round/>
+                      <a:headEnd type="none" w="med" len="med"/>
+                      <a:tailEnd type="none" w="med" len="med"/>
+                    </a:lnT>
+                    <a:lnB w="6350" cap="flat" cmpd="sng" algn="ctr">
+                      <a:solidFill>
+                        <a:schemeClr val="tx1">
+                          <a:lumMod val="50000"/>
+                          <a:lumOff val="50000"/>
+                        </a:schemeClr>
+                      </a:solidFill>
+                      <a:prstDash val="solid"/>
+                      <a:round/>
+                      <a:headEnd type="none" w="med" len="med"/>
+                      <a:tailEnd type="none" w="med" len="med"/>
+                    </a:lnB>
+                    <a:noFill/>
+                  </a:tcPr>
+                </a:tc>
+                <a:tc>
+                  <a:txBody>
+                    <a:bodyPr wrap="square"/>
+                    <a:lstStyle/>
+                    <a:p>
+                      <a:pPr algn="ctr" fontAlgn="ctr">
+                        <a:lnSpc>
+                          <a:spcPct val="115000"/>
+                        </a:lnSpc>
+                      </a:pPr>
+                      <a:r>
+                        <a:rPr sz="1050" b="1" i="0" u="none">
+                          <a:solidFill>
+                            <a:srgbClr val="1B8A6B"/>
+                          </a:solidFill>
+                          <a:latin typeface="맑은 고딕"/>
+                          <a:ea typeface="맑은 고딕"/>
+                          <a:cs typeface="맑은 고딕"/>
+                        </a:rPr>
+                        <a:t>진행</a:t>
+                      </a:r>
+                      <a:endParaRPr lang="ko-KR" altLang="en-US" sz="1000" b="0" i="0" u="none" strike="noStrike">
+                        <a:solidFill>
+                          <a:srgbClr val="000000"/>
+                        </a:solidFill>
+                        <a:effectLst/>
+                        <a:latin typeface="맑은 고딕" panose="020B0503020000020004" pitchFamily="50" charset="-127"/>
+                        <a:ea typeface="맑은 고딕" panose="020B0503020000020004" pitchFamily="50" charset="-127"/>
+                      </a:endParaRPr>
+                    </a:p>
+                  </a:txBody>
+                  <a:tcPr marL="54864" marR="54864" marT="18288" anchor="ctr" marB="18288">
+                    <a:lnL w="6350" cap="flat" cmpd="sng" algn="ctr">
+                      <a:solidFill>
+                        <a:schemeClr val="tx1">
+                          <a:lumMod val="50000"/>
+                          <a:lumOff val="50000"/>
+                        </a:schemeClr>
+                      </a:solidFill>
+                      <a:prstDash val="solid"/>
+                      <a:round/>
+                      <a:headEnd type="none" w="med" len="med"/>
+                      <a:tailEnd type="none" w="med" len="med"/>
+                    </a:lnL>
+                    <a:lnR w="6350" cap="flat" cmpd="sng" algn="ctr">
+                      <a:solidFill>
+                        <a:schemeClr val="tx1">
+                          <a:lumMod val="50000"/>
+                          <a:lumOff val="50000"/>
+                        </a:schemeClr>
+                      </a:solidFill>
+                      <a:prstDash val="solid"/>
+                      <a:round/>
+                      <a:headEnd type="none" w="med" len="med"/>
+                      <a:tailEnd type="none" w="med" len="med"/>
+                    </a:lnR>
+                    <a:lnT w="6350" cap="flat" cmpd="sng" algn="ctr">
+                      <a:solidFill>
+                        <a:schemeClr val="tx1">
+                          <a:lumMod val="50000"/>
+                          <a:lumOff val="50000"/>
+                        </a:schemeClr>
+                      </a:solidFill>
+                      <a:prstDash val="solid"/>
+                      <a:round/>
+                      <a:headEnd type="none" w="med" len="med"/>
+                      <a:tailEnd type="none" w="med" len="med"/>
+                    </a:lnT>
+                    <a:lnB w="6350" cap="flat" cmpd="sng" algn="ctr">
+                      <a:solidFill>
+                        <a:schemeClr val="tx1">
+                          <a:lumMod val="50000"/>
+                          <a:lumOff val="50000"/>
+                        </a:schemeClr>
+                      </a:solidFill>
+                      <a:prstDash val="solid"/>
+                      <a:round/>
+                      <a:headEnd type="none" w="med" len="med"/>
+                      <a:tailEnd type="none" w="med" len="med"/>
+                    </a:lnB>
+                    <a:noFill/>
+                  </a:tcPr>
+                </a:tc>
+                <a:extLst>
+                  <a:ext uri="{0D108BD9-81ED-4DB2-BD59-A6C34878D82A}">
+                    <a16:rowId xmlns:a16="http://schemas.microsoft.com/office/drawing/2014/main" val="4122717012"/>
+                  </a:ext>
+                </a:extLst>
+              </a:tr>
+              <a:tr h="379701">
+                <a:tc>
+                  <a:txBody>
+                    <a:bodyPr wrap="square"/>
+                    <a:lstStyle/>
+                    <a:p>
+                      <a:pPr algn="l" fontAlgn="ctr">
+                        <a:lnSpc>
+                          <a:spcPct val="115000"/>
+                        </a:lnSpc>
+                      </a:pPr>
+                      <a:r>
+                        <a:rPr sz="1050" b="0" i="0" u="none">
+                          <a:solidFill>
+                            <a:srgbClr val="404040"/>
+                          </a:solidFill>
+                          <a:latin typeface="맑은 고딕"/>
+                          <a:ea typeface="맑은 고딕"/>
+                          <a:cs typeface="맑은 고딕"/>
+                        </a:rPr>
+                        <a:t>세 센터 작업자 설문 — 만족도 · 경보가 늦었던 경험</a:t>
+                      </a:r>
+                      <a:endParaRPr lang="ko-KR" altLang="en-US" sz="1000" b="0" i="0" u="none" strike="noStrike">
+                        <a:solidFill>
+                          <a:srgbClr val="000000"/>
+                        </a:solidFill>
+                        <a:effectLst/>
+                        <a:latin typeface="맑은 고딕" panose="020B0503020000020004" pitchFamily="50" charset="-127"/>
+                        <a:ea typeface="맑은 고딕" panose="020B0503020000020004" pitchFamily="50" charset="-127"/>
+                      </a:endParaRPr>
+                    </a:p>
+                  </a:txBody>
+                  <a:tcPr marL="128016" marR="128016" marT="18288" anchor="ctr" marB="18288">
+                    <a:lnL w="6350" cap="flat" cmpd="sng" algn="ctr">
+                      <a:solidFill>
+                        <a:schemeClr val="tx1">
+                          <a:lumMod val="50000"/>
+                          <a:lumOff val="50000"/>
+                        </a:schemeClr>
+                      </a:solidFill>
+                      <a:prstDash val="solid"/>
+                      <a:round/>
+                      <a:headEnd type="none" w="med" len="med"/>
+                      <a:tailEnd type="none" w="med" len="med"/>
+                    </a:lnL>
+                    <a:lnR w="6350" cap="flat" cmpd="sng" algn="ctr">
+                      <a:solidFill>
+                        <a:schemeClr val="tx1">
+                          <a:lumMod val="50000"/>
+                          <a:lumOff val="50000"/>
+                        </a:schemeClr>
+                      </a:solidFill>
+                      <a:prstDash val="solid"/>
+                      <a:round/>
+                      <a:headEnd type="none" w="med" len="med"/>
+                      <a:tailEnd type="none" w="med" len="med"/>
+                    </a:lnR>
+                    <a:lnT w="6350" cap="flat" cmpd="sng" algn="ctr">
+                      <a:solidFill>
+                        <a:schemeClr val="tx1">
+                          <a:lumMod val="50000"/>
+                          <a:lumOff val="50000"/>
+                        </a:schemeClr>
+                      </a:solidFill>
+                      <a:prstDash val="solid"/>
+                      <a:round/>
+                      <a:headEnd type="none" w="med" len="med"/>
+                      <a:tailEnd type="none" w="med" len="med"/>
+                    </a:lnT>
+                    <a:lnB w="6350" cap="flat" cmpd="sng" algn="ctr">
+                      <a:solidFill>
+                        <a:schemeClr val="tx1">
+                          <a:lumMod val="50000"/>
+                          <a:lumOff val="50000"/>
+                        </a:schemeClr>
+                      </a:solidFill>
+                      <a:prstDash val="solid"/>
+                      <a:round/>
+                      <a:headEnd type="none" w="med" len="med"/>
+                      <a:tailEnd type="none" w="med" len="med"/>
+                    </a:lnB>
+                    <a:noFill/>
+                  </a:tcPr>
+                </a:tc>
+                <a:tc>
+                  <a:txBody>
+                    <a:bodyPr wrap="square"/>
+                    <a:lstStyle/>
+                    <a:p>
+                      <a:pPr algn="ctr" fontAlgn="ctr">
+                        <a:lnSpc>
+                          <a:spcPct val="115000"/>
+                        </a:lnSpc>
+                      </a:pPr>
+                      <a:r>
+                        <a:rPr sz="1050" b="0" i="0" u="none">
+                          <a:solidFill>
+                            <a:srgbClr val="404040"/>
+                          </a:solidFill>
+                          <a:latin typeface="맑은 고딕"/>
+                          <a:ea typeface="맑은 고딕"/>
+                          <a:cs typeface="맑은 고딕"/>
+                        </a:rPr>
+                        <a:t>제안자 · 현장</a:t>
+                      </a:r>
+                      <a:endParaRPr lang="en-US" sz="1000" b="0" i="0" u="none" strike="noStrike">
+                        <a:solidFill>
+                          <a:srgbClr val="000000"/>
+                        </a:solidFill>
+                        <a:effectLst/>
+                        <a:latin typeface="맑은 고딕" panose="020B0503020000020004" pitchFamily="50" charset="-127"/>
+                        <a:ea typeface="맑은 고딕" panose="020B0503020000020004" pitchFamily="50" charset="-127"/>
+                      </a:endParaRPr>
+                    </a:p>
+                  </a:txBody>
+                  <a:tcPr marL="54864" marR="54864" marT="18288" anchor="ctr" marB="18288">
+                    <a:lnL w="6350" cap="flat" cmpd="sng" algn="ctr">
+                      <a:solidFill>
+                        <a:schemeClr val="tx1">
+                          <a:lumMod val="50000"/>
+                          <a:lumOff val="50000"/>
+                        </a:schemeClr>
+                      </a:solidFill>
+                      <a:prstDash val="solid"/>
+                      <a:round/>
+                      <a:headEnd type="none" w="med" len="med"/>
+                      <a:tailEnd type="none" w="med" len="med"/>
+                    </a:lnL>
+                    <a:lnR w="6350" cap="flat" cmpd="sng" algn="ctr">
+                      <a:solidFill>
+                        <a:schemeClr val="tx1">
+                          <a:lumMod val="50000"/>
+                          <a:lumOff val="50000"/>
+                        </a:schemeClr>
+                      </a:solidFill>
+                      <a:prstDash val="solid"/>
+                      <a:round/>
+                      <a:headEnd type="none" w="med" len="med"/>
+                      <a:tailEnd type="none" w="med" len="med"/>
+                    </a:lnR>
+                    <a:lnT w="6350" cap="flat" cmpd="sng" algn="ctr">
+                      <a:solidFill>
+                        <a:schemeClr val="tx1">
+                          <a:lumMod val="50000"/>
+                          <a:lumOff val="50000"/>
+                        </a:schemeClr>
+                      </a:solidFill>
+                      <a:prstDash val="solid"/>
+                      <a:round/>
+                      <a:headEnd type="none" w="med" len="med"/>
+                      <a:tailEnd type="none" w="med" len="med"/>
+                    </a:lnT>
+                    <a:lnB w="6350" cap="flat" cmpd="sng" algn="ctr">
+                      <a:solidFill>
+                        <a:schemeClr val="tx1">
+                          <a:lumMod val="50000"/>
+                          <a:lumOff val="50000"/>
+                        </a:schemeClr>
+                      </a:solidFill>
+                      <a:prstDash val="solid"/>
+                      <a:round/>
+                      <a:headEnd type="none" w="med" len="med"/>
+                      <a:tailEnd type="none" w="med" len="med"/>
+                    </a:lnB>
+                    <a:noFill/>
+                  </a:tcPr>
+                </a:tc>
+                <a:tc>
+                  <a:txBody>
+                    <a:bodyPr wrap="square"/>
+                    <a:lstStyle/>
+                    <a:p>
+                      <a:pPr algn="ctr" fontAlgn="ctr">
+                        <a:lnSpc>
+                          <a:spcPct val="115000"/>
+                        </a:lnSpc>
+                      </a:pPr>
+                      <a:r>
+                        <a:rPr sz="1050" b="0" i="0" u="none">
+                          <a:solidFill>
+                            <a:srgbClr val="404040"/>
+                          </a:solidFill>
+                          <a:latin typeface="맑은 고딕"/>
+                          <a:ea typeface="맑은 고딕"/>
+                          <a:cs typeface="맑은 고딕"/>
+                        </a:rPr>
+                        <a:t>9월</a:t>
+                      </a:r>
+                      <a:endParaRPr lang="en-US" altLang="ko-KR" sz="1000" b="0" i="0" u="none" strike="noStrike">
+                        <a:solidFill>
+                          <a:srgbClr val="000000"/>
+                        </a:solidFill>
+                        <a:effectLst/>
+                        <a:latin typeface="맑은 고딕" panose="020B0503020000020004" pitchFamily="50" charset="-127"/>
+                        <a:ea typeface="맑은 고딕" panose="020B0503020000020004" pitchFamily="50" charset="-127"/>
+                      </a:endParaRPr>
+                    </a:p>
+                  </a:txBody>
+                  <a:tcPr marL="54864" marR="54864" marT="18288" anchor="ctr" marB="18288">
+                    <a:lnL w="6350" cap="flat" cmpd="sng" algn="ctr">
+                      <a:solidFill>
+                        <a:schemeClr val="tx1">
+                          <a:lumMod val="50000"/>
+                          <a:lumOff val="50000"/>
+                        </a:schemeClr>
+                      </a:solidFill>
+                      <a:prstDash val="solid"/>
+                      <a:round/>
+                      <a:headEnd type="none" w="med" len="med"/>
+                      <a:tailEnd type="none" w="med" len="med"/>
+                    </a:lnL>
+                    <a:lnR w="6350" cap="flat" cmpd="sng" algn="ctr">
+                      <a:solidFill>
+                        <a:schemeClr val="tx1">
+                          <a:lumMod val="50000"/>
+                          <a:lumOff val="50000"/>
+                        </a:schemeClr>
+                      </a:solidFill>
+                      <a:prstDash val="solid"/>
+                      <a:round/>
+                      <a:headEnd type="none" w="med" len="med"/>
+                      <a:tailEnd type="none" w="med" len="med"/>
+                    </a:lnR>
+                    <a:lnT w="6350" cap="flat" cmpd="sng" algn="ctr">
+                      <a:solidFill>
+                        <a:schemeClr val="tx1">
+                          <a:lumMod val="50000"/>
+                          <a:lumOff val="50000"/>
+                        </a:schemeClr>
+                      </a:solidFill>
+                      <a:prstDash val="solid"/>
+                      <a:round/>
+                      <a:headEnd type="none" w="med" len="med"/>
+                      <a:tailEnd type="none" w="med" len="med"/>
+                    </a:lnT>
+                    <a:lnB w="6350" cap="flat" cmpd="sng" algn="ctr">
+                      <a:solidFill>
+                        <a:schemeClr val="tx1">
+                          <a:lumMod val="50000"/>
+                          <a:lumOff val="50000"/>
+                        </a:schemeClr>
+                      </a:solidFill>
+                      <a:prstDash val="solid"/>
+                      <a:round/>
+                      <a:headEnd type="none" w="med" len="med"/>
+                      <a:tailEnd type="none" w="med" len="med"/>
+                    </a:lnB>
+                    <a:noFill/>
+                  </a:tcPr>
+                </a:tc>
+                <a:tc>
+                  <a:txBody>
+                    <a:bodyPr wrap="square"/>
+                    <a:lstStyle/>
+                    <a:p>
+                      <a:pPr algn="ctr" fontAlgn="ctr">
+                        <a:lnSpc>
+                          <a:spcPct val="115000"/>
+                        </a:lnSpc>
+                      </a:pPr>
+                      <a:r>
+                        <a:rPr sz="1050" b="1" i="0" u="none">
+                          <a:solidFill>
+                            <a:srgbClr val="1B8A6B"/>
+                          </a:solidFill>
+                          <a:latin typeface="맑은 고딕"/>
+                          <a:ea typeface="맑은 고딕"/>
+                          <a:cs typeface="맑은 고딕"/>
+                        </a:rPr>
+                        <a:t>진행</a:t>
+                      </a:r>
+                      <a:endParaRPr lang="ko-KR" altLang="en-US" sz="1000" b="0" i="0" u="none" strike="noStrike">
+                        <a:solidFill>
+                          <a:srgbClr val="000000"/>
+                        </a:solidFill>
+                        <a:effectLst/>
+                        <a:latin typeface="맑은 고딕" panose="020B0503020000020004" pitchFamily="50" charset="-127"/>
+                        <a:ea typeface="맑은 고딕" panose="020B0503020000020004" pitchFamily="50" charset="-127"/>
+                      </a:endParaRPr>
+                    </a:p>
+                  </a:txBody>
+                  <a:tcPr marL="54864" marR="54864" marT="18288" anchor="ctr" marB="18288">
+                    <a:lnL w="6350" cap="flat" cmpd="sng" algn="ctr">
+                      <a:solidFill>
+                        <a:schemeClr val="tx1">
+                          <a:lumMod val="50000"/>
+                          <a:lumOff val="50000"/>
+                        </a:schemeClr>
+                      </a:solidFill>
+                      <a:prstDash val="solid"/>
+                      <a:round/>
+                      <a:headEnd type="none" w="med" len="med"/>
+                      <a:tailEnd type="none" w="med" len="med"/>
+                    </a:lnL>
+                    <a:lnR w="6350" cap="flat" cmpd="sng" algn="ctr">
+                      <a:solidFill>
+                        <a:schemeClr val="tx1">
+                          <a:lumMod val="50000"/>
+                          <a:lumOff val="50000"/>
+                        </a:schemeClr>
+                      </a:solidFill>
+                      <a:prstDash val="solid"/>
+                      <a:round/>
+                      <a:headEnd type="none" w="med" len="med"/>
+                      <a:tailEnd type="none" w="med" len="med"/>
+                    </a:lnR>
+                    <a:lnT w="6350" cap="flat" cmpd="sng" algn="ctr">
+                      <a:solidFill>
+                        <a:schemeClr val="tx1">
+                          <a:lumMod val="50000"/>
+                          <a:lumOff val="50000"/>
+                        </a:schemeClr>
+                      </a:solidFill>
+                      <a:prstDash val="solid"/>
+                      <a:round/>
+                      <a:headEnd type="none" w="med" len="med"/>
+                      <a:tailEnd type="none" w="med" len="med"/>
+                    </a:lnT>
+                    <a:lnB w="6350" cap="flat" cmpd="sng" algn="ctr">
+                      <a:solidFill>
+                        <a:schemeClr val="tx1">
+                          <a:lumMod val="50000"/>
+                          <a:lumOff val="50000"/>
+                        </a:schemeClr>
+                      </a:solidFill>
+                      <a:prstDash val="solid"/>
+                      <a:round/>
+                      <a:headEnd type="none" w="med" len="med"/>
+                      <a:tailEnd type="none" w="med" len="med"/>
+                    </a:lnB>
+                    <a:noFill/>
+                  </a:tcPr>
+                </a:tc>
+                <a:extLst>
+                  <a:ext uri="{0D108BD9-81ED-4DB2-BD59-A6C34878D82A}">
+                    <a16:rowId xmlns:a16="http://schemas.microsoft.com/office/drawing/2014/main" val="2710345523"/>
+                  </a:ext>
+                </a:extLst>
+              </a:tr>
+              <a:tr h="379701">
+                <a:tc>
+                  <a:txBody>
+                    <a:bodyPr wrap="square"/>
+                    <a:lstStyle/>
+                    <a:p>
+                      <a:pPr algn="l" fontAlgn="ctr">
+                        <a:lnSpc>
+                          <a:spcPct val="115000"/>
+                        </a:lnSpc>
+                      </a:pPr>
+                      <a:r>
+                        <a:rPr sz="1050" b="0" i="0" u="none">
+                          <a:solidFill>
+                            <a:srgbClr val="404040"/>
+                          </a:solidFill>
+                          <a:latin typeface="맑은 고딕"/>
+                          <a:ea typeface="맑은 고딕"/>
+                          <a:cs typeface="맑은 고딕"/>
+                        </a:rPr>
+                        <a:t>업무용 PDA 로 이전 — 개인 폰 임시 설치 종료</a:t>
+                      </a:r>
+                      <a:endParaRPr lang="en-US" altLang="ko-KR" sz="1000" b="0" i="0" u="none" strike="noStrike">
+                        <a:solidFill>
+                          <a:srgbClr val="000000"/>
+                        </a:solidFill>
+                        <a:effectLst/>
+                        <a:latin typeface="맑은 고딕" panose="020B0503020000020004" pitchFamily="50" charset="-127"/>
+                        <a:ea typeface="맑은 고딕" panose="020B0503020000020004" pitchFamily="50" charset="-127"/>
+                      </a:endParaRPr>
+                    </a:p>
+                  </a:txBody>
+                  <a:tcPr marL="128016" marR="128016" marT="18288" anchor="ctr" marB="18288">
+                    <a:lnL w="6350" cap="flat" cmpd="sng" algn="ctr">
+                      <a:solidFill>
+                        <a:schemeClr val="tx1">
+                          <a:lumMod val="50000"/>
+                          <a:lumOff val="50000"/>
+                        </a:schemeClr>
+                      </a:solidFill>
+                      <a:prstDash val="solid"/>
+                      <a:round/>
+                      <a:headEnd type="none" w="med" len="med"/>
+                      <a:tailEnd type="none" w="med" len="med"/>
+                    </a:lnL>
+                    <a:lnR w="6350" cap="flat" cmpd="sng" algn="ctr">
+                      <a:solidFill>
+                        <a:schemeClr val="tx1">
+                          <a:lumMod val="50000"/>
+                          <a:lumOff val="50000"/>
+                        </a:schemeClr>
+                      </a:solidFill>
+                      <a:prstDash val="solid"/>
+                      <a:round/>
+                      <a:headEnd type="none" w="med" len="med"/>
+                      <a:tailEnd type="none" w="med" len="med"/>
+                    </a:lnR>
+                    <a:lnT w="6350" cap="flat" cmpd="sng" algn="ctr">
+                      <a:solidFill>
+                        <a:schemeClr val="tx1">
+                          <a:lumMod val="50000"/>
+                          <a:lumOff val="50000"/>
+                        </a:schemeClr>
+                      </a:solidFill>
+                      <a:prstDash val="solid"/>
+                      <a:round/>
+                      <a:headEnd type="none" w="med" len="med"/>
+                      <a:tailEnd type="none" w="med" len="med"/>
+                    </a:lnT>
+                    <a:lnB w="6350" cap="flat" cmpd="sng" algn="ctr">
+                      <a:solidFill>
+                        <a:schemeClr val="tx1">
+                          <a:lumMod val="50000"/>
+                          <a:lumOff val="50000"/>
+                        </a:schemeClr>
+                      </a:solidFill>
+                      <a:prstDash val="solid"/>
+                      <a:round/>
+                      <a:headEnd type="none" w="med" len="med"/>
+                      <a:tailEnd type="none" w="med" len="med"/>
+                    </a:lnB>
+                    <a:noFill/>
+                  </a:tcPr>
+                </a:tc>
+                <a:tc>
+                  <a:txBody>
+                    <a:bodyPr wrap="square"/>
+                    <a:lstStyle/>
+                    <a:p>
+                      <a:pPr algn="ctr" fontAlgn="ctr">
+                        <a:lnSpc>
+                          <a:spcPct val="115000"/>
+                        </a:lnSpc>
+                      </a:pPr>
+                      <a:r>
+                        <a:rPr sz="1050" b="0" i="0" u="none">
+                          <a:solidFill>
+                            <a:srgbClr val="404040"/>
+                          </a:solidFill>
+                          <a:latin typeface="맑은 고딕"/>
+                          <a:ea typeface="맑은 고딕"/>
+                          <a:cs typeface="맑은 고딕"/>
+                        </a:rPr>
+                        <a:t>제안자 · IT</a:t>
+                      </a:r>
+                      <a:endParaRPr lang="en-US" sz="1000" b="0" i="0" u="none" strike="noStrike">
+                        <a:solidFill>
+                          <a:srgbClr val="000000"/>
+                        </a:solidFill>
+                        <a:effectLst/>
+                        <a:latin typeface="맑은 고딕" panose="020B0503020000020004" pitchFamily="50" charset="-127"/>
+                        <a:ea typeface="맑은 고딕" panose="020B0503020000020004" pitchFamily="50" charset="-127"/>
+                      </a:endParaRPr>
+                    </a:p>
+                  </a:txBody>
+                  <a:tcPr marL="54864" marR="54864" marT="18288" anchor="ctr" marB="18288">
+                    <a:lnL w="6350" cap="flat" cmpd="sng" algn="ctr">
+                      <a:solidFill>
+                        <a:schemeClr val="tx1">
+                          <a:lumMod val="50000"/>
+                          <a:lumOff val="50000"/>
+                        </a:schemeClr>
+                      </a:solidFill>
+                      <a:prstDash val="solid"/>
+                      <a:round/>
+                      <a:headEnd type="none" w="med" len="med"/>
+                      <a:tailEnd type="none" w="med" len="med"/>
+                    </a:lnL>
+                    <a:lnR w="6350" cap="flat" cmpd="sng" algn="ctr">
+                      <a:solidFill>
+                        <a:schemeClr val="tx1">
+                          <a:lumMod val="50000"/>
+                          <a:lumOff val="50000"/>
+                        </a:schemeClr>
+                      </a:solidFill>
+                      <a:prstDash val="solid"/>
+                      <a:round/>
+                      <a:headEnd type="none" w="med" len="med"/>
+                      <a:tailEnd type="none" w="med" len="med"/>
+                    </a:lnR>
+                    <a:lnT w="6350" cap="flat" cmpd="sng" algn="ctr">
+                      <a:solidFill>
+                        <a:schemeClr val="tx1">
+                          <a:lumMod val="50000"/>
+                          <a:lumOff val="50000"/>
+                        </a:schemeClr>
+                      </a:solidFill>
+                      <a:prstDash val="solid"/>
+                      <a:round/>
+                      <a:headEnd type="none" w="med" len="med"/>
+                      <a:tailEnd type="none" w="med" len="med"/>
+                    </a:lnT>
+                    <a:lnB w="6350" cap="flat" cmpd="sng" algn="ctr">
+                      <a:solidFill>
+                        <a:schemeClr val="tx1">
+                          <a:lumMod val="50000"/>
+                          <a:lumOff val="50000"/>
+                        </a:schemeClr>
+                      </a:solidFill>
+                      <a:prstDash val="solid"/>
+                      <a:round/>
+                      <a:headEnd type="none" w="med" len="med"/>
+                      <a:tailEnd type="none" w="med" len="med"/>
+                    </a:lnB>
+                    <a:noFill/>
+                  </a:tcPr>
+                </a:tc>
+                <a:tc>
+                  <a:txBody>
+                    <a:bodyPr wrap="square"/>
+                    <a:lstStyle/>
+                    <a:p>
+                      <a:pPr algn="ctr" fontAlgn="ctr">
+                        <a:lnSpc>
+                          <a:spcPct val="115000"/>
+                        </a:lnSpc>
+                      </a:pPr>
+                      <a:r>
+                        <a:rPr sz="1050" b="0" i="0" u="none">
+                          <a:solidFill>
+                            <a:srgbClr val="404040"/>
+                          </a:solidFill>
+                          <a:latin typeface="맑은 고딕"/>
+                          <a:ea typeface="맑은 고딕"/>
+                          <a:cs typeface="맑은 고딕"/>
+                        </a:rPr>
+                        <a:t>10월</a:t>
+                      </a:r>
+                      <a:endParaRPr lang="en-US" altLang="ko-KR" sz="1000" b="0" i="0" u="none" strike="noStrike">
+                        <a:solidFill>
+                          <a:srgbClr val="000000"/>
+                        </a:solidFill>
+                        <a:effectLst/>
+                        <a:latin typeface="맑은 고딕" panose="020B0503020000020004" pitchFamily="50" charset="-127"/>
+                        <a:ea typeface="맑은 고딕" panose="020B0503020000020004" pitchFamily="50" charset="-127"/>
+                      </a:endParaRPr>
+                    </a:p>
+                  </a:txBody>
+                  <a:tcPr marL="54864" marR="54864" marT="18288" anchor="ctr" marB="18288">
+                    <a:lnL w="6350" cap="flat" cmpd="sng" algn="ctr">
+                      <a:solidFill>
+                        <a:schemeClr val="tx1">
+                          <a:lumMod val="50000"/>
+                          <a:lumOff val="50000"/>
+                        </a:schemeClr>
+                      </a:solidFill>
+                      <a:prstDash val="solid"/>
+                      <a:round/>
+                      <a:headEnd type="none" w="med" len="med"/>
+                      <a:tailEnd type="none" w="med" len="med"/>
+                    </a:lnL>
+                    <a:lnR w="6350" cap="flat" cmpd="sng" algn="ctr">
+                      <a:solidFill>
+                        <a:schemeClr val="tx1">
+                          <a:lumMod val="50000"/>
+                          <a:lumOff val="50000"/>
+                        </a:schemeClr>
+                      </a:solidFill>
+                      <a:prstDash val="solid"/>
+                      <a:round/>
+                      <a:headEnd type="none" w="med" len="med"/>
+                      <a:tailEnd type="none" w="med" len="med"/>
+                    </a:lnR>
+                    <a:lnT w="6350" cap="flat" cmpd="sng" algn="ctr">
+                      <a:solidFill>
+                        <a:schemeClr val="tx1">
+                          <a:lumMod val="50000"/>
+                          <a:lumOff val="50000"/>
+                        </a:schemeClr>
+                      </a:solidFill>
+                      <a:prstDash val="solid"/>
+                      <a:round/>
+                      <a:headEnd type="none" w="med" len="med"/>
+                      <a:tailEnd type="none" w="med" len="med"/>
+                    </a:lnT>
+                    <a:lnB w="6350" cap="flat" cmpd="sng" algn="ctr">
+                      <a:solidFill>
+                        <a:schemeClr val="tx1">
+                          <a:lumMod val="50000"/>
+                          <a:lumOff val="50000"/>
+                        </a:schemeClr>
+                      </a:solidFill>
+                      <a:prstDash val="solid"/>
+                      <a:round/>
+                      <a:headEnd type="none" w="med" len="med"/>
+                      <a:tailEnd type="none" w="med" len="med"/>
+                    </a:lnB>
+                    <a:noFill/>
+                  </a:tcPr>
+                </a:tc>
+                <a:tc>
+                  <a:txBody>
+                    <a:bodyPr wrap="square"/>
+                    <a:lstStyle/>
+                    <a:p>
+                      <a:pPr algn="ctr" fontAlgn="ctr">
+                        <a:lnSpc>
+                          <a:spcPct val="115000"/>
+                        </a:lnSpc>
+                      </a:pPr>
+                      <a:r>
+                        <a:rPr sz="1050" b="1" i="0" u="none">
+                          <a:solidFill>
+                            <a:srgbClr val="6B7278"/>
+                          </a:solidFill>
+                          <a:latin typeface="맑은 고딕"/>
+                          <a:ea typeface="맑은 고딕"/>
+                          <a:cs typeface="맑은 고딕"/>
+                        </a:rPr>
+                        <a:t>예정</a:t>
+                      </a:r>
+                      <a:endParaRPr lang="ko-KR" altLang="en-US" sz="1000" b="0" i="0" u="none" strike="noStrike">
+                        <a:solidFill>
+                          <a:srgbClr val="000000"/>
+                        </a:solidFill>
+                        <a:effectLst/>
+                        <a:latin typeface="맑은 고딕" panose="020B0503020000020004" pitchFamily="50" charset="-127"/>
+                        <a:ea typeface="맑은 고딕" panose="020B0503020000020004" pitchFamily="50" charset="-127"/>
+                      </a:endParaRPr>
+                    </a:p>
+                  </a:txBody>
+                  <a:tcPr marL="54864" marR="54864" marT="18288" anchor="ctr" marB="18288">
+                    <a:lnL w="6350" cap="flat" cmpd="sng" algn="ctr">
+                      <a:solidFill>
+                        <a:schemeClr val="tx1">
+                          <a:lumMod val="50000"/>
+                          <a:lumOff val="50000"/>
+                        </a:schemeClr>
+                      </a:solidFill>
+                      <a:prstDash val="solid"/>
+                      <a:round/>
+                      <a:headEnd type="none" w="med" len="med"/>
+                      <a:tailEnd type="none" w="med" len="med"/>
+                    </a:lnL>
+                    <a:lnR w="6350" cap="flat" cmpd="sng" algn="ctr">
+                      <a:solidFill>
+                        <a:schemeClr val="tx1">
+                          <a:lumMod val="50000"/>
+                          <a:lumOff val="50000"/>
+                        </a:schemeClr>
+                      </a:solidFill>
+                      <a:prstDash val="solid"/>
+                      <a:round/>
+                      <a:headEnd type="none" w="med" len="med"/>
+                      <a:tailEnd type="none" w="med" len="med"/>
+                    </a:lnR>
+                    <a:lnT w="6350" cap="flat" cmpd="sng" algn="ctr">
+                      <a:solidFill>
+                        <a:schemeClr val="tx1">
+                          <a:lumMod val="50000"/>
+                          <a:lumOff val="50000"/>
+                        </a:schemeClr>
+                      </a:solidFill>
+                      <a:prstDash val="solid"/>
+                      <a:round/>
+                      <a:headEnd type="none" w="med" len="med"/>
+                      <a:tailEnd type="none" w="med" len="med"/>
+                    </a:lnT>
+                    <a:lnB w="6350" cap="flat" cmpd="sng" algn="ctr">
+                      <a:solidFill>
+                        <a:schemeClr val="tx1">
+                          <a:lumMod val="50000"/>
+                          <a:lumOff val="50000"/>
+                        </a:schemeClr>
+                      </a:solidFill>
+                      <a:prstDash val="solid"/>
+                      <a:round/>
+                      <a:headEnd type="none" w="med" len="med"/>
+                      <a:tailEnd type="none" w="med" len="med"/>
+                    </a:lnB>
+                    <a:noFill/>
+                  </a:tcPr>
+                </a:tc>
+                <a:extLst>
+                  <a:ext uri="{0D108BD9-81ED-4DB2-BD59-A6C34878D82A}">
+                    <a16:rowId xmlns:a16="http://schemas.microsoft.com/office/drawing/2014/main" val="2003406257"/>
+                  </a:ext>
+                </a:extLst>
+              </a:tr>
+              <a:tr h="379701">
+                <a:tc>
+                  <a:txBody>
+                    <a:bodyPr wrap="square"/>
+                    <a:lstStyle/>
+                    <a:p>
+                      <a:pPr algn="l" fontAlgn="ctr">
+                        <a:lnSpc>
+                          <a:spcPct val="115000"/>
+                        </a:lnSpc>
+                      </a:pPr>
+                      <a:r>
+                        <a:rPr sz="1050" b="0" i="0" u="none">
+                          <a:solidFill>
+                            <a:srgbClr val="404040"/>
+                          </a:solidFill>
+                          <a:latin typeface="맑은 고딕"/>
+                          <a:ea typeface="맑은 고딕"/>
+                          <a:cs typeface="맑은 고딕"/>
+                        </a:rPr>
+                        <a:t>정식 과제 등록 — 확산의 첫 절차</a:t>
                       </a:r>
                       <a:endParaRPr lang="ko-KR" altLang="en-US" sz="1000" b="0" i="0" u="none" strike="noStrike">
                         <a:solidFill>
@@ -11997,1702 +13703,7 @@
                           <a:ea typeface="맑은 고딕"/>
                           <a:cs typeface="맑은 고딕"/>
                         </a:rPr>
-                        <a:t>완료</a:t>
-                      </a:r>
-                      <a:endParaRPr lang="en-US" altLang="ko-KR" sz="1000" b="0" i="0" u="none" strike="noStrike">
-                        <a:solidFill>
-                          <a:srgbClr val="000000"/>
-                        </a:solidFill>
-                        <a:effectLst/>
-                        <a:latin typeface="맑은 고딕" panose="020B0503020000020004" pitchFamily="50" charset="-127"/>
-                        <a:ea typeface="맑은 고딕" panose="020B0503020000020004" pitchFamily="50" charset="-127"/>
-                      </a:endParaRPr>
-                    </a:p>
-                  </a:txBody>
-                  <a:tcPr marL="54864" marR="54864" marT="18288" anchor="ctr" marB="18288">
-                    <a:lnL w="6350" cap="flat" cmpd="sng" algn="ctr">
-                      <a:solidFill>
-                        <a:schemeClr val="tx1">
-                          <a:lumMod val="50000"/>
-                          <a:lumOff val="50000"/>
-                        </a:schemeClr>
-                      </a:solidFill>
-                      <a:prstDash val="solid"/>
-                      <a:round/>
-                      <a:headEnd type="none" w="med" len="med"/>
-                      <a:tailEnd type="none" w="med" len="med"/>
-                    </a:lnL>
-                    <a:lnR w="6350" cap="flat" cmpd="sng" algn="ctr">
-                      <a:solidFill>
-                        <a:schemeClr val="tx1">
-                          <a:lumMod val="50000"/>
-                          <a:lumOff val="50000"/>
-                        </a:schemeClr>
-                      </a:solidFill>
-                      <a:prstDash val="solid"/>
-                      <a:round/>
-                      <a:headEnd type="none" w="med" len="med"/>
-                      <a:tailEnd type="none" w="med" len="med"/>
-                    </a:lnR>
-                    <a:lnT w="6350" cap="flat" cmpd="sng" algn="ctr">
-                      <a:solidFill>
-                        <a:schemeClr val="tx1">
-                          <a:lumMod val="50000"/>
-                          <a:lumOff val="50000"/>
-                        </a:schemeClr>
-                      </a:solidFill>
-                      <a:prstDash val="solid"/>
-                      <a:round/>
-                      <a:headEnd type="none" w="med" len="med"/>
-                      <a:tailEnd type="none" w="med" len="med"/>
-                    </a:lnT>
-                    <a:lnB w="6350" cap="flat" cmpd="sng" algn="ctr">
-                      <a:solidFill>
-                        <a:schemeClr val="tx1">
-                          <a:lumMod val="50000"/>
-                          <a:lumOff val="50000"/>
-                        </a:schemeClr>
-                      </a:solidFill>
-                      <a:prstDash val="solid"/>
-                      <a:round/>
-                      <a:headEnd type="none" w="med" len="med"/>
-                      <a:tailEnd type="none" w="med" len="med"/>
-                    </a:lnB>
-                    <a:noFill/>
-                  </a:tcPr>
-                </a:tc>
-                <a:tc>
-                  <a:txBody>
-                    <a:bodyPr wrap="square"/>
-                    <a:lstStyle/>
-                    <a:p>
-                      <a:pPr algn="ctr" fontAlgn="ctr">
-                        <a:lnSpc>
-                          <a:spcPct val="115000"/>
-                        </a:lnSpc>
-                      </a:pPr>
-                      <a:r>
-                        <a:rPr sz="1050" b="1" i="0" u="none">
-                          <a:solidFill>
-                            <a:srgbClr val="1B8A6B"/>
-                          </a:solidFill>
-                          <a:latin typeface="맑은 고딕"/>
-                          <a:ea typeface="맑은 고딕"/>
-                          <a:cs typeface="맑은 고딕"/>
-                        </a:rPr>
-                        <a:t>완료</a:t>
-                      </a:r>
-                      <a:endParaRPr lang="ko-KR" altLang="en-US" sz="1000" b="0" i="0" u="none" strike="noStrike">
-                        <a:solidFill>
-                          <a:srgbClr val="000000"/>
-                        </a:solidFill>
-                        <a:effectLst/>
-                        <a:latin typeface="맑은 고딕" panose="020B0503020000020004" pitchFamily="50" charset="-127"/>
-                        <a:ea typeface="맑은 고딕" panose="020B0503020000020004" pitchFamily="50" charset="-127"/>
-                      </a:endParaRPr>
-                    </a:p>
-                  </a:txBody>
-                  <a:tcPr marL="54864" marR="54864" marT="18288" anchor="ctr" marB="18288">
-                    <a:lnL w="6350" cap="flat" cmpd="sng" algn="ctr">
-                      <a:solidFill>
-                        <a:schemeClr val="tx1">
-                          <a:lumMod val="50000"/>
-                          <a:lumOff val="50000"/>
-                        </a:schemeClr>
-                      </a:solidFill>
-                      <a:prstDash val="solid"/>
-                      <a:round/>
-                      <a:headEnd type="none" w="med" len="med"/>
-                      <a:tailEnd type="none" w="med" len="med"/>
-                    </a:lnL>
-                    <a:lnR w="6350" cap="flat" cmpd="sng" algn="ctr">
-                      <a:solidFill>
-                        <a:schemeClr val="tx1">
-                          <a:lumMod val="50000"/>
-                          <a:lumOff val="50000"/>
-                        </a:schemeClr>
-                      </a:solidFill>
-                      <a:prstDash val="solid"/>
-                      <a:round/>
-                      <a:headEnd type="none" w="med" len="med"/>
-                      <a:tailEnd type="none" w="med" len="med"/>
-                    </a:lnR>
-                    <a:lnT w="6350" cap="flat" cmpd="sng" algn="ctr">
-                      <a:solidFill>
-                        <a:schemeClr val="tx1">
-                          <a:lumMod val="50000"/>
-                          <a:lumOff val="50000"/>
-                        </a:schemeClr>
-                      </a:solidFill>
-                      <a:prstDash val="solid"/>
-                      <a:round/>
-                      <a:headEnd type="none" w="med" len="med"/>
-                      <a:tailEnd type="none" w="med" len="med"/>
-                    </a:lnT>
-                    <a:lnB w="6350" cap="flat" cmpd="sng" algn="ctr">
-                      <a:solidFill>
-                        <a:schemeClr val="tx1">
-                          <a:lumMod val="50000"/>
-                          <a:lumOff val="50000"/>
-                        </a:schemeClr>
-                      </a:solidFill>
-                      <a:prstDash val="solid"/>
-                      <a:round/>
-                      <a:headEnd type="none" w="med" len="med"/>
-                      <a:tailEnd type="none" w="med" len="med"/>
-                    </a:lnB>
-                    <a:noFill/>
-                  </a:tcPr>
-                </a:tc>
-                <a:extLst>
-                  <a:ext uri="{0D108BD9-81ED-4DB2-BD59-A6C34878D82A}">
-                    <a16:rowId xmlns:a16="http://schemas.microsoft.com/office/drawing/2014/main" val="3977275645"/>
-                  </a:ext>
-                </a:extLst>
-              </a:tr>
-              <a:tr h="379701">
-                <a:tc>
-                  <a:txBody>
-                    <a:bodyPr wrap="square"/>
-                    <a:lstStyle/>
-                    <a:p>
-                      <a:pPr algn="l" fontAlgn="ctr">
-                        <a:lnSpc>
-                          <a:spcPct val="115000"/>
-                        </a:lnSpc>
-                      </a:pPr>
-                      <a:r>
-                        <a:rPr sz="1050" b="0" i="0" u="none">
-                          <a:solidFill>
-                            <a:srgbClr val="404040"/>
-                          </a:solidFill>
-                          <a:latin typeface="맑은 고딕"/>
-                          <a:ea typeface="맑은 고딕"/>
-                          <a:cs typeface="맑은 고딕"/>
-                        </a:rPr>
-                        <a:t>4단계  기기 상태 관리 경로 일원화</a:t>
-                      </a:r>
-                      <a:endParaRPr lang="ko-KR" altLang="en-US" sz="1000" b="0" i="0" u="none" strike="noStrike">
-                        <a:solidFill>
-                          <a:srgbClr val="000000"/>
-                        </a:solidFill>
-                        <a:effectLst/>
-                        <a:latin typeface="맑은 고딕" panose="020B0503020000020004" pitchFamily="50" charset="-127"/>
-                        <a:ea typeface="맑은 고딕" panose="020B0503020000020004" pitchFamily="50" charset="-127"/>
-                      </a:endParaRPr>
-                    </a:p>
-                  </a:txBody>
-                  <a:tcPr marL="128016" marR="128016" marT="18288" anchor="ctr" marB="18288">
-                    <a:lnL w="6350" cap="flat" cmpd="sng" algn="ctr">
-                      <a:solidFill>
-                        <a:schemeClr val="tx1">
-                          <a:lumMod val="50000"/>
-                          <a:lumOff val="50000"/>
-                        </a:schemeClr>
-                      </a:solidFill>
-                      <a:prstDash val="solid"/>
-                      <a:round/>
-                      <a:headEnd type="none" w="med" len="med"/>
-                      <a:tailEnd type="none" w="med" len="med"/>
-                    </a:lnL>
-                    <a:lnR w="6350" cap="flat" cmpd="sng" algn="ctr">
-                      <a:solidFill>
-                        <a:schemeClr val="tx1">
-                          <a:lumMod val="50000"/>
-                          <a:lumOff val="50000"/>
-                        </a:schemeClr>
-                      </a:solidFill>
-                      <a:prstDash val="solid"/>
-                      <a:round/>
-                      <a:headEnd type="none" w="med" len="med"/>
-                      <a:tailEnd type="none" w="med" len="med"/>
-                    </a:lnR>
-                    <a:lnT w="6350" cap="flat" cmpd="sng" algn="ctr">
-                      <a:solidFill>
-                        <a:schemeClr val="tx1">
-                          <a:lumMod val="50000"/>
-                          <a:lumOff val="50000"/>
-                        </a:schemeClr>
-                      </a:solidFill>
-                      <a:prstDash val="solid"/>
-                      <a:round/>
-                      <a:headEnd type="none" w="med" len="med"/>
-                      <a:tailEnd type="none" w="med" len="med"/>
-                    </a:lnT>
-                    <a:lnB w="6350" cap="flat" cmpd="sng" algn="ctr">
-                      <a:solidFill>
-                        <a:schemeClr val="tx1">
-                          <a:lumMod val="50000"/>
-                          <a:lumOff val="50000"/>
-                        </a:schemeClr>
-                      </a:solidFill>
-                      <a:prstDash val="solid"/>
-                      <a:round/>
-                      <a:headEnd type="none" w="med" len="med"/>
-                      <a:tailEnd type="none" w="med" len="med"/>
-                    </a:lnB>
-                    <a:noFill/>
-                  </a:tcPr>
-                </a:tc>
-                <a:tc>
-                  <a:txBody>
-                    <a:bodyPr wrap="square"/>
-                    <a:lstStyle/>
-                    <a:p>
-                      <a:pPr algn="ctr" fontAlgn="ctr">
-                        <a:lnSpc>
-                          <a:spcPct val="115000"/>
-                        </a:lnSpc>
-                      </a:pPr>
-                      <a:r>
-                        <a:rPr sz="1050" b="0" i="0" u="none">
-                          <a:solidFill>
-                            <a:srgbClr val="404040"/>
-                          </a:solidFill>
-                          <a:latin typeface="맑은 고딕"/>
-                          <a:ea typeface="맑은 고딕"/>
-                          <a:cs typeface="맑은 고딕"/>
-                        </a:rPr>
-                        <a:t>제안자</a:t>
-                      </a:r>
-                      <a:endParaRPr lang="en-US" sz="1000" b="0" i="0" u="none" strike="noStrike">
-                        <a:solidFill>
-                          <a:srgbClr val="000000"/>
-                        </a:solidFill>
-                        <a:effectLst/>
-                        <a:latin typeface="맑은 고딕" panose="020B0503020000020004" pitchFamily="50" charset="-127"/>
-                        <a:ea typeface="맑은 고딕" panose="020B0503020000020004" pitchFamily="50" charset="-127"/>
-                      </a:endParaRPr>
-                    </a:p>
-                  </a:txBody>
-                  <a:tcPr marL="54864" marR="54864" marT="18288" anchor="ctr" marB="18288">
-                    <a:lnL w="6350" cap="flat" cmpd="sng" algn="ctr">
-                      <a:solidFill>
-                        <a:schemeClr val="tx1">
-                          <a:lumMod val="50000"/>
-                          <a:lumOff val="50000"/>
-                        </a:schemeClr>
-                      </a:solidFill>
-                      <a:prstDash val="solid"/>
-                      <a:round/>
-                      <a:headEnd type="none" w="med" len="med"/>
-                      <a:tailEnd type="none" w="med" len="med"/>
-                    </a:lnL>
-                    <a:lnR w="6350" cap="flat" cmpd="sng" algn="ctr">
-                      <a:solidFill>
-                        <a:schemeClr val="tx1">
-                          <a:lumMod val="50000"/>
-                          <a:lumOff val="50000"/>
-                        </a:schemeClr>
-                      </a:solidFill>
-                      <a:prstDash val="solid"/>
-                      <a:round/>
-                      <a:headEnd type="none" w="med" len="med"/>
-                      <a:tailEnd type="none" w="med" len="med"/>
-                    </a:lnR>
-                    <a:lnT w="6350" cap="flat" cmpd="sng" algn="ctr">
-                      <a:solidFill>
-                        <a:schemeClr val="tx1">
-                          <a:lumMod val="50000"/>
-                          <a:lumOff val="50000"/>
-                        </a:schemeClr>
-                      </a:solidFill>
-                      <a:prstDash val="solid"/>
-                      <a:round/>
-                      <a:headEnd type="none" w="med" len="med"/>
-                      <a:tailEnd type="none" w="med" len="med"/>
-                    </a:lnT>
-                    <a:lnB w="6350" cap="flat" cmpd="sng" algn="ctr">
-                      <a:solidFill>
-                        <a:schemeClr val="tx1">
-                          <a:lumMod val="50000"/>
-                          <a:lumOff val="50000"/>
-                        </a:schemeClr>
-                      </a:solidFill>
-                      <a:prstDash val="solid"/>
-                      <a:round/>
-                      <a:headEnd type="none" w="med" len="med"/>
-                      <a:tailEnd type="none" w="med" len="med"/>
-                    </a:lnB>
-                    <a:noFill/>
-                  </a:tcPr>
-                </a:tc>
-                <a:tc>
-                  <a:txBody>
-                    <a:bodyPr wrap="square"/>
-                    <a:lstStyle/>
-                    <a:p>
-                      <a:pPr algn="ctr" fontAlgn="ctr">
-                        <a:lnSpc>
-                          <a:spcPct val="115000"/>
-                        </a:lnSpc>
-                      </a:pPr>
-                      <a:r>
-                        <a:rPr sz="1050" b="0" i="0" u="none">
-                          <a:solidFill>
-                            <a:srgbClr val="404040"/>
-                          </a:solidFill>
-                          <a:latin typeface="맑은 고딕"/>
-                          <a:ea typeface="맑은 고딕"/>
-                          <a:cs typeface="맑은 고딕"/>
-                        </a:rPr>
-                        <a:t>완료</a:t>
-                      </a:r>
-                      <a:endParaRPr lang="en-US" altLang="ko-KR" sz="1000" b="0" i="0" u="none" strike="noStrike">
-                        <a:solidFill>
-                          <a:srgbClr val="000000"/>
-                        </a:solidFill>
-                        <a:effectLst/>
-                        <a:latin typeface="맑은 고딕" panose="020B0503020000020004" pitchFamily="50" charset="-127"/>
-                        <a:ea typeface="맑은 고딕" panose="020B0503020000020004" pitchFamily="50" charset="-127"/>
-                      </a:endParaRPr>
-                    </a:p>
-                  </a:txBody>
-                  <a:tcPr marL="54864" marR="54864" marT="18288" anchor="ctr" marB="18288">
-                    <a:lnL w="6350" cap="flat" cmpd="sng" algn="ctr">
-                      <a:solidFill>
-                        <a:schemeClr val="tx1">
-                          <a:lumMod val="50000"/>
-                          <a:lumOff val="50000"/>
-                        </a:schemeClr>
-                      </a:solidFill>
-                      <a:prstDash val="solid"/>
-                      <a:round/>
-                      <a:headEnd type="none" w="med" len="med"/>
-                      <a:tailEnd type="none" w="med" len="med"/>
-                    </a:lnL>
-                    <a:lnR w="6350" cap="flat" cmpd="sng" algn="ctr">
-                      <a:solidFill>
-                        <a:schemeClr val="tx1">
-                          <a:lumMod val="50000"/>
-                          <a:lumOff val="50000"/>
-                        </a:schemeClr>
-                      </a:solidFill>
-                      <a:prstDash val="solid"/>
-                      <a:round/>
-                      <a:headEnd type="none" w="med" len="med"/>
-                      <a:tailEnd type="none" w="med" len="med"/>
-                    </a:lnR>
-                    <a:lnT w="6350" cap="flat" cmpd="sng" algn="ctr">
-                      <a:solidFill>
-                        <a:schemeClr val="tx1">
-                          <a:lumMod val="50000"/>
-                          <a:lumOff val="50000"/>
-                        </a:schemeClr>
-                      </a:solidFill>
-                      <a:prstDash val="solid"/>
-                      <a:round/>
-                      <a:headEnd type="none" w="med" len="med"/>
-                      <a:tailEnd type="none" w="med" len="med"/>
-                    </a:lnT>
-                    <a:lnB w="6350" cap="flat" cmpd="sng" algn="ctr">
-                      <a:solidFill>
-                        <a:schemeClr val="tx1">
-                          <a:lumMod val="50000"/>
-                          <a:lumOff val="50000"/>
-                        </a:schemeClr>
-                      </a:solidFill>
-                      <a:prstDash val="solid"/>
-                      <a:round/>
-                      <a:headEnd type="none" w="med" len="med"/>
-                      <a:tailEnd type="none" w="med" len="med"/>
-                    </a:lnB>
-                    <a:noFill/>
-                  </a:tcPr>
-                </a:tc>
-                <a:tc>
-                  <a:txBody>
-                    <a:bodyPr wrap="square"/>
-                    <a:lstStyle/>
-                    <a:p>
-                      <a:pPr algn="ctr" fontAlgn="ctr">
-                        <a:lnSpc>
-                          <a:spcPct val="115000"/>
-                        </a:lnSpc>
-                      </a:pPr>
-                      <a:r>
-                        <a:rPr sz="1050" b="1" i="0" u="none">
-                          <a:solidFill>
-                            <a:srgbClr val="1B8A6B"/>
-                          </a:solidFill>
-                          <a:latin typeface="맑은 고딕"/>
-                          <a:ea typeface="맑은 고딕"/>
-                          <a:cs typeface="맑은 고딕"/>
-                        </a:rPr>
-                        <a:t>완료</a:t>
-                      </a:r>
-                      <a:endParaRPr lang="ko-KR" altLang="en-US" sz="1000" b="0" i="0" u="none" strike="noStrike">
-                        <a:solidFill>
-                          <a:srgbClr val="000000"/>
-                        </a:solidFill>
-                        <a:effectLst/>
-                        <a:latin typeface="맑은 고딕" panose="020B0503020000020004" pitchFamily="50" charset="-127"/>
-                        <a:ea typeface="맑은 고딕" panose="020B0503020000020004" pitchFamily="50" charset="-127"/>
-                      </a:endParaRPr>
-                    </a:p>
-                  </a:txBody>
-                  <a:tcPr marL="54864" marR="54864" marT="18288" anchor="ctr" marB="18288">
-                    <a:lnL w="6350" cap="flat" cmpd="sng" algn="ctr">
-                      <a:solidFill>
-                        <a:schemeClr val="tx1">
-                          <a:lumMod val="50000"/>
-                          <a:lumOff val="50000"/>
-                        </a:schemeClr>
-                      </a:solidFill>
-                      <a:prstDash val="solid"/>
-                      <a:round/>
-                      <a:headEnd type="none" w="med" len="med"/>
-                      <a:tailEnd type="none" w="med" len="med"/>
-                    </a:lnL>
-                    <a:lnR w="6350" cap="flat" cmpd="sng" algn="ctr">
-                      <a:solidFill>
-                        <a:schemeClr val="tx1">
-                          <a:lumMod val="50000"/>
-                          <a:lumOff val="50000"/>
-                        </a:schemeClr>
-                      </a:solidFill>
-                      <a:prstDash val="solid"/>
-                      <a:round/>
-                      <a:headEnd type="none" w="med" len="med"/>
-                      <a:tailEnd type="none" w="med" len="med"/>
-                    </a:lnR>
-                    <a:lnT w="6350" cap="flat" cmpd="sng" algn="ctr">
-                      <a:solidFill>
-                        <a:schemeClr val="tx1">
-                          <a:lumMod val="50000"/>
-                          <a:lumOff val="50000"/>
-                        </a:schemeClr>
-                      </a:solidFill>
-                      <a:prstDash val="solid"/>
-                      <a:round/>
-                      <a:headEnd type="none" w="med" len="med"/>
-                      <a:tailEnd type="none" w="med" len="med"/>
-                    </a:lnT>
-                    <a:lnB w="6350" cap="flat" cmpd="sng" algn="ctr">
-                      <a:solidFill>
-                        <a:schemeClr val="tx1">
-                          <a:lumMod val="50000"/>
-                          <a:lumOff val="50000"/>
-                        </a:schemeClr>
-                      </a:solidFill>
-                      <a:prstDash val="solid"/>
-                      <a:round/>
-                      <a:headEnd type="none" w="med" len="med"/>
-                      <a:tailEnd type="none" w="med" len="med"/>
-                    </a:lnB>
-                    <a:noFill/>
-                  </a:tcPr>
-                </a:tc>
-                <a:extLst>
-                  <a:ext uri="{0D108BD9-81ED-4DB2-BD59-A6C34878D82A}">
-                    <a16:rowId xmlns:a16="http://schemas.microsoft.com/office/drawing/2014/main" val="1393886245"/>
-                  </a:ext>
-                </a:extLst>
-              </a:tr>
-              <a:tr h="379701">
-                <a:tc>
-                  <a:txBody>
-                    <a:bodyPr wrap="square"/>
-                    <a:lstStyle/>
-                    <a:p>
-                      <a:pPr algn="l" fontAlgn="ctr">
-                        <a:lnSpc>
-                          <a:spcPct val="115000"/>
-                        </a:lnSpc>
-                      </a:pPr>
-                      <a:r>
-                        <a:rPr sz="1050" b="0" i="0" u="none">
-                          <a:solidFill>
-                            <a:srgbClr val="404040"/>
-                          </a:solidFill>
-                          <a:latin typeface="맑은 고딕"/>
-                          <a:ea typeface="맑은 고딕"/>
-                          <a:cs typeface="맑은 고딕"/>
-                        </a:rPr>
-                        <a:t>DB 보안 규칙 잠금 · 업데이트 채널 정비</a:t>
-                      </a:r>
-                      <a:endParaRPr lang="ko-KR" altLang="en-US" sz="1000" b="0" i="0" u="none" strike="noStrike">
-                        <a:solidFill>
-                          <a:srgbClr val="000000"/>
-                        </a:solidFill>
-                        <a:effectLst/>
-                        <a:latin typeface="맑은 고딕" panose="020B0503020000020004" pitchFamily="50" charset="-127"/>
-                        <a:ea typeface="맑은 고딕" panose="020B0503020000020004" pitchFamily="50" charset="-127"/>
-                      </a:endParaRPr>
-                    </a:p>
-                  </a:txBody>
-                  <a:tcPr marL="128016" marR="128016" marT="18288" anchor="ctr" marB="18288">
-                    <a:lnL w="6350" cap="flat" cmpd="sng" algn="ctr">
-                      <a:solidFill>
-                        <a:schemeClr val="tx1">
-                          <a:lumMod val="50000"/>
-                          <a:lumOff val="50000"/>
-                        </a:schemeClr>
-                      </a:solidFill>
-                      <a:prstDash val="solid"/>
-                      <a:round/>
-                      <a:headEnd type="none" w="med" len="med"/>
-                      <a:tailEnd type="none" w="med" len="med"/>
-                    </a:lnL>
-                    <a:lnR w="6350" cap="flat" cmpd="sng" algn="ctr">
-                      <a:solidFill>
-                        <a:schemeClr val="tx1">
-                          <a:lumMod val="50000"/>
-                          <a:lumOff val="50000"/>
-                        </a:schemeClr>
-                      </a:solidFill>
-                      <a:prstDash val="solid"/>
-                      <a:round/>
-                      <a:headEnd type="none" w="med" len="med"/>
-                      <a:tailEnd type="none" w="med" len="med"/>
-                    </a:lnR>
-                    <a:lnT w="6350" cap="flat" cmpd="sng" algn="ctr">
-                      <a:solidFill>
-                        <a:schemeClr val="tx1">
-                          <a:lumMod val="50000"/>
-                          <a:lumOff val="50000"/>
-                        </a:schemeClr>
-                      </a:solidFill>
-                      <a:prstDash val="solid"/>
-                      <a:round/>
-                      <a:headEnd type="none" w="med" len="med"/>
-                      <a:tailEnd type="none" w="med" len="med"/>
-                    </a:lnT>
-                    <a:lnB w="6350" cap="flat" cmpd="sng" algn="ctr">
-                      <a:solidFill>
-                        <a:schemeClr val="tx1">
-                          <a:lumMod val="50000"/>
-                          <a:lumOff val="50000"/>
-                        </a:schemeClr>
-                      </a:solidFill>
-                      <a:prstDash val="solid"/>
-                      <a:round/>
-                      <a:headEnd type="none" w="med" len="med"/>
-                      <a:tailEnd type="none" w="med" len="med"/>
-                    </a:lnB>
-                    <a:noFill/>
-                  </a:tcPr>
-                </a:tc>
-                <a:tc>
-                  <a:txBody>
-                    <a:bodyPr wrap="square"/>
-                    <a:lstStyle/>
-                    <a:p>
-                      <a:pPr algn="ctr" fontAlgn="ctr">
-                        <a:lnSpc>
-                          <a:spcPct val="115000"/>
-                        </a:lnSpc>
-                      </a:pPr>
-                      <a:r>
-                        <a:rPr sz="1050" b="0" i="0" u="none">
-                          <a:solidFill>
-                            <a:srgbClr val="404040"/>
-                          </a:solidFill>
-                          <a:latin typeface="맑은 고딕"/>
-                          <a:ea typeface="맑은 고딕"/>
-                          <a:cs typeface="맑은 고딕"/>
-                        </a:rPr>
-                        <a:t>제안자</a:t>
-                      </a:r>
-                      <a:endParaRPr lang="en-US" sz="1000" b="0" i="0" u="none" strike="noStrike">
-                        <a:solidFill>
-                          <a:srgbClr val="000000"/>
-                        </a:solidFill>
-                        <a:effectLst/>
-                        <a:latin typeface="맑은 고딕" panose="020B0503020000020004" pitchFamily="50" charset="-127"/>
-                        <a:ea typeface="맑은 고딕" panose="020B0503020000020004" pitchFamily="50" charset="-127"/>
-                      </a:endParaRPr>
-                    </a:p>
-                  </a:txBody>
-                  <a:tcPr marL="54864" marR="54864" marT="18288" anchor="ctr" marB="18288">
-                    <a:lnL w="6350" cap="flat" cmpd="sng" algn="ctr">
-                      <a:solidFill>
-                        <a:schemeClr val="tx1">
-                          <a:lumMod val="50000"/>
-                          <a:lumOff val="50000"/>
-                        </a:schemeClr>
-                      </a:solidFill>
-                      <a:prstDash val="solid"/>
-                      <a:round/>
-                      <a:headEnd type="none" w="med" len="med"/>
-                      <a:tailEnd type="none" w="med" len="med"/>
-                    </a:lnL>
-                    <a:lnR w="6350" cap="flat" cmpd="sng" algn="ctr">
-                      <a:solidFill>
-                        <a:schemeClr val="tx1">
-                          <a:lumMod val="50000"/>
-                          <a:lumOff val="50000"/>
-                        </a:schemeClr>
-                      </a:solidFill>
-                      <a:prstDash val="solid"/>
-                      <a:round/>
-                      <a:headEnd type="none" w="med" len="med"/>
-                      <a:tailEnd type="none" w="med" len="med"/>
-                    </a:lnR>
-                    <a:lnT w="6350" cap="flat" cmpd="sng" algn="ctr">
-                      <a:solidFill>
-                        <a:schemeClr val="tx1">
-                          <a:lumMod val="50000"/>
-                          <a:lumOff val="50000"/>
-                        </a:schemeClr>
-                      </a:solidFill>
-                      <a:prstDash val="solid"/>
-                      <a:round/>
-                      <a:headEnd type="none" w="med" len="med"/>
-                      <a:tailEnd type="none" w="med" len="med"/>
-                    </a:lnT>
-                    <a:lnB w="6350" cap="flat" cmpd="sng" algn="ctr">
-                      <a:solidFill>
-                        <a:schemeClr val="tx1">
-                          <a:lumMod val="50000"/>
-                          <a:lumOff val="50000"/>
-                        </a:schemeClr>
-                      </a:solidFill>
-                      <a:prstDash val="solid"/>
-                      <a:round/>
-                      <a:headEnd type="none" w="med" len="med"/>
-                      <a:tailEnd type="none" w="med" len="med"/>
-                    </a:lnB>
-                    <a:noFill/>
-                  </a:tcPr>
-                </a:tc>
-                <a:tc>
-                  <a:txBody>
-                    <a:bodyPr wrap="square"/>
-                    <a:lstStyle/>
-                    <a:p>
-                      <a:pPr algn="ctr" fontAlgn="ctr">
-                        <a:lnSpc>
-                          <a:spcPct val="115000"/>
-                        </a:lnSpc>
-                      </a:pPr>
-                      <a:r>
-                        <a:rPr sz="1050" b="0" i="0" u="none">
-                          <a:solidFill>
-                            <a:srgbClr val="404040"/>
-                          </a:solidFill>
-                          <a:latin typeface="맑은 고딕"/>
-                          <a:ea typeface="맑은 고딕"/>
-                          <a:cs typeface="맑은 고딕"/>
-                        </a:rPr>
-                        <a:t>완료 (v1.1.71)</a:t>
-                      </a:r>
-                      <a:endParaRPr lang="en-US" altLang="ko-KR" sz="1000" b="0" i="0" u="none" strike="noStrike">
-                        <a:solidFill>
-                          <a:srgbClr val="000000"/>
-                        </a:solidFill>
-                        <a:effectLst/>
-                        <a:latin typeface="맑은 고딕" panose="020B0503020000020004" pitchFamily="50" charset="-127"/>
-                        <a:ea typeface="맑은 고딕" panose="020B0503020000020004" pitchFamily="50" charset="-127"/>
-                      </a:endParaRPr>
-                    </a:p>
-                  </a:txBody>
-                  <a:tcPr marL="54864" marR="54864" marT="18288" anchor="ctr" marB="18288">
-                    <a:lnL w="6350" cap="flat" cmpd="sng" algn="ctr">
-                      <a:solidFill>
-                        <a:schemeClr val="tx1">
-                          <a:lumMod val="50000"/>
-                          <a:lumOff val="50000"/>
-                        </a:schemeClr>
-                      </a:solidFill>
-                      <a:prstDash val="solid"/>
-                      <a:round/>
-                      <a:headEnd type="none" w="med" len="med"/>
-                      <a:tailEnd type="none" w="med" len="med"/>
-                    </a:lnL>
-                    <a:lnR w="6350" cap="flat" cmpd="sng" algn="ctr">
-                      <a:solidFill>
-                        <a:schemeClr val="tx1">
-                          <a:lumMod val="50000"/>
-                          <a:lumOff val="50000"/>
-                        </a:schemeClr>
-                      </a:solidFill>
-                      <a:prstDash val="solid"/>
-                      <a:round/>
-                      <a:headEnd type="none" w="med" len="med"/>
-                      <a:tailEnd type="none" w="med" len="med"/>
-                    </a:lnR>
-                    <a:lnT w="6350" cap="flat" cmpd="sng" algn="ctr">
-                      <a:solidFill>
-                        <a:schemeClr val="tx1">
-                          <a:lumMod val="50000"/>
-                          <a:lumOff val="50000"/>
-                        </a:schemeClr>
-                      </a:solidFill>
-                      <a:prstDash val="solid"/>
-                      <a:round/>
-                      <a:headEnd type="none" w="med" len="med"/>
-                      <a:tailEnd type="none" w="med" len="med"/>
-                    </a:lnT>
-                    <a:lnB w="6350" cap="flat" cmpd="sng" algn="ctr">
-                      <a:solidFill>
-                        <a:schemeClr val="tx1">
-                          <a:lumMod val="50000"/>
-                          <a:lumOff val="50000"/>
-                        </a:schemeClr>
-                      </a:solidFill>
-                      <a:prstDash val="solid"/>
-                      <a:round/>
-                      <a:headEnd type="none" w="med" len="med"/>
-                      <a:tailEnd type="none" w="med" len="med"/>
-                    </a:lnB>
-                    <a:noFill/>
-                  </a:tcPr>
-                </a:tc>
-                <a:tc>
-                  <a:txBody>
-                    <a:bodyPr wrap="square"/>
-                    <a:lstStyle/>
-                    <a:p>
-                      <a:pPr algn="ctr" fontAlgn="ctr">
-                        <a:lnSpc>
-                          <a:spcPct val="115000"/>
-                        </a:lnSpc>
-                      </a:pPr>
-                      <a:r>
-                        <a:rPr sz="1050" b="1" i="0" u="none">
-                          <a:solidFill>
-                            <a:srgbClr val="1B8A6B"/>
-                          </a:solidFill>
-                          <a:latin typeface="맑은 고딕"/>
-                          <a:ea typeface="맑은 고딕"/>
-                          <a:cs typeface="맑은 고딕"/>
-                        </a:rPr>
-                        <a:t>완료</a:t>
-                      </a:r>
-                      <a:endParaRPr lang="ko-KR" altLang="en-US" sz="1000" b="0" i="0" u="none" strike="noStrike">
-                        <a:solidFill>
-                          <a:srgbClr val="000000"/>
-                        </a:solidFill>
-                        <a:effectLst/>
-                        <a:latin typeface="맑은 고딕" panose="020B0503020000020004" pitchFamily="50" charset="-127"/>
-                        <a:ea typeface="맑은 고딕" panose="020B0503020000020004" pitchFamily="50" charset="-127"/>
-                      </a:endParaRPr>
-                    </a:p>
-                  </a:txBody>
-                  <a:tcPr marL="54864" marR="54864" marT="18288" anchor="ctr" marB="18288">
-                    <a:lnL w="6350" cap="flat" cmpd="sng" algn="ctr">
-                      <a:solidFill>
-                        <a:schemeClr val="tx1">
-                          <a:lumMod val="50000"/>
-                          <a:lumOff val="50000"/>
-                        </a:schemeClr>
-                      </a:solidFill>
-                      <a:prstDash val="solid"/>
-                      <a:round/>
-                      <a:headEnd type="none" w="med" len="med"/>
-                      <a:tailEnd type="none" w="med" len="med"/>
-                    </a:lnL>
-                    <a:lnR w="6350" cap="flat" cmpd="sng" algn="ctr">
-                      <a:solidFill>
-                        <a:schemeClr val="tx1">
-                          <a:lumMod val="50000"/>
-                          <a:lumOff val="50000"/>
-                        </a:schemeClr>
-                      </a:solidFill>
-                      <a:prstDash val="solid"/>
-                      <a:round/>
-                      <a:headEnd type="none" w="med" len="med"/>
-                      <a:tailEnd type="none" w="med" len="med"/>
-                    </a:lnR>
-                    <a:lnT w="6350" cap="flat" cmpd="sng" algn="ctr">
-                      <a:solidFill>
-                        <a:schemeClr val="tx1">
-                          <a:lumMod val="50000"/>
-                          <a:lumOff val="50000"/>
-                        </a:schemeClr>
-                      </a:solidFill>
-                      <a:prstDash val="solid"/>
-                      <a:round/>
-                      <a:headEnd type="none" w="med" len="med"/>
-                      <a:tailEnd type="none" w="med" len="med"/>
-                    </a:lnT>
-                    <a:lnB w="6350" cap="flat" cmpd="sng" algn="ctr">
-                      <a:solidFill>
-                        <a:schemeClr val="tx1">
-                          <a:lumMod val="50000"/>
-                          <a:lumOff val="50000"/>
-                        </a:schemeClr>
-                      </a:solidFill>
-                      <a:prstDash val="solid"/>
-                      <a:round/>
-                      <a:headEnd type="none" w="med" len="med"/>
-                      <a:tailEnd type="none" w="med" len="med"/>
-                    </a:lnB>
-                    <a:noFill/>
-                  </a:tcPr>
-                </a:tc>
-                <a:extLst>
-                  <a:ext uri="{0D108BD9-81ED-4DB2-BD59-A6C34878D82A}">
-                    <a16:rowId xmlns:a16="http://schemas.microsoft.com/office/drawing/2014/main" val="4122717012"/>
-                  </a:ext>
-                </a:extLst>
-              </a:tr>
-              <a:tr h="379701">
-                <a:tc>
-                  <a:txBody>
-                    <a:bodyPr wrap="square"/>
-                    <a:lstStyle/>
-                    <a:p>
-                      <a:pPr algn="l" fontAlgn="ctr">
-                        <a:lnSpc>
-                          <a:spcPct val="115000"/>
-                        </a:lnSpc>
-                      </a:pPr>
-                      <a:r>
-                        <a:rPr sz="1050" b="0" i="0" u="none">
-                          <a:solidFill>
-                            <a:srgbClr val="404040"/>
-                          </a:solidFill>
-                          <a:latin typeface="맑은 고딕"/>
-                          <a:ea typeface="맑은 고딕"/>
-                          <a:cs typeface="맑은 고딕"/>
-                        </a:rPr>
-                        <a:t>v1.0.1 ~ v1.1.71 현장 배포 · 3개 센터 실사용</a:t>
-                      </a:r>
-                      <a:endParaRPr lang="ko-KR" altLang="en-US" sz="1000" b="0" i="0" u="none" strike="noStrike">
-                        <a:solidFill>
-                          <a:srgbClr val="000000"/>
-                        </a:solidFill>
-                        <a:effectLst/>
-                        <a:latin typeface="맑은 고딕" panose="020B0503020000020004" pitchFamily="50" charset="-127"/>
-                        <a:ea typeface="맑은 고딕" panose="020B0503020000020004" pitchFamily="50" charset="-127"/>
-                      </a:endParaRPr>
-                    </a:p>
-                  </a:txBody>
-                  <a:tcPr marL="128016" marR="128016" marT="18288" anchor="ctr" marB="18288">
-                    <a:lnL w="6350" cap="flat" cmpd="sng" algn="ctr">
-                      <a:solidFill>
-                        <a:schemeClr val="tx1">
-                          <a:lumMod val="50000"/>
-                          <a:lumOff val="50000"/>
-                        </a:schemeClr>
-                      </a:solidFill>
-                      <a:prstDash val="solid"/>
-                      <a:round/>
-                      <a:headEnd type="none" w="med" len="med"/>
-                      <a:tailEnd type="none" w="med" len="med"/>
-                    </a:lnL>
-                    <a:lnR w="6350" cap="flat" cmpd="sng" algn="ctr">
-                      <a:solidFill>
-                        <a:schemeClr val="tx1">
-                          <a:lumMod val="50000"/>
-                          <a:lumOff val="50000"/>
-                        </a:schemeClr>
-                      </a:solidFill>
-                      <a:prstDash val="solid"/>
-                      <a:round/>
-                      <a:headEnd type="none" w="med" len="med"/>
-                      <a:tailEnd type="none" w="med" len="med"/>
-                    </a:lnR>
-                    <a:lnT w="6350" cap="flat" cmpd="sng" algn="ctr">
-                      <a:solidFill>
-                        <a:schemeClr val="tx1">
-                          <a:lumMod val="50000"/>
-                          <a:lumOff val="50000"/>
-                        </a:schemeClr>
-                      </a:solidFill>
-                      <a:prstDash val="solid"/>
-                      <a:round/>
-                      <a:headEnd type="none" w="med" len="med"/>
-                      <a:tailEnd type="none" w="med" len="med"/>
-                    </a:lnT>
-                    <a:lnB w="6350" cap="flat" cmpd="sng" algn="ctr">
-                      <a:solidFill>
-                        <a:schemeClr val="tx1">
-                          <a:lumMod val="50000"/>
-                          <a:lumOff val="50000"/>
-                        </a:schemeClr>
-                      </a:solidFill>
-                      <a:prstDash val="solid"/>
-                      <a:round/>
-                      <a:headEnd type="none" w="med" len="med"/>
-                      <a:tailEnd type="none" w="med" len="med"/>
-                    </a:lnB>
-                    <a:noFill/>
-                  </a:tcPr>
-                </a:tc>
-                <a:tc>
-                  <a:txBody>
-                    <a:bodyPr wrap="square"/>
-                    <a:lstStyle/>
-                    <a:p>
-                      <a:pPr algn="ctr" fontAlgn="ctr">
-                        <a:lnSpc>
-                          <a:spcPct val="115000"/>
-                        </a:lnSpc>
-                      </a:pPr>
-                      <a:r>
-                        <a:rPr sz="1050" b="0" i="0" u="none">
-                          <a:solidFill>
-                            <a:srgbClr val="404040"/>
-                          </a:solidFill>
-                          <a:latin typeface="맑은 고딕"/>
-                          <a:ea typeface="맑은 고딕"/>
-                          <a:cs typeface="맑은 고딕"/>
-                        </a:rPr>
-                        <a:t>제안자 · 현장</a:t>
-                      </a:r>
-                      <a:endParaRPr lang="en-US" sz="1000" b="0" i="0" u="none" strike="noStrike">
-                        <a:solidFill>
-                          <a:srgbClr val="000000"/>
-                        </a:solidFill>
-                        <a:effectLst/>
-                        <a:latin typeface="맑은 고딕" panose="020B0503020000020004" pitchFamily="50" charset="-127"/>
-                        <a:ea typeface="맑은 고딕" panose="020B0503020000020004" pitchFamily="50" charset="-127"/>
-                      </a:endParaRPr>
-                    </a:p>
-                  </a:txBody>
-                  <a:tcPr marL="54864" marR="54864" marT="18288" anchor="ctr" marB="18288">
-                    <a:lnL w="6350" cap="flat" cmpd="sng" algn="ctr">
-                      <a:solidFill>
-                        <a:schemeClr val="tx1">
-                          <a:lumMod val="50000"/>
-                          <a:lumOff val="50000"/>
-                        </a:schemeClr>
-                      </a:solidFill>
-                      <a:prstDash val="solid"/>
-                      <a:round/>
-                      <a:headEnd type="none" w="med" len="med"/>
-                      <a:tailEnd type="none" w="med" len="med"/>
-                    </a:lnL>
-                    <a:lnR w="6350" cap="flat" cmpd="sng" algn="ctr">
-                      <a:solidFill>
-                        <a:schemeClr val="tx1">
-                          <a:lumMod val="50000"/>
-                          <a:lumOff val="50000"/>
-                        </a:schemeClr>
-                      </a:solidFill>
-                      <a:prstDash val="solid"/>
-                      <a:round/>
-                      <a:headEnd type="none" w="med" len="med"/>
-                      <a:tailEnd type="none" w="med" len="med"/>
-                    </a:lnR>
-                    <a:lnT w="6350" cap="flat" cmpd="sng" algn="ctr">
-                      <a:solidFill>
-                        <a:schemeClr val="tx1">
-                          <a:lumMod val="50000"/>
-                          <a:lumOff val="50000"/>
-                        </a:schemeClr>
-                      </a:solidFill>
-                      <a:prstDash val="solid"/>
-                      <a:round/>
-                      <a:headEnd type="none" w="med" len="med"/>
-                      <a:tailEnd type="none" w="med" len="med"/>
-                    </a:lnT>
-                    <a:lnB w="6350" cap="flat" cmpd="sng" algn="ctr">
-                      <a:solidFill>
-                        <a:schemeClr val="tx1">
-                          <a:lumMod val="50000"/>
-                          <a:lumOff val="50000"/>
-                        </a:schemeClr>
-                      </a:solidFill>
-                      <a:prstDash val="solid"/>
-                      <a:round/>
-                      <a:headEnd type="none" w="med" len="med"/>
-                      <a:tailEnd type="none" w="med" len="med"/>
-                    </a:lnB>
-                    <a:noFill/>
-                  </a:tcPr>
-                </a:tc>
-                <a:tc>
-                  <a:txBody>
-                    <a:bodyPr wrap="square"/>
-                    <a:lstStyle/>
-                    <a:p>
-                      <a:pPr algn="ctr" fontAlgn="ctr">
-                        <a:lnSpc>
-                          <a:spcPct val="115000"/>
-                        </a:lnSpc>
-                      </a:pPr>
-                      <a:r>
-                        <a:rPr sz="1050" b="0" i="0" u="none">
-                          <a:solidFill>
-                            <a:srgbClr val="404040"/>
-                          </a:solidFill>
-                          <a:latin typeface="맑은 고딕"/>
-                          <a:ea typeface="맑은 고딕"/>
-                          <a:cs typeface="맑은 고딕"/>
-                        </a:rPr>
-                        <a:t>진행 중</a:t>
-                      </a:r>
-                      <a:endParaRPr lang="en-US" altLang="ko-KR" sz="1000" b="0" i="0" u="none" strike="noStrike">
-                        <a:solidFill>
-                          <a:srgbClr val="000000"/>
-                        </a:solidFill>
-                        <a:effectLst/>
-                        <a:latin typeface="맑은 고딕" panose="020B0503020000020004" pitchFamily="50" charset="-127"/>
-                        <a:ea typeface="맑은 고딕" panose="020B0503020000020004" pitchFamily="50" charset="-127"/>
-                      </a:endParaRPr>
-                    </a:p>
-                  </a:txBody>
-                  <a:tcPr marL="54864" marR="54864" marT="18288" anchor="ctr" marB="18288">
-                    <a:lnL w="6350" cap="flat" cmpd="sng" algn="ctr">
-                      <a:solidFill>
-                        <a:schemeClr val="tx1">
-                          <a:lumMod val="50000"/>
-                          <a:lumOff val="50000"/>
-                        </a:schemeClr>
-                      </a:solidFill>
-                      <a:prstDash val="solid"/>
-                      <a:round/>
-                      <a:headEnd type="none" w="med" len="med"/>
-                      <a:tailEnd type="none" w="med" len="med"/>
-                    </a:lnL>
-                    <a:lnR w="6350" cap="flat" cmpd="sng" algn="ctr">
-                      <a:solidFill>
-                        <a:schemeClr val="tx1">
-                          <a:lumMod val="50000"/>
-                          <a:lumOff val="50000"/>
-                        </a:schemeClr>
-                      </a:solidFill>
-                      <a:prstDash val="solid"/>
-                      <a:round/>
-                      <a:headEnd type="none" w="med" len="med"/>
-                      <a:tailEnd type="none" w="med" len="med"/>
-                    </a:lnR>
-                    <a:lnT w="6350" cap="flat" cmpd="sng" algn="ctr">
-                      <a:solidFill>
-                        <a:schemeClr val="tx1">
-                          <a:lumMod val="50000"/>
-                          <a:lumOff val="50000"/>
-                        </a:schemeClr>
-                      </a:solidFill>
-                      <a:prstDash val="solid"/>
-                      <a:round/>
-                      <a:headEnd type="none" w="med" len="med"/>
-                      <a:tailEnd type="none" w="med" len="med"/>
-                    </a:lnT>
-                    <a:lnB w="6350" cap="flat" cmpd="sng" algn="ctr">
-                      <a:solidFill>
-                        <a:schemeClr val="tx1">
-                          <a:lumMod val="50000"/>
-                          <a:lumOff val="50000"/>
-                        </a:schemeClr>
-                      </a:solidFill>
-                      <a:prstDash val="solid"/>
-                      <a:round/>
-                      <a:headEnd type="none" w="med" len="med"/>
-                      <a:tailEnd type="none" w="med" len="med"/>
-                    </a:lnB>
-                    <a:noFill/>
-                  </a:tcPr>
-                </a:tc>
-                <a:tc>
-                  <a:txBody>
-                    <a:bodyPr wrap="square"/>
-                    <a:lstStyle/>
-                    <a:p>
-                      <a:pPr algn="ctr" fontAlgn="ctr">
-                        <a:lnSpc>
-                          <a:spcPct val="115000"/>
-                        </a:lnSpc>
-                      </a:pPr>
-                      <a:r>
-                        <a:rPr sz="1050" b="1" i="0" u="none">
-                          <a:solidFill>
-                            <a:srgbClr val="1B8A6B"/>
-                          </a:solidFill>
-                          <a:latin typeface="맑은 고딕"/>
-                          <a:ea typeface="맑은 고딕"/>
-                          <a:cs typeface="맑은 고딕"/>
-                        </a:rPr>
-                        <a:t>진행</a:t>
-                      </a:r>
-                      <a:endParaRPr lang="ko-KR" altLang="en-US" sz="1000" b="0" i="0" u="none" strike="noStrike">
-                        <a:solidFill>
-                          <a:srgbClr val="000000"/>
-                        </a:solidFill>
-                        <a:effectLst/>
-                        <a:latin typeface="맑은 고딕" panose="020B0503020000020004" pitchFamily="50" charset="-127"/>
-                        <a:ea typeface="맑은 고딕" panose="020B0503020000020004" pitchFamily="50" charset="-127"/>
-                      </a:endParaRPr>
-                    </a:p>
-                  </a:txBody>
-                  <a:tcPr marL="54864" marR="54864" marT="18288" anchor="ctr" marB="18288">
-                    <a:lnL w="6350" cap="flat" cmpd="sng" algn="ctr">
-                      <a:solidFill>
-                        <a:schemeClr val="tx1">
-                          <a:lumMod val="50000"/>
-                          <a:lumOff val="50000"/>
-                        </a:schemeClr>
-                      </a:solidFill>
-                      <a:prstDash val="solid"/>
-                      <a:round/>
-                      <a:headEnd type="none" w="med" len="med"/>
-                      <a:tailEnd type="none" w="med" len="med"/>
-                    </a:lnL>
-                    <a:lnR w="6350" cap="flat" cmpd="sng" algn="ctr">
-                      <a:solidFill>
-                        <a:schemeClr val="tx1">
-                          <a:lumMod val="50000"/>
-                          <a:lumOff val="50000"/>
-                        </a:schemeClr>
-                      </a:solidFill>
-                      <a:prstDash val="solid"/>
-                      <a:round/>
-                      <a:headEnd type="none" w="med" len="med"/>
-                      <a:tailEnd type="none" w="med" len="med"/>
-                    </a:lnR>
-                    <a:lnT w="6350" cap="flat" cmpd="sng" algn="ctr">
-                      <a:solidFill>
-                        <a:schemeClr val="tx1">
-                          <a:lumMod val="50000"/>
-                          <a:lumOff val="50000"/>
-                        </a:schemeClr>
-                      </a:solidFill>
-                      <a:prstDash val="solid"/>
-                      <a:round/>
-                      <a:headEnd type="none" w="med" len="med"/>
-                      <a:tailEnd type="none" w="med" len="med"/>
-                    </a:lnT>
-                    <a:lnB w="6350" cap="flat" cmpd="sng" algn="ctr">
-                      <a:solidFill>
-                        <a:schemeClr val="tx1">
-                          <a:lumMod val="50000"/>
-                          <a:lumOff val="50000"/>
-                        </a:schemeClr>
-                      </a:solidFill>
-                      <a:prstDash val="solid"/>
-                      <a:round/>
-                      <a:headEnd type="none" w="med" len="med"/>
-                      <a:tailEnd type="none" w="med" len="med"/>
-                    </a:lnB>
-                    <a:noFill/>
-                  </a:tcPr>
-                </a:tc>
-                <a:extLst>
-                  <a:ext uri="{0D108BD9-81ED-4DB2-BD59-A6C34878D82A}">
-                    <a16:rowId xmlns:a16="http://schemas.microsoft.com/office/drawing/2014/main" val="2710345523"/>
-                  </a:ext>
-                </a:extLst>
-              </a:tr>
-              <a:tr h="379701">
-                <a:tc>
-                  <a:txBody>
-                    <a:bodyPr wrap="square"/>
-                    <a:lstStyle/>
-                    <a:p>
-                      <a:pPr algn="l" fontAlgn="ctr">
-                        <a:lnSpc>
-                          <a:spcPct val="115000"/>
-                        </a:lnSpc>
-                      </a:pPr>
-                      <a:r>
-                        <a:rPr sz="1050" b="0" i="0" u="none">
-                          <a:solidFill>
-                            <a:srgbClr val="404040"/>
-                          </a:solidFill>
-                          <a:latin typeface="맑은 고딕"/>
-                          <a:ea typeface="맑은 고딕"/>
-                          <a:cs typeface="맑은 고딕"/>
-                        </a:rPr>
-                        <a:t>작업자 설문 회수  (경보 기록 집계는 주간 자동화 완료)</a:t>
-                      </a:r>
-                      <a:endParaRPr lang="en-US" altLang="ko-KR" sz="1000" b="0" i="0" u="none" strike="noStrike">
-                        <a:solidFill>
-                          <a:srgbClr val="000000"/>
-                        </a:solidFill>
-                        <a:effectLst/>
-                        <a:latin typeface="맑은 고딕" panose="020B0503020000020004" pitchFamily="50" charset="-127"/>
-                        <a:ea typeface="맑은 고딕" panose="020B0503020000020004" pitchFamily="50" charset="-127"/>
-                      </a:endParaRPr>
-                    </a:p>
-                  </a:txBody>
-                  <a:tcPr marL="128016" marR="128016" marT="18288" anchor="ctr" marB="18288">
-                    <a:lnL w="6350" cap="flat" cmpd="sng" algn="ctr">
-                      <a:solidFill>
-                        <a:schemeClr val="tx1">
-                          <a:lumMod val="50000"/>
-                          <a:lumOff val="50000"/>
-                        </a:schemeClr>
-                      </a:solidFill>
-                      <a:prstDash val="solid"/>
-                      <a:round/>
-                      <a:headEnd type="none" w="med" len="med"/>
-                      <a:tailEnd type="none" w="med" len="med"/>
-                    </a:lnL>
-                    <a:lnR w="6350" cap="flat" cmpd="sng" algn="ctr">
-                      <a:solidFill>
-                        <a:schemeClr val="tx1">
-                          <a:lumMod val="50000"/>
-                          <a:lumOff val="50000"/>
-                        </a:schemeClr>
-                      </a:solidFill>
-                      <a:prstDash val="solid"/>
-                      <a:round/>
-                      <a:headEnd type="none" w="med" len="med"/>
-                      <a:tailEnd type="none" w="med" len="med"/>
-                    </a:lnR>
-                    <a:lnT w="6350" cap="flat" cmpd="sng" algn="ctr">
-                      <a:solidFill>
-                        <a:schemeClr val="tx1">
-                          <a:lumMod val="50000"/>
-                          <a:lumOff val="50000"/>
-                        </a:schemeClr>
-                      </a:solidFill>
-                      <a:prstDash val="solid"/>
-                      <a:round/>
-                      <a:headEnd type="none" w="med" len="med"/>
-                      <a:tailEnd type="none" w="med" len="med"/>
-                    </a:lnT>
-                    <a:lnB w="6350" cap="flat" cmpd="sng" algn="ctr">
-                      <a:solidFill>
-                        <a:schemeClr val="tx1">
-                          <a:lumMod val="50000"/>
-                          <a:lumOff val="50000"/>
-                        </a:schemeClr>
-                      </a:solidFill>
-                      <a:prstDash val="solid"/>
-                      <a:round/>
-                      <a:headEnd type="none" w="med" len="med"/>
-                      <a:tailEnd type="none" w="med" len="med"/>
-                    </a:lnB>
-                    <a:noFill/>
-                  </a:tcPr>
-                </a:tc>
-                <a:tc>
-                  <a:txBody>
-                    <a:bodyPr wrap="square"/>
-                    <a:lstStyle/>
-                    <a:p>
-                      <a:pPr algn="ctr" fontAlgn="ctr">
-                        <a:lnSpc>
-                          <a:spcPct val="115000"/>
-                        </a:lnSpc>
-                      </a:pPr>
-                      <a:r>
-                        <a:rPr sz="1050" b="0" i="0" u="none">
-                          <a:solidFill>
-                            <a:srgbClr val="404040"/>
-                          </a:solidFill>
-                          <a:latin typeface="맑은 고딕"/>
-                          <a:ea typeface="맑은 고딕"/>
-                          <a:cs typeface="맑은 고딕"/>
-                        </a:rPr>
-                        <a:t>제안자 · 현장</a:t>
-                      </a:r>
-                      <a:endParaRPr lang="en-US" sz="1000" b="0" i="0" u="none" strike="noStrike">
-                        <a:solidFill>
-                          <a:srgbClr val="000000"/>
-                        </a:solidFill>
-                        <a:effectLst/>
-                        <a:latin typeface="맑은 고딕" panose="020B0503020000020004" pitchFamily="50" charset="-127"/>
-                        <a:ea typeface="맑은 고딕" panose="020B0503020000020004" pitchFamily="50" charset="-127"/>
-                      </a:endParaRPr>
-                    </a:p>
-                  </a:txBody>
-                  <a:tcPr marL="54864" marR="54864" marT="18288" anchor="ctr" marB="18288">
-                    <a:lnL w="6350" cap="flat" cmpd="sng" algn="ctr">
-                      <a:solidFill>
-                        <a:schemeClr val="tx1">
-                          <a:lumMod val="50000"/>
-                          <a:lumOff val="50000"/>
-                        </a:schemeClr>
-                      </a:solidFill>
-                      <a:prstDash val="solid"/>
-                      <a:round/>
-                      <a:headEnd type="none" w="med" len="med"/>
-                      <a:tailEnd type="none" w="med" len="med"/>
-                    </a:lnL>
-                    <a:lnR w="6350" cap="flat" cmpd="sng" algn="ctr">
-                      <a:solidFill>
-                        <a:schemeClr val="tx1">
-                          <a:lumMod val="50000"/>
-                          <a:lumOff val="50000"/>
-                        </a:schemeClr>
-                      </a:solidFill>
-                      <a:prstDash val="solid"/>
-                      <a:round/>
-                      <a:headEnd type="none" w="med" len="med"/>
-                      <a:tailEnd type="none" w="med" len="med"/>
-                    </a:lnR>
-                    <a:lnT w="6350" cap="flat" cmpd="sng" algn="ctr">
-                      <a:solidFill>
-                        <a:schemeClr val="tx1">
-                          <a:lumMod val="50000"/>
-                          <a:lumOff val="50000"/>
-                        </a:schemeClr>
-                      </a:solidFill>
-                      <a:prstDash val="solid"/>
-                      <a:round/>
-                      <a:headEnd type="none" w="med" len="med"/>
-                      <a:tailEnd type="none" w="med" len="med"/>
-                    </a:lnT>
-                    <a:lnB w="6350" cap="flat" cmpd="sng" algn="ctr">
-                      <a:solidFill>
-                        <a:schemeClr val="tx1">
-                          <a:lumMod val="50000"/>
-                          <a:lumOff val="50000"/>
-                        </a:schemeClr>
-                      </a:solidFill>
-                      <a:prstDash val="solid"/>
-                      <a:round/>
-                      <a:headEnd type="none" w="med" len="med"/>
-                      <a:tailEnd type="none" w="med" len="med"/>
-                    </a:lnB>
-                    <a:noFill/>
-                  </a:tcPr>
-                </a:tc>
-                <a:tc>
-                  <a:txBody>
-                    <a:bodyPr wrap="square"/>
-                    <a:lstStyle/>
-                    <a:p>
-                      <a:pPr algn="ctr" fontAlgn="ctr">
-                        <a:lnSpc>
-                          <a:spcPct val="115000"/>
-                        </a:lnSpc>
-                      </a:pPr>
-                      <a:r>
-                        <a:rPr sz="1050" b="0" i="0" u="none">
-                          <a:solidFill>
-                            <a:srgbClr val="404040"/>
-                          </a:solidFill>
-                          <a:latin typeface="맑은 고딕"/>
-                          <a:ea typeface="맑은 고딕"/>
-                          <a:cs typeface="맑은 고딕"/>
-                        </a:rPr>
-                        <a:t>9월 중</a:t>
-                      </a:r>
-                      <a:endParaRPr lang="en-US" altLang="ko-KR" sz="1000" b="0" i="0" u="none" strike="noStrike">
-                        <a:solidFill>
-                          <a:srgbClr val="000000"/>
-                        </a:solidFill>
-                        <a:effectLst/>
-                        <a:latin typeface="맑은 고딕" panose="020B0503020000020004" pitchFamily="50" charset="-127"/>
-                        <a:ea typeface="맑은 고딕" panose="020B0503020000020004" pitchFamily="50" charset="-127"/>
-                      </a:endParaRPr>
-                    </a:p>
-                  </a:txBody>
-                  <a:tcPr marL="54864" marR="54864" marT="18288" anchor="ctr" marB="18288">
-                    <a:lnL w="6350" cap="flat" cmpd="sng" algn="ctr">
-                      <a:solidFill>
-                        <a:schemeClr val="tx1">
-                          <a:lumMod val="50000"/>
-                          <a:lumOff val="50000"/>
-                        </a:schemeClr>
-                      </a:solidFill>
-                      <a:prstDash val="solid"/>
-                      <a:round/>
-                      <a:headEnd type="none" w="med" len="med"/>
-                      <a:tailEnd type="none" w="med" len="med"/>
-                    </a:lnL>
-                    <a:lnR w="6350" cap="flat" cmpd="sng" algn="ctr">
-                      <a:solidFill>
-                        <a:schemeClr val="tx1">
-                          <a:lumMod val="50000"/>
-                          <a:lumOff val="50000"/>
-                        </a:schemeClr>
-                      </a:solidFill>
-                      <a:prstDash val="solid"/>
-                      <a:round/>
-                      <a:headEnd type="none" w="med" len="med"/>
-                      <a:tailEnd type="none" w="med" len="med"/>
-                    </a:lnR>
-                    <a:lnT w="6350" cap="flat" cmpd="sng" algn="ctr">
-                      <a:solidFill>
-                        <a:schemeClr val="tx1">
-                          <a:lumMod val="50000"/>
-                          <a:lumOff val="50000"/>
-                        </a:schemeClr>
-                      </a:solidFill>
-                      <a:prstDash val="solid"/>
-                      <a:round/>
-                      <a:headEnd type="none" w="med" len="med"/>
-                      <a:tailEnd type="none" w="med" len="med"/>
-                    </a:lnT>
-                    <a:lnB w="6350" cap="flat" cmpd="sng" algn="ctr">
-                      <a:solidFill>
-                        <a:schemeClr val="tx1">
-                          <a:lumMod val="50000"/>
-                          <a:lumOff val="50000"/>
-                        </a:schemeClr>
-                      </a:solidFill>
-                      <a:prstDash val="solid"/>
-                      <a:round/>
-                      <a:headEnd type="none" w="med" len="med"/>
-                      <a:tailEnd type="none" w="med" len="med"/>
-                    </a:lnB>
-                    <a:noFill/>
-                  </a:tcPr>
-                </a:tc>
-                <a:tc>
-                  <a:txBody>
-                    <a:bodyPr wrap="square"/>
-                    <a:lstStyle/>
-                    <a:p>
-                      <a:pPr algn="ctr" fontAlgn="ctr">
-                        <a:lnSpc>
-                          <a:spcPct val="115000"/>
-                        </a:lnSpc>
-                      </a:pPr>
-                      <a:r>
-                        <a:rPr sz="1050" b="1" i="0" u="none">
-                          <a:solidFill>
-                            <a:srgbClr val="1B8A6B"/>
-                          </a:solidFill>
-                          <a:latin typeface="맑은 고딕"/>
-                          <a:ea typeface="맑은 고딕"/>
-                          <a:cs typeface="맑은 고딕"/>
-                        </a:rPr>
-                        <a:t>진행</a:t>
-                      </a:r>
-                      <a:endParaRPr lang="ko-KR" altLang="en-US" sz="1000" b="0" i="0" u="none" strike="noStrike">
-                        <a:solidFill>
-                          <a:srgbClr val="000000"/>
-                        </a:solidFill>
-                        <a:effectLst/>
-                        <a:latin typeface="맑은 고딕" panose="020B0503020000020004" pitchFamily="50" charset="-127"/>
-                        <a:ea typeface="맑은 고딕" panose="020B0503020000020004" pitchFamily="50" charset="-127"/>
-                      </a:endParaRPr>
-                    </a:p>
-                  </a:txBody>
-                  <a:tcPr marL="54864" marR="54864" marT="18288" anchor="ctr" marB="18288">
-                    <a:lnL w="6350" cap="flat" cmpd="sng" algn="ctr">
-                      <a:solidFill>
-                        <a:schemeClr val="tx1">
-                          <a:lumMod val="50000"/>
-                          <a:lumOff val="50000"/>
-                        </a:schemeClr>
-                      </a:solidFill>
-                      <a:prstDash val="solid"/>
-                      <a:round/>
-                      <a:headEnd type="none" w="med" len="med"/>
-                      <a:tailEnd type="none" w="med" len="med"/>
-                    </a:lnL>
-                    <a:lnR w="6350" cap="flat" cmpd="sng" algn="ctr">
-                      <a:solidFill>
-                        <a:schemeClr val="tx1">
-                          <a:lumMod val="50000"/>
-                          <a:lumOff val="50000"/>
-                        </a:schemeClr>
-                      </a:solidFill>
-                      <a:prstDash val="solid"/>
-                      <a:round/>
-                      <a:headEnd type="none" w="med" len="med"/>
-                      <a:tailEnd type="none" w="med" len="med"/>
-                    </a:lnR>
-                    <a:lnT w="6350" cap="flat" cmpd="sng" algn="ctr">
-                      <a:solidFill>
-                        <a:schemeClr val="tx1">
-                          <a:lumMod val="50000"/>
-                          <a:lumOff val="50000"/>
-                        </a:schemeClr>
-                      </a:solidFill>
-                      <a:prstDash val="solid"/>
-                      <a:round/>
-                      <a:headEnd type="none" w="med" len="med"/>
-                      <a:tailEnd type="none" w="med" len="med"/>
-                    </a:lnT>
-                    <a:lnB w="6350" cap="flat" cmpd="sng" algn="ctr">
-                      <a:solidFill>
-                        <a:schemeClr val="tx1">
-                          <a:lumMod val="50000"/>
-                          <a:lumOff val="50000"/>
-                        </a:schemeClr>
-                      </a:solidFill>
-                      <a:prstDash val="solid"/>
-                      <a:round/>
-                      <a:headEnd type="none" w="med" len="med"/>
-                      <a:tailEnd type="none" w="med" len="med"/>
-                    </a:lnB>
-                    <a:noFill/>
-                  </a:tcPr>
-                </a:tc>
-                <a:extLst>
-                  <a:ext uri="{0D108BD9-81ED-4DB2-BD59-A6C34878D82A}">
-                    <a16:rowId xmlns:a16="http://schemas.microsoft.com/office/drawing/2014/main" val="2003406257"/>
-                  </a:ext>
-                </a:extLst>
-              </a:tr>
-              <a:tr h="379701">
-                <a:tc>
-                  <a:txBody>
-                    <a:bodyPr wrap="square"/>
-                    <a:lstStyle/>
-                    <a:p>
-                      <a:pPr algn="l" fontAlgn="ctr">
-                        <a:lnSpc>
-                          <a:spcPct val="115000"/>
-                        </a:lnSpc>
-                      </a:pPr>
-                      <a:r>
-                        <a:rPr sz="1050" b="0" i="0" u="none">
-                          <a:solidFill>
-                            <a:srgbClr val="404040"/>
-                          </a:solidFill>
-                          <a:latin typeface="맑은 고딕"/>
-                          <a:ea typeface="맑은 고딕"/>
-                          <a:cs typeface="맑은 고딕"/>
-                        </a:rPr>
-                        <a:t>5단계  경보 계산을 화면과 분리</a:t>
-                      </a:r>
-                      <a:endParaRPr lang="ko-KR" altLang="en-US" sz="1000" b="0" i="0" u="none" strike="noStrike">
-                        <a:solidFill>
-                          <a:srgbClr val="000000"/>
-                        </a:solidFill>
-                        <a:effectLst/>
-                        <a:latin typeface="맑은 고딕" panose="020B0503020000020004" pitchFamily="50" charset="-127"/>
-                        <a:ea typeface="맑은 고딕" panose="020B0503020000020004" pitchFamily="50" charset="-127"/>
-                      </a:endParaRPr>
-                    </a:p>
-                  </a:txBody>
-                  <a:tcPr marL="128016" marR="128016" marT="18288" anchor="ctr" marB="18288">
-                    <a:lnL w="6350" cap="flat" cmpd="sng" algn="ctr">
-                      <a:solidFill>
-                        <a:schemeClr val="tx1">
-                          <a:lumMod val="50000"/>
-                          <a:lumOff val="50000"/>
-                        </a:schemeClr>
-                      </a:solidFill>
-                      <a:prstDash val="solid"/>
-                      <a:round/>
-                      <a:headEnd type="none" w="med" len="med"/>
-                      <a:tailEnd type="none" w="med" len="med"/>
-                    </a:lnL>
-                    <a:lnR w="6350" cap="flat" cmpd="sng" algn="ctr">
-                      <a:solidFill>
-                        <a:schemeClr val="tx1">
-                          <a:lumMod val="50000"/>
-                          <a:lumOff val="50000"/>
-                        </a:schemeClr>
-                      </a:solidFill>
-                      <a:prstDash val="solid"/>
-                      <a:round/>
-                      <a:headEnd type="none" w="med" len="med"/>
-                      <a:tailEnd type="none" w="med" len="med"/>
-                    </a:lnR>
-                    <a:lnT w="6350" cap="flat" cmpd="sng" algn="ctr">
-                      <a:solidFill>
-                        <a:schemeClr val="tx1">
-                          <a:lumMod val="50000"/>
-                          <a:lumOff val="50000"/>
-                        </a:schemeClr>
-                      </a:solidFill>
-                      <a:prstDash val="solid"/>
-                      <a:round/>
-                      <a:headEnd type="none" w="med" len="med"/>
-                      <a:tailEnd type="none" w="med" len="med"/>
-                    </a:lnT>
-                    <a:lnB w="6350" cap="flat" cmpd="sng" algn="ctr">
-                      <a:solidFill>
-                        <a:schemeClr val="tx1">
-                          <a:lumMod val="50000"/>
-                          <a:lumOff val="50000"/>
-                        </a:schemeClr>
-                      </a:solidFill>
-                      <a:prstDash val="solid"/>
-                      <a:round/>
-                      <a:headEnd type="none" w="med" len="med"/>
-                      <a:tailEnd type="none" w="med" len="med"/>
-                    </a:lnB>
-                    <a:noFill/>
-                  </a:tcPr>
-                </a:tc>
-                <a:tc>
-                  <a:txBody>
-                    <a:bodyPr wrap="square"/>
-                    <a:lstStyle/>
-                    <a:p>
-                      <a:pPr algn="ctr" fontAlgn="ctr">
-                        <a:lnSpc>
-                          <a:spcPct val="115000"/>
-                        </a:lnSpc>
-                      </a:pPr>
-                      <a:r>
-                        <a:rPr sz="1050" b="0" i="0" u="none">
-                          <a:solidFill>
-                            <a:srgbClr val="404040"/>
-                          </a:solidFill>
-                          <a:latin typeface="맑은 고딕"/>
-                          <a:ea typeface="맑은 고딕"/>
-                          <a:cs typeface="맑은 고딕"/>
-                        </a:rPr>
-                        <a:t>제안자</a:t>
-                      </a:r>
-                      <a:endParaRPr lang="en-US" sz="1000" b="0" i="0" u="none" strike="noStrike">
-                        <a:solidFill>
-                          <a:srgbClr val="000000"/>
-                        </a:solidFill>
-                        <a:effectLst/>
-                        <a:latin typeface="맑은 고딕" panose="020B0503020000020004" pitchFamily="50" charset="-127"/>
-                        <a:ea typeface="맑은 고딕" panose="020B0503020000020004" pitchFamily="50" charset="-127"/>
-                      </a:endParaRPr>
-                    </a:p>
-                  </a:txBody>
-                  <a:tcPr marL="54864" marR="54864" marT="18288" anchor="ctr" marB="18288">
-                    <a:lnL w="6350" cap="flat" cmpd="sng" algn="ctr">
-                      <a:solidFill>
-                        <a:schemeClr val="tx1">
-                          <a:lumMod val="50000"/>
-                          <a:lumOff val="50000"/>
-                        </a:schemeClr>
-                      </a:solidFill>
-                      <a:prstDash val="solid"/>
-                      <a:round/>
-                      <a:headEnd type="none" w="med" len="med"/>
-                      <a:tailEnd type="none" w="med" len="med"/>
-                    </a:lnL>
-                    <a:lnR w="6350" cap="flat" cmpd="sng" algn="ctr">
-                      <a:solidFill>
-                        <a:schemeClr val="tx1">
-                          <a:lumMod val="50000"/>
-                          <a:lumOff val="50000"/>
-                        </a:schemeClr>
-                      </a:solidFill>
-                      <a:prstDash val="solid"/>
-                      <a:round/>
-                      <a:headEnd type="none" w="med" len="med"/>
-                      <a:tailEnd type="none" w="med" len="med"/>
-                    </a:lnR>
-                    <a:lnT w="6350" cap="flat" cmpd="sng" algn="ctr">
-                      <a:solidFill>
-                        <a:schemeClr val="tx1">
-                          <a:lumMod val="50000"/>
-                          <a:lumOff val="50000"/>
-                        </a:schemeClr>
-                      </a:solidFill>
-                      <a:prstDash val="solid"/>
-                      <a:round/>
-                      <a:headEnd type="none" w="med" len="med"/>
-                      <a:tailEnd type="none" w="med" len="med"/>
-                    </a:lnT>
-                    <a:lnB w="6350" cap="flat" cmpd="sng" algn="ctr">
-                      <a:solidFill>
-                        <a:schemeClr val="tx1">
-                          <a:lumMod val="50000"/>
-                          <a:lumOff val="50000"/>
-                        </a:schemeClr>
-                      </a:solidFill>
-                      <a:prstDash val="solid"/>
-                      <a:round/>
-                      <a:headEnd type="none" w="med" len="med"/>
-                      <a:tailEnd type="none" w="med" len="med"/>
-                    </a:lnB>
-                    <a:noFill/>
-                  </a:tcPr>
-                </a:tc>
-                <a:tc>
-                  <a:txBody>
-                    <a:bodyPr wrap="square"/>
-                    <a:lstStyle/>
-                    <a:p>
-                      <a:pPr algn="ctr" fontAlgn="ctr">
-                        <a:lnSpc>
-                          <a:spcPct val="115000"/>
-                        </a:lnSpc>
-                      </a:pPr>
-                      <a:r>
-                        <a:rPr sz="1050" b="0" i="0" u="none">
-                          <a:solidFill>
-                            <a:srgbClr val="404040"/>
-                          </a:solidFill>
-                          <a:latin typeface="맑은 고딕"/>
-                          <a:ea typeface="맑은 고딕"/>
-                          <a:cs typeface="맑은 고딕"/>
-                        </a:rPr>
-                        <a:t>10월</a:t>
+                        <a:t>확산 전</a:t>
                       </a:r>
                       <a:endParaRPr lang="en-US" altLang="ko-KR" sz="1000" b="0" i="0" u="none" strike="noStrike">
                         <a:solidFill>
@@ -13865,7 +13876,7 @@
                           <a:ea typeface="맑은 고딕"/>
                           <a:cs typeface="맑은 고딕"/>
                         </a:rPr>
-                        <a:t>업무용 PDA 로 이전 — 개인 폰 임시 설치 종료</a:t>
+                        <a:t>보안 검토 — 확산 전 필수</a:t>
                       </a:r>
                       <a:endParaRPr lang="ko-KR" altLang="en-US" sz="1000" b="0" i="0" u="none" strike="noStrike">
                         <a:solidFill>
@@ -13948,7 +13959,7 @@
                           <a:ea typeface="맑은 고딕"/>
                           <a:cs typeface="맑은 고딕"/>
                         </a:rPr>
-                        <a:t>제안자 · IT</a:t>
+                        <a:t>IT · 보안</a:t>
                       </a:r>
                       <a:endParaRPr lang="en-US" sz="1000" b="0" i="0" u="none" strike="noStrike">
                         <a:solidFill>
@@ -14031,7 +14042,7 @@
                           <a:ea typeface="맑은 고딕"/>
                           <a:cs typeface="맑은 고딕"/>
                         </a:rPr>
-                        <a:t>10월</a:t>
+                        <a:t>확산 전</a:t>
                       </a:r>
                       <a:endParaRPr lang="en-US" altLang="ko-KR" sz="1000" b="0" i="0" u="none" strike="noStrike">
                         <a:solidFill>
@@ -14108,13 +14119,13 @@
                       <a:r>
                         <a:rPr sz="1050" b="1" i="0" u="none">
                           <a:solidFill>
-                            <a:srgbClr val="6B7278"/>
+                            <a:srgbClr val="B9770B"/>
                           </a:solidFill>
                           <a:latin typeface="맑은 고딕"/>
                           <a:ea typeface="맑은 고딕"/>
                           <a:cs typeface="맑은 고딕"/>
                         </a:rPr>
-                        <a:t>예정</a:t>
+                        <a:t>협조</a:t>
                       </a:r>
                       <a:endParaRPr lang="ko-KR" altLang="en-US" sz="1000" b="0" i="0" u="none" strike="noStrike">
                         <a:solidFill>
@@ -14204,7 +14215,7 @@
                           <a:ea typeface="맑은 고딕"/>
                           <a:cs typeface="맑은 고딕"/>
                         </a:rPr>
-                        <a:t>현장 사용 승인 절차 정리 · 확대 승인</a:t>
+                        <a:t>현장 사용 승인 · 확대 승인</a:t>
                       </a:r>
                       <a:endParaRPr lang="ko-KR" altLang="en-US" sz="1000" b="0" i="0" u="none" strike="noStrike">
                         <a:solidFill>
@@ -14555,7 +14566,7 @@
                           <a:ea typeface="맑은 고딕"/>
                           <a:cs typeface="맑은 고딕"/>
                         </a:rPr>
-                        <a:t>17개 센터 확산</a:t>
+                        <a:t>17개 센터 확산 — 장비 구매 없이 앱 설치만</a:t>
                       </a:r>
                       <a:endParaRPr lang="ko-KR" altLang="en-US" sz="1000" b="0" i="0" u="none" strike="noStrike">
                         <a:solidFill>
@@ -14810,13 +14821,13 @@
                       <a:r>
                         <a:rPr sz="1050" b="1" i="0" u="none">
                           <a:solidFill>
-                            <a:srgbClr val="6B7278"/>
+                            <a:srgbClr val="B9770B"/>
                           </a:solidFill>
                           <a:latin typeface="맑은 고딕"/>
                           <a:ea typeface="맑은 고딕"/>
                           <a:cs typeface="맑은 고딕"/>
                         </a:rPr>
-                        <a:t>예정</a:t>
+                        <a:t>협조</a:t>
                       </a:r>
                       <a:endParaRPr lang="ko-KR" altLang="en-US" sz="1000" b="0" i="0" u="none" strike="noStrike">
                         <a:solidFill>
@@ -15799,7 +15810,7 @@
                 <a:ea typeface="맑은 고딕"/>
                 <a:cs typeface="맑은 고딕"/>
               </a:rPr>
-              <a:t>개선 계획  1 ~ 5단계  —  4단계까지 완료</a:t>
+              <a:t>앱을 깔기 전과 뒤 — 현장의 변화</a:t>
             </a:r>
             <a:r>
               <a:rPr sz="1050" b="0" i="0" u="none">
@@ -15810,7 +15821,7 @@
                 <a:ea typeface="맑은 고딕"/>
                 <a:cs typeface="맑은 고딕"/>
               </a:rPr>
-              <a:t>     새 기능을 붙이는 게 아니라, 결과가 흔들리는 원인을 걷어내는 작업</a:t>
+              <a:t>     WF11 기준 · 장비를 사지 않고 달라진 것</a:t>
             </a:r>
           </a:p>
         </p:txBody>
@@ -15825,7 +15836,7 @@
         </p:nvGraphicFramePr>
         <p:xfrm>
           <a:off x="914400" y="2724912"/>
-          <a:ext cx="10378440" cy="1938528"/>
+          <a:ext cx="10378439" cy="1938528"/>
         </p:xfrm>
         <a:graphic>
           <a:graphicData uri="http://schemas.openxmlformats.org/drawingml/2006/table">
@@ -15834,9 +15845,9 @@
                 <a:tableStyleId>{5C22544A-7EE6-4342-B048-85BDC9FD1C3A}</a:tableStyleId>
               </a:tblPr>
               <a:tblGrid>
-                <a:gridCol w="685800"/>
-                <a:gridCol w="4023360"/>
-                <a:gridCol w="4480560"/>
+                <a:gridCol w="914400"/>
+                <a:gridCol w="3749039"/>
+                <a:gridCol w="4526280"/>
                 <a:gridCol w="1188720"/>
               </a:tblGrid>
               <a:tr h="292608">
@@ -15859,7 +15870,7 @@
                           <a:ea typeface="맑은 고딕"/>
                           <a:cs typeface="맑은 고딕"/>
                         </a:rPr>
-                        <a:t>단계</a:t>
+                        <a:t>항목</a:t>
                       </a:r>
                     </a:p>
                   </a:txBody>
@@ -15912,7 +15923,7 @@
                           <a:ea typeface="맑은 고딕"/>
                           <a:cs typeface="맑은 고딕"/>
                         </a:rPr>
-                        <a:t>무엇을 하는가</a:t>
+                        <a:t>앱 깔기 전</a:t>
                       </a:r>
                     </a:p>
                   </a:txBody>
@@ -15965,7 +15976,7 @@
                           <a:ea typeface="맑은 고딕"/>
                           <a:cs typeface="맑은 고딕"/>
                         </a:rPr>
-                        <a:t>출하 시 현장에서 확인할 것</a:t>
+                        <a:t>앱 깐 뒤</a:t>
                       </a:r>
                     </a:p>
                   </a:txBody>
@@ -16018,7 +16029,7 @@
                           <a:ea typeface="맑은 고딕"/>
                           <a:cs typeface="맑은 고딕"/>
                         </a:rPr>
-                        <a:t>상태</a:t>
+                        <a:t>근거</a:t>
                       </a:r>
                     </a:p>
                   </a:txBody>
@@ -16073,7 +16084,7 @@
                           <a:ea typeface="맑은 고딕"/>
                           <a:cs typeface="맑은 고딕"/>
                         </a:rPr>
-                        <a:t>1</a:t>
+                        <a:t>감지</a:t>
                       </a:r>
                     </a:p>
                   </a:txBody>
@@ -16126,7 +16137,7 @@
                           <a:ea typeface="맑은 고딕"/>
                           <a:cs typeface="맑은 고딕"/>
                         </a:rPr>
-                        <a:t>고친 문제마다 자동 검사를 붙인다</a:t>
+                        <a:t>접근을 알려주는 장치 0대</a:t>
                       </a:r>
                     </a:p>
                   </a:txBody>
@@ -16171,15 +16182,15 @@
                         </a:lnSpc>
                       </a:pPr>
                       <a:r>
-                        <a:rPr sz="1000" b="0" i="0" u="none">
+                        <a:rPr sz="1000" b="1" i="0" u="none">
                           <a:solidFill>
-                            <a:srgbClr val="404040"/>
+                            <a:srgbClr val="1B8A6B"/>
                           </a:solidFill>
                           <a:latin typeface="맑은 고딕"/>
                           <a:ea typeface="맑은 고딕"/>
                           <a:cs typeface="맑은 고딕"/>
                         </a:rPr>
-                        <a:t>설치와 경보가 이전과 똑같이 되는가</a:t>
+                        <a:t>폰 41대가 서로 감지 · 소리 · 진동 · 화면 경보</a:t>
                       </a:r>
                     </a:p>
                   </a:txBody>
@@ -16224,15 +16235,15 @@
                         </a:lnSpc>
                       </a:pPr>
                       <a:r>
-                        <a:rPr sz="1000" b="1" i="0" u="none">
+                        <a:rPr sz="1000" b="0" i="0" u="none">
                           <a:solidFill>
-                            <a:srgbClr val="1B8A6B"/>
+                            <a:srgbClr val="404040"/>
                           </a:solidFill>
                           <a:latin typeface="맑은 고딕"/>
                           <a:ea typeface="맑은 고딕"/>
                           <a:cs typeface="맑은 고딕"/>
                         </a:rPr>
-                        <a:t>완료</a:t>
+                        <a:t>서버 기록</a:t>
                       </a:r>
                     </a:p>
                   </a:txBody>
@@ -16287,7 +16298,7 @@
                           <a:ea typeface="맑은 고딕"/>
                           <a:cs typeface="맑은 고딕"/>
                         </a:rPr>
-                        <a:t>2</a:t>
+                        <a:t>기록</a:t>
                       </a:r>
                     </a:p>
                   </a:txBody>
@@ -16340,7 +16351,7 @@
                           <a:ea typeface="맑은 고딕"/>
                           <a:cs typeface="맑은 고딕"/>
                         </a:rPr>
-                        <a:t>안전 동작을 자동 검사로 고정한다</a:t>
+                        <a:t>사고도 위험 순간도 기록 없음</a:t>
                       </a:r>
                     </a:p>
                   </a:txBody>
@@ -16385,15 +16396,15 @@
                         </a:lnSpc>
                       </a:pPr>
                       <a:r>
-                        <a:rPr sz="1000" b="0" i="0" u="none">
+                        <a:rPr sz="1000" b="1" i="0" u="none">
                           <a:solidFill>
-                            <a:srgbClr val="404040"/>
+                            <a:srgbClr val="1B8A6B"/>
                           </a:solidFill>
                           <a:latin typeface="맑은 고딕"/>
                           <a:ea typeface="맑은 고딕"/>
                           <a:cs typeface="맑은 고딕"/>
                         </a:rPr>
-                        <a:t>천천히 다가오는 지게차에 경고가 뜨는가</a:t>
+                        <a:t>하루 평균 경고 40.6회 · 위험 24.2회 기록</a:t>
                       </a:r>
                     </a:p>
                   </a:txBody>
@@ -16438,15 +16449,15 @@
                         </a:lnSpc>
                       </a:pPr>
                       <a:r>
-                        <a:rPr sz="1000" b="1" i="0" u="none">
+                        <a:rPr sz="1000" b="0" i="0" u="none">
                           <a:solidFill>
-                            <a:srgbClr val="1B8A6B"/>
+                            <a:srgbClr val="404040"/>
                           </a:solidFill>
                           <a:latin typeface="맑은 고딕"/>
                           <a:ea typeface="맑은 고딕"/>
                           <a:cs typeface="맑은 고딕"/>
                         </a:rPr>
-                        <a:t>완료</a:t>
+                        <a:t>기록 12일</a:t>
                       </a:r>
                     </a:p>
                   </a:txBody>
@@ -16501,7 +16512,7 @@
                           <a:ea typeface="맑은 고딕"/>
                           <a:cs typeface="맑은 고딕"/>
                         </a:rPr>
-                        <a:t>3</a:t>
+                        <a:t>비용</a:t>
                       </a:r>
                     </a:p>
                   </a:txBody>
@@ -16554,7 +16565,7 @@
                           <a:ea typeface="맑은 고딕"/>
                           <a:cs typeface="맑은 고딕"/>
                         </a:rPr>
-                        <a:t>한 파일에 몰린 경보 계산 코드를 나눈다</a:t>
+                        <a:t>감지 장치 없음 · 장비로 갖추려면 331만원</a:t>
                       </a:r>
                     </a:p>
                   </a:txBody>
@@ -16599,15 +16610,15 @@
                         </a:lnSpc>
                       </a:pPr>
                       <a:r>
-                        <a:rPr sz="1000" b="0" i="0" u="none">
+                        <a:rPr sz="1000" b="1" i="0" u="none">
                           <a:solidFill>
-                            <a:srgbClr val="404040"/>
+                            <a:srgbClr val="1B8A6B"/>
                           </a:solidFill>
                           <a:latin typeface="맑은 고딕"/>
                           <a:ea typeface="맑은 고딕"/>
                           <a:cs typeface="맑은 고딕"/>
                         </a:rPr>
-                        <a:t>나누기 전과 동작이 똑같은가</a:t>
+                        <a:t>추가 비용 0원 · 사람이 늘어도 0원</a:t>
                       </a:r>
                     </a:p>
                   </a:txBody>
@@ -16652,15 +16663,15 @@
                         </a:lnSpc>
                       </a:pPr>
                       <a:r>
-                        <a:rPr sz="1000" b="1" i="0" u="none">
+                        <a:rPr sz="1000" b="0" i="0" u="none">
                           <a:solidFill>
-                            <a:srgbClr val="1B8A6B"/>
+                            <a:srgbClr val="404040"/>
                           </a:solidFill>
                           <a:latin typeface="맑은 고딕"/>
                           <a:ea typeface="맑은 고딕"/>
                           <a:cs typeface="맑은 고딕"/>
                         </a:rPr>
-                        <a:t>완료</a:t>
+                        <a:t>사내 단가</a:t>
                       </a:r>
                     </a:p>
                   </a:txBody>
@@ -16715,7 +16726,7 @@
                           <a:ea typeface="맑은 고딕"/>
                           <a:cs typeface="맑은 고딕"/>
                         </a:rPr>
-                        <a:t>4</a:t>
+                        <a:t>감지 범위</a:t>
                       </a:r>
                     </a:p>
                   </a:txBody>
@@ -16768,7 +16779,7 @@
                           <a:ea typeface="맑은 고딕"/>
                           <a:cs typeface="맑은 고딕"/>
                         </a:rPr>
-                        <a:t>기기 상태 관리 경로를 하나로 통일한다</a:t>
+                        <a:t>감지 장치 없음 · 태그를 사도 3명이면 12쌍</a:t>
                       </a:r>
                     </a:p>
                   </a:txBody>
@@ -16813,15 +16824,15 @@
                         </a:lnSpc>
                       </a:pPr>
                       <a:r>
-                        <a:rPr sz="1000" b="0" i="0" u="none">
+                        <a:rPr sz="1000" b="1" i="0" u="none">
                           <a:solidFill>
-                            <a:srgbClr val="404040"/>
+                            <a:srgbClr val="1B8A6B"/>
                           </a:solidFill>
                           <a:latin typeface="맑은 고딕"/>
                           <a:ea typeface="맑은 고딕"/>
                           <a:cs typeface="맑은 고딕"/>
                         </a:rPr>
-                        <a:t>2시간 넘게 켜 둬도 느려지지 않는가</a:t>
+                        <a:t>폰 가진 모두가 서로 감지 · 3명이면 21쌍</a:t>
                       </a:r>
                     </a:p>
                   </a:txBody>
@@ -16866,15 +16877,15 @@
                         </a:lnSpc>
                       </a:pPr>
                       <a:r>
-                        <a:rPr sz="1000" b="1" i="0" u="none">
+                        <a:rPr sz="1000" b="0" i="0" u="none">
                           <a:solidFill>
-                            <a:srgbClr val="1B8A6B"/>
+                            <a:srgbClr val="404040"/>
                           </a:solidFill>
                           <a:latin typeface="맑은 고딕"/>
                           <a:ea typeface="맑은 고딕"/>
                           <a:cs typeface="맑은 고딕"/>
                         </a:rPr>
-                        <a:t>완료</a:t>
+                        <a:t>지게차 4대</a:t>
                       </a:r>
                     </a:p>
                   </a:txBody>
@@ -16929,7 +16940,7 @@
                           <a:ea typeface="맑은 고딕"/>
                           <a:cs typeface="맑은 고딕"/>
                         </a:rPr>
-                        <a:t>5</a:t>
+                        <a:t>한계</a:t>
                       </a:r>
                     </a:p>
                   </a:txBody>
@@ -16982,7 +16993,7 @@
                           <a:ea typeface="맑은 고딕"/>
                           <a:cs typeface="맑은 고딕"/>
                         </a:rPr>
-                        <a:t>경보 계산을 화면과 분리해 따로 돌린다</a:t>
+                        <a:t>자동 정지 장치 없음</a:t>
                       </a:r>
                     </a:p>
                   </a:txBody>
@@ -17029,13 +17040,13 @@
                       <a:r>
                         <a:rPr sz="1000" b="0" i="0" u="none">
                           <a:solidFill>
-                            <a:srgbClr val="404040"/>
+                            <a:srgbClr val="C0392B"/>
                           </a:solidFill>
                           <a:latin typeface="맑은 고딕"/>
                           <a:ea typeface="맑은 고딕"/>
                           <a:cs typeface="맑은 고딕"/>
                         </a:rPr>
-                        <a:t>폰 20대 이상에서 화면이 끊기지 않는가</a:t>
+                        <a:t>그대로 없음 — 사람에게 알리는 데까지</a:t>
                       </a:r>
                     </a:p>
                   </a:txBody>
@@ -17082,13 +17093,13 @@
                       <a:r>
                         <a:rPr sz="1000" b="0" i="0" u="none">
                           <a:solidFill>
-                            <a:srgbClr val="6B7278"/>
+                            <a:srgbClr val="404040"/>
                           </a:solidFill>
                           <a:latin typeface="맑은 고딕"/>
                           <a:ea typeface="맑은 고딕"/>
                           <a:cs typeface="맑은 고딕"/>
                         </a:rPr>
-                        <a:t>남음</a:t>
+                        <a:t>별도 과제</a:t>
                       </a:r>
                     </a:p>
                   </a:txBody>
@@ -17163,7 +17174,7 @@
                 <a:ea typeface="맑은 고딕"/>
                 <a:cs typeface="맑은 고딕"/>
               </a:rPr>
-              <a:t>이 순서인 이유</a:t>
+              <a:t>왜 되는가</a:t>
             </a:r>
           </a:p>
         </p:txBody>
@@ -17204,7 +17215,7 @@
                 <a:ea typeface="맑은 고딕"/>
                 <a:cs typeface="맑은 고딕"/>
               </a:rPr>
-              <a:t>①  재는 방법을 먼저 만든다</a:t>
+              <a:t>①  폰이 이미 있다</a:t>
             </a:r>
             <a:r>
               <a:rPr sz="1000" b="0" i="0" u="none">
@@ -17215,7 +17226,7 @@
                 <a:ea typeface="맑은 고딕"/>
                 <a:cs typeface="맑은 고딕"/>
               </a:rPr>
-              <a:t>  —  검사가 하나도 없는 상태에서 안전 코드를 건드리면, 문제를 현장에서 발견하게 된다.</a:t>
+              <a:t>  —  살 것도, 몸에 달 것도, 센터에 설치할 것도 없다.</a:t>
             </a:r>
           </a:p>
         </p:txBody>
@@ -17256,7 +17267,7 @@
                 <a:ea typeface="맑은 고딕"/>
                 <a:cs typeface="맑은 고딕"/>
               </a:rPr>
-              <a:t>②  단계마다 따로 배포한다</a:t>
+              <a:t>②  사람이 늘어도 0원</a:t>
             </a:r>
             <a:r>
               <a:rPr sz="1000" b="0" i="0" u="none">
@@ -17267,7 +17278,7 @@
                 <a:ea typeface="맑은 고딕"/>
                 <a:cs typeface="맑은 고딕"/>
               </a:rPr>
-              <a:t>  —  여러 변경을 한꺼번에 내보내면, 문제가 생겨도 어느 것 때문인지 알 수 없다.</a:t>
+              <a:t>  —  태그를 더 사는 대신 앱만 깐다.</a:t>
             </a:r>
           </a:p>
         </p:txBody>
@@ -17308,7 +17319,7 @@
                 <a:ea typeface="맑은 고딕"/>
                 <a:cs typeface="맑은 고딕"/>
               </a:rPr>
-              <a:t>③  어느 단계에서 멈춰도 쓸 수 있다</a:t>
+              <a:t>③  현장 의견이 바로 반영된다</a:t>
             </a:r>
             <a:r>
               <a:rPr sz="1000" b="0" i="0" u="none">
@@ -17319,7 +17330,7 @@
                 <a:ea typeface="맑은 고딕"/>
                 <a:cs typeface="맑은 고딕"/>
               </a:rPr>
-              <a:t>  —  단계마다 현장에 그대로 배포했고, 지금 버전이 계속 돌고 있다. 개선이 멈춰도 경보는 끊기지 않는다.</a:t>
+              <a:t>  —  ‘서 있는데 계속 울린다’ → 같은 경보가 5초 넘으면 소리를 끈다.</a:t>
             </a:r>
           </a:p>
         </p:txBody>
@@ -17371,7 +17382,7 @@
                 <a:ea typeface="맑은 고딕"/>
                 <a:cs typeface="맑은 고딕"/>
               </a:rPr>
-              <a:t>자동 검사 51건이 릴리스마다 돈다. 그중 24건은 경보 동작을 프레임 단위로 고정한 검사로, 3 · 4단계에서 코드를 나눌 때 동작이 1비트도 달라지지 않았음을 이 검사로 확인했다.</a:t>
+              <a:t>WF11 · WF21 · WF25 세 센터에서 실사용 중. 실측은 WF11 뿐. 10월 업무용 PDA 로 옮긴다. 보안 검토와 승인을 거쳐 17개 센터로 늘린다.</a:t>
             </a:r>
           </a:p>
         </p:txBody>
@@ -18554,7 +18565,7 @@
                 <a:ea typeface="맑은 고딕"/>
                 <a:cs typeface="맑은 고딕"/>
               </a:rPr>
-              <a:t>네 가지 중 둘은 이미 쟀다</a:t>
+              <a:t>성공 지표 네 가지</a:t>
             </a:r>
             <a:r>
               <a:rPr sz="850" b="0" i="0" u="sng">
@@ -18744,7 +18755,7 @@
                 <a:ea typeface="맑은 고딕"/>
                 <a:cs typeface="맑은 고딕"/>
               </a:rPr>
-              <a:t>서로 접근 — 경고권 진입</a:t>
+              <a:t>경고 거리 안 (정밀 측위 · 지게차 15m)</a:t>
             </a:r>
           </a:p>
         </p:txBody>
@@ -18964,7 +18975,7 @@
                 <a:ea typeface="맑은 고딕"/>
                 <a:cs typeface="맑은 고딕"/>
               </a:rPr>
-              <a:t>더 가까워짐 — 위험권 진입</a:t>
+              <a:t>위험 거리 안 (정밀 측위 · 지게차 8m)</a:t>
             </a:r>
           </a:p>
         </p:txBody>
@@ -19184,7 +19195,7 @@
                 <a:ea typeface="맑은 고딕"/>
                 <a:cs typeface="맑은 고딕"/>
               </a:rPr>
-              <a:t>서 있는데 계속 울림 · 멀어졌는데 다시 울림</a:t>
+              <a:t>서 있는데 울림 · 멀어졌는데 또 울림</a:t>
             </a:r>
           </a:p>
         </p:txBody>
@@ -19486,7 +19497,7 @@
                 <a:ea typeface="맑은 고딕"/>
                 <a:cs typeface="맑은 고딕"/>
               </a:rPr>
-              <a:t>‘울렸어야 하는데 안 울린 횟수’ 는 지표에서 뺐다</a:t>
+              <a:t>‘울렸어야 하는데 안 울린 횟수’ 는 뺐다</a:t>
             </a:r>
             <a:r>
               <a:rPr sz="900" b="0" i="0" u="none">
@@ -19497,7 +19508,7 @@
                 <a:ea typeface="맑은 고딕"/>
                 <a:cs typeface="맑은 고딕"/>
               </a:rPr>
-              <a:t>  —  아무 일도 일어나지 않은 것이라 셀 방법이 없다. 작업자 설문의 ‘경보가 늦었다’ 응답으로 대신 본다.</a:t>
+              <a:t>  —  겉으로는 아무 일도 없어 셀 수 없다. 설문의 ‘경보가 늦었다’ 응답으로 대신 본다.</a:t>
             </a:r>
           </a:p>
         </p:txBody>
@@ -19538,7 +19549,7 @@
                 <a:ea typeface="맑은 고딕"/>
                 <a:cs typeface="맑은 고딕"/>
               </a:rPr>
-              <a:t>먼저 추정했고, 4주 뒤 실제로 쟀다</a:t>
+              <a:t>언제 울리는가 — 시간대별 경보 수</a:t>
             </a:r>
             <a:r>
               <a:rPr sz="850" b="0" i="0" u="none">
@@ -19549,7 +19560,7 @@
                 <a:ea typeface="맑은 고딕"/>
                 <a:cs typeface="맑은 고딕"/>
               </a:rPr>
-              <a:t>   WF11 · 2026.08.04~2026.09.01</a:t>
+              <a:t>   WF11 · 28일 중 12일 기록 · 폰 41대</a:t>
             </a:r>
           </a:p>
         </p:txBody>
@@ -19564,7 +19575,7 @@
         </p:nvGraphicFramePr>
         <p:xfrm>
           <a:off x="6345936" y="2880360"/>
-          <a:ext cx="4974336" cy="1975104"/>
+          <a:ext cx="4974336" cy="1728216"/>
         </p:xfrm>
         <a:graphic>
           <a:graphicData uri="http://schemas.openxmlformats.org/drawingml/2006/table">
@@ -19573,9 +19584,9 @@
                 <a:tableStyleId>{5C22544A-7EE6-4342-B048-85BDC9FD1C3A}</a:tableStyleId>
               </a:tblPr>
               <a:tblGrid>
-                <a:gridCol w="1225296"/>
                 <a:gridCol w="1097280"/>
-                <a:gridCol w="2651760"/>
+                <a:gridCol w="1005840"/>
+                <a:gridCol w="2871216"/>
               </a:tblGrid>
               <a:tr h="246888">
                 <a:tc>
@@ -19597,7 +19608,7 @@
                           <a:ea typeface="맑은 고딕"/>
                           <a:cs typeface="맑은 고딕"/>
                         </a:rPr>
-                        <a:t>항목</a:t>
+                        <a:t>시간대</a:t>
                       </a:r>
                     </a:p>
                   </a:txBody>
@@ -19650,7 +19661,7 @@
                           <a:ea typeface="맑은 고딕"/>
                           <a:cs typeface="맑은 고딕"/>
                         </a:rPr>
-                        <a:t>추정</a:t>
+                        <a:t>경보 수</a:t>
                       </a:r>
                     </a:p>
                   </a:txBody>
@@ -19703,7 +19714,7 @@
                           <a:ea typeface="맑은 고딕"/>
                           <a:cs typeface="맑은 고딕"/>
                         </a:rPr>
-                        <a:t>실측</a:t>
+                        <a:t>비고</a:t>
                       </a:r>
                     </a:p>
                   </a:txBody>
@@ -19744,7 +19755,7 @@
                     <a:bodyPr wrap="square"/>
                     <a:lstStyle/>
                     <a:p>
-                      <a:pPr algn="l">
+                      <a:pPr algn="ctr">
                         <a:lnSpc>
                           <a:spcPct val="115000"/>
                         </a:lnSpc>
@@ -19758,60 +19769,7 @@
                           <a:ea typeface="맑은 고딕"/>
                           <a:cs typeface="맑은 고딕"/>
                         </a:rPr>
-                        <a:t>서로 감지되는 짝</a:t>
-                      </a:r>
-                    </a:p>
-                  </a:txBody>
-                  <a:tcPr marL="45720" marR="45720" marT="18288" marB="18288" anchor="ctr">
-                    <a:lnB w="9525" cap="flat" cmpd="sng" algn="ctr">
-                      <a:solidFill>
-                        <a:srgbClr val="D8DDE1"/>
-                      </a:solidFill>
-                      <a:prstDash val="solid"/>
-                    </a:lnB>
-                    <a:lnT w="9525" cap="flat" cmpd="sng" algn="ctr">
-                      <a:solidFill>
-                        <a:srgbClr val="FFFFFF"/>
-                      </a:solidFill>
-                      <a:prstDash val="solid"/>
-                    </a:lnT>
-                    <a:lnR w="9525" cap="flat" cmpd="sng" algn="ctr">
-                      <a:solidFill>
-                        <a:srgbClr val="FFFFFF"/>
-                      </a:solidFill>
-                      <a:prstDash val="solid"/>
-                    </a:lnR>
-                    <a:lnL w="9525" cap="flat" cmpd="sng" algn="ctr">
-                      <a:solidFill>
-                        <a:srgbClr val="FFFFFF"/>
-                      </a:solidFill>
-                      <a:prstDash val="solid"/>
-                    </a:lnL>
-                    <a:solidFill>
-                      <a:srgbClr val="FFFFFF"/>
-                    </a:solidFill>
-                  </a:tcPr>
-                </a:tc>
-                <a:tc>
-                  <a:txBody>
-                    <a:bodyPr wrap="square"/>
-                    <a:lstStyle/>
-                    <a:p>
-                      <a:pPr algn="ctr">
-                        <a:lnSpc>
-                          <a:spcPct val="115000"/>
-                        </a:lnSpc>
-                      </a:pPr>
-                      <a:r>
-                        <a:rPr sz="850" b="0" i="0" u="sng">
-                          <a:solidFill>
-                            <a:srgbClr val="404040"/>
-                          </a:solidFill>
-                          <a:latin typeface="맑은 고딕"/>
-                          <a:ea typeface="맑은 고딕"/>
-                          <a:cs typeface="맑은 고딕"/>
-                        </a:rPr>
-                        <a:t>21가지</a:t>
+                        <a:t>07~09시</a:t>
                       </a:r>
                     </a:p>
                   </a:txBody>
@@ -19864,7 +19822,7 @@
                           <a:ea typeface="맑은 고딕"/>
                           <a:cs typeface="맑은 고딕"/>
                         </a:rPr>
-                        <a:t>41쌍  (단말 41대)</a:t>
+                        <a:t>157건</a:t>
                       </a:r>
                     </a:p>
                   </a:txBody>
@@ -19898,8 +19856,6 @@
                     </a:solidFill>
                   </a:tcPr>
                 </a:tc>
-              </a:tr>
-              <a:tr h="246888">
                 <a:tc>
                   <a:txBody>
                     <a:bodyPr wrap="square"/>
@@ -19919,7 +19875,62 @@
                           <a:ea typeface="맑은 고딕"/>
                           <a:cs typeface="맑은 고딕"/>
                         </a:rPr>
-                        <a:t>짝당 시간당 접근</a:t>
+                        <a:t>—</a:t>
+                      </a:r>
+                    </a:p>
+                  </a:txBody>
+                  <a:tcPr marL="45720" marR="45720" marT="18288" marB="18288" anchor="ctr">
+                    <a:lnB w="9525" cap="flat" cmpd="sng" algn="ctr">
+                      <a:solidFill>
+                        <a:srgbClr val="D8DDE1"/>
+                      </a:solidFill>
+                      <a:prstDash val="solid"/>
+                    </a:lnB>
+                    <a:lnT w="9525" cap="flat" cmpd="sng" algn="ctr">
+                      <a:solidFill>
+                        <a:srgbClr val="FFFFFF"/>
+                      </a:solidFill>
+                      <a:prstDash val="solid"/>
+                    </a:lnT>
+                    <a:lnR w="9525" cap="flat" cmpd="sng" algn="ctr">
+                      <a:solidFill>
+                        <a:srgbClr val="FFFFFF"/>
+                      </a:solidFill>
+                      <a:prstDash val="solid"/>
+                    </a:lnR>
+                    <a:lnL w="9525" cap="flat" cmpd="sng" algn="ctr">
+                      <a:solidFill>
+                        <a:srgbClr val="FFFFFF"/>
+                      </a:solidFill>
+                      <a:prstDash val="solid"/>
+                    </a:lnL>
+                    <a:solidFill>
+                      <a:srgbClr val="FFFFFF"/>
+                    </a:solidFill>
+                  </a:tcPr>
+                </a:tc>
+              </a:tr>
+              <a:tr h="246888">
+                <a:tc>
+                  <a:txBody>
+                    <a:bodyPr wrap="square"/>
+                    <a:lstStyle/>
+                    <a:p>
+                      <a:pPr algn="ctr">
+                        <a:lnSpc>
+                          <a:spcPct val="115000"/>
+                        </a:lnSpc>
+                      </a:pPr>
+                      <a:r>
+                        <a:rPr sz="850" b="0" i="0" u="none">
+                          <a:solidFill>
+                            <a:srgbClr val="404040"/>
+                          </a:solidFill>
+                          <a:latin typeface="맑은 고딕"/>
+                          <a:ea typeface="맑은 고딕"/>
+                          <a:cs typeface="맑은 고딕"/>
+                        </a:rPr>
+                        <a:t>10시</a:t>
                       </a:r>
                     </a:p>
                   </a:txBody>
@@ -19964,7 +19975,60 @@
                         </a:lnSpc>
                       </a:pPr>
                       <a:r>
-                        <a:rPr sz="850" b="0" i="0" u="sng">
+                        <a:rPr sz="850" b="1" i="0" u="none">
+                          <a:solidFill>
+                            <a:srgbClr val="C0392B"/>
+                          </a:solidFill>
+                          <a:latin typeface="맑은 고딕"/>
+                          <a:ea typeface="맑은 고딕"/>
+                          <a:cs typeface="맑은 고딕"/>
+                        </a:rPr>
+                        <a:t>230건</a:t>
+                      </a:r>
+                    </a:p>
+                  </a:txBody>
+                  <a:tcPr marL="45720" marR="45720" marT="18288" marB="18288" anchor="ctr">
+                    <a:lnB w="9525" cap="flat" cmpd="sng" algn="ctr">
+                      <a:solidFill>
+                        <a:srgbClr val="D8DDE1"/>
+                      </a:solidFill>
+                      <a:prstDash val="solid"/>
+                    </a:lnB>
+                    <a:lnT w="9525" cap="flat" cmpd="sng" algn="ctr">
+                      <a:solidFill>
+                        <a:srgbClr val="FFFFFF"/>
+                      </a:solidFill>
+                      <a:prstDash val="solid"/>
+                    </a:lnT>
+                    <a:lnR w="9525" cap="flat" cmpd="sng" algn="ctr">
+                      <a:solidFill>
+                        <a:srgbClr val="FFFFFF"/>
+                      </a:solidFill>
+                      <a:prstDash val="solid"/>
+                    </a:lnR>
+                    <a:lnL w="9525" cap="flat" cmpd="sng" algn="ctr">
+                      <a:solidFill>
+                        <a:srgbClr val="FFFFFF"/>
+                      </a:solidFill>
+                      <a:prstDash val="solid"/>
+                    </a:lnL>
+                    <a:solidFill>
+                      <a:srgbClr val="FFFFFF"/>
+                    </a:solidFill>
+                  </a:tcPr>
+                </a:tc>
+                <a:tc>
+                  <a:txBody>
+                    <a:bodyPr wrap="square"/>
+                    <a:lstStyle/>
+                    <a:p>
+                      <a:pPr algn="l">
+                        <a:lnSpc>
+                          <a:spcPct val="115000"/>
+                        </a:lnSpc>
+                      </a:pPr>
+                      <a:r>
+                        <a:rPr sz="850" b="1" i="0" u="none">
                           <a:solidFill>
                             <a:srgbClr val="404040"/>
                           </a:solidFill>
@@ -19972,7 +20036,62 @@
                           <a:ea typeface="맑은 고딕"/>
                           <a:cs typeface="맑은 고딕"/>
                         </a:rPr>
-                        <a:t>0.5회</a:t>
+                        <a:t>전체의 약 30% · 가장 몰린다</a:t>
+                      </a:r>
+                    </a:p>
+                  </a:txBody>
+                  <a:tcPr marL="45720" marR="45720" marT="18288" marB="18288" anchor="ctr">
+                    <a:lnB w="9525" cap="flat" cmpd="sng" algn="ctr">
+                      <a:solidFill>
+                        <a:srgbClr val="D8DDE1"/>
+                      </a:solidFill>
+                      <a:prstDash val="solid"/>
+                    </a:lnB>
+                    <a:lnT w="9525" cap="flat" cmpd="sng" algn="ctr">
+                      <a:solidFill>
+                        <a:srgbClr val="FFFFFF"/>
+                      </a:solidFill>
+                      <a:prstDash val="solid"/>
+                    </a:lnT>
+                    <a:lnR w="9525" cap="flat" cmpd="sng" algn="ctr">
+                      <a:solidFill>
+                        <a:srgbClr val="FFFFFF"/>
+                      </a:solidFill>
+                      <a:prstDash val="solid"/>
+                    </a:lnR>
+                    <a:lnL w="9525" cap="flat" cmpd="sng" algn="ctr">
+                      <a:solidFill>
+                        <a:srgbClr val="FFFFFF"/>
+                      </a:solidFill>
+                      <a:prstDash val="solid"/>
+                    </a:lnL>
+                    <a:solidFill>
+                      <a:srgbClr val="FFFFFF"/>
+                    </a:solidFill>
+                  </a:tcPr>
+                </a:tc>
+              </a:tr>
+              <a:tr h="246888">
+                <a:tc>
+                  <a:txBody>
+                    <a:bodyPr wrap="square"/>
+                    <a:lstStyle/>
+                    <a:p>
+                      <a:pPr algn="ctr">
+                        <a:lnSpc>
+                          <a:spcPct val="115000"/>
+                        </a:lnSpc>
+                      </a:pPr>
+                      <a:r>
+                        <a:rPr sz="850" b="0" i="0" u="none">
+                          <a:solidFill>
+                            <a:srgbClr val="404040"/>
+                          </a:solidFill>
+                          <a:latin typeface="맑은 고딕"/>
+                          <a:ea typeface="맑은 고딕"/>
+                          <a:cs typeface="맑은 고딕"/>
+                        </a:rPr>
+                        <a:t>11~12시</a:t>
                       </a:r>
                     </a:p>
                   </a:txBody>
@@ -20025,7 +20144,7 @@
                           <a:ea typeface="맑은 고딕"/>
                           <a:cs typeface="맑은 고딕"/>
                         </a:rPr>
-                        <a:t>0.11회</a:t>
+                        <a:t>174건</a:t>
                       </a:r>
                     </a:p>
                   </a:txBody>
@@ -20059,8 +20178,6 @@
                     </a:solidFill>
                   </a:tcPr>
                 </a:tc>
-              </a:tr>
-              <a:tr h="246888">
                 <a:tc>
                   <a:txBody>
                     <a:bodyPr wrap="square"/>
@@ -20080,7 +20197,62 @@
                           <a:ea typeface="맑은 고딕"/>
                           <a:cs typeface="맑은 고딕"/>
                         </a:rPr>
-                        <a:t>하루 경고 경보</a:t>
+                        <a:t>—</a:t>
+                      </a:r>
+                    </a:p>
+                  </a:txBody>
+                  <a:tcPr marL="45720" marR="45720" marT="18288" marB="18288" anchor="ctr">
+                    <a:lnB w="9525" cap="flat" cmpd="sng" algn="ctr">
+                      <a:solidFill>
+                        <a:srgbClr val="D8DDE1"/>
+                      </a:solidFill>
+                      <a:prstDash val="solid"/>
+                    </a:lnB>
+                    <a:lnT w="9525" cap="flat" cmpd="sng" algn="ctr">
+                      <a:solidFill>
+                        <a:srgbClr val="FFFFFF"/>
+                      </a:solidFill>
+                      <a:prstDash val="solid"/>
+                    </a:lnT>
+                    <a:lnR w="9525" cap="flat" cmpd="sng" algn="ctr">
+                      <a:solidFill>
+                        <a:srgbClr val="FFFFFF"/>
+                      </a:solidFill>
+                      <a:prstDash val="solid"/>
+                    </a:lnR>
+                    <a:lnL w="9525" cap="flat" cmpd="sng" algn="ctr">
+                      <a:solidFill>
+                        <a:srgbClr val="FFFFFF"/>
+                      </a:solidFill>
+                      <a:prstDash val="solid"/>
+                    </a:lnL>
+                    <a:solidFill>
+                      <a:srgbClr val="FFFFFF"/>
+                    </a:solidFill>
+                  </a:tcPr>
+                </a:tc>
+              </a:tr>
+              <a:tr h="246888">
+                <a:tc>
+                  <a:txBody>
+                    <a:bodyPr wrap="square"/>
+                    <a:lstStyle/>
+                    <a:p>
+                      <a:pPr algn="ctr">
+                        <a:lnSpc>
+                          <a:spcPct val="115000"/>
+                        </a:lnSpc>
+                      </a:pPr>
+                      <a:r>
+                        <a:rPr sz="850" b="0" i="0" u="none">
+                          <a:solidFill>
+                            <a:srgbClr val="404040"/>
+                          </a:solidFill>
+                          <a:latin typeface="맑은 고딕"/>
+                          <a:ea typeface="맑은 고딕"/>
+                          <a:cs typeface="맑은 고딕"/>
+                        </a:rPr>
+                        <a:t>13~14시</a:t>
                       </a:r>
                     </a:p>
                   </a:txBody>
@@ -20125,7 +20297,7 @@
                         </a:lnSpc>
                       </a:pPr>
                       <a:r>
-                        <a:rPr sz="850" b="1" i="0" u="sng">
+                        <a:rPr sz="850" b="0" i="0" u="none">
                           <a:solidFill>
                             <a:srgbClr val="404040"/>
                           </a:solidFill>
@@ -20133,7 +20305,276 @@
                           <a:ea typeface="맑은 고딕"/>
                           <a:cs typeface="맑은 고딕"/>
                         </a:rPr>
-                        <a:t>95회</a:t>
+                        <a:t>2건</a:t>
+                      </a:r>
+                    </a:p>
+                  </a:txBody>
+                  <a:tcPr marL="45720" marR="45720" marT="18288" marB="18288" anchor="ctr">
+                    <a:lnB w="9525" cap="flat" cmpd="sng" algn="ctr">
+                      <a:solidFill>
+                        <a:srgbClr val="D8DDE1"/>
+                      </a:solidFill>
+                      <a:prstDash val="solid"/>
+                    </a:lnB>
+                    <a:lnT w="9525" cap="flat" cmpd="sng" algn="ctr">
+                      <a:solidFill>
+                        <a:srgbClr val="FFFFFF"/>
+                      </a:solidFill>
+                      <a:prstDash val="solid"/>
+                    </a:lnT>
+                    <a:lnR w="9525" cap="flat" cmpd="sng" algn="ctr">
+                      <a:solidFill>
+                        <a:srgbClr val="FFFFFF"/>
+                      </a:solidFill>
+                      <a:prstDash val="solid"/>
+                    </a:lnR>
+                    <a:lnL w="9525" cap="flat" cmpd="sng" algn="ctr">
+                      <a:solidFill>
+                        <a:srgbClr val="FFFFFF"/>
+                      </a:solidFill>
+                      <a:prstDash val="solid"/>
+                    </a:lnL>
+                    <a:solidFill>
+                      <a:srgbClr val="FFFFFF"/>
+                    </a:solidFill>
+                  </a:tcPr>
+                </a:tc>
+                <a:tc>
+                  <a:txBody>
+                    <a:bodyPr wrap="square"/>
+                    <a:lstStyle/>
+                    <a:p>
+                      <a:pPr algn="l">
+                        <a:lnSpc>
+                          <a:spcPct val="115000"/>
+                        </a:lnSpc>
+                      </a:pPr>
+                      <a:r>
+                        <a:rPr sz="850" b="0" i="0" u="none">
+                          <a:solidFill>
+                            <a:srgbClr val="404040"/>
+                          </a:solidFill>
+                          <a:latin typeface="맑은 고딕"/>
+                          <a:ea typeface="맑은 고딕"/>
+                          <a:cs typeface="맑은 고딕"/>
+                        </a:rPr>
+                        <a:t>점심 · 거의 0</a:t>
+                      </a:r>
+                    </a:p>
+                  </a:txBody>
+                  <a:tcPr marL="45720" marR="45720" marT="18288" marB="18288" anchor="ctr">
+                    <a:lnB w="9525" cap="flat" cmpd="sng" algn="ctr">
+                      <a:solidFill>
+                        <a:srgbClr val="D8DDE1"/>
+                      </a:solidFill>
+                      <a:prstDash val="solid"/>
+                    </a:lnB>
+                    <a:lnT w="9525" cap="flat" cmpd="sng" algn="ctr">
+                      <a:solidFill>
+                        <a:srgbClr val="FFFFFF"/>
+                      </a:solidFill>
+                      <a:prstDash val="solid"/>
+                    </a:lnT>
+                    <a:lnR w="9525" cap="flat" cmpd="sng" algn="ctr">
+                      <a:solidFill>
+                        <a:srgbClr val="FFFFFF"/>
+                      </a:solidFill>
+                      <a:prstDash val="solid"/>
+                    </a:lnR>
+                    <a:lnL w="9525" cap="flat" cmpd="sng" algn="ctr">
+                      <a:solidFill>
+                        <a:srgbClr val="FFFFFF"/>
+                      </a:solidFill>
+                      <a:prstDash val="solid"/>
+                    </a:lnL>
+                    <a:solidFill>
+                      <a:srgbClr val="FFFFFF"/>
+                    </a:solidFill>
+                  </a:tcPr>
+                </a:tc>
+              </a:tr>
+              <a:tr h="246888">
+                <a:tc>
+                  <a:txBody>
+                    <a:bodyPr wrap="square"/>
+                    <a:lstStyle/>
+                    <a:p>
+                      <a:pPr algn="ctr">
+                        <a:lnSpc>
+                          <a:spcPct val="115000"/>
+                        </a:lnSpc>
+                      </a:pPr>
+                      <a:r>
+                        <a:rPr sz="850" b="0" i="0" u="none">
+                          <a:solidFill>
+                            <a:srgbClr val="404040"/>
+                          </a:solidFill>
+                          <a:latin typeface="맑은 고딕"/>
+                          <a:ea typeface="맑은 고딕"/>
+                          <a:cs typeface="맑은 고딕"/>
+                        </a:rPr>
+                        <a:t>15~19시</a:t>
+                      </a:r>
+                    </a:p>
+                  </a:txBody>
+                  <a:tcPr marL="45720" marR="45720" marT="18288" marB="18288" anchor="ctr">
+                    <a:lnB w="9525" cap="flat" cmpd="sng" algn="ctr">
+                      <a:solidFill>
+                        <a:srgbClr val="D8DDE1"/>
+                      </a:solidFill>
+                      <a:prstDash val="solid"/>
+                    </a:lnB>
+                    <a:lnT w="9525" cap="flat" cmpd="sng" algn="ctr">
+                      <a:solidFill>
+                        <a:srgbClr val="FFFFFF"/>
+                      </a:solidFill>
+                      <a:prstDash val="solid"/>
+                    </a:lnT>
+                    <a:lnR w="9525" cap="flat" cmpd="sng" algn="ctr">
+                      <a:solidFill>
+                        <a:srgbClr val="FFFFFF"/>
+                      </a:solidFill>
+                      <a:prstDash val="solid"/>
+                    </a:lnR>
+                    <a:lnL w="9525" cap="flat" cmpd="sng" algn="ctr">
+                      <a:solidFill>
+                        <a:srgbClr val="FFFFFF"/>
+                      </a:solidFill>
+                      <a:prstDash val="solid"/>
+                    </a:lnL>
+                    <a:solidFill>
+                      <a:srgbClr val="FFFFFF"/>
+                    </a:solidFill>
+                  </a:tcPr>
+                </a:tc>
+                <a:tc>
+                  <a:txBody>
+                    <a:bodyPr wrap="square"/>
+                    <a:lstStyle/>
+                    <a:p>
+                      <a:pPr algn="ctr">
+                        <a:lnSpc>
+                          <a:spcPct val="115000"/>
+                        </a:lnSpc>
+                      </a:pPr>
+                      <a:r>
+                        <a:rPr sz="850" b="0" i="0" u="none">
+                          <a:solidFill>
+                            <a:srgbClr val="404040"/>
+                          </a:solidFill>
+                          <a:latin typeface="맑은 고딕"/>
+                          <a:ea typeface="맑은 고딕"/>
+                          <a:cs typeface="맑은 고딕"/>
+                        </a:rPr>
+                        <a:t>215건</a:t>
+                      </a:r>
+                    </a:p>
+                  </a:txBody>
+                  <a:tcPr marL="45720" marR="45720" marT="18288" marB="18288" anchor="ctr">
+                    <a:lnB w="9525" cap="flat" cmpd="sng" algn="ctr">
+                      <a:solidFill>
+                        <a:srgbClr val="D8DDE1"/>
+                      </a:solidFill>
+                      <a:prstDash val="solid"/>
+                    </a:lnB>
+                    <a:lnT w="9525" cap="flat" cmpd="sng" algn="ctr">
+                      <a:solidFill>
+                        <a:srgbClr val="FFFFFF"/>
+                      </a:solidFill>
+                      <a:prstDash val="solid"/>
+                    </a:lnT>
+                    <a:lnR w="9525" cap="flat" cmpd="sng" algn="ctr">
+                      <a:solidFill>
+                        <a:srgbClr val="FFFFFF"/>
+                      </a:solidFill>
+                      <a:prstDash val="solid"/>
+                    </a:lnR>
+                    <a:lnL w="9525" cap="flat" cmpd="sng" algn="ctr">
+                      <a:solidFill>
+                        <a:srgbClr val="FFFFFF"/>
+                      </a:solidFill>
+                      <a:prstDash val="solid"/>
+                    </a:lnL>
+                    <a:solidFill>
+                      <a:srgbClr val="FFFFFF"/>
+                    </a:solidFill>
+                  </a:tcPr>
+                </a:tc>
+                <a:tc>
+                  <a:txBody>
+                    <a:bodyPr wrap="square"/>
+                    <a:lstStyle/>
+                    <a:p>
+                      <a:pPr algn="l">
+                        <a:lnSpc>
+                          <a:spcPct val="115000"/>
+                        </a:lnSpc>
+                      </a:pPr>
+                      <a:r>
+                        <a:rPr sz="850" b="0" i="0" u="none">
+                          <a:solidFill>
+                            <a:srgbClr val="404040"/>
+                          </a:solidFill>
+                          <a:latin typeface="맑은 고딕"/>
+                          <a:ea typeface="맑은 고딕"/>
+                          <a:cs typeface="맑은 고딕"/>
+                        </a:rPr>
+                        <a:t>—</a:t>
+                      </a:r>
+                    </a:p>
+                  </a:txBody>
+                  <a:tcPr marL="45720" marR="45720" marT="18288" marB="18288" anchor="ctr">
+                    <a:lnB w="9525" cap="flat" cmpd="sng" algn="ctr">
+                      <a:solidFill>
+                        <a:srgbClr val="D8DDE1"/>
+                      </a:solidFill>
+                      <a:prstDash val="solid"/>
+                    </a:lnB>
+                    <a:lnT w="9525" cap="flat" cmpd="sng" algn="ctr">
+                      <a:solidFill>
+                        <a:srgbClr val="FFFFFF"/>
+                      </a:solidFill>
+                      <a:prstDash val="solid"/>
+                    </a:lnT>
+                    <a:lnR w="9525" cap="flat" cmpd="sng" algn="ctr">
+                      <a:solidFill>
+                        <a:srgbClr val="FFFFFF"/>
+                      </a:solidFill>
+                      <a:prstDash val="solid"/>
+                    </a:lnR>
+                    <a:lnL w="9525" cap="flat" cmpd="sng" algn="ctr">
+                      <a:solidFill>
+                        <a:srgbClr val="FFFFFF"/>
+                      </a:solidFill>
+                      <a:prstDash val="solid"/>
+                    </a:lnL>
+                    <a:solidFill>
+                      <a:srgbClr val="FFFFFF"/>
+                    </a:solidFill>
+                  </a:tcPr>
+                </a:tc>
+              </a:tr>
+              <a:tr h="246888">
+                <a:tc>
+                  <a:txBody>
+                    <a:bodyPr wrap="square"/>
+                    <a:lstStyle/>
+                    <a:p>
+                      <a:pPr algn="ctr">
+                        <a:lnSpc>
+                          <a:spcPct val="115000"/>
+                        </a:lnSpc>
+                      </a:pPr>
+                      <a:r>
+                        <a:rPr sz="850" b="0" i="0" u="none">
+                          <a:solidFill>
+                            <a:srgbClr val="404040"/>
+                          </a:solidFill>
+                          <a:latin typeface="맑은 고딕"/>
+                          <a:ea typeface="맑은 고딕"/>
+                          <a:cs typeface="맑은 고딕"/>
+                        </a:rPr>
+                        <a:t>합계</a:t>
                       </a:r>
                     </a:p>
                   </a:txBody>
@@ -20186,7 +20627,7 @@
                           <a:ea typeface="맑은 고딕"/>
                           <a:cs typeface="맑은 고딕"/>
                         </a:rPr>
-                        <a:t>40.6회</a:t>
+                        <a:t>778건</a:t>
                       </a:r>
                     </a:p>
                   </a:txBody>
@@ -20220,8 +20661,6 @@
                     </a:solidFill>
                   </a:tcPr>
                 </a:tc>
-              </a:tr>
-              <a:tr h="246888">
                 <a:tc>
                   <a:txBody>
                     <a:bodyPr wrap="square"/>
@@ -20241,596 +20680,7 @@
                           <a:ea typeface="맑은 고딕"/>
                           <a:cs typeface="맑은 고딕"/>
                         </a:rPr>
-                        <a:t>위험까지 갈 비율</a:t>
-                      </a:r>
-                    </a:p>
-                  </a:txBody>
-                  <a:tcPr marL="45720" marR="45720" marT="18288" marB="18288" anchor="ctr">
-                    <a:lnB w="9525" cap="flat" cmpd="sng" algn="ctr">
-                      <a:solidFill>
-                        <a:srgbClr val="D8DDE1"/>
-                      </a:solidFill>
-                      <a:prstDash val="solid"/>
-                    </a:lnB>
-                    <a:lnT w="9525" cap="flat" cmpd="sng" algn="ctr">
-                      <a:solidFill>
-                        <a:srgbClr val="FFFFFF"/>
-                      </a:solidFill>
-                      <a:prstDash val="solid"/>
-                    </a:lnT>
-                    <a:lnR w="9525" cap="flat" cmpd="sng" algn="ctr">
-                      <a:solidFill>
-                        <a:srgbClr val="FFFFFF"/>
-                      </a:solidFill>
-                      <a:prstDash val="solid"/>
-                    </a:lnR>
-                    <a:lnL w="9525" cap="flat" cmpd="sng" algn="ctr">
-                      <a:solidFill>
-                        <a:srgbClr val="FFFFFF"/>
-                      </a:solidFill>
-                      <a:prstDash val="solid"/>
-                    </a:lnL>
-                    <a:solidFill>
-                      <a:srgbClr val="FFFFFF"/>
-                    </a:solidFill>
-                  </a:tcPr>
-                </a:tc>
-                <a:tc>
-                  <a:txBody>
-                    <a:bodyPr wrap="square"/>
-                    <a:lstStyle/>
-                    <a:p>
-                      <a:pPr algn="ctr">
-                        <a:lnSpc>
-                          <a:spcPct val="115000"/>
-                        </a:lnSpc>
-                      </a:pPr>
-                      <a:r>
-                        <a:rPr sz="850" b="0" i="0" u="sng">
-                          <a:solidFill>
-                            <a:srgbClr val="404040"/>
-                          </a:solidFill>
-                          <a:latin typeface="맑은 고딕"/>
-                          <a:ea typeface="맑은 고딕"/>
-                          <a:cs typeface="맑은 고딕"/>
-                        </a:rPr>
-                        <a:t>0.28</a:t>
-                      </a:r>
-                    </a:p>
-                  </a:txBody>
-                  <a:tcPr marL="45720" marR="45720" marT="18288" marB="18288" anchor="ctr">
-                    <a:lnB w="9525" cap="flat" cmpd="sng" algn="ctr">
-                      <a:solidFill>
-                        <a:srgbClr val="D8DDE1"/>
-                      </a:solidFill>
-                      <a:prstDash val="solid"/>
-                    </a:lnB>
-                    <a:lnT w="9525" cap="flat" cmpd="sng" algn="ctr">
-                      <a:solidFill>
-                        <a:srgbClr val="FFFFFF"/>
-                      </a:solidFill>
-                      <a:prstDash val="solid"/>
-                    </a:lnT>
-                    <a:lnR w="9525" cap="flat" cmpd="sng" algn="ctr">
-                      <a:solidFill>
-                        <a:srgbClr val="FFFFFF"/>
-                      </a:solidFill>
-                      <a:prstDash val="solid"/>
-                    </a:lnR>
-                    <a:lnL w="9525" cap="flat" cmpd="sng" algn="ctr">
-                      <a:solidFill>
-                        <a:srgbClr val="FFFFFF"/>
-                      </a:solidFill>
-                      <a:prstDash val="solid"/>
-                    </a:lnL>
-                    <a:solidFill>
-                      <a:srgbClr val="FFFFFF"/>
-                    </a:solidFill>
-                  </a:tcPr>
-                </a:tc>
-                <a:tc>
-                  <a:txBody>
-                    <a:bodyPr wrap="square"/>
-                    <a:lstStyle/>
-                    <a:p>
-                      <a:pPr algn="ctr">
-                        <a:lnSpc>
-                          <a:spcPct val="115000"/>
-                        </a:lnSpc>
-                      </a:pPr>
-                      <a:r>
-                        <a:rPr sz="850" b="0" i="0" u="none">
-                          <a:solidFill>
-                            <a:srgbClr val="404040"/>
-                          </a:solidFill>
-                          <a:latin typeface="맑은 고딕"/>
-                          <a:ea typeface="맑은 고딕"/>
-                          <a:cs typeface="맑은 고딕"/>
-                        </a:rPr>
-                        <a:t>0.60</a:t>
-                      </a:r>
-                    </a:p>
-                  </a:txBody>
-                  <a:tcPr marL="45720" marR="45720" marT="18288" marB="18288" anchor="ctr">
-                    <a:lnB w="9525" cap="flat" cmpd="sng" algn="ctr">
-                      <a:solidFill>
-                        <a:srgbClr val="D8DDE1"/>
-                      </a:solidFill>
-                      <a:prstDash val="solid"/>
-                    </a:lnB>
-                    <a:lnT w="9525" cap="flat" cmpd="sng" algn="ctr">
-                      <a:solidFill>
-                        <a:srgbClr val="FFFFFF"/>
-                      </a:solidFill>
-                      <a:prstDash val="solid"/>
-                    </a:lnT>
-                    <a:lnR w="9525" cap="flat" cmpd="sng" algn="ctr">
-                      <a:solidFill>
-                        <a:srgbClr val="FFFFFF"/>
-                      </a:solidFill>
-                      <a:prstDash val="solid"/>
-                    </a:lnR>
-                    <a:lnL w="9525" cap="flat" cmpd="sng" algn="ctr">
-                      <a:solidFill>
-                        <a:srgbClr val="FFFFFF"/>
-                      </a:solidFill>
-                      <a:prstDash val="solid"/>
-                    </a:lnL>
-                    <a:solidFill>
-                      <a:srgbClr val="FFFFFF"/>
-                    </a:solidFill>
-                  </a:tcPr>
-                </a:tc>
-              </a:tr>
-              <a:tr h="246888">
-                <a:tc>
-                  <a:txBody>
-                    <a:bodyPr wrap="square"/>
-                    <a:lstStyle/>
-                    <a:p>
-                      <a:pPr algn="l">
-                        <a:lnSpc>
-                          <a:spcPct val="115000"/>
-                        </a:lnSpc>
-                      </a:pPr>
-                      <a:r>
-                        <a:rPr sz="850" b="0" i="0" u="none">
-                          <a:solidFill>
-                            <a:srgbClr val="404040"/>
-                          </a:solidFill>
-                          <a:latin typeface="맑은 고딕"/>
-                          <a:ea typeface="맑은 고딕"/>
-                          <a:cs typeface="맑은 고딕"/>
-                        </a:rPr>
-                        <a:t>하루 위험 경보</a:t>
-                      </a:r>
-                    </a:p>
-                  </a:txBody>
-                  <a:tcPr marL="45720" marR="45720" marT="18288" marB="18288" anchor="ctr">
-                    <a:lnB w="9525" cap="flat" cmpd="sng" algn="ctr">
-                      <a:solidFill>
-                        <a:srgbClr val="D8DDE1"/>
-                      </a:solidFill>
-                      <a:prstDash val="solid"/>
-                    </a:lnB>
-                    <a:lnT w="9525" cap="flat" cmpd="sng" algn="ctr">
-                      <a:solidFill>
-                        <a:srgbClr val="FFFFFF"/>
-                      </a:solidFill>
-                      <a:prstDash val="solid"/>
-                    </a:lnT>
-                    <a:lnR w="9525" cap="flat" cmpd="sng" algn="ctr">
-                      <a:solidFill>
-                        <a:srgbClr val="FFFFFF"/>
-                      </a:solidFill>
-                      <a:prstDash val="solid"/>
-                    </a:lnR>
-                    <a:lnL w="9525" cap="flat" cmpd="sng" algn="ctr">
-                      <a:solidFill>
-                        <a:srgbClr val="FFFFFF"/>
-                      </a:solidFill>
-                      <a:prstDash val="solid"/>
-                    </a:lnL>
-                    <a:solidFill>
-                      <a:srgbClr val="FFFFFF"/>
-                    </a:solidFill>
-                  </a:tcPr>
-                </a:tc>
-                <a:tc>
-                  <a:txBody>
-                    <a:bodyPr wrap="square"/>
-                    <a:lstStyle/>
-                    <a:p>
-                      <a:pPr algn="ctr">
-                        <a:lnSpc>
-                          <a:spcPct val="115000"/>
-                        </a:lnSpc>
-                      </a:pPr>
-                      <a:r>
-                        <a:rPr sz="850" b="1" i="0" u="sng">
-                          <a:solidFill>
-                            <a:srgbClr val="404040"/>
-                          </a:solidFill>
-                          <a:latin typeface="맑은 고딕"/>
-                          <a:ea typeface="맑은 고딕"/>
-                          <a:cs typeface="맑은 고딕"/>
-                        </a:rPr>
-                        <a:t>27회</a:t>
-                      </a:r>
-                    </a:p>
-                  </a:txBody>
-                  <a:tcPr marL="45720" marR="45720" marT="18288" marB="18288" anchor="ctr">
-                    <a:lnB w="9525" cap="flat" cmpd="sng" algn="ctr">
-                      <a:solidFill>
-                        <a:srgbClr val="D8DDE1"/>
-                      </a:solidFill>
-                      <a:prstDash val="solid"/>
-                    </a:lnB>
-                    <a:lnT w="9525" cap="flat" cmpd="sng" algn="ctr">
-                      <a:solidFill>
-                        <a:srgbClr val="FFFFFF"/>
-                      </a:solidFill>
-                      <a:prstDash val="solid"/>
-                    </a:lnT>
-                    <a:lnR w="9525" cap="flat" cmpd="sng" algn="ctr">
-                      <a:solidFill>
-                        <a:srgbClr val="FFFFFF"/>
-                      </a:solidFill>
-                      <a:prstDash val="solid"/>
-                    </a:lnR>
-                    <a:lnL w="9525" cap="flat" cmpd="sng" algn="ctr">
-                      <a:solidFill>
-                        <a:srgbClr val="FFFFFF"/>
-                      </a:solidFill>
-                      <a:prstDash val="solid"/>
-                    </a:lnL>
-                    <a:solidFill>
-                      <a:srgbClr val="FFFFFF"/>
-                    </a:solidFill>
-                  </a:tcPr>
-                </a:tc>
-                <a:tc>
-                  <a:txBody>
-                    <a:bodyPr wrap="square"/>
-                    <a:lstStyle/>
-                    <a:p>
-                      <a:pPr algn="ctr">
-                        <a:lnSpc>
-                          <a:spcPct val="115000"/>
-                        </a:lnSpc>
-                      </a:pPr>
-                      <a:r>
-                        <a:rPr sz="850" b="1" i="0" u="none">
-                          <a:solidFill>
-                            <a:srgbClr val="1B8A6B"/>
-                          </a:solidFill>
-                          <a:latin typeface="맑은 고딕"/>
-                          <a:ea typeface="맑은 고딕"/>
-                          <a:cs typeface="맑은 고딕"/>
-                        </a:rPr>
-                        <a:t>24.2회</a:t>
-                      </a:r>
-                    </a:p>
-                  </a:txBody>
-                  <a:tcPr marL="45720" marR="45720" marT="18288" marB="18288" anchor="ctr">
-                    <a:lnB w="9525" cap="flat" cmpd="sng" algn="ctr">
-                      <a:solidFill>
-                        <a:srgbClr val="D8DDE1"/>
-                      </a:solidFill>
-                      <a:prstDash val="solid"/>
-                    </a:lnB>
-                    <a:lnT w="9525" cap="flat" cmpd="sng" algn="ctr">
-                      <a:solidFill>
-                        <a:srgbClr val="FFFFFF"/>
-                      </a:solidFill>
-                      <a:prstDash val="solid"/>
-                    </a:lnT>
-                    <a:lnR w="9525" cap="flat" cmpd="sng" algn="ctr">
-                      <a:solidFill>
-                        <a:srgbClr val="FFFFFF"/>
-                      </a:solidFill>
-                      <a:prstDash val="solid"/>
-                    </a:lnR>
-                    <a:lnL w="9525" cap="flat" cmpd="sng" algn="ctr">
-                      <a:solidFill>
-                        <a:srgbClr val="FFFFFF"/>
-                      </a:solidFill>
-                      <a:prstDash val="solid"/>
-                    </a:lnL>
-                    <a:solidFill>
-                      <a:srgbClr val="FFFFFF"/>
-                    </a:solidFill>
-                  </a:tcPr>
-                </a:tc>
-              </a:tr>
-              <a:tr h="246888">
-                <a:tc>
-                  <a:txBody>
-                    <a:bodyPr wrap="square"/>
-                    <a:lstStyle/>
-                    <a:p>
-                      <a:pPr algn="l">
-                        <a:lnSpc>
-                          <a:spcPct val="115000"/>
-                        </a:lnSpc>
-                      </a:pPr>
-                      <a:r>
-                        <a:rPr sz="850" b="0" i="0" u="none">
-                          <a:solidFill>
-                            <a:srgbClr val="404040"/>
-                          </a:solidFill>
-                          <a:latin typeface="맑은 고딕"/>
-                          <a:ea typeface="맑은 고딕"/>
-                          <a:cs typeface="맑은 고딕"/>
-                        </a:rPr>
-                        <a:t>쓸데없이 울린 횟수</a:t>
-                      </a:r>
-                    </a:p>
-                  </a:txBody>
-                  <a:tcPr marL="45720" marR="45720" marT="18288" marB="18288" anchor="ctr">
-                    <a:lnB w="9525" cap="flat" cmpd="sng" algn="ctr">
-                      <a:solidFill>
-                        <a:srgbClr val="D8DDE1"/>
-                      </a:solidFill>
-                      <a:prstDash val="solid"/>
-                    </a:lnB>
-                    <a:lnT w="9525" cap="flat" cmpd="sng" algn="ctr">
-                      <a:solidFill>
-                        <a:srgbClr val="FFFFFF"/>
-                      </a:solidFill>
-                      <a:prstDash val="solid"/>
-                    </a:lnT>
-                    <a:lnR w="9525" cap="flat" cmpd="sng" algn="ctr">
-                      <a:solidFill>
-                        <a:srgbClr val="FFFFFF"/>
-                      </a:solidFill>
-                      <a:prstDash val="solid"/>
-                    </a:lnR>
-                    <a:lnL w="9525" cap="flat" cmpd="sng" algn="ctr">
-                      <a:solidFill>
-                        <a:srgbClr val="FFFFFF"/>
-                      </a:solidFill>
-                      <a:prstDash val="solid"/>
-                    </a:lnL>
-                    <a:solidFill>
-                      <a:srgbClr val="FFFFFF"/>
-                    </a:solidFill>
-                  </a:tcPr>
-                </a:tc>
-                <a:tc>
-                  <a:txBody>
-                    <a:bodyPr wrap="square"/>
-                    <a:lstStyle/>
-                    <a:p>
-                      <a:pPr algn="ctr">
-                        <a:lnSpc>
-                          <a:spcPct val="115000"/>
-                        </a:lnSpc>
-                      </a:pPr>
-                      <a:r>
-                        <a:rPr sz="850" b="0" i="0" u="sng">
-                          <a:solidFill>
-                            <a:srgbClr val="404040"/>
-                          </a:solidFill>
-                          <a:latin typeface="맑은 고딕"/>
-                          <a:ea typeface="맑은 고딕"/>
-                          <a:cs typeface="맑은 고딕"/>
-                        </a:rPr>
-                        <a:t>하루 3회 미만</a:t>
-                      </a:r>
-                    </a:p>
-                  </a:txBody>
-                  <a:tcPr marL="45720" marR="45720" marT="18288" marB="18288" anchor="ctr">
-                    <a:lnB w="9525" cap="flat" cmpd="sng" algn="ctr">
-                      <a:solidFill>
-                        <a:srgbClr val="D8DDE1"/>
-                      </a:solidFill>
-                      <a:prstDash val="solid"/>
-                    </a:lnB>
-                    <a:lnT w="9525" cap="flat" cmpd="sng" algn="ctr">
-                      <a:solidFill>
-                        <a:srgbClr val="FFFFFF"/>
-                      </a:solidFill>
-                      <a:prstDash val="solid"/>
-                    </a:lnT>
-                    <a:lnR w="9525" cap="flat" cmpd="sng" algn="ctr">
-                      <a:solidFill>
-                        <a:srgbClr val="FFFFFF"/>
-                      </a:solidFill>
-                      <a:prstDash val="solid"/>
-                    </a:lnR>
-                    <a:lnL w="9525" cap="flat" cmpd="sng" algn="ctr">
-                      <a:solidFill>
-                        <a:srgbClr val="FFFFFF"/>
-                      </a:solidFill>
-                      <a:prstDash val="solid"/>
-                    </a:lnL>
-                    <a:solidFill>
-                      <a:srgbClr val="FFFFFF"/>
-                    </a:solidFill>
-                  </a:tcPr>
-                </a:tc>
-                <a:tc>
-                  <a:txBody>
-                    <a:bodyPr wrap="square"/>
-                    <a:lstStyle/>
-                    <a:p>
-                      <a:pPr algn="ctr">
-                        <a:lnSpc>
-                          <a:spcPct val="115000"/>
-                        </a:lnSpc>
-                      </a:pPr>
-                      <a:r>
-                        <a:rPr sz="850" b="0" i="0" u="none">
-                          <a:solidFill>
-                            <a:srgbClr val="404040"/>
-                          </a:solidFill>
-                          <a:latin typeface="맑은 고딕"/>
-                          <a:ea typeface="맑은 고딕"/>
-                          <a:cs typeface="맑은 고딕"/>
-                        </a:rPr>
-                        <a:t>아직 못 쟀다</a:t>
-                      </a:r>
-                    </a:p>
-                  </a:txBody>
-                  <a:tcPr marL="45720" marR="45720" marT="18288" marB="18288" anchor="ctr">
-                    <a:lnB w="9525" cap="flat" cmpd="sng" algn="ctr">
-                      <a:solidFill>
-                        <a:srgbClr val="D8DDE1"/>
-                      </a:solidFill>
-                      <a:prstDash val="solid"/>
-                    </a:lnB>
-                    <a:lnT w="9525" cap="flat" cmpd="sng" algn="ctr">
-                      <a:solidFill>
-                        <a:srgbClr val="FFFFFF"/>
-                      </a:solidFill>
-                      <a:prstDash val="solid"/>
-                    </a:lnT>
-                    <a:lnR w="9525" cap="flat" cmpd="sng" algn="ctr">
-                      <a:solidFill>
-                        <a:srgbClr val="FFFFFF"/>
-                      </a:solidFill>
-                      <a:prstDash val="solid"/>
-                    </a:lnR>
-                    <a:lnL w="9525" cap="flat" cmpd="sng" algn="ctr">
-                      <a:solidFill>
-                        <a:srgbClr val="FFFFFF"/>
-                      </a:solidFill>
-                      <a:prstDash val="solid"/>
-                    </a:lnL>
-                    <a:solidFill>
-                      <a:srgbClr val="FFFFFF"/>
-                    </a:solidFill>
-                  </a:tcPr>
-                </a:tc>
-              </a:tr>
-              <a:tr h="246888">
-                <a:tc>
-                  <a:txBody>
-                    <a:bodyPr wrap="square"/>
-                    <a:lstStyle/>
-                    <a:p>
-                      <a:pPr algn="l">
-                        <a:lnSpc>
-                          <a:spcPct val="115000"/>
-                        </a:lnSpc>
-                      </a:pPr>
-                      <a:r>
-                        <a:rPr sz="850" b="0" i="0" u="none">
-                          <a:solidFill>
-                            <a:srgbClr val="404040"/>
-                          </a:solidFill>
-                          <a:latin typeface="맑은 고딕"/>
-                          <a:ea typeface="맑은 고딕"/>
-                          <a:cs typeface="맑은 고딕"/>
-                        </a:rPr>
-                        <a:t>작업자 만족도</a:t>
-                      </a:r>
-                    </a:p>
-                  </a:txBody>
-                  <a:tcPr marL="45720" marR="45720" marT="18288" marB="18288" anchor="ctr">
-                    <a:lnB w="9525" cap="flat" cmpd="sng" algn="ctr">
-                      <a:solidFill>
-                        <a:srgbClr val="D8DDE1"/>
-                      </a:solidFill>
-                      <a:prstDash val="solid"/>
-                    </a:lnB>
-                    <a:lnT w="9525" cap="flat" cmpd="sng" algn="ctr">
-                      <a:solidFill>
-                        <a:srgbClr val="FFFFFF"/>
-                      </a:solidFill>
-                      <a:prstDash val="solid"/>
-                    </a:lnT>
-                    <a:lnR w="9525" cap="flat" cmpd="sng" algn="ctr">
-                      <a:solidFill>
-                        <a:srgbClr val="FFFFFF"/>
-                      </a:solidFill>
-                      <a:prstDash val="solid"/>
-                    </a:lnR>
-                    <a:lnL w="9525" cap="flat" cmpd="sng" algn="ctr">
-                      <a:solidFill>
-                        <a:srgbClr val="FFFFFF"/>
-                      </a:solidFill>
-                      <a:prstDash val="solid"/>
-                    </a:lnL>
-                    <a:solidFill>
-                      <a:srgbClr val="FFFFFF"/>
-                    </a:solidFill>
-                  </a:tcPr>
-                </a:tc>
-                <a:tc>
-                  <a:txBody>
-                    <a:bodyPr wrap="square"/>
-                    <a:lstStyle/>
-                    <a:p>
-                      <a:pPr algn="ctr">
-                        <a:lnSpc>
-                          <a:spcPct val="115000"/>
-                        </a:lnSpc>
-                      </a:pPr>
-                      <a:r>
-                        <a:rPr sz="850" b="0" i="0" u="sng">
-                          <a:solidFill>
-                            <a:srgbClr val="404040"/>
-                          </a:solidFill>
-                          <a:latin typeface="맑은 고딕"/>
-                          <a:ea typeface="맑은 고딕"/>
-                          <a:cs typeface="맑은 고딕"/>
-                        </a:rPr>
-                        <a:t>10점 중 7.0점</a:t>
-                      </a:r>
-                    </a:p>
-                  </a:txBody>
-                  <a:tcPr marL="45720" marR="45720" marT="18288" marB="18288" anchor="ctr">
-                    <a:lnB w="9525" cap="flat" cmpd="sng" algn="ctr">
-                      <a:solidFill>
-                        <a:srgbClr val="D8DDE1"/>
-                      </a:solidFill>
-                      <a:prstDash val="solid"/>
-                    </a:lnB>
-                    <a:lnT w="9525" cap="flat" cmpd="sng" algn="ctr">
-                      <a:solidFill>
-                        <a:srgbClr val="FFFFFF"/>
-                      </a:solidFill>
-                      <a:prstDash val="solid"/>
-                    </a:lnT>
-                    <a:lnR w="9525" cap="flat" cmpd="sng" algn="ctr">
-                      <a:solidFill>
-                        <a:srgbClr val="FFFFFF"/>
-                      </a:solidFill>
-                      <a:prstDash val="solid"/>
-                    </a:lnR>
-                    <a:lnL w="9525" cap="flat" cmpd="sng" algn="ctr">
-                      <a:solidFill>
-                        <a:srgbClr val="FFFFFF"/>
-                      </a:solidFill>
-                      <a:prstDash val="solid"/>
-                    </a:lnL>
-                    <a:solidFill>
-                      <a:srgbClr val="FFFFFF"/>
-                    </a:solidFill>
-                  </a:tcPr>
-                </a:tc>
-                <a:tc>
-                  <a:txBody>
-                    <a:bodyPr wrap="square"/>
-                    <a:lstStyle/>
-                    <a:p>
-                      <a:pPr algn="ctr">
-                        <a:lnSpc>
-                          <a:spcPct val="115000"/>
-                        </a:lnSpc>
-                      </a:pPr>
-                      <a:r>
-                        <a:rPr sz="850" b="0" i="0" u="none">
-                          <a:solidFill>
-                            <a:srgbClr val="404040"/>
-                          </a:solidFill>
-                          <a:latin typeface="맑은 고딕"/>
-                          <a:ea typeface="맑은 고딕"/>
-                          <a:cs typeface="맑은 고딕"/>
-                        </a:rPr>
-                        <a:t>설문 예정</a:t>
+                        <a:t>경고 487 · 위험 291</a:t>
                       </a:r>
                     </a:p>
                   </a:txBody>
@@ -20877,7 +20727,7 @@
         </p:nvSpPr>
         <p:spPr>
           <a:xfrm>
-            <a:off x="6382512" y="4946904"/>
+            <a:off x="6382512" y="4727448"/>
             <a:ext cx="4901183" cy="310896"/>
           </a:xfrm>
           <a:prstGeom prst="rect">
@@ -20905,29 +20755,7 @@
                 <a:ea typeface="맑은 고딕"/>
                 <a:cs typeface="맑은 고딕"/>
               </a:rPr>
-              <a:t>·  경보가 울릴 때마다 시각 · 상대 · 신호 세기 · 등급이 서버에 남고, </a:t>
-            </a:r>
-            <a:r>
-              <a:rPr sz="900" b="1" i="0" u="none">
-                <a:solidFill>
-                  <a:srgbClr val="404040"/>
-                </a:solidFill>
-                <a:latin typeface="맑은 고딕"/>
-                <a:ea typeface="맑은 고딕"/>
-                <a:cs typeface="맑은 고딕"/>
-              </a:rPr>
-              <a:t>GitHub Actions 가 매주 자동 집계한다</a:t>
-            </a:r>
-            <a:r>
-              <a:rPr sz="900" b="0" i="0" u="none">
-                <a:solidFill>
-                  <a:srgbClr val="404040"/>
-                </a:solidFill>
-                <a:latin typeface="맑은 고딕"/>
-                <a:ea typeface="맑은 고딕"/>
-                <a:cs typeface="맑은 고딕"/>
-              </a:rPr>
-              <a:t> — 손으로 만든 숫자가 아니다.</a:t>
+              <a:t>·  경보가 울릴 때마다 시각 · 상대 · 신호 세기 · 등급이 서버에 남는다. 매주 자동 집계한다.</a:t>
             </a:r>
           </a:p>
         </p:txBody>
@@ -20940,7 +20768,7 @@
         </p:nvSpPr>
         <p:spPr>
           <a:xfrm>
-            <a:off x="6382512" y="5257800"/>
+            <a:off x="6382512" y="5038344"/>
             <a:ext cx="4901183" cy="310896"/>
           </a:xfrm>
           <a:prstGeom prst="rect">
@@ -20968,7 +20796,7 @@
                 <a:ea typeface="맑은 고딕"/>
                 <a:cs typeface="맑은 고딕"/>
               </a:rPr>
-              <a:t>·  같은 상대는 1분에 한 번만 기록되므로 1건 = 가까워진 1분이다. 사고 건수가 아니라 위험했던 순간의 대용 지표로 쓴다.</a:t>
+              <a:t>·  같은 상대는 1분에 한 번만 기록한다. 1건 = 가까워진 1분. 사고 건수가 아니라 위험했던 순간의 수다.</a:t>
             </a:r>
           </a:p>
         </p:txBody>
@@ -20981,7 +20809,7 @@
         </p:nvSpPr>
         <p:spPr>
           <a:xfrm>
-            <a:off x="6382512" y="5568696"/>
+            <a:off x="6382512" y="5349240"/>
             <a:ext cx="4901183" cy="310896"/>
           </a:xfrm>
           <a:prstGeom prst="rect">
@@ -21009,18 +20837,18 @@
                 <a:ea typeface="맑은 고딕"/>
                 <a:cs typeface="맑은 고딕"/>
               </a:rPr>
-              <a:t>·  가정은 ‘한 짝이 한 시간에 0.5번’ 하나뿐이었다. 짝은 두 배, 빈도는 1/5 — 오차가 상쇄돼 </a:t>
+              <a:t>·  </a:t>
             </a:r>
             <a:r>
               <a:rPr sz="900" b="1" i="0" u="none">
                 <a:solidFill>
-                  <a:srgbClr val="1B8A6B"/>
+                  <a:srgbClr val="053866"/>
                 </a:solidFill>
                 <a:latin typeface="맑은 고딕"/>
                 <a:ea typeface="맑은 고딕"/>
                 <a:cs typeface="맑은 고딕"/>
               </a:rPr>
-              <a:t>위험 경보는 추정 27회 → 실측 24.2회</a:t>
+              <a:t>오전 10시에 전체의 약 30%가 몰린다. 점심은 거의 0.</a:t>
             </a:r>
             <a:r>
               <a:rPr sz="900" b="0" i="0" u="none">
@@ -21031,7 +20859,7 @@
                 <a:ea typeface="맑은 고딕"/>
                 <a:cs typeface="맑은 고딕"/>
               </a:rPr>
-              <a:t>.</a:t>
+              <a:t> 주의를 집중할 시간대가 처음 드러났다.</a:t>
             </a:r>
           </a:p>
         </p:txBody>
@@ -21044,7 +20872,48 @@
         </p:nvSpPr>
         <p:spPr>
           <a:xfrm>
-            <a:off x="6382512" y="5879592"/>
+            <a:off x="6382512" y="5660136"/>
+            <a:ext cx="4901183" cy="310896"/>
+          </a:xfrm>
+          <a:prstGeom prst="rect">
+            <a:avLst/>
+          </a:prstGeom>
+          <a:noFill/>
+        </p:spPr>
+        <p:txBody>
+          <a:bodyPr wrap="square" lIns="18288" rIns="18288" tIns="0" bIns="0">
+            <a:spAutoFit/>
+          </a:bodyPr>
+          <a:lstStyle/>
+          <a:p>
+            <a:pPr algn="l">
+              <a:lnSpc>
+                <a:spcPct val="120000"/>
+              </a:lnSpc>
+            </a:pPr>
+            <a:r>
+              <a:rPr sz="900" b="0" i="0" u="none">
+                <a:solidFill>
+                  <a:srgbClr val="404040"/>
+                </a:solidFill>
+                <a:latin typeface="맑은 고딕"/>
+                <a:ea typeface="맑은 고딕"/>
+                <a:cs typeface="맑은 고딕"/>
+              </a:rPr>
+              <a:t>·  쓸데없이 울린 횟수는 작업자 신고와 서버 기록을 대조해 잰다. 만족도는 9월 세 센터 작업자 설문으로 잰다.</a:t>
+            </a:r>
+          </a:p>
+        </p:txBody>
+      </p:sp>
+      <p:sp>
+        <p:nvSpPr>
+          <p:cNvPr id="47" name="TextBox 46"/>
+          <p:cNvSpPr txBox="1"/>
+          <p:nvPr/>
+        </p:nvSpPr>
+        <p:spPr>
+          <a:xfrm>
+            <a:off x="6382512" y="5971032"/>
             <a:ext cx="4901183" cy="310896"/>
           </a:xfrm>
           <a:prstGeom prst="rect">
@@ -22358,7 +22227,7 @@
                 <a:ea typeface="맑은 고딕"/>
                 <a:cs typeface="맑은 고딕"/>
               </a:rPr>
-              <a:t>가까워졌는데 경보가 뜨지 않은 사례 1건이라도</a:t>
+              <a:t>가까워졌는데 안 울렸다는 작업자 신고 1건이라도</a:t>
             </a:r>
           </a:p>
         </p:txBody>
@@ -22451,7 +22320,7 @@
                 <a:ea typeface="맑은 고딕"/>
                 <a:cs typeface="맑은 고딕"/>
               </a:rPr>
-              <a:t>서 있는데 계속 울림 · 멀어졌는데 다시 울림이 반복</a:t>
+              <a:t>서 있는데 · 멀어졌는데 울린다는 지적이 반복</a:t>
             </a:r>
           </a:p>
         </p:txBody>
@@ -22544,7 +22413,7 @@
                 <a:ea typeface="맑은 고딕"/>
                 <a:cs typeface="맑은 고딕"/>
               </a:rPr>
-              <a:t>알림 표시줄이 ‘이상’ 으로 바뀌거나 사라짐</a:t>
+              <a:t>알림 표시줄에 ‘이상’ 이 뜨거나 알림이 사라짐</a:t>
             </a:r>
           </a:p>
         </p:txBody>
@@ -22812,7 +22681,7 @@
                 <a:ea typeface="맑은 고딕"/>
                 <a:cs typeface="맑은 고딕"/>
               </a:rPr>
-              <a:t>고쳤던 문제가 재발</a:t>
+              <a:t>고친 문제가 또 나온다</a:t>
             </a:r>
             <a:r>
               <a:rPr sz="850" b="1" i="0" u="none">
@@ -22864,7 +22733,7 @@
                 <a:ea typeface="맑은 고딕"/>
                 <a:cs typeface="맑은 고딕"/>
               </a:rPr>
-              <a:t>이전에 고친 증상이 다시 나타남</a:t>
+              <a:t>이미 고친 증상을 작업자가 다시 지적함</a:t>
             </a:r>
           </a:p>
         </p:txBody>
@@ -22905,7 +22774,7 @@
                 <a:ea typeface="맑은 고딕"/>
                 <a:cs typeface="맑은 고딕"/>
               </a:rPr>
-              <a:t>업데이트 중 무방비</a:t>
+              <a:t>업데이트 중 빈틈</a:t>
             </a:r>
             <a:r>
               <a:rPr sz="850" b="1" i="0" u="none">
@@ -22957,7 +22826,7 @@
                 <a:ea typeface="맑은 고딕"/>
                 <a:cs typeface="맑은 고딕"/>
               </a:rPr>
-              <a:t>작업 시간 중 일괄 업데이트 금지 — 교대 전환 때만 배포</a:t>
+              <a:t>작업 시간 중 여러 폰이 한꺼번에 꺼져 있음</a:t>
             </a:r>
           </a:p>
         </p:txBody>
@@ -23050,7 +22919,7 @@
                 <a:ea typeface="맑은 고딕"/>
                 <a:cs typeface="맑은 고딕"/>
               </a:rPr>
-              <a:t>업데이트나 역할 변경 뒤 앱이 다시 켜지지 않음</a:t>
+              <a:t>설치나 역할 변경 뒤 앱이 다시 켜지지 않음</a:t>
             </a:r>
           </a:p>
         </p:txBody>
@@ -23132,7 +23001,7 @@
                 <a:ea typeface="맑은 고딕"/>
                 <a:cs typeface="맑은 고딕"/>
               </a:rPr>
-              <a:t>·  경보 누락 · 오작동 — 작업자 신고와 서버에 남은 경보 기록을 대조한다.</a:t>
+              <a:t>·  안 울림 · 쓸데없이 울림 — 작업자 신고를 서버 경보 기록과 대조한다.</a:t>
             </a:r>
           </a:p>
         </p:txBody>
@@ -23173,7 +23042,7 @@
                 <a:ea typeface="맑은 고딕"/>
                 <a:cs typeface="맑은 고딕"/>
               </a:rPr>
-              <a:t>·  감지 멈춤 · 앱 안 켜짐 — 알림 표시줄이 스스로 ‘이상’ 을 띄운다 (v1.1.64).</a:t>
+              <a:t>·  감지 멈춤 · 안 켜짐 — 알림 표시줄을 본다. 감지가 멈추면 ‘이상’ 이 뜬다.</a:t>
             </a:r>
           </a:p>
         </p:txBody>
@@ -23214,7 +23083,7 @@
                 <a:ea typeface="맑은 고딕"/>
                 <a:cs typeface="맑은 고딕"/>
               </a:rPr>
-              <a:t>·  버전 섞임 — 배포 뒤 모든 폰의 버전을 확인한다. 신호 형식은 옛 버전과도 통하게 만들었다.</a:t>
+              <a:t>·  옛 버전 섞임 — 배포 뒤 폰마다 버전을 확인한다. 옛 버전과도 서로 통한다.</a:t>
             </a:r>
           </a:p>
         </p:txBody>
@@ -23255,7 +23124,7 @@
                 <a:ea typeface="맑은 고딕"/>
                 <a:cs typeface="맑은 고딕"/>
               </a:rPr>
-              <a:t>·  재발 — 자동 검사가 잡는다. 검사가 실패하면 새 버전이 나가지 않는다.</a:t>
+              <a:t>·  고친 문제가 또 나옴 — 배포 때마다 고쳤던 증상을 확인한다. 작업자 지적으로도 본다.</a:t>
             </a:r>
           </a:p>
         </p:txBody>
@@ -23296,7 +23165,7 @@
                 <a:ea typeface="맑은 고딕"/>
                 <a:cs typeface="맑은 고딕"/>
               </a:rPr>
-              <a:t>·  꺼 두는 사람 — 작업자 설문과 소리 끔 설정 비율로 본다.</a:t>
+              <a:t>·  꺼 두는 사람 — 작업자 설문으로 묻는다. 현장에서 폰의 소리 설정도 직접 본다.</a:t>
             </a:r>
           </a:p>
         </p:txBody>
@@ -23396,7 +23265,7 @@
                 <a:ea typeface="맑은 고딕"/>
                 <a:cs typeface="맑은 고딕"/>
               </a:rPr>
-              <a:t>직전 버전으로 되돌린다 — 현장에서 다시 설치할 필요가 없다</a:t>
+              <a:t>문제가 확인되면 바로 이전 버전으로 되돌린다</a:t>
             </a:r>
           </a:p>
         </p:txBody>
@@ -23455,7 +23324,7 @@
                 <a:ea typeface="맑은 고딕"/>
                 <a:cs typeface="맑은 고딕"/>
               </a:rPr>
-              <a:t>모든 폰에 배포하기 전에 1대에서 먼저 확인한다</a:t>
+              <a:t>모든 폰에 깔기 전에 1대에서 먼저 확인한다</a:t>
             </a:r>
           </a:p>
         </p:txBody>
@@ -23496,7 +23365,7 @@
                 <a:ea typeface="맑은 고딕"/>
                 <a:cs typeface="맑은 고딕"/>
               </a:rPr>
-              <a:t>배포 차단</a:t>
+              <a:t>교대 때만</a:t>
             </a:r>
           </a:p>
           <a:p>
@@ -23514,7 +23383,7 @@
                 <a:ea typeface="맑은 고딕"/>
                 <a:cs typeface="맑은 고딕"/>
               </a:rPr>
-              <a:t>자동 검사가 실패하면 새 버전이 아예 나가지 않는다 (동작 중)</a:t>
+              <a:t>작업 시간 중에는 바꾸지 않는다. 교대 전환 때만 배포한다</a:t>
             </a:r>
           </a:p>
         </p:txBody>
@@ -23555,7 +23424,7 @@
                 <a:ea typeface="맑은 고딕"/>
                 <a:cs typeface="맑은 고딕"/>
               </a:rPr>
-              <a:t>원인 특정</a:t>
+              <a:t>다시 배포할 때</a:t>
             </a:r>
           </a:p>
           <a:p>
@@ -23573,7 +23442,7 @@
                 <a:ea typeface="맑은 고딕"/>
                 <a:cs typeface="맑은 고딕"/>
               </a:rPr>
-              <a:t>단계를 하나씩 따로 배포하므로 어느 변경 탓인지 알 수 있다</a:t>
+              <a:t>한 번에 하나만 바꾼다. 같은 문제가 없는지 확인한 뒤 배포한다</a:t>
             </a:r>
           </a:p>
         </p:txBody>
@@ -23614,7 +23483,7 @@
                 <a:ea typeface="맑은 고딕"/>
                 <a:cs typeface="맑은 고딕"/>
               </a:rPr>
-              <a:t>재개 조건</a:t>
+              <a:t>중단 비용 0</a:t>
             </a:r>
           </a:p>
           <a:p>
@@ -23632,7 +23501,7 @@
                 <a:ea typeface="맑은 고딕"/>
                 <a:cs typeface="맑은 고딕"/>
               </a:rPr>
-              <a:t>실패한 상황을 자동 검사로 만들어 둔 뒤에만 다음 단계로</a:t>
+              <a:t>앱을 꺼도 도입 전 상태로 돌아갈 뿐이다 (감지 장치 0대)</a:t>
             </a:r>
           </a:p>
         </p:txBody>
@@ -24702,7 +24571,7 @@
                   <a:ea typeface="맑은 고딕"/>
                   <a:cs typeface="맑은 고딕"/>
                 </a:rPr>
-                <a:t>① 실제 숫자 확보</a:t>
+                <a:t>① 9월 작업자 설문</a:t>
               </a:r>
               <a:r>
                 <a:rPr sz="1050" b="0" i="0" u="none">
@@ -24713,7 +24582,7 @@
                   <a:ea typeface="맑은 고딕"/>
                   <a:cs typeface="맑은 고딕"/>
                 </a:rPr>
-                <a:t>  경보 기록은 주간 자동 집계로 확보했다. 남은 것은 WF11 · WF21 · WF25 작업자 설문 회수.</a:t>
+                <a:t>  WF11 · WF21 · WF25 작업자에게 묻는다 — 경보가 늦은 적이 있는가, 만족하는가.</a:t>
               </a:r>
               <a:endParaRPr lang="ko-KR" altLang="en-US" sz="1200">
                 <a:solidFill>
@@ -24744,7 +24613,7 @@
                   <a:ea typeface="맑은 고딕"/>
                   <a:cs typeface="맑은 고딕"/>
                 </a:rPr>
-                <a:t>② 업무용 PDA 로 이전</a:t>
+                <a:t>② 업무용 PDA 이전</a:t>
               </a:r>
               <a:r>
                 <a:rPr sz="1050" b="0" i="0" u="none">
@@ -24755,7 +24624,7 @@
                   <a:ea typeface="맑은 고딕"/>
                   <a:cs typeface="맑은 고딕"/>
                 </a:rPr>
-                <a:t>  2단계에서 개인 폰에 임시로 깔아 둔 상태를 끝낸다.</a:t>
+                <a:t>  10월, 개인 폰에 임시로 깐 것을 회사 기기로 옮긴다.</a:t>
               </a:r>
             </a:p>
             <a:p>
@@ -24776,7 +24645,7 @@
                   <a:ea typeface="맑은 고딕"/>
                   <a:cs typeface="맑은 고딕"/>
                 </a:rPr>
-                <a:t>③ 확산</a:t>
+                <a:t>③ 17개 센터 확산</a:t>
               </a:r>
               <a:r>
                 <a:rPr sz="1050" b="0" i="0" u="none">
@@ -24787,7 +24656,7 @@
                   <a:ea typeface="맑은 고딕"/>
                   <a:cs typeface="맑은 고딕"/>
                 </a:rPr>
-                <a:t>  정식 과제로 등록한 뒤 17개 센터로 — 장비를 사지 않고 앱 배포만으로 늘린다. 확산 전에 보안 검토를 먼저 받는다.</a:t>
+                <a:t>  정식 과제 등록 → 안전 · 운영 승인. 확산 전 보안 검토를 받는다. 장비 없이 앱 설치만으로 늘린다.</a:t>
               </a:r>
             </a:p>
           </p:txBody>
@@ -24900,7 +24769,7 @@
                 <a:ea typeface="맑은 고딕"/>
                 <a:cs typeface="맑은 고딕"/>
               </a:rPr>
-              <a:t>피드백은 이미 한 바퀴 돌았다 — 지적이 코드에 남아 있다</a:t>
+              <a:t>현장 지적 세 가지가 그대로 기능이 됐다</a:t>
             </a:r>
           </a:p>
         </p:txBody>
@@ -26283,7 +26152,7 @@
                 <a:ea typeface="맑은 고딕"/>
                 <a:cs typeface="맑은 고딕"/>
               </a:rPr>
-              <a:t>반영 이력은 커밋에 남아 있다  —  </a:t>
+              <a:t>“서 있는데 계속 울린다”  “멀어졌는데 다시 울린다”  “앱이 꺼진 줄 몰랐다”</a:t>
             </a:r>
             <a:r>
               <a:rPr sz="900" b="0" i="0" u="none">
@@ -26294,7 +26163,7 @@
                 <a:ea typeface="맑은 고딕"/>
                 <a:cs typeface="맑은 고딕"/>
               </a:rPr>
-              <a:t>리뷰 1·2·3차 v1.1.60 · v1.1.61 · v1.1.62,  앱 상태 표시 v1.1.64,  재발령 억제 v1.1.51,  알림 눌러 끄기 v1.1.68,  화면 가장자리 경보 v1.1.69 · v1.1.70</a:t>
+              <a:t>  —  모두 위 표의 항목으로 해결됐다. 다음 의견은 9월 설문으로 받는다.</a:t>
             </a:r>
           </a:p>
         </p:txBody>
@@ -27079,7 +26948,7 @@
                 <a:ea typeface="맑은 고딕"/>
                 <a:cs typeface="맑은 고딕"/>
               </a:rPr>
-              <a:t>우리 센터에는 지게차 접근을 알려주는 장치가 하나도 없습니다</a:t>
+              <a:t>우리 센터에는 지게차 접근을 알리는 장치가 없습니다</a:t>
             </a:r>
             <a:endParaRPr lang="ko-KR" altLang="en-US" sz="2100">
               <a:solidFill>
@@ -27108,7 +26977,7 @@
                 <a:ea typeface="맑은 고딕"/>
                 <a:cs typeface="맑은 고딕"/>
               </a:rPr>
-              <a:t>시야는 적재 파렛트에 막히고 경적은 장비 소음에 묻힙니다. 지금은 작업자의 주의력이 사실상 유일한 안전장치입니다.</a:t>
+              <a:t>시야는 적재 파렛트에 막히고, 경적은 장비 소음에 묻힙니다. 지게차 4대 · 상시 3명, 어느 쪽도 감지되지 않습니다. 지금은 작업자의 주의력이 사실상 유일한 안전장치입니다.</a:t>
             </a:r>
           </a:p>
         </p:txBody>
@@ -27205,7 +27074,7 @@
                 <a:ea typeface="맑은 고딕"/>
                 <a:cs typeface="맑은 고딕"/>
               </a:rPr>
-              <a:t>계획이 아니라, 지금 돌아가고 있는 앱입니다</a:t>
+              <a:t>세 센터에서 지금 돌아가고 있는 앱입니다</a:t>
             </a:r>
             <a:endParaRPr lang="en-US" altLang="ko-KR" sz="2100">
               <a:solidFill>
@@ -27234,7 +27103,29 @@
                 <a:ea typeface="맑은 고딕"/>
                 <a:cs typeface="맑은 고딕"/>
               </a:rPr>
-              <a:t>WF11 · WF21 · WF25 세 개 센터에서 실사용 중, 3개월간 97번 배포했습니다.</a:t>
+              <a:t>WF11 · WF21 · WF25 에서 실사용 중입니다. WF11 에서는 하루 평균 </a:t>
+            </a:r>
+            <a:r>
+              <a:rPr sz="1100" b="1" i="0" u="none">
+                <a:solidFill>
+                  <a:srgbClr val="053866"/>
+                </a:solidFill>
+                <a:latin typeface="맑은 고딕"/>
+                <a:ea typeface="맑은 고딕"/>
+                <a:cs typeface="맑은 고딕"/>
+              </a:rPr>
+              <a:t>경고 40.6회 · 위험 24.2회</a:t>
+            </a:r>
+            <a:r>
+              <a:rPr sz="1100" b="0" i="0" u="none">
+                <a:solidFill>
+                  <a:srgbClr val="404040"/>
+                </a:solidFill>
+                <a:latin typeface="맑은 고딕"/>
+                <a:ea typeface="맑은 고딕"/>
+                <a:cs typeface="맑은 고딕"/>
+              </a:rPr>
+              <a:t>가 기록됩니다 (기록 12일 평균 · 1건 = 서로 가까워진 1분).</a:t>
             </a:r>
           </a:p>
           <a:p>
@@ -27523,7 +27414,7 @@
                 <a:ea typeface="맑은 고딕"/>
                 <a:cs typeface="맑은 고딕"/>
               </a:rPr>
-              <a:t>앱만 깔면 서로 다가오는 것을 감지해 소리 · 진동 · 화면으로 알립니다. 같은 기능을 장비로 갖추면 센터당 331만원이 들지만, </a:t>
+              <a:t>앱만 깔면 서로 다가올 때 소리 · 진동 · 화면으로 알립니다. 같은 일을 장비로 하면 우리 센터 규모로 331만원, </a:t>
             </a:r>
             <a:r>
               <a:rPr sz="1100" b="1" i="0" u="none">
@@ -27534,7 +27425,7 @@
                 <a:ea typeface="맑은 고딕"/>
                 <a:cs typeface="맑은 고딕"/>
               </a:rPr>
-              <a:t>이 앱은 추가 비용이 없습니다</a:t>
+              <a:t>이 앱은 사람이 늘어도 추가 비용이 없습니다</a:t>
             </a:r>
             <a:r>
               <a:rPr sz="1100" b="0" i="0" u="none">
@@ -27545,7 +27436,7 @@
                 <a:ea typeface="맑은 고딕"/>
                 <a:cs typeface="맑은 고딕"/>
               </a:rPr>
-              <a:t>.</a:t>
+              <a:t>. 지게차를 자동으로 멈추지는 못합니다.</a:t>
             </a:r>
           </a:p>
         </p:txBody>
@@ -28445,7 +28336,7 @@
                   <a:ea typeface="맑은 고딕"/>
                   <a:cs typeface="맑은 고딕"/>
                 </a:rPr>
-                <a:t>우리 센터에는 지게차와 보행자가 서로 다가오는 것을 알려주는 장치가 없다. 존과 로케이션 사이 교차 구간은 적재 파렛트에 시야가 막히고 장비 소음에 경적이 묻혀, 서로를 보지 못한 채 가까워진다.</a:t>
+                <a:t>우리 센터에는 지게차와 보행자가 서로 다가오는 것을 알려주는 장치가 없다. 통로가 만나는 교차 구간에서는 적재 파렛트가 시야를 막고, 장비 소음에 경적이 묻힌다. 서로를 보지 못한 채 가까워진다.</a:t>
               </a:r>
               <a:endParaRPr lang="ko-KR" altLang="en-US" sz="1200">
                 <a:solidFill>
@@ -28626,7 +28517,7 @@
                   <a:ea typeface="맑은 고딕"/>
                   <a:cs typeface="맑은 고딕"/>
                 </a:rPr>
-                <a:t>이미 나눠준 스마트폰에 앱을 깔면, 폰끼리 신호를 주고받아 서로를 감지한다.</a:t>
+                <a:t>이미 나눠준 스마트폰에 앱만 깔면 서로를 감지한다.</a:t>
               </a:r>
               <a:endParaRPr lang="ko-KR" altLang="en-US" sz="1200">
                 <a:solidFill>
@@ -28657,7 +28548,7 @@
                   <a:ea typeface="맑은 고딕"/>
                   <a:cs typeface="맑은 고딕"/>
                 </a:rPr>
-                <a:t>따로 살 장비도, 몸에 달 태그도, 센터에 설치할 것도 없다.</a:t>
+                <a:t>따로 살 장비도, 몸에 달 태그도, 설치할 것도 없다.</a:t>
               </a:r>
             </a:p>
             <a:p>
@@ -28699,7 +28590,7 @@
                   <a:ea typeface="맑은 고딕"/>
                   <a:cs typeface="맑은 고딕"/>
                 </a:rPr>
-                <a:t>정밀 측위(UWB)를 지원하는 폰끼리는 실제 거리로 — 지게차가 끼면 경고 15m · 위험 8m, 사람끼리는 5m · 3m.</a:t>
+                <a:t>정밀 측위(UWB) 폰끼리는 실제 거리로 잰다. 지게차가 낀 짝은 경고 15m · 위험 8m, 사람끼리 5m · 3m.</a:t>
               </a:r>
             </a:p>
             <a:p>
@@ -28720,7 +28611,7 @@
                   <a:ea typeface="맑은 고딕"/>
                   <a:cs typeface="맑은 고딕"/>
                 </a:rPr>
-                <a:t>그 밖의 폰은 신호 세기로 판단한다. 창고는 랙과 적재물 때문에 신호 세기가 거리와 일정하게 대응하지 않아, 거리로 환산하지 않는다.</a:t>
+                <a:t>그 밖의 폰은 신호 세기로 가늠한다. 창고는 랙과 적재물 때문에 신호 세기가 거리와 늘 맞지는 않는다. 미터 대신 등급으로 알린다.</a:t>
               </a:r>
             </a:p>
             <a:p>
@@ -29045,7 +28936,7 @@
                 <a:ea typeface="맑은 고딕"/>
                 <a:cs typeface="맑은 고딕"/>
               </a:rPr>
-              <a:t>서로 감지되는 경우의 수 — 현장 인원이 늘어날수록</a:t>
+              <a:t>서로 감지되는 경우의 수 — 사람이 늘수록</a:t>
             </a:r>
           </a:p>
         </p:txBody>
@@ -29104,7 +28995,7 @@
                 <a:ea typeface="맑은 고딕"/>
                 <a:cs typeface="맑은 고딕"/>
               </a:rPr>
-              <a:t>지게차 4대 기준. 장비 방식은 태그를 산 사람만 감지되지만, 앱은 폰을 가진 모두가 서로 감지된다.</a:t>
+              <a:t>지게차 4대 기준. 장비 방식은 태그를 산 사람만 감지된다. 앱은 폰을 가진 모두가 서로 감지된다.</a:t>
             </a:r>
           </a:p>
         </p:txBody>
@@ -29145,7 +29036,7 @@
                 <a:ea typeface="맑은 고딕"/>
                 <a:cs typeface="맑은 고딕"/>
               </a:rPr>
-              <a:t>하루에 경보가 몇 번 울리는가</a:t>
+              <a:t>하루에 몇 번 서로 가까워지는가</a:t>
             </a:r>
             <a:r>
               <a:rPr sz="850" b="0" i="0" u="none">
@@ -29156,7 +29047,7 @@
                 <a:ea typeface="맑은 고딕"/>
                 <a:cs typeface="맑은 고딕"/>
               </a:rPr>
-              <a:t>   앱이 남긴 기록으로 실측했다</a:t>
+              <a:t>   WF11 서버 기록 자동 집계</a:t>
             </a:r>
           </a:p>
         </p:txBody>
@@ -29294,7 +29185,7 @@
                 <a:ea typeface="맑은 고딕"/>
                 <a:cs typeface="맑은 고딕"/>
               </a:rPr>
-              <a:t>경고 등급 경보</a:t>
+              <a:t>경고 등급</a:t>
             </a:r>
           </a:p>
         </p:txBody>
@@ -29335,7 +29226,7 @@
                 <a:ea typeface="맑은 고딕"/>
                 <a:cs typeface="맑은 고딕"/>
               </a:rPr>
-              <a:t>WF11 · 기록 12일 평균</a:t>
+              <a:t>경고가 뜰 만큼 가까워짐</a:t>
             </a:r>
           </a:p>
         </p:txBody>
@@ -29376,7 +29267,7 @@
                 <a:ea typeface="맑은 고딕"/>
                 <a:cs typeface="맑은 고딕"/>
               </a:rPr>
-              <a:t>40.6회</a:t>
+              <a:t>하루 40.6회</a:t>
             </a:r>
           </a:p>
         </p:txBody>
@@ -29514,7 +29405,7 @@
                 <a:ea typeface="맑은 고딕"/>
                 <a:cs typeface="맑은 고딕"/>
               </a:rPr>
-              <a:t>위험 등급 경보</a:t>
+              <a:t>위험 등급</a:t>
             </a:r>
           </a:p>
         </p:txBody>
@@ -29555,7 +29446,7 @@
                 <a:ea typeface="맑은 고딕"/>
                 <a:cs typeface="맑은 고딕"/>
               </a:rPr>
-              <a:t>WF11 · 기록 12일 평균</a:t>
+              <a:t>위험이 뜰 만큼 더 가까워짐</a:t>
             </a:r>
           </a:p>
         </p:txBody>
@@ -29596,7 +29487,7 @@
                 <a:ea typeface="맑은 고딕"/>
                 <a:cs typeface="맑은 고딕"/>
               </a:rPr>
-              <a:t>24.2회</a:t>
+              <a:t>하루 24.2회</a:t>
             </a:r>
           </a:p>
         </p:txBody>
@@ -29637,7 +29528,7 @@
                 <a:ea typeface="맑은 고딕"/>
                 <a:cs typeface="맑은 고딕"/>
               </a:rPr>
-              <a:t>2026.08.04~2026.09.01 실측. 미리 추정했던 값과 얼마나 달랐는지는 12장.</a:t>
+              <a:t>08.04~09.01 기록이 남은 12일 평균. 1건 = 가까워진 1분, 사고 건수 아님.</a:t>
             </a:r>
           </a:p>
         </p:txBody>
@@ -30627,7 +30518,7 @@
                 <a:ea typeface="맑은 고딕"/>
                 <a:cs typeface="맑은 고딕"/>
               </a:rPr>
-              <a:t>정밀 측위 지원 폰끼리의 경보 거리 — 실제 비례로 그린 것</a:t>
+              <a:t>정밀 측위 폰끼리 — 지게차가 끼면 경고 15m · 위험 8m</a:t>
             </a:r>
           </a:p>
         </p:txBody>
@@ -30692,7 +30583,7 @@
                 <a:ea typeface="맑은 고딕"/>
                 <a:cs typeface="맑은 고딕"/>
               </a:rPr>
-              <a:t>폰이 늘수록 서로 감지되는 경우의 수는 제곱으로 (3대 3가지 → 10대 45가지)</a:t>
+              <a:t>지게차 4대 · 사람 3명이면 21가지, 10명이면 91가지</a:t>
             </a:r>
           </a:p>
         </p:txBody>
@@ -30757,7 +30648,7 @@
                 <a:ea typeface="맑은 고딕"/>
                 <a:cs typeface="맑은 고딕"/>
               </a:rPr>
-              <a:t>안전 구역 안에서는 경보가 울리지 않는다</a:t>
+              <a:t>휴게실 · 충전 구역 — 서로 울리지 않는다</a:t>
             </a:r>
           </a:p>
         </p:txBody>
@@ -30809,7 +30700,7 @@
                 <a:ea typeface="맑은 고딕"/>
                 <a:cs typeface="맑은 고딕"/>
               </a:rPr>
-              <a:t>경보는 소리 · 진동 · 화면 세 가지로 동시에 울린다</a:t>
+              <a:t>경보는 소리 · 진동 · 화면 세 가지로 동시에</a:t>
             </a:r>
             <a:r>
               <a:rPr sz="1000" b="0" i="0" u="none">
@@ -30820,7 +30711,7 @@
                 <a:ea typeface="맑은 고딕"/>
                 <a:cs typeface="맑은 고딕"/>
               </a:rPr>
-              <a:t>  —  소음 때문에 못 듣거나, 장갑 때문에 진동을 놓치거나, 화면을 안 봐도 나머지 하나는 전달된다</a:t>
+              <a:t>  —  소음으로 못 듣거나 장갑으로 진동을 놓쳐도 나머지가 전달된다</a:t>
             </a:r>
           </a:p>
         </p:txBody>
@@ -30872,7 +30763,7 @@
                 <a:ea typeface="맑은 고딕"/>
                 <a:cs typeface="맑은 고딕"/>
               </a:rPr>
-              <a:t>같은 상대와 같은 등급이 5초 넘게 이어지면 소리를 끈다</a:t>
+              <a:t>상대가 지게차인지 사람인지, 후진 중인지까지 신호에 실어 보낸다</a:t>
             </a:r>
             <a:r>
               <a:rPr sz="1000" b="0" i="0" u="none">
@@ -30883,7 +30774,7 @@
                 <a:ea typeface="맑은 고딕"/>
                 <a:cs typeface="맑은 고딕"/>
               </a:rPr>
-              <a:t>  —  화면 표시와 기록은 그대로 두고, 더 가까워지면 즉시 다시 울린다 (v1.1.61)</a:t>
+              <a:t>  —  지게차가 낀 짝은 더 먼 거리에서 울린다</a:t>
             </a:r>
           </a:p>
         </p:txBody>
@@ -30935,7 +30826,7 @@
                 <a:ea typeface="맑은 고딕"/>
                 <a:cs typeface="맑은 고딕"/>
               </a:rPr>
-              <a:t>휴게실 · 충전 구역은 ‘안전 구역’ 으로 지정한다</a:t>
+              <a:t>같은 상대와 같은 등급이 5초 넘으면 소리를 끈다</a:t>
             </a:r>
             <a:r>
               <a:rPr sz="1000" b="0" i="0" u="none">
@@ -30946,7 +30837,7 @@
                 <a:ea typeface="맑은 고딕"/>
                 <a:cs typeface="맑은 고딕"/>
               </a:rPr>
-              <a:t>  —  그 안에 있는 사람은 경보를 받지도, 남에게 울리게 하지도 않는다 (v1.1.62)</a:t>
+              <a:t>  —  서 있을 때 계속 울리지 않는다. 더 가까워지면 즉시 다시 울린다</a:t>
             </a:r>
           </a:p>
         </p:txBody>
@@ -30998,7 +30889,7 @@
                 <a:ea typeface="맑은 고딕"/>
                 <a:cs typeface="맑은 고딕"/>
               </a:rPr>
-              <a:t>감지가 멈추면 알림 표시줄에 ‘이상’ 이 뜬다</a:t>
+              <a:t>화면이 꺼져도 감지는 이어진다. 감지가 멈추면 알림 표시줄에 ‘이상’ 이 뜬다</a:t>
             </a:r>
             <a:r>
               <a:rPr sz="1000" b="0" i="0" u="none">
@@ -31009,7 +30900,7 @@
                 <a:ea typeface="맑은 고딕"/>
                 <a:cs typeface="맑은 고딕"/>
               </a:rPr>
-              <a:t>  —  앱이 꺼진 줄 모르고 일하는 상황을 막는다 (v1.1.64)</a:t>
+              <a:t>  —  앱이 꺼진 줄 모르고 일하는 상황을 막는다</a:t>
             </a:r>
           </a:p>
         </p:txBody>
@@ -31923,7 +31814,7 @@
                   <a:ea typeface="맑은 고딕"/>
                   <a:cs typeface="맑은 고딕"/>
                 </a:rPr>
-                <a:t>우리 센터에는 지게차와 보행자의 접근을 감지하는 장치가 설치돼 있지 않다.</a:t>
+                <a:t>우리 센터에는 지게차 · 보행자 접근 경보 장치가 없다.</a:t>
               </a:r>
               <a:endParaRPr lang="ko-KR" altLang="en-US">
                 <a:solidFill>
@@ -31973,7 +31864,7 @@
                   <a:ea typeface="맑은 고딕"/>
                   <a:cs typeface="맑은 고딕"/>
                 </a:rPr>
-                <a:t>존과 로케이션 사이 교차 구간에서 적재 파렛트가 시야를 가리고, 장비 소음에 경적이 묻혀 서로를 알아채는 것이 늦다.</a:t>
+                <a:t>지게차와 사람이 마주치는 교차 구간. 파렛트가 시야를 가린다. 소음에 경적이 묻힌다.</a:t>
               </a:r>
             </a:p>
             <a:p>
@@ -31994,7 +31885,7 @@
                   <a:ea typeface="맑은 고딕"/>
                   <a:cs typeface="맑은 고딕"/>
                 </a:rPr>
-                <a:t>접근을 알려주는 수단이 없어, 앱을 깔기 전까지는 위험했던 순간이 몇 번이었는지조차 기록되지 않았다.</a:t>
+                <a:t>위험했던 순간이 하루 몇 번인지 기록된 적이 없었다.</a:t>
               </a:r>
             </a:p>
           </p:txBody>
@@ -32351,7 +32242,7 @@
                   <a:ea typeface="맑은 고딕"/>
                   <a:cs typeface="맑은 고딕"/>
                 </a:rPr>
-                <a:t>서로 다가오는 것을 부딪히기 전에 감지해 사람에게 알린다.</a:t>
+                <a:t>서로 다가오는 것을 부딪히기 전에 알린다.</a:t>
               </a:r>
               <a:endParaRPr lang="en-US">
                 <a:solidFill>
@@ -32401,7 +32292,7 @@
                   <a:ea typeface="맑은 고딕"/>
                   <a:cs typeface="맑은 고딕"/>
                 </a:rPr>
-                <a:t>현장에 있는 모든 사람과 장비가 서로의 접근을 알 수 있는 상태.</a:t>
+                <a:t>사람과 장비 모두가 서로의 접근을 안다.</a:t>
               </a:r>
             </a:p>
           </p:txBody>
@@ -32610,7 +32501,7 @@
                   <a:ea typeface="맑은 고딕"/>
                   <a:cs typeface="맑은 고딕"/>
                 </a:rPr>
-                <a:t>현재 서로를 감지하는 장비는 </a:t>
+                <a:t>감지 장비 </a:t>
               </a:r>
               <a:r>
                 <a:rPr sz="1000" b="1" i="0" u="none">
@@ -32632,7 +32523,7 @@
                   <a:ea typeface="맑은 고딕"/>
                   <a:cs typeface="맑은 고딕"/>
                 </a:rPr>
-                <a:t>. 지게차 4대와 상시 인원 3명 모두 감지 대상이 아니다.</a:t>
+                <a:t>. 지게차 4대와 상시 인원 3명 모두 감지되지 않는다.</a:t>
               </a:r>
               <a:endParaRPr lang="en-US">
                 <a:solidFill>
@@ -32682,7 +32573,7 @@
                   <a:ea typeface="맑은 고딕"/>
                   <a:cs typeface="맑은 고딕"/>
                 </a:rPr>
-                <a:t>사고도 아차사고도 회사 데이터에 집계된 적이 없다.</a:t>
+                <a:t>사고도 아차사고도 집계된 적이 없다.</a:t>
               </a:r>
             </a:p>
           </p:txBody>
@@ -32795,7 +32686,7 @@
                 <a:ea typeface="맑은 고딕"/>
                 <a:cs typeface="맑은 고딕"/>
               </a:rPr>
-              <a:t>1. 부딪히기 전에 알린다</a:t>
+              <a:t>1. 시야가 막힌다</a:t>
             </a:r>
             <a:r>
               <a:rPr sz="1250" b="1" i="0" u="none">
@@ -32806,7 +32697,7 @@
                 <a:ea typeface="맑은 고딕"/>
                 <a:cs typeface="맑은 고딕"/>
               </a:rPr>
-              <a:t>      2. 장비를 사지 않는다</a:t>
+              <a:t>      2. 경적이 안 들린다</a:t>
             </a:r>
             <a:r>
               <a:rPr sz="1250" b="1" i="0" u="none">
@@ -32817,7 +32708,7 @@
                 <a:ea typeface="맑은 고딕"/>
                 <a:cs typeface="맑은 고딕"/>
               </a:rPr>
-              <a:t>      3. 쓸데없이 울리지 않는다</a:t>
+              <a:t>      3. 주의력에만 기댄다</a:t>
             </a:r>
             <a:r>
               <a:rPr sz="1250" b="1" i="0" u="none">
@@ -32828,7 +32719,7 @@
                 <a:ea typeface="맑은 고딕"/>
                 <a:cs typeface="맑은 고딕"/>
               </a:rPr>
-              <a:t>      4. 꺼져도 바로 안다</a:t>
+              <a:t>      4. 위험이 기록되지 않는다</a:t>
             </a:r>
           </a:p>
         </p:txBody>
@@ -32869,7 +32760,7 @@
                 <a:ea typeface="맑은 고딕"/>
                 <a:cs typeface="맑은 고딕"/>
               </a:rPr>
-              <a:t>앱을 깔고 4주, 하루 평균 경고 등급 경보 </a:t>
+              <a:t>앱을 깐 뒤 하루 평균 경고 등급 </a:t>
             </a:r>
             <a:r>
               <a:rPr sz="1150" b="1" i="0" u="none">
@@ -32891,7 +32782,7 @@
                 <a:ea typeface="맑은 고딕"/>
                 <a:cs typeface="맑은 고딕"/>
               </a:rPr>
-              <a:t>,  위험 등급 </a:t>
+              <a:t> · 위험 등급 </a:t>
             </a:r>
             <a:r>
               <a:rPr sz="1150" b="1" i="0" u="none">
@@ -32913,7 +32804,7 @@
                 <a:ea typeface="맑은 고딕"/>
                 <a:cs typeface="맑은 고딕"/>
               </a:rPr>
-              <a:t>가 실제로 찍혔다</a:t>
+              <a:t>가 기록됐다</a:t>
             </a:r>
           </a:p>
         </p:txBody>
@@ -32954,7 +32845,7 @@
                 <a:ea typeface="맑은 고딕"/>
                 <a:cs typeface="맑은 고딕"/>
               </a:rPr>
-              <a:t>WF11 앱 경보 기록 실측 (2026.08.04~2026.09.01 중 기록 12일). 앱이 깔리기 전에는 이 숫자를 셀 수단 자체가 없었다.</a:t>
+              <a:t>WF11 2026.08.04~09.01 중 기록이 남은 12일. 1건 = 상대와 가까워진 1분. 사고 건수가 아니다.</a:t>
             </a:r>
           </a:p>
         </p:txBody>
@@ -32995,7 +32886,7 @@
                 <a:ea typeface="맑은 고딕"/>
                 <a:cs typeface="맑은 고딕"/>
               </a:rPr>
-              <a:t>“지금 이 구간을 지키는 것은 설비가 아니라 </a:t>
+              <a:t>“지금 이 구간을 지키는 것은 장치가 아니라 </a:t>
             </a:r>
             <a:r>
               <a:rPr sz="1050" b="1" i="1" u="none">
@@ -33017,7 +32908,7 @@
                 <a:ea typeface="맑은 고딕"/>
                 <a:cs typeface="맑은 고딕"/>
               </a:rPr>
-              <a:t> 하나뿐입니다. 그리고 주의력은 교대 끝으로 갈수록 떨어집니다.”</a:t>
+              <a:t>뿐입니다.”</a:t>
             </a:r>
           </a:p>
         </p:txBody>
@@ -34589,7 +34480,7 @@
                           <a:latin typeface="맑은 고딕" panose="020B0503020000020004" pitchFamily="50" charset="-127"/>
                           <a:ea typeface="맑은 고딕" panose="020B0503020000020004" pitchFamily="50" charset="-127"/>
                         </a:rPr>
-                        <a:t>3. Why ?</a:t>
+                        <a:t>3 Why ?</a:t>
                       </a:r>
                       <a:endParaRPr lang="en-US" altLang="ko-KR" sz="1000" b="0" i="0">
                         <a:solidFill>
@@ -34942,7 +34833,7 @@
                           <a:latin typeface="맑은 고딕" panose="020B0503020000020004" pitchFamily="50" charset="-127"/>
                           <a:ea typeface="맑은 고딕" panose="020B0503020000020004" pitchFamily="50" charset="-127"/>
                         </a:rPr>
-                        <a:t>4. Why ?</a:t>
+                        <a:t>4 Why ?</a:t>
                       </a:r>
                       <a:endParaRPr lang="en-US" altLang="ko-KR" sz="1000" b="0" i="0">
                         <a:solidFill>
@@ -35206,7 +35097,7 @@
                           <a:ea typeface="맑은 고딕"/>
                           <a:cs typeface="맑은 고딕"/>
                         </a:rPr>
-                        <a:t>시중 감지 장비는 차량과 사람 모두에게 태그를 달아야 하고, 대상이 늘 때마다 태그를 더 사야 한다.</a:t>
+                        <a:t>시중 장비는 차량에 수신기, 사람에 태그를 달아야 한다. 사람이 늘 때마다 태그를 더 산다.</a:t>
                       </a:r>
                       <a:endParaRPr lang="ko-KR" altLang="en-US" sz="1000" b="0" i="0">
                         <a:solidFill>
@@ -35295,7 +35186,7 @@
                           <a:latin typeface="맑은 고딕" panose="020B0503020000020004" pitchFamily="50" charset="-127"/>
                           <a:ea typeface="맑은 고딕" panose="020B0503020000020004" pitchFamily="50" charset="-127"/>
                         </a:rPr>
-                        <a:t>5. Why ?</a:t>
+                        <a:t>5 Why ?</a:t>
                       </a:r>
                       <a:endParaRPr lang="en-US" altLang="ko-KR" sz="1000" b="0" i="0">
                         <a:solidFill>
@@ -35559,7 +35450,7 @@
                           <a:ea typeface="맑은 고딕"/>
                           <a:cs typeface="맑은 고딕"/>
                         </a:rPr>
-                        <a:t>접근 감지를 ‘장비를 사는 일’ 로만 봤기 때문이다. 이미 나눠준 업무용 스마트폰이 같은 일을 할 수 있다는 것을 검토한 적이 없다.</a:t>
+                        <a:t>접근 감지를 ‘장비를 사는 일’ 로만 봤다. 이미 나눠준 업무용 스마트폰이 같은 일을 할 수 있는지는 검토된 적이 없다.</a:t>
                       </a:r>
                       <a:endParaRPr lang="ko-KR" altLang="en-US" sz="1000" b="0" i="0">
                         <a:solidFill>
@@ -35753,7 +35644,7 @@
                 <a:ea typeface="맑은 고딕"/>
                 <a:cs typeface="맑은 고딕"/>
               </a:rPr>
-              <a:t>접근 감지를 ‘장비를 사는 일’ 로만 봐 왔고, 예산이 서지 않으면 대책이 0 인 상태가 유지됐다</a:t>
+              <a:t>접근 감지를 ‘장비를 사는 일’ 로만 봐 왔다. 예산이 서지 않으면 대책이 없는 상태가 이어졌다</a:t>
             </a:r>
             <a:r>
               <a:rPr sz="900" b="0" i="0" u="none">
@@ -36647,7 +36538,7 @@
                 <a:ea typeface="맑은 고딕"/>
                 <a:cs typeface="맑은 고딕"/>
               </a:rPr>
-              <a:t>자주 울리기  vs.  꺼버리기</a:t>
+              <a:t>넓게 울리기  vs.  좁게 울리기</a:t>
             </a:r>
           </a:p>
           <a:p>
@@ -36668,7 +36559,7 @@
                 <a:ea typeface="맑은 고딕"/>
                 <a:cs typeface="맑은 고딕"/>
               </a:rPr>
-              <a:t>넓게 울리면 작업자가 앱을 꺼버린다. 꺼진 폰은 아무것도 못 한다.</a:t>
+              <a:t>넓게 울리면 작업자가 앱을 꺼 둔다. 꺼진 폰은 아무것도 못 한다.</a:t>
             </a:r>
           </a:p>
         </p:txBody>
@@ -36743,7 +36634,7 @@
                 <a:ea typeface="맑은 고딕"/>
                 <a:cs typeface="맑은 고딕"/>
               </a:rPr>
-              <a:t>자주 울리되, 울릴 곳을 좁혔다</a:t>
+              <a:t>울릴 때와 곳을 좁혔다</a:t>
             </a:r>
           </a:p>
           <a:p>
@@ -36764,7 +36655,7 @@
                 <a:ea typeface="맑은 고딕"/>
                 <a:cs typeface="맑은 고딕"/>
               </a:rPr>
-              <a:t>같은 상대와 같은 등급이 5초 넘게 이어지면 소리를 끈다 (v1.1.61) · 휴게실 · 충전 구역은 안전 구역으로 지정 (v1.1.62) · 멀어진 뒤 다시 울리지 않게 (v1.1.51)</a:t>
+              <a:t>같은 상대 · 같은 등급이 5초 넘으면 소리를 끈다. 더 가까워지면 즉시 다시 울린다. 멀어진 뒤 경고 거리에서는 다시 울리지 않는다. 휴게실 · 충전 구역에서는 울리지 않는다.</a:t>
             </a:r>
           </a:p>
         </p:txBody>
@@ -36893,7 +36784,7 @@
                 <a:ea typeface="맑은 고딕"/>
                 <a:cs typeface="맑은 고딕"/>
               </a:rPr>
-              <a:t>알리기만 하기  vs.  장비를 세우기</a:t>
+              <a:t>알리기만  vs.  장비 세우기</a:t>
             </a:r>
           </a:p>
           <a:p>
@@ -36914,7 +36805,7 @@
                 <a:ea typeface="맑은 고딕"/>
                 <a:cs typeface="맑은 고딕"/>
               </a:rPr>
-              <a:t>장비를 자동으로 세우려면 지게차마다 제동 장치를 달아야 한다. 앱은 못 한다.</a:t>
+              <a:t>자동으로 세우려면 지게차마다 정지 장치가 필요하다. 앱은 못 한다.</a:t>
             </a:r>
           </a:p>
         </p:txBody>
@@ -37010,7 +36901,7 @@
                 <a:ea typeface="맑은 고딕"/>
                 <a:cs typeface="맑은 고딕"/>
               </a:rPr>
-              <a:t>안전 대책은 ‘자동으로 멈추기’ 가 ‘사람에게 알리기’ 보다 확실하다. 그건 맞다. 다만 지금 우리 센터에는 둘 다 없다. 장비를 사지 않고 지금 당장 할 수 있는 쪽부터 넣었고, 자동 정지는 필요하다고 판단되면 별도 과제로 간다.</a:t>
+              <a:t>자동으로 멈추는 쪽이 더 확실하다. 앱을 깔기 전에는 알림도 자동 정지도 없었다. 장비를 사지 않고 당장 할 수 있는 쪽을 먼저 했다. 자동 정지는 필요하면 별도 과제로 검토한다.</a:t>
             </a:r>
           </a:p>
         </p:txBody>
@@ -37139,7 +37030,7 @@
                 <a:ea typeface="맑은 고딕"/>
                 <a:cs typeface="맑은 고딕"/>
               </a:rPr>
-              <a:t>빨리 고치기  vs.  같은 결과 내기</a:t>
+              <a:t>미터 표시  vs.  등급 표시</a:t>
             </a:r>
           </a:p>
           <a:p>
@@ -37160,7 +37051,7 @@
                 <a:ea typeface="맑은 고딕"/>
                 <a:cs typeface="맑은 고딕"/>
               </a:rPr>
-              <a:t>3개월에 97번 고쳤지만, 고쳤던 문제가 다시 나타났다.</a:t>
+              <a:t>창고는 랙 · 적재물 때문에 신호 세기가 거리와 늘 맞지는 않는다.</a:t>
             </a:r>
           </a:p>
         </p:txBody>
@@ -37235,7 +37126,7 @@
                 <a:ea typeface="맑은 고딕"/>
                 <a:cs typeface="맑은 고딕"/>
               </a:rPr>
-              <a:t>속도를 늦추고, 같은 결과를 택했다</a:t>
+              <a:t>경고 · 위험 등급으로 알린다</a:t>
             </a:r>
           </a:p>
           <a:p>
@@ -37256,7 +37147,7 @@
                 <a:ea typeface="맑은 고딕"/>
                 <a:cs typeface="맑은 고딕"/>
               </a:rPr>
-              <a:t>고친 문제마다 자동 검사를 붙여 둔다. 지금 51건이 릴리스마다 돌고, 하나라도 실패하면 새 버전이 아예 나가지 않는다.</a:t>
+              <a:t>정밀 측위(UWB) 폰끼리는 실제 거리로 등급을 정한다. 그 밖의 폰은 신호 세기로 정한다. 신호 세기는 미터로 바꾸지 않는다. 어느 쪽이든 작업자에게는 경고 · 위험 등급으로 알린다.</a:t>
             </a:r>
           </a:p>
         </p:txBody>
